--- a/presentation/Nafis_Ismam_Docitalis_Final.pptx
+++ b/presentation/Nafis_Ismam_Docitalis_Final.pptx
@@ -646,7 +646,7 @@
           <a:lstStyle/>
           <a:p>
             <a:r>
-              <a:t>About 45 seconds. “I prepared this recent demonstration to explore requirements from the role. The fictional case requests the procedural route and has records. The engine validates input, checks conditions and prerequisites, rejects conflicting selections, fills prepared paragraphs and returns a decision record.” For this case it selects jurisdiction, facts, procedural defense, records and relief. M5 needs both records and selected M3. Same inputs and rule version give the same output. The prototype is not the original research system. Describe implementation assistance and your own review/testing accurately when explaining who built each part. The legacy limitation_defense flag requests a procedural example; it does not establish a legal deadline violation.</a:t>
+              <a:t>About 45 seconds. “Cell 1 stores labelled source records: Act, section, text and any recorded judgment note. Cell 2 stores prepared paragraphs and the conditions for including them. The shared source ID connects the two.” For example, the records paragraph M5 requires available records AND selected procedural block M3; it links to C167. The output of these cells is a source table and a module-rule table, not an assembled document. There are ten educational source summaries and seven blocks in knowledge base 1.2.0. The date and version are manually assigned. Two simulated source updates exist for testing. The terms and exclusive routes are teaching examples, not verified legal instructions.</a:t>
             </a:r>
           </a:p>
         </p:txBody>
@@ -716,7 +716,7 @@
           <a:lstStyle/>
           <a:p>
             <a:r>
-              <a:t>About 45 seconds. “The review checks required citation markers and manually recorded judgment notes. A newer note flags selected modules linked to that source. It does not discover judgments online or assess legal applicability.” The four test groups check 25-run reproducibility, expected module order and citations on four fictional cases, rejection of configured conflicting routes, and warnings after an injected simulated judgment. Citation and retrieval assertions also run. All groups passed. This checks agreed software behaviour, not universal legal correctness. The source search uses TF-IDF with an uncalibrated 0.80 gate; exact-text examples demonstrate the mechanism, not paraphrase accuracy. There is no generative review model in this notebook.</a:t>
+              <a:t>About 50 seconds. “This is the main drafting step. The engine checks the case facts, evaluates paragraph conditions, checks prerequisites and rejects active configured conflicts. It fills the selected templates and returns both the draft and an explanation.” The sample output is M1 jurisdiction, M2 facts, M3 procedure, M5 records and M7 relief. M4 substantive and M6 bail are skipped because their flags default to False. M5 is included because has_records=True and M3 was included. The trace records expected/actual facts, missing prerequisites, decisions, version and fingerprints. The method returns the final document text, module IDs, required sources and trace. No LLM chooses paragraphs. The legacy limitation_defense flag is a supplied request for this procedural example, not an automated conclusion about a legal deadline.</a:t>
             </a:r>
           </a:p>
         </p:txBody>
@@ -786,7 +786,7 @@
           <a:lstStyle/>
           <a:p>
             <a:r>
-              <a:t>About 30–40 seconds. “With the team, I would start from one approved workflow, clarify its rules and exceptions, agree on examples, then build a small pilot and inspect the results with reviewers. I would learn the existing system before choosing new tools.” The demo uses summaries and fictional cases, not real lawyer-approved histories. It is not a production backend, SQL database or implemented appeals workflow. For a broader RAG discussion, LearnRAG is a separate demo with actual MiniLM/Qwen outputs and documented limits. Close with the question on the slide and listen. Ask about supervision, code review and legal approval if these have not been discussed. No percentage improvement is promised without a baseline.</a:t>
+              <a:t>About 60 seconds. “Cell 4 retrieves source summaries and performs structured checks on the draft. The controlled two-part search finds C54 and P420 after decomposition. In the sample draft, newer recorded notes flag M3-C54, M3-C167 and M5-C167: three module-source links. There are no missing-citation warnings in this unmodified draft. Searching the ordinary case summary accepts no source at the 0.80 gate; both split parts remain unresolved.” The threshold is uncalibrated, TF-IDF is word-based, decomposition uses separators, and no generative reviewer runs. Judgment warnings compare manually entered dates; they do not assess applicability. “Cell 5 checks 25-run reproducibility, four synthetic reference cases, rejection of conflicting routes and warning propagation after a simulated source update. All four groups pass; additional assertions exercise citation and retrieval paths.” Expected examples are synthetic, not actual lawyer-approved files. Close: “With the team I would start from one approved workflow and agreed examples. Which would be the most useful starting point?”</a:t>
             </a:r>
           </a:p>
         </p:txBody>
@@ -5382,7 +5382,7 @@
               </a:defRPr>
             </a:pPr>
             <a:r>
-              <a:t>PROJECT IMPLEMENTATION · A SEPARATE RECENT DEMO</a:t>
+              <a:t>IMPLEMENTATION · CELLS 1 + 2</a:t>
             </a:r>
           </a:p>
         </p:txBody>
@@ -5421,7 +5421,7 @@
               </a:defRPr>
             </a:pPr>
             <a:r>
-              <a:t>UkilRAG: facts in, a draft and explanation out</a:t>
+              <a:t>Store the sources. Define the paragraph rules.</a:t>
             </a:r>
           </a:p>
         </p:txBody>
@@ -5460,7 +5460,7 @@
               </a:defRPr>
             </a:pPr>
             <a:r>
-              <a:t>Prepared paragraphs follow explicit rules, not a language model’s choice.</a:t>
+              <a:t>10 sample legal sources and 7 reusable document blocks, connected by source IDs.</a:t>
             </a:r>
           </a:p>
         </p:txBody>
@@ -5542,7 +5542,7 @@
               </a:defRPr>
             </a:pPr>
             <a:r>
-              <a:t>Source: UkilRAG notebook. Fictional case and teaching rules, not verified legal guidance.</a:t>
+              <a:t>Cells 1–2: educational legal summaries and teaching rules; no complete official text or real judgment update.</a:t>
             </a:r>
           </a:p>
         </p:txBody>
@@ -5594,8 +5594,8 @@
         </p:nvSpPr>
         <p:spPr>
           <a:xfrm>
-            <a:off x="594360" y="2852928"/>
-            <a:ext cx="3172968" cy="2203704"/>
+            <a:off x="594360" y="2834640"/>
+            <a:ext cx="5193792" cy="2286000"/>
           </a:xfrm>
           <a:prstGeom prst="roundRect">
             <a:avLst>
@@ -5639,8 +5639,8 @@
         </p:nvSpPr>
         <p:spPr>
           <a:xfrm>
-            <a:off x="850392" y="3081528"/>
-            <a:ext cx="2660904" cy="329184"/>
+            <a:off x="850392" y="3063240"/>
+            <a:ext cx="4681727" cy="329184"/>
           </a:xfrm>
           <a:prstGeom prst="rect">
             <a:avLst/>
@@ -5665,7 +5665,7 @@
               </a:defRPr>
             </a:pPr>
             <a:r>
-              <a:t>CASE FACTS</a:t>
+              <a:t>CELL 1 · A SOURCE RECORD</a:t>
             </a:r>
           </a:p>
         </p:txBody>
@@ -5678,8 +5678,8 @@
         </p:nvSpPr>
         <p:spPr>
           <a:xfrm>
-            <a:off x="850392" y="3685032"/>
-            <a:ext cx="2660904" cy="1271016"/>
+            <a:off x="850392" y="3666744"/>
+            <a:ext cx="4681727" cy="1353312"/>
           </a:xfrm>
           <a:prstGeom prst="rect">
             <a:avLst/>
@@ -5704,7 +5704,7 @@
               </a:defRPr>
             </a:pPr>
             <a:r>
-              <a:t>Procedure: yes</a:t>
+              <a:t>ID: C167</a:t>
             </a:r>
           </a:p>
           <a:p>
@@ -5720,7 +5720,7 @@
               </a:defRPr>
             </a:pPr>
             <a:r>
-              <a:t>Records: yes</a:t>
+              <a:t>Section: 167</a:t>
             </a:r>
           </a:p>
           <a:p>
@@ -5736,7 +5736,7 @@
               </a:defRPr>
             </a:pPr>
             <a:r>
-              <a:t>Relief: yes</a:t>
+              <a:t>Act: Criminal Procedure, 1898</a:t>
             </a:r>
           </a:p>
         </p:txBody>
@@ -5749,8 +5749,8 @@
         </p:nvSpPr>
         <p:spPr>
           <a:xfrm>
-            <a:off x="4352544" y="2852928"/>
-            <a:ext cx="3172968" cy="2203704"/>
+            <a:off x="6391656" y="2834640"/>
+            <a:ext cx="5202936" cy="2286000"/>
           </a:xfrm>
           <a:prstGeom prst="roundRect">
             <a:avLst>
@@ -5758,7 +5758,7 @@
             </a:avLst>
           </a:prstGeom>
           <a:solidFill>
-            <a:srgbClr val="F1F5F7"/>
+            <a:srgbClr val="E8F3F0"/>
           </a:solidFill>
           <a:ln>
             <a:noFill/>
@@ -5794,8 +5794,8 @@
         </p:nvSpPr>
         <p:spPr>
           <a:xfrm>
-            <a:off x="4608576" y="3081528"/>
-            <a:ext cx="2660904" cy="329184"/>
+            <a:off x="6647688" y="3063240"/>
+            <a:ext cx="4690872" cy="329184"/>
           </a:xfrm>
           <a:prstGeom prst="rect">
             <a:avLst/>
@@ -5820,7 +5820,7 @@
               </a:defRPr>
             </a:pPr>
             <a:r>
-              <a:t>RULE CHECKS</a:t>
+              <a:t>CELL 2 · A PARAGRAPH RULE</a:t>
             </a:r>
           </a:p>
         </p:txBody>
@@ -5833,8 +5833,8 @@
         </p:nvSpPr>
         <p:spPr>
           <a:xfrm>
-            <a:off x="4608576" y="3685032"/>
-            <a:ext cx="2660904" cy="1271016"/>
+            <a:off x="6647688" y="3666744"/>
+            <a:ext cx="4690872" cy="1335024"/>
           </a:xfrm>
           <a:prstGeom prst="rect">
             <a:avLst/>
@@ -5851,7 +5851,7 @@
               <a:spcAft>
                 <a:spcPts val="1000"/>
               </a:spcAft>
-              <a:defRPr sz="2000" b="1">
+              <a:defRPr sz="1700" b="1">
                 <a:solidFill>
                   <a:srgbClr val="172F46"/>
                 </a:solidFill>
@@ -5859,7 +5859,7 @@
               </a:defRPr>
             </a:pPr>
             <a:r>
-              <a:t>Facts match?</a:t>
+              <a:t>Records available + M3 selected</a:t>
             </a:r>
           </a:p>
           <a:p>
@@ -5867,7 +5867,7 @@
               <a:spcAft>
                 <a:spcPts val="1000"/>
               </a:spcAft>
-              <a:defRPr sz="2000" b="1">
+              <a:defRPr sz="1700" b="1">
                 <a:solidFill>
                   <a:srgbClr val="172F46"/>
                 </a:solidFill>
@@ -5875,7 +5875,7 @@
               </a:defRPr>
             </a:pPr>
             <a:r>
-              <a:t>Blocks ready?</a:t>
+              <a:t>→ include the records paragraph</a:t>
             </a:r>
           </a:p>
           <a:p>
@@ -5883,7 +5883,7 @@
               <a:spcAft>
                 <a:spcPts val="1000"/>
               </a:spcAft>
-              <a:defRPr sz="2000" b="1">
+              <a:defRPr sz="1700" b="1">
                 <a:solidFill>
                   <a:srgbClr val="172F46"/>
                 </a:solidFill>
@@ -5891,29 +5891,27 @@
               </a:defRPr>
             </a:pPr>
             <a:r>
-              <a:t>Any conflicts?</a:t>
-            </a:r>
-          </a:p>
-        </p:txBody>
-      </p:sp>
-      <p:sp>
-        <p:nvSpPr>
-          <p:cNvPr id="15" name="Rounded Rectangle 14"/>
+              <a:t>→ cite C167</a:t>
+            </a:r>
+          </a:p>
+        </p:txBody>
+      </p:sp>
+      <p:sp>
+        <p:nvSpPr>
+          <p:cNvPr id="15" name="Rectangle 14"/>
           <p:cNvSpPr/>
           <p:nvPr/>
         </p:nvSpPr>
         <p:spPr>
           <a:xfrm>
-            <a:off x="8110727" y="2852928"/>
-            <a:ext cx="3483864" cy="2203704"/>
-          </a:xfrm>
-          <a:prstGeom prst="roundRect">
-            <a:avLst>
-              <a:gd name="adj" fmla="val 8000"/>
-            </a:avLst>
+            <a:off x="594360" y="5559552"/>
+            <a:ext cx="11000232" cy="594360"/>
+          </a:xfrm>
+          <a:prstGeom prst="rect">
+            <a:avLst/>
           </a:prstGeom>
           <a:solidFill>
-            <a:srgbClr val="E8F3F0"/>
+            <a:srgbClr val="172F46"/>
           </a:solidFill>
           <a:ln>
             <a:noFill/>
@@ -5949,237 +5947,6 @@
         </p:nvSpPr>
         <p:spPr>
           <a:xfrm>
-            <a:off x="8366759" y="3081528"/>
-            <a:ext cx="2971800" cy="329184"/>
-          </a:xfrm>
-          <a:prstGeom prst="rect">
-            <a:avLst/>
-          </a:prstGeom>
-          <a:noFill/>
-        </p:spPr>
-        <p:txBody>
-          <a:bodyPr wrap="square" tIns="0" bIns="0" lIns="0" rIns="0">
-            <a:spAutoFit/>
-          </a:bodyPr>
-          <a:lstStyle/>
-          <a:p>
-            <a:pPr>
-              <a:spcAft>
-                <a:spcPts val="1000"/>
-              </a:spcAft>
-              <a:defRPr sz="1200" b="1">
-                <a:solidFill>
-                  <a:srgbClr val="117970"/>
-                </a:solidFill>
-                <a:latin typeface="DejaVu Sans"/>
-              </a:defRPr>
-            </a:pPr>
-            <a:r>
-              <a:t>RESULT</a:t>
-            </a:r>
-          </a:p>
-        </p:txBody>
-      </p:sp>
-      <p:sp>
-        <p:nvSpPr>
-          <p:cNvPr id="17" name="TextBox 16"/>
-          <p:cNvSpPr txBox="1"/>
-          <p:nvPr/>
-        </p:nvSpPr>
-        <p:spPr>
-          <a:xfrm>
-            <a:off x="8366759" y="3685032"/>
-            <a:ext cx="2971800" cy="1271016"/>
-          </a:xfrm>
-          <a:prstGeom prst="rect">
-            <a:avLst/>
-          </a:prstGeom>
-          <a:noFill/>
-        </p:spPr>
-        <p:txBody>
-          <a:bodyPr wrap="square" tIns="0" bIns="0" lIns="0" rIns="0">
-            <a:spAutoFit/>
-          </a:bodyPr>
-          <a:lstStyle/>
-          <a:p>
-            <a:pPr>
-              <a:spcAft>
-                <a:spcPts val="1000"/>
-              </a:spcAft>
-              <a:defRPr sz="2000" b="1">
-                <a:solidFill>
-                  <a:srgbClr val="172F46"/>
-                </a:solidFill>
-                <a:latin typeface="DejaVu Sans"/>
-              </a:defRPr>
-            </a:pPr>
-            <a:r>
-              <a:t>Chosen paragraphs</a:t>
-            </a:r>
-          </a:p>
-          <a:p>
-            <a:pPr>
-              <a:spcAft>
-                <a:spcPts val="1000"/>
-              </a:spcAft>
-              <a:defRPr sz="2000" b="1">
-                <a:solidFill>
-                  <a:srgbClr val="172F46"/>
-                </a:solidFill>
-                <a:latin typeface="DejaVu Sans"/>
-              </a:defRPr>
-            </a:pPr>
-            <a:r>
-              <a:t>Fixed order</a:t>
-            </a:r>
-          </a:p>
-          <a:p>
-            <a:pPr>
-              <a:spcAft>
-                <a:spcPts val="1000"/>
-              </a:spcAft>
-              <a:defRPr sz="2000" b="1">
-                <a:solidFill>
-                  <a:srgbClr val="172F46"/>
-                </a:solidFill>
-                <a:latin typeface="DejaVu Sans"/>
-              </a:defRPr>
-            </a:pPr>
-            <a:r>
-              <a:t>Decision record</a:t>
-            </a:r>
-          </a:p>
-        </p:txBody>
-      </p:sp>
-      <p:sp>
-        <p:nvSpPr>
-          <p:cNvPr id="18" name="TextBox 17"/>
-          <p:cNvSpPr txBox="1"/>
-          <p:nvPr/>
-        </p:nvSpPr>
-        <p:spPr>
-          <a:xfrm>
-            <a:off x="3904487" y="3749039"/>
-            <a:ext cx="274320" cy="365760"/>
-          </a:xfrm>
-          <a:prstGeom prst="rect">
-            <a:avLst/>
-          </a:prstGeom>
-          <a:noFill/>
-        </p:spPr>
-        <p:txBody>
-          <a:bodyPr wrap="square" tIns="0" bIns="0" lIns="0" rIns="0">
-            <a:spAutoFit/>
-          </a:bodyPr>
-          <a:lstStyle/>
-          <a:p>
-            <a:pPr>
-              <a:spcAft>
-                <a:spcPts val="1000"/>
-              </a:spcAft>
-              <a:defRPr sz="2400" b="1">
-                <a:solidFill>
-                  <a:srgbClr val="117970"/>
-                </a:solidFill>
-                <a:latin typeface="DejaVu Sans"/>
-              </a:defRPr>
-            </a:pPr>
-            <a:r>
-              <a:t>→</a:t>
-            </a:r>
-          </a:p>
-        </p:txBody>
-      </p:sp>
-      <p:sp>
-        <p:nvSpPr>
-          <p:cNvPr id="19" name="TextBox 18"/>
-          <p:cNvSpPr txBox="1"/>
-          <p:nvPr/>
-        </p:nvSpPr>
-        <p:spPr>
-          <a:xfrm>
-            <a:off x="7671816" y="3749039"/>
-            <a:ext cx="274320" cy="365760"/>
-          </a:xfrm>
-          <a:prstGeom prst="rect">
-            <a:avLst/>
-          </a:prstGeom>
-          <a:noFill/>
-        </p:spPr>
-        <p:txBody>
-          <a:bodyPr wrap="square" tIns="0" bIns="0" lIns="0" rIns="0">
-            <a:spAutoFit/>
-          </a:bodyPr>
-          <a:lstStyle/>
-          <a:p>
-            <a:pPr>
-              <a:spcAft>
-                <a:spcPts val="1000"/>
-              </a:spcAft>
-              <a:defRPr sz="2400" b="1">
-                <a:solidFill>
-                  <a:srgbClr val="117970"/>
-                </a:solidFill>
-                <a:latin typeface="DejaVu Sans"/>
-              </a:defRPr>
-            </a:pPr>
-            <a:r>
-              <a:t>→</a:t>
-            </a:r>
-          </a:p>
-        </p:txBody>
-      </p:sp>
-      <p:sp>
-        <p:nvSpPr>
-          <p:cNvPr id="20" name="Rectangle 19"/>
-          <p:cNvSpPr/>
-          <p:nvPr/>
-        </p:nvSpPr>
-        <p:spPr>
-          <a:xfrm>
-            <a:off x="594360" y="5559552"/>
-            <a:ext cx="11000232" cy="594360"/>
-          </a:xfrm>
-          <a:prstGeom prst="rect">
-            <a:avLst/>
-          </a:prstGeom>
-          <a:solidFill>
-            <a:srgbClr val="172F46"/>
-          </a:solidFill>
-          <a:ln>
-            <a:noFill/>
-          </a:ln>
-        </p:spPr>
-        <p:style>
-          <a:lnRef idx="1">
-            <a:schemeClr val="accent1"/>
-          </a:lnRef>
-          <a:fillRef idx="3">
-            <a:schemeClr val="accent1"/>
-          </a:fillRef>
-          <a:effectRef idx="0">
-            <a:schemeClr val="accent1"/>
-          </a:effectRef>
-          <a:fontRef idx="minor">
-            <a:schemeClr val="lt1"/>
-          </a:fontRef>
-        </p:style>
-        <p:txBody>
-          <a:bodyPr rtlCol="0" anchor="ctr"/>
-          <a:lstStyle/>
-          <a:p>
-            <a:pPr algn="ctr"/>
-          </a:p>
-        </p:txBody>
-      </p:sp>
-      <p:sp>
-        <p:nvSpPr>
-          <p:cNvPr id="21" name="TextBox 20"/>
-          <p:cNvSpPr txBox="1"/>
-          <p:nvPr/>
-        </p:nvSpPr>
-        <p:spPr>
-          <a:xfrm>
             <a:off x="850392" y="5742432"/>
             <a:ext cx="10469880" cy="292608"/>
           </a:xfrm>
@@ -6206,7 +5973,7 @@
               </a:defRPr>
             </a:pPr>
             <a:r>
-              <a:t>Records paragraph: include only when records exist and the procedural block is selected.</a:t>
+              <a:t>The source ID links a paragraph to the legal information used in its review.</a:t>
             </a:r>
           </a:p>
         </p:txBody>
@@ -6314,7 +6081,7 @@
               </a:defRPr>
             </a:pPr>
             <a:r>
-              <a:t>PROJECT IMPLEMENTATION · REVIEW AND TESTS</a:t>
+              <a:t>IMPLEMENTATION · CELL 3</a:t>
             </a:r>
           </a:p>
         </p:txBody>
@@ -6353,7 +6120,7 @@
               </a:defRPr>
             </a:pPr>
             <a:r>
-              <a:t>Check the references. Check the behaviour.</a:t>
+              <a:t>Apply the rules and explain the selection</a:t>
             </a:r>
           </a:p>
         </p:txBody>
@@ -6392,7 +6159,7 @@
               </a:defRPr>
             </a:pPr>
             <a:r>
-              <a:t>Keep the draft explainable when source records or rules change.</a:t>
+              <a:t>Same facts and rule version → the same prepared draft.</a:t>
             </a:r>
           </a:p>
         </p:txBody>
@@ -6474,7 +6241,7 @@
               </a:defRPr>
             </a:pPr>
             <a:r>
-              <a:t>Evidence: executed UkilRAG notebook. Four test groups passed on synthetic cases; no legal-accuracy claim.</a:t>
+              <a:t>Cell 3: actual selected sequence from fictional SAMPLE_CASE. Prepared templates, not generated legal arguments.</a:t>
             </a:r>
           </a:p>
         </p:txBody>
@@ -6526,8 +6293,8 @@
         </p:nvSpPr>
         <p:spPr>
           <a:xfrm>
-            <a:off x="594360" y="2834640"/>
-            <a:ext cx="5193792" cy="2286000"/>
+            <a:off x="594360" y="2743200"/>
+            <a:ext cx="3529584" cy="2487168"/>
           </a:xfrm>
           <a:prstGeom prst="roundRect">
             <a:avLst>
@@ -6571,8 +6338,8 @@
         </p:nvSpPr>
         <p:spPr>
           <a:xfrm>
-            <a:off x="850392" y="3063240"/>
-            <a:ext cx="4681727" cy="329184"/>
+            <a:off x="850392" y="2971800"/>
+            <a:ext cx="3017520" cy="329184"/>
           </a:xfrm>
           <a:prstGeom prst="rect">
             <a:avLst/>
@@ -6597,7 +6364,7 @@
               </a:defRPr>
             </a:pPr>
             <a:r>
-              <a:t>REVIEW CHECKS</a:t>
+              <a:t>INPUT FACTS</a:t>
             </a:r>
           </a:p>
         </p:txBody>
@@ -6610,8 +6377,8 @@
         </p:nvSpPr>
         <p:spPr>
           <a:xfrm>
-            <a:off x="850392" y="3666744"/>
-            <a:ext cx="4681727" cy="1353312"/>
+            <a:off x="850392" y="3575304"/>
+            <a:ext cx="3017520" cy="1554480"/>
           </a:xfrm>
           <a:prstGeom prst="rect">
             <a:avLst/>
@@ -6636,7 +6403,7 @@
               </a:defRPr>
             </a:pPr>
             <a:r>
-              <a:t>Missing citation markers</a:t>
+              <a:t>Procedure: yes</a:t>
             </a:r>
           </a:p>
           <a:p>
@@ -6652,7 +6419,7 @@
               </a:defRPr>
             </a:pPr>
             <a:r>
-              <a:t>Unknown or unlinked references</a:t>
+              <a:t>Records: yes</a:t>
             </a:r>
           </a:p>
           <a:p>
@@ -6668,21 +6435,60 @@
               </a:defRPr>
             </a:pPr>
             <a:r>
-              <a:t>Newer recorded judgment notes</a:t>
-            </a:r>
-          </a:p>
-        </p:txBody>
-      </p:sp>
-      <p:sp>
-        <p:nvSpPr>
-          <p:cNvPr id="12" name="Rounded Rectangle 11"/>
+              <a:t>Relief: yes</a:t>
+            </a:r>
+          </a:p>
+        </p:txBody>
+      </p:sp>
+      <p:sp>
+        <p:nvSpPr>
+          <p:cNvPr id="12" name="TextBox 11"/>
+          <p:cNvSpPr txBox="1"/>
+          <p:nvPr/>
+        </p:nvSpPr>
+        <p:spPr>
+          <a:xfrm>
+            <a:off x="4215384" y="3767328"/>
+            <a:ext cx="320040" cy="411480"/>
+          </a:xfrm>
+          <a:prstGeom prst="rect">
+            <a:avLst/>
+          </a:prstGeom>
+          <a:noFill/>
+        </p:spPr>
+        <p:txBody>
+          <a:bodyPr wrap="square" tIns="0" bIns="0" lIns="0" rIns="0">
+            <a:spAutoFit/>
+          </a:bodyPr>
+          <a:lstStyle/>
+          <a:p>
+            <a:pPr>
+              <a:spcAft>
+                <a:spcPts val="1000"/>
+              </a:spcAft>
+              <a:defRPr sz="2400" b="1">
+                <a:solidFill>
+                  <a:srgbClr val="117970"/>
+                </a:solidFill>
+                <a:latin typeface="DejaVu Sans"/>
+              </a:defRPr>
+            </a:pPr>
+            <a:r>
+              <a:t>→</a:t>
+            </a:r>
+          </a:p>
+        </p:txBody>
+      </p:sp>
+      <p:sp>
+        <p:nvSpPr>
+          <p:cNvPr id="13" name="Rounded Rectangle 12"/>
           <p:cNvSpPr/>
           <p:nvPr/>
         </p:nvSpPr>
         <p:spPr>
           <a:xfrm>
-            <a:off x="6391656" y="2834640"/>
-            <a:ext cx="5202936" cy="2286000"/>
+            <a:off x="4663440" y="2743200"/>
+            <a:ext cx="6931152" cy="2487168"/>
           </a:xfrm>
           <a:prstGeom prst="roundRect">
             <a:avLst>
@@ -6720,14 +6526,14 @@
       </p:sp>
       <p:sp>
         <p:nvSpPr>
-          <p:cNvPr id="13" name="TextBox 12"/>
+          <p:cNvPr id="14" name="TextBox 13"/>
           <p:cNvSpPr txBox="1"/>
           <p:nvPr/>
         </p:nvSpPr>
         <p:spPr>
           <a:xfrm>
-            <a:off x="6647688" y="3063240"/>
-            <a:ext cx="4690872" cy="329184"/>
+            <a:off x="4919472" y="2971800"/>
+            <a:ext cx="6419088" cy="329184"/>
           </a:xfrm>
           <a:prstGeom prst="rect">
             <a:avLst/>
@@ -6752,21 +6558,21 @@
               </a:defRPr>
             </a:pPr>
             <a:r>
-              <a:t>FOUR TEST GROUPS</a:t>
-            </a:r>
-          </a:p>
-        </p:txBody>
-      </p:sp>
-      <p:sp>
-        <p:nvSpPr>
-          <p:cNvPr id="14" name="TextBox 13"/>
+              <a:t>BASIC OUTPUT · SELECTED PARAGRAPHS</a:t>
+            </a:r>
+          </a:p>
+        </p:txBody>
+      </p:sp>
+      <p:sp>
+        <p:nvSpPr>
+          <p:cNvPr id="15" name="TextBox 14"/>
           <p:cNvSpPr txBox="1"/>
           <p:nvPr/>
         </p:nvSpPr>
         <p:spPr>
           <a:xfrm>
-            <a:off x="6647688" y="3666744"/>
-            <a:ext cx="4690872" cy="1353312"/>
+            <a:off x="4919472" y="3575304"/>
+            <a:ext cx="6419088" cy="795528"/>
           </a:xfrm>
           <a:prstGeom prst="rect">
             <a:avLst/>
@@ -6783,7 +6589,7 @@
               <a:spcAft>
                 <a:spcPts val="1000"/>
               </a:spcAft>
-              <a:defRPr sz="2000" b="1">
+              <a:defRPr sz="1900" b="1">
                 <a:solidFill>
                   <a:srgbClr val="172F46"/>
                 </a:solidFill>
@@ -6791,7 +6597,7 @@
               </a:defRPr>
             </a:pPr>
             <a:r>
-              <a:t>Repeatability: 25 runs</a:t>
+              <a:t>Jurisdiction → Facts → Procedure</a:t>
             </a:r>
           </a:p>
           <a:p>
@@ -6799,7 +6605,7 @@
               <a:spcAft>
                 <a:spcPts val="1000"/>
               </a:spcAft>
-              <a:defRPr sz="2000" b="1">
+              <a:defRPr sz="1900" b="1">
                 <a:solidFill>
                   <a:srgbClr val="172F46"/>
                 </a:solidFill>
@@ -6807,30 +6613,53 @@
               </a:defRPr>
             </a:pPr>
             <a:r>
-              <a:t>Expected results: 4 cases</a:t>
-            </a:r>
-          </a:p>
+              <a:t>→ Records → Relief</a:t>
+            </a:r>
+          </a:p>
+        </p:txBody>
+      </p:sp>
+      <p:sp>
+        <p:nvSpPr>
+          <p:cNvPr id="16" name="TextBox 15"/>
+          <p:cNvSpPr txBox="1"/>
+          <p:nvPr/>
+        </p:nvSpPr>
+        <p:spPr>
+          <a:xfrm>
+            <a:off x="4919472" y="4581144"/>
+            <a:ext cx="6419088" cy="512064"/>
+          </a:xfrm>
+          <a:prstGeom prst="rect">
+            <a:avLst/>
+          </a:prstGeom>
+          <a:noFill/>
+        </p:spPr>
+        <p:txBody>
+          <a:bodyPr wrap="square" tIns="0" bIns="0" lIns="0" rIns="0">
+            <a:spAutoFit/>
+          </a:bodyPr>
+          <a:lstStyle/>
           <a:p>
             <a:pPr>
               <a:spcAft>
                 <a:spcPts val="1000"/>
               </a:spcAft>
-              <a:defRPr sz="2000" b="1">
-                <a:solidFill>
-                  <a:srgbClr val="172F46"/>
+              <a:defRPr sz="1300" b="0">
+                <a:solidFill>
+                  <a:srgbClr val="263B4B"/>
                 </a:solidFill>
                 <a:latin typeface="DejaVu Sans"/>
               </a:defRPr>
             </a:pPr>
             <a:r>
-              <a:t>Conflicts and update warnings</a:t>
-            </a:r>
-          </a:p>
-        </p:txBody>
-      </p:sp>
-      <p:sp>
-        <p:nvSpPr>
-          <p:cNvPr id="15" name="Rectangle 14"/>
+              <a:t>Decision record: M5 INCLUDED — records are available and M3 is selected.</a:t>
+            </a:r>
+          </a:p>
+        </p:txBody>
+      </p:sp>
+      <p:sp>
+        <p:nvSpPr>
+          <p:cNvPr id="17" name="Rectangle 16"/>
           <p:cNvSpPr/>
           <p:nvPr/>
         </p:nvSpPr>
@@ -6873,7 +6702,7 @@
       </p:sp>
       <p:sp>
         <p:nvSpPr>
-          <p:cNvPr id="16" name="TextBox 15"/>
+          <p:cNvPr id="18" name="TextBox 17"/>
           <p:cNvSpPr txBox="1"/>
           <p:nvPr/>
         </p:nvSpPr>
@@ -6905,7 +6734,7 @@
               </a:defRPr>
             </a:pPr>
             <a:r>
-              <a:t>An update warning means “review this paragraph”—not “rewrite it automatically.”</a:t>
+              <a:t>Other blocks are skipped when their conditions fail; conflicting choices stop assembly.</a:t>
             </a:r>
           </a:p>
         </p:txBody>
@@ -7013,7 +6842,7 @@
               </a:defRPr>
             </a:pPr>
             <a:r>
-              <a:t>HOW I WOULD CONTRIBUTE</a:t>
+              <a:t>IMPLEMENTATION · CELLS 4 + 5</a:t>
             </a:r>
           </a:p>
         </p:txBody>
@@ -7052,7 +6881,7 @@
               </a:defRPr>
             </a:pPr>
             <a:r>
-              <a:t>Start with one approved workflow</a:t>
+              <a:t>Review the draft. Test the behaviour.</a:t>
             </a:r>
           </a:p>
         </p:txBody>
@@ -7091,7 +6920,7 @@
               </a:defRPr>
             </a:pPr>
             <a:r>
-              <a:t>A small, reviewable pilot before wider automation.</a:t>
+              <a:t>Check references and recorded updates, then rerun known examples after changes.</a:t>
             </a:r>
           </a:p>
         </p:txBody>
@@ -7173,7 +7002,7 @@
               </a:defRPr>
             </a:pPr>
             <a:r>
-              <a:t>Proposed starting approach from the internship brief. Demos use sample summaries and fictional legal cases.</a:t>
+              <a:t>Cells 4–5: saved notebook outputs. Judgment notes and reference cases are synthetic; warnings need human assessment.</a:t>
             </a:r>
           </a:p>
         </p:txBody>
@@ -7225,8 +7054,8 @@
         </p:nvSpPr>
         <p:spPr>
           <a:xfrm>
-            <a:off x="594360" y="2852928"/>
-            <a:ext cx="3493008" cy="2203704"/>
+            <a:off x="594360" y="2834640"/>
+            <a:ext cx="5193792" cy="2286000"/>
           </a:xfrm>
           <a:prstGeom prst="roundRect">
             <a:avLst>
@@ -7270,8 +7099,8 @@
         </p:nvSpPr>
         <p:spPr>
           <a:xfrm>
-            <a:off x="850392" y="3081528"/>
-            <a:ext cx="2980944" cy="329184"/>
+            <a:off x="850392" y="3063240"/>
+            <a:ext cx="4681728" cy="329184"/>
           </a:xfrm>
           <a:prstGeom prst="rect">
             <a:avLst/>
@@ -7296,7 +7125,7 @@
               </a:defRPr>
             </a:pPr>
             <a:r>
-              <a:t>DISCOVER</a:t>
+              <a:t>CELL 4 · EXAMPLE REVIEW OUTPUT</a:t>
             </a:r>
           </a:p>
         </p:txBody>
@@ -7309,8 +7138,8 @@
         </p:nvSpPr>
         <p:spPr>
           <a:xfrm>
-            <a:off x="850392" y="3685032"/>
-            <a:ext cx="2980944" cy="1271016"/>
+            <a:off x="850392" y="3666744"/>
+            <a:ext cx="4681728" cy="1335024"/>
           </a:xfrm>
           <a:prstGeom prst="rect">
             <a:avLst/>
@@ -7327,7 +7156,7 @@
               <a:spcAft>
                 <a:spcPts val="1000"/>
               </a:spcAft>
-              <a:defRPr sz="2000" b="1">
+              <a:defRPr sz="1700" b="1">
                 <a:solidFill>
                   <a:srgbClr val="172F46"/>
                 </a:solidFill>
@@ -7335,7 +7164,7 @@
               </a:defRPr>
             </a:pPr>
             <a:r>
-              <a:t>Work through an</a:t>
+              <a:t>Search demo: C54 + P420 found</a:t>
             </a:r>
           </a:p>
           <a:p>
@@ -7343,7 +7172,7 @@
               <a:spcAft>
                 <a:spcPts val="1000"/>
               </a:spcAft>
-              <a:defRPr sz="2000" b="1">
+              <a:defRPr sz="1700" b="1">
                 <a:solidFill>
                   <a:srgbClr val="172F46"/>
                 </a:solidFill>
@@ -7351,7 +7180,23 @@
               </a:defRPr>
             </a:pPr>
             <a:r>
-              <a:t>approved example.</a:t>
+              <a:t>Draft review: 3 update warnings</a:t>
+            </a:r>
+          </a:p>
+          <a:p>
+            <a:pPr>
+              <a:spcAft>
+                <a:spcPts val="1000"/>
+              </a:spcAft>
+              <a:defRPr sz="1700" b="1">
+                <a:solidFill>
+                  <a:srgbClr val="172F46"/>
+                </a:solidFill>
+                <a:latin typeface="DejaVu Sans"/>
+              </a:defRPr>
+            </a:pPr>
+            <a:r>
+              <a:t>Case summary: no accepted sources</a:t>
             </a:r>
           </a:p>
         </p:txBody>
@@ -7364,8 +7209,8 @@
         </p:nvSpPr>
         <p:spPr>
           <a:xfrm>
-            <a:off x="4343400" y="2852928"/>
-            <a:ext cx="3493008" cy="2203704"/>
+            <a:off x="6391656" y="2834640"/>
+            <a:ext cx="5202936" cy="2286000"/>
           </a:xfrm>
           <a:prstGeom prst="roundRect">
             <a:avLst>
@@ -7373,7 +7218,7 @@
             </a:avLst>
           </a:prstGeom>
           <a:solidFill>
-            <a:srgbClr val="F1F5F7"/>
+            <a:srgbClr val="E8F3F0"/>
           </a:solidFill>
           <a:ln>
             <a:noFill/>
@@ -7409,8 +7254,8 @@
         </p:nvSpPr>
         <p:spPr>
           <a:xfrm>
-            <a:off x="4599432" y="3081528"/>
-            <a:ext cx="2980944" cy="329184"/>
+            <a:off x="6647688" y="3063240"/>
+            <a:ext cx="4690872" cy="329184"/>
           </a:xfrm>
           <a:prstGeom prst="rect">
             <a:avLst/>
@@ -7435,7 +7280,7 @@
               </a:defRPr>
             </a:pPr>
             <a:r>
-              <a:t>BUILD</a:t>
+              <a:t>CELL 5 · FOUR TEST GROUPS PASS</a:t>
             </a:r>
           </a:p>
         </p:txBody>
@@ -7448,8 +7293,8 @@
         </p:nvSpPr>
         <p:spPr>
           <a:xfrm>
-            <a:off x="4599432" y="3685032"/>
-            <a:ext cx="2980944" cy="1271016"/>
+            <a:off x="6647688" y="3666744"/>
+            <a:ext cx="4690872" cy="1335024"/>
           </a:xfrm>
           <a:prstGeom prst="rect">
             <a:avLst/>
@@ -7466,7 +7311,7 @@
               <a:spcAft>
                 <a:spcPts val="1000"/>
               </a:spcAft>
-              <a:defRPr sz="2000" b="1">
+              <a:defRPr sz="1700" b="1">
                 <a:solidFill>
                   <a:srgbClr val="172F46"/>
                 </a:solidFill>
@@ -7474,7 +7319,7 @@
               </a:defRPr>
             </a:pPr>
             <a:r>
-              <a:t>Agree on rules and</a:t>
+              <a:t>25 runs give matching results</a:t>
             </a:r>
           </a:p>
           <a:p>
@@ -7482,7 +7327,7 @@
               <a:spcAft>
                 <a:spcPts val="1000"/>
               </a:spcAft>
-              <a:defRPr sz="2000" b="1">
+              <a:defRPr sz="1700" b="1">
                 <a:solidFill>
                   <a:srgbClr val="172F46"/>
                 </a:solidFill>
@@ -7490,29 +7335,43 @@
               </a:defRPr>
             </a:pPr>
             <a:r>
-              <a:t>expected results.</a:t>
-            </a:r>
-          </a:p>
-        </p:txBody>
-      </p:sp>
-      <p:sp>
-        <p:nvSpPr>
-          <p:cNvPr id="15" name="Rounded Rectangle 14"/>
+              <a:t>4 cases match their expectations</a:t>
+            </a:r>
+          </a:p>
+          <a:p>
+            <a:pPr>
+              <a:spcAft>
+                <a:spcPts val="1000"/>
+              </a:spcAft>
+              <a:defRPr sz="1700" b="1">
+                <a:solidFill>
+                  <a:srgbClr val="172F46"/>
+                </a:solidFill>
+                <a:latin typeface="DejaVu Sans"/>
+              </a:defRPr>
+            </a:pPr>
+            <a:r>
+              <a:t>Conflicts rejected; updates flagged</a:t>
+            </a:r>
+          </a:p>
+        </p:txBody>
+      </p:sp>
+      <p:sp>
+        <p:nvSpPr>
+          <p:cNvPr id="15" name="Rectangle 14"/>
           <p:cNvSpPr/>
           <p:nvPr/>
         </p:nvSpPr>
         <p:spPr>
           <a:xfrm>
-            <a:off x="8092440" y="2852928"/>
-            <a:ext cx="3493008" cy="2203704"/>
-          </a:xfrm>
-          <a:prstGeom prst="roundRect">
-            <a:avLst>
-              <a:gd name="adj" fmla="val 8000"/>
-            </a:avLst>
+            <a:off x="594360" y="5559552"/>
+            <a:ext cx="11000232" cy="594360"/>
+          </a:xfrm>
+          <a:prstGeom prst="rect">
+            <a:avLst/>
           </a:prstGeom>
           <a:solidFill>
-            <a:srgbClr val="F1F5F7"/>
+            <a:srgbClr val="172F46"/>
           </a:solidFill>
           <a:ln>
             <a:noFill/>
@@ -7548,159 +7407,6 @@
         </p:nvSpPr>
         <p:spPr>
           <a:xfrm>
-            <a:off x="8348471" y="3081528"/>
-            <a:ext cx="2980944" cy="329184"/>
-          </a:xfrm>
-          <a:prstGeom prst="rect">
-            <a:avLst/>
-          </a:prstGeom>
-          <a:noFill/>
-        </p:spPr>
-        <p:txBody>
-          <a:bodyPr wrap="square" tIns="0" bIns="0" lIns="0" rIns="0">
-            <a:spAutoFit/>
-          </a:bodyPr>
-          <a:lstStyle/>
-          <a:p>
-            <a:pPr>
-              <a:spcAft>
-                <a:spcPts val="1000"/>
-              </a:spcAft>
-              <a:defRPr sz="1200" b="1">
-                <a:solidFill>
-                  <a:srgbClr val="117970"/>
-                </a:solidFill>
-                <a:latin typeface="DejaVu Sans"/>
-              </a:defRPr>
-            </a:pPr>
-            <a:r>
-              <a:t>REVIEW</a:t>
-            </a:r>
-          </a:p>
-        </p:txBody>
-      </p:sp>
-      <p:sp>
-        <p:nvSpPr>
-          <p:cNvPr id="17" name="TextBox 16"/>
-          <p:cNvSpPr txBox="1"/>
-          <p:nvPr/>
-        </p:nvSpPr>
-        <p:spPr>
-          <a:xfrm>
-            <a:off x="8348471" y="3685032"/>
-            <a:ext cx="2980944" cy="1271016"/>
-          </a:xfrm>
-          <a:prstGeom prst="rect">
-            <a:avLst/>
-          </a:prstGeom>
-          <a:noFill/>
-        </p:spPr>
-        <p:txBody>
-          <a:bodyPr wrap="square" tIns="0" bIns="0" lIns="0" rIns="0">
-            <a:spAutoFit/>
-          </a:bodyPr>
-          <a:lstStyle/>
-          <a:p>
-            <a:pPr>
-              <a:spcAft>
-                <a:spcPts val="1000"/>
-              </a:spcAft>
-              <a:defRPr sz="2000" b="1">
-                <a:solidFill>
-                  <a:srgbClr val="172F46"/>
-                </a:solidFill>
-                <a:latin typeface="DejaVu Sans"/>
-              </a:defRPr>
-            </a:pPr>
-            <a:r>
-              <a:t>Test with the team.</a:t>
-            </a:r>
-          </a:p>
-          <a:p>
-            <a:pPr>
-              <a:spcAft>
-                <a:spcPts val="1000"/>
-              </a:spcAft>
-              <a:defRPr sz="2000" b="1">
-                <a:solidFill>
-                  <a:srgbClr val="172F46"/>
-                </a:solidFill>
-                <a:latin typeface="DejaVu Sans"/>
-              </a:defRPr>
-            </a:pPr>
-            <a:r>
-              <a:t>Review differences.</a:t>
-            </a:r>
-          </a:p>
-          <a:p>
-            <a:pPr>
-              <a:spcAft>
-                <a:spcPts val="1000"/>
-              </a:spcAft>
-              <a:defRPr sz="2000" b="1">
-                <a:solidFill>
-                  <a:srgbClr val="172F46"/>
-                </a:solidFill>
-                <a:latin typeface="DejaVu Sans"/>
-              </a:defRPr>
-            </a:pPr>
-            <a:r>
-              <a:t>Improve together.</a:t>
-            </a:r>
-          </a:p>
-        </p:txBody>
-      </p:sp>
-      <p:sp>
-        <p:nvSpPr>
-          <p:cNvPr id="18" name="Rectangle 17"/>
-          <p:cNvSpPr/>
-          <p:nvPr/>
-        </p:nvSpPr>
-        <p:spPr>
-          <a:xfrm>
-            <a:off x="594360" y="5559552"/>
-            <a:ext cx="11000232" cy="594360"/>
-          </a:xfrm>
-          <a:prstGeom prst="rect">
-            <a:avLst/>
-          </a:prstGeom>
-          <a:solidFill>
-            <a:srgbClr val="172F46"/>
-          </a:solidFill>
-          <a:ln>
-            <a:noFill/>
-          </a:ln>
-        </p:spPr>
-        <p:style>
-          <a:lnRef idx="1">
-            <a:schemeClr val="accent1"/>
-          </a:lnRef>
-          <a:fillRef idx="3">
-            <a:schemeClr val="accent1"/>
-          </a:fillRef>
-          <a:effectRef idx="0">
-            <a:schemeClr val="accent1"/>
-          </a:effectRef>
-          <a:fontRef idx="minor">
-            <a:schemeClr val="lt1"/>
-          </a:fontRef>
-        </p:style>
-        <p:txBody>
-          <a:bodyPr rtlCol="0" anchor="ctr"/>
-          <a:lstStyle/>
-          <a:p>
-            <a:pPr algn="ctr"/>
-          </a:p>
-        </p:txBody>
-      </p:sp>
-      <p:sp>
-        <p:nvSpPr>
-          <p:cNvPr id="19" name="TextBox 18"/>
-          <p:cNvSpPr txBox="1"/>
-          <p:nvPr/>
-        </p:nvSpPr>
-        <p:spPr>
-          <a:xfrm>
             <a:off x="850392" y="5742432"/>
             <a:ext cx="10469880" cy="292608"/>
           </a:xfrm>
@@ -7727,14 +7433,14 @@
               </a:defRPr>
             </a:pPr>
             <a:r>
-              <a:t>Which workflow would be the most useful starting point for this internship?</a:t>
-            </a:r>
-          </a:p>
-        </p:txBody>
-      </p:sp>
-      <p:sp>
-        <p:nvSpPr>
-          <p:cNvPr id="20" name="TextBox 19"/>
+              <a:t>A warning prompts review. Passing tests is not a guarantee of legal accuracy.</a:t>
+            </a:r>
+          </a:p>
+        </p:txBody>
+      </p:sp>
+      <p:sp>
+        <p:nvSpPr>
+          <p:cNvPr id="17" name="TextBox 16"/>
           <p:cNvSpPr txBox="1"/>
           <p:nvPr/>
         </p:nvSpPr>

--- a/presentation/Nafis_Ismam_Docitalis_Final.pptx
+++ b/presentation/Nafis_Ismam_Docitalis_Final.pptx
@@ -10,6 +10,8 @@
     <p:sldId id="258" r:id="rId10"/>
     <p:sldId id="259" r:id="rId11"/>
     <p:sldId id="260" r:id="rId12"/>
+    <p:sldId id="261" r:id="rId13"/>
+    <p:sldId id="262" r:id="rId14"/>
   </p:sldIdLst>
   <p:sldSz cx="12191695" cy="6858000" type="screen4x3"/>
   <p:notesSz cx="6858000" cy="9144000"/>
@@ -506,7 +508,7 @@
           <a:lstStyle/>
           <a:p>
             <a:r>
-              <a:t>About 35–40 seconds. “I understand this internship as turning lawyers’ knowledge into explicit software rules. I would start by learning the workflow, recording the conditions and exceptions, then helping build and test the approved process. Rules control document assembly; AI supports review, while legal decisions remain with lawyers.” The brief names Docitalis and services connected with Aprigliano. This slide does not claim to describe their existing architecture. Public context: https://docitalis.com/.</a:t>
+              <a:t>About 35 seconds. “I understand the role as learning how lawyers make decisions and representing approved reasoning as explicit rules. The system then prepares a consistent draft and explains its choices. AI can support review, but legal strategy and applicability remain with lawyers.” This is based on the supplied posting, not access to the internal system. Public context: https://docitalis.com/.</a:t>
             </a:r>
           </a:p>
         </p:txBody>
@@ -576,7 +578,7 @@
           <a:lstStyle/>
           <a:p>
             <a:r>
-              <a:t>About 40–45 seconds. “In the earlier research, my contribution was literature review, problem identification and initial design. A practical concern was confusing Bangladeshi and Indian legal provisions. I helped explore section-level organisation and retaining parent Act metadata so evidence could be traced to its source. We also considered passages related to a question but insufficient to answer it fully. I then moved to LLM inference work while a sub-team continued the legal project.” Distinguish personally completed work from group work. Do not imply ownership of the complete published pipeline. Act names alone are not sufficient jurisdiction metadata; full official sources and versions also matter.</a:t>
+              <a:t>About 40 seconds. “My role covered literature review, problem identification and initial design. I helped explore section-level organisation and parent Act metadata so retrieved passages could be traced to their sources. I later moved to an LLM inference project while a sub-team continued the legal work.” Do not claim implementation of the final research pipeline. A lawyer discussion motivated the Bangladesh/India confusion concern. Act names alone cannot settle jurisdiction; verified source, jurisdiction and version metadata are needed. The recent demo is a separate implementation; explain assistance and personal work accurately when discussing ownership.</a:t>
             </a:r>
           </a:p>
         </p:txBody>
@@ -646,7 +648,7 @@
           <a:lstStyle/>
           <a:p>
             <a:r>
-              <a:t>About 45 seconds. “Cell 1 stores labelled source records: Act, section, text and any recorded judgment note. Cell 2 stores prepared paragraphs and the conditions for including them. The shared source ID connects the two.” For example, the records paragraph M5 requires available records AND selected procedural block M3; it links to C167. The output of these cells is a source table and a module-rule table, not an assembled document. There are ten educational source summaries and seven blocks in knowledge base 1.2.0. The date and version are manually assigned. Two simulated source updates exist for testing. The terms and exclusive routes are teaching examples, not verified legal instructions.</a:t>
+              <a:t>About 45 seconds. “Cell 1 creates the Legal Sources Matrix. Cell 2 defines seven prepared document blocks and their rules in version 1.2.0. The source ID connects each paragraph to the legal records it references.” Example: M5 requires records and selected M3, and links to C167. Show these are definitions, not a completed draft. The source texts are summaries rather than verified full provisions. Two judgment notes are simulated. Versions and dates are manually assigned. The legacy limitation_defense flag is a supplied request for the procedural example, not a calculation of a breached legal deadline. Exclusive routes are teaching configuration, not universal legal rules.</a:t>
             </a:r>
           </a:p>
         </p:txBody>
@@ -716,7 +718,7 @@
           <a:lstStyle/>
           <a:p>
             <a:r>
-              <a:t>About 50 seconds. “This is the main drafting step. The engine checks the case facts, evaluates paragraph conditions, checks prerequisites and rejects active configured conflicts. It fills the selected templates and returns both the draft and an explanation.” The sample output is M1 jurisdiction, M2 facts, M3 procedure, M5 records and M7 relief. M4 substantive and M6 bail are skipped because their flags default to False. M5 is included because has_records=True and M3 was included. The trace records expected/actual facts, missing prerequisites, decisions, version and fingerprints. The method returns the final document text, module IDs, required sources and trace. No LLM chooses paragraphs. The legacy limitation_defense flag is a supplied request for this procedural example, not an automated conclusion about a legal deadline.</a:t>
+              <a:t>About 45 seconds. “The sample requests the procedural route, has records and requests relief. The engine validates fields, checks conditions and prerequisites, records every inclusion or skip, checks active conflicts and fills selected templates in order.” The sample selects M1, M2, M3, M5 and M7. M4 and M6 are skipped because their flags default to False. Defaulting unknown facts to False would need careful agreement in a real workflow. The returned trace includes rules, missing dependencies, source links, version and fingerprints. Hashes help compare outputs; they do not make them legally correct. No LLM invents the wording.</a:t>
             </a:r>
           </a:p>
         </p:txBody>
@@ -786,7 +788,147 @@
           <a:lstStyle/>
           <a:p>
             <a:r>
-              <a:t>About 60 seconds. “Cell 4 retrieves source summaries and performs structured checks on the draft. The controlled two-part search finds C54 and P420 after decomposition. In the sample draft, newer recorded notes flag M3-C54, M3-C167 and M5-C167: three module-source links. There are no missing-citation warnings in this unmodified draft. Searching the ordinary case summary accepts no source at the 0.80 gate; both split parts remain unresolved.” The threshold is uncalibrated, TF-IDF is word-based, decomposition uses separators, and no generative reviewer runs. Judgment warnings compare manually entered dates; they do not assess applicability. “Cell 5 checks 25-run reproducibility, four synthetic reference cases, rejection of conflicting routes and warning propagation after a simulated source update. All four groups pass; additional assertions exercise citation and retrieval paths.” Expected examples are synthetic, not actual lawyer-approved files. Close: “With the team I would start from one approved workflow and agreed examples. Which would be the most useful starting point?”</a:t>
+              <a:t>About 50 seconds. “Retrieval uses TF-IDF word matching and cosine similarity with an uncalibrated 0.80 gate. If direct retrieval accepts nothing, explicit separators can split the query. The controlled two-source text example retrieves C54 and P420 after splitting.” That is not proof of paraphrase accuracy. “Separately, the review derives required citations from module definitions, checks markers in the actual text and compares stored judgment-note dates.” The unchanged draft has three newer-note warnings: M3-C54, M3-C167 and M5-C167. It has no missing-citation alerts. The ordinary case summary and both split parts accept no sources. Explicit source-link warnings do not depend on search success. No new judgments are discovered automatically, no generative reviewer runs, and marker presence does not establish semantic citation support.</a:t>
+            </a:r>
+          </a:p>
+        </p:txBody>
+      </p:sp>
+      <p:sp>
+        <p:nvSpPr>
+          <p:cNvPr id="4" name="Slide Number Placeholder 3"/>
+          <p:cNvSpPr>
+            <a:spLocks noGrp="1"/>
+          </p:cNvSpPr>
+          <p:nvPr>
+            <p:ph type="sldNum" idx="5" sz="quarter"/>
+          </p:nvPr>
+        </p:nvSpPr>
+        <p:spPr/>
+      </p:sp>
+    </p:spTree>
+  </p:cSld>
+  <p:clrMapOvr>
+    <a:masterClrMapping/>
+  </p:clrMapOvr>
+</p:notes>
+</file>
+
+<file path=ppt/notesSlides/notesSlide6.xml><?xml version="1.0" encoding="utf-8"?>
+<p:notes xmlns:a="http://schemas.openxmlformats.org/drawingml/2006/main" xmlns:p="http://schemas.openxmlformats.org/presentationml/2006/main" xmlns:r="http://schemas.openxmlformats.org/officeDocument/2006/relationships">
+  <p:cSld>
+    <p:spTree>
+      <p:nvGrpSpPr>
+        <p:cNvPr id="1" name=""/>
+        <p:cNvGrpSpPr/>
+        <p:nvPr/>
+      </p:nvGrpSpPr>
+      <p:grpSpPr>
+        <a:xfrm>
+          <a:off x="0" y="0"/>
+          <a:ext cx="0" cy="0"/>
+          <a:chOff x="0" y="0"/>
+          <a:chExt cx="0" cy="0"/>
+        </a:xfrm>
+      </p:grpSpPr>
+      <p:sp>
+        <p:nvSpPr>
+          <p:cNvPr id="2" name="Slide Image Placeholder 1"/>
+          <p:cNvSpPr>
+            <a:spLocks noGrp="1"/>
+          </p:cNvSpPr>
+          <p:nvPr>
+            <p:ph type="sldImg" idx="2"/>
+          </p:nvPr>
+        </p:nvSpPr>
+        <p:spPr/>
+      </p:sp>
+      <p:sp>
+        <p:nvSpPr>
+          <p:cNvPr id="3" name="Notes Placeholder 2"/>
+          <p:cNvSpPr>
+            <a:spLocks noGrp="1"/>
+          </p:cNvSpPr>
+          <p:nvPr>
+            <p:ph type="body" idx="3" sz="quarter"/>
+          </p:nvPr>
+        </p:nvSpPr>
+        <p:spPr/>
+        <p:txBody>
+          <a:bodyPr/>
+          <a:lstStyle/>
+          <a:p>
+            <a:r>
+              <a:t>About 45 seconds. “These checks target the prototype’s promises: repeatable outputs, expected module order and citations, conflict rejection and recorded update alerts. All four groups pass.” Twenty-five repetitions were specified for the demo and are not a mathematically special number. Expected fixture lists are written separately. The conflict test passes when the intended error is raised. The update test removes notes, inserts a new simulated C167 note and checks M3 and M5; it also deliberately damages citations and checks retrieval paths. These are not approved real historical cases. A reviewed legal change may intentionally change expected outputs, so failures require investigation rather than blindly forcing old results.</a:t>
+            </a:r>
+          </a:p>
+        </p:txBody>
+      </p:sp>
+      <p:sp>
+        <p:nvSpPr>
+          <p:cNvPr id="4" name="Slide Number Placeholder 3"/>
+          <p:cNvSpPr>
+            <a:spLocks noGrp="1"/>
+          </p:cNvSpPr>
+          <p:nvPr>
+            <p:ph type="sldNum" idx="5" sz="quarter"/>
+          </p:nvPr>
+        </p:nvSpPr>
+        <p:spPr/>
+      </p:sp>
+    </p:spTree>
+  </p:cSld>
+  <p:clrMapOvr>
+    <a:masterClrMapping/>
+  </p:clrMapOvr>
+</p:notes>
+</file>
+
+<file path=ppt/notesSlides/notesSlide7.xml><?xml version="1.0" encoding="utf-8"?>
+<p:notes xmlns:a="http://schemas.openxmlformats.org/drawingml/2006/main" xmlns:p="http://schemas.openxmlformats.org/presentationml/2006/main" xmlns:r="http://schemas.openxmlformats.org/officeDocument/2006/relationships">
+  <p:cSld>
+    <p:spTree>
+      <p:nvGrpSpPr>
+        <p:cNvPr id="1" name=""/>
+        <p:cNvGrpSpPr/>
+        <p:nvPr/>
+      </p:nvGrpSpPr>
+      <p:grpSpPr>
+        <a:xfrm>
+          <a:off x="0" y="0"/>
+          <a:ext cx="0" cy="0"/>
+          <a:chOff x="0" y="0"/>
+          <a:chExt cx="0" cy="0"/>
+        </a:xfrm>
+      </p:grpSpPr>
+      <p:sp>
+        <p:nvSpPr>
+          <p:cNvPr id="2" name="Slide Image Placeholder 1"/>
+          <p:cNvSpPr>
+            <a:spLocks noGrp="1"/>
+          </p:cNvSpPr>
+          <p:nvPr>
+            <p:ph type="sldImg" idx="2"/>
+          </p:nvPr>
+        </p:nvSpPr>
+        <p:spPr/>
+      </p:sp>
+      <p:sp>
+        <p:nvSpPr>
+          <p:cNvPr id="3" name="Notes Placeholder 2"/>
+          <p:cNvSpPr>
+            <a:spLocks noGrp="1"/>
+          </p:cNvSpPr>
+          <p:nvPr>
+            <p:ph type="body" idx="3" sz="quarter"/>
+          </p:nvPr>
+        </p:nvSpPr>
+        <p:spPr/>
+        <p:txBody>
+          <a:bodyPr/>
+          <a:lstStyle/>
+          <a:p>
+            <a:r>
+              <a:t>About 40 seconds. “The demo uses summaries, fictional cases and simple checks. With your team, I would start from one approved workflow and reviewed reference set, implement a bounded task, then inspect results with lawyers and engineers.” Production work needs jurisdiction/version/source metadata, approved test cases, access controls and technical review. Evaluate thresholds on labeled queries rather than assume 0.80 transfers to another corpus. Assess claim-to-source support rather than just marker presence. The prototype lacks production storage, a generative legal reviewer and an appeals workflow. Keep these as development scope, not completed features. Close with the slide’s question. Ask about technical supervision and legal approval if not covered.</a:t>
             </a:r>
           </a:p>
         </p:txBody>
@@ -3802,20 +3944,22 @@
       <p:grpSpPr/>
       <p:sp>
         <p:nvSpPr>
-          <p:cNvPr id="2" name="Rectangle 1"/>
+          <p:cNvPr id="2" name="Rounded Rectangle 1"/>
           <p:cNvSpPr/>
           <p:nvPr/>
         </p:nvSpPr>
         <p:spPr>
           <a:xfrm>
-            <a:off x="0" y="0"/>
-            <a:ext cx="12191695" cy="91440"/>
-          </a:xfrm>
-          <a:prstGeom prst="rect">
-            <a:avLst/>
+            <a:off x="512064" y="384048"/>
+            <a:ext cx="91440" cy="329184"/>
+          </a:xfrm>
+          <a:prstGeom prst="roundRect">
+            <a:avLst>
+              <a:gd name="adj" fmla="val 6000"/>
+            </a:avLst>
           </a:prstGeom>
           <a:solidFill>
-            <a:srgbClr val="117970"/>
+            <a:srgbClr val="087B72"/>
           </a:solidFill>
           <a:ln>
             <a:noFill/>
@@ -3851,33 +3995,33 @@
         </p:nvSpPr>
         <p:spPr>
           <a:xfrm>
-            <a:off x="594360" y="365760"/>
-            <a:ext cx="10972800" cy="320040"/>
-          </a:xfrm>
-          <a:prstGeom prst="rect">
-            <a:avLst/>
-          </a:prstGeom>
-          <a:noFill/>
-        </p:spPr>
-        <p:txBody>
-          <a:bodyPr wrap="square" tIns="0" bIns="0" lIns="0" rIns="0">
-            <a:spAutoFit/>
-          </a:bodyPr>
-          <a:lstStyle/>
-          <a:p>
-            <a:pPr>
-              <a:spcAft>
-                <a:spcPts val="1000"/>
+            <a:off x="758952" y="420624"/>
+            <a:ext cx="10058400" cy="237744"/>
+          </a:xfrm>
+          <a:prstGeom prst="rect">
+            <a:avLst/>
+          </a:prstGeom>
+          <a:noFill/>
+        </p:spPr>
+        <p:txBody>
+          <a:bodyPr wrap="square" lIns="0" rIns="0" tIns="0" bIns="0">
+            <a:spAutoFit/>
+          </a:bodyPr>
+          <a:lstStyle/>
+          <a:p>
+            <a:pPr>
+              <a:spcAft>
+                <a:spcPts val="700"/>
               </a:spcAft>
               <a:defRPr sz="1100" b="1">
                 <a:solidFill>
-                  <a:srgbClr val="117970"/>
-                </a:solidFill>
-                <a:latin typeface="DejaVu Sans"/>
-              </a:defRPr>
-            </a:pPr>
-            <a:r>
-              <a:t>NAFIS ISMAM · MY UNDERSTANDING OF THE ROLE</a:t>
+                  <a:srgbClr val="087B72"/>
+                </a:solidFill>
+                <a:latin typeface="DejaVu Sans"/>
+              </a:defRPr>
+            </a:pPr>
+            <a:r>
+              <a:t>NAFIS ISMAM · ROLE UNDERSTANDING</a:t>
             </a:r>
           </a:p>
         </p:txBody>
@@ -3890,25 +4034,25 @@
         </p:nvSpPr>
         <p:spPr>
           <a:xfrm>
-            <a:off x="594360" y="960120"/>
-            <a:ext cx="10972800" cy="960120"/>
-          </a:xfrm>
-          <a:prstGeom prst="rect">
-            <a:avLst/>
-          </a:prstGeom>
-          <a:noFill/>
-        </p:spPr>
-        <p:txBody>
-          <a:bodyPr wrap="square" tIns="0" bIns="0" lIns="0" rIns="0">
-            <a:spAutoFit/>
-          </a:bodyPr>
-          <a:lstStyle/>
-          <a:p>
-            <a:pPr>
-              <a:spcAft>
-                <a:spcPts val="1000"/>
-              </a:spcAft>
-              <a:defRPr sz="3100" b="1">
+            <a:off x="594360" y="941832"/>
+            <a:ext cx="10972800" cy="914400"/>
+          </a:xfrm>
+          <a:prstGeom prst="rect">
+            <a:avLst/>
+          </a:prstGeom>
+          <a:noFill/>
+        </p:spPr>
+        <p:txBody>
+          <a:bodyPr wrap="square" lIns="0" rIns="0" tIns="0" bIns="0">
+            <a:spAutoFit/>
+          </a:bodyPr>
+          <a:lstStyle/>
+          <a:p>
+            <a:pPr>
+              <a:spcAft>
+                <a:spcPts val="700"/>
+              </a:spcAft>
+              <a:defRPr sz="3000" b="1">
                 <a:solidFill>
                   <a:srgbClr val="172F46"/>
                 </a:solidFill>
@@ -3916,7 +4060,7 @@
               </a:defRPr>
             </a:pPr>
             <a:r>
-              <a:t>Turn approved legal knowledge into reliable software</a:t>
+              <a:t>My understanding of the role</a:t>
             </a:r>
           </a:p>
         </p:txBody>
@@ -3929,53 +4073,133 @@
         </p:nvSpPr>
         <p:spPr>
           <a:xfrm>
-            <a:off x="594360" y="1956816"/>
-            <a:ext cx="10972800" cy="530352"/>
-          </a:xfrm>
-          <a:prstGeom prst="rect">
-            <a:avLst/>
-          </a:prstGeom>
-          <a:noFill/>
-        </p:spPr>
-        <p:txBody>
-          <a:bodyPr wrap="square" tIns="0" bIns="0" lIns="0" rIns="0">
-            <a:spAutoFit/>
-          </a:bodyPr>
-          <a:lstStyle/>
-          <a:p>
-            <a:pPr>
-              <a:spcAft>
-                <a:spcPts val="1000"/>
+            <a:off x="594360" y="1856231"/>
+            <a:ext cx="10972800" cy="548640"/>
+          </a:xfrm>
+          <a:prstGeom prst="rect">
+            <a:avLst/>
+          </a:prstGeom>
+          <a:noFill/>
+        </p:spPr>
+        <p:txBody>
+          <a:bodyPr wrap="square" lIns="0" rIns="0" tIns="0" bIns="0">
+            <a:spAutoFit/>
+          </a:bodyPr>
+          <a:lstStyle/>
+          <a:p>
+            <a:pPr>
+              <a:spcAft>
+                <a:spcPts val="700"/>
               </a:spcAft>
               <a:defRPr sz="1600" b="0">
                 <a:solidFill>
-                  <a:srgbClr val="607482"/>
-                </a:solidFill>
-                <a:latin typeface="DejaVu Sans"/>
-              </a:defRPr>
-            </a:pPr>
-            <a:r>
-              <a:t>Learn the legal workflow before deciding what to automate.</a:t>
-            </a:r>
-          </a:p>
-        </p:txBody>
-      </p:sp>
-      <p:sp>
-        <p:nvSpPr>
-          <p:cNvPr id="6" name="Rectangle 5"/>
+                  <a:srgbClr val="617786"/>
+                </a:solidFill>
+                <a:latin typeface="DejaVu Sans"/>
+              </a:defRPr>
+            </a:pPr>
+            <a:r>
+              <a:t>Help turn lawyers’ reasoning into reusable rules, drafts and review checks.</a:t>
+            </a:r>
+          </a:p>
+        </p:txBody>
+      </p:sp>
+      <p:sp>
+        <p:nvSpPr>
+          <p:cNvPr id="6" name="TextBox 5"/>
+          <p:cNvSpPr txBox="1"/>
+          <p:nvPr/>
+        </p:nvSpPr>
+        <p:spPr>
+          <a:xfrm>
+            <a:off x="594360" y="6510528"/>
+            <a:ext cx="10058400" cy="219456"/>
+          </a:xfrm>
+          <a:prstGeom prst="rect">
+            <a:avLst/>
+          </a:prstGeom>
+          <a:noFill/>
+        </p:spPr>
+        <p:txBody>
+          <a:bodyPr wrap="square" lIns="0" rIns="0" tIns="0" bIns="0">
+            <a:spAutoFit/>
+          </a:bodyPr>
+          <a:lstStyle/>
+          <a:p>
+            <a:pPr>
+              <a:spcAft>
+                <a:spcPts val="700"/>
+              </a:spcAft>
+              <a:defRPr sz="800" b="0">
+                <a:solidFill>
+                  <a:srgbClr val="617786"/>
+                </a:solidFill>
+                <a:latin typeface="DejaVu Sans"/>
+              </a:defRPr>
+            </a:pPr>
+            <a:r>
+              <a:t>Basis: original internship posting supplied by the candidate. Proposed understanding, not an internal-system assessment.</a:t>
+            </a:r>
+          </a:p>
+        </p:txBody>
+      </p:sp>
+      <p:sp>
+        <p:nvSpPr>
+          <p:cNvPr id="7" name="TextBox 6"/>
+          <p:cNvSpPr txBox="1"/>
+          <p:nvPr/>
+        </p:nvSpPr>
+        <p:spPr>
+          <a:xfrm>
+            <a:off x="10817352" y="6446520"/>
+            <a:ext cx="731520" cy="274320"/>
+          </a:xfrm>
+          <a:prstGeom prst="rect">
+            <a:avLst/>
+          </a:prstGeom>
+          <a:noFill/>
+        </p:spPr>
+        <p:txBody>
+          <a:bodyPr wrap="square" lIns="0" rIns="0" tIns="0" bIns="0">
+            <a:spAutoFit/>
+          </a:bodyPr>
+          <a:lstStyle/>
+          <a:p>
+            <a:pPr>
+              <a:spcAft>
+                <a:spcPts val="700"/>
+              </a:spcAft>
+              <a:defRPr sz="1000" b="0">
+                <a:solidFill>
+                  <a:srgbClr val="617786"/>
+                </a:solidFill>
+                <a:latin typeface="DejaVu Sans"/>
+              </a:defRPr>
+            </a:pPr>
+            <a:r>
+              <a:t>01 / 07</a:t>
+            </a:r>
+          </a:p>
+        </p:txBody>
+      </p:sp>
+      <p:sp>
+        <p:nvSpPr>
+          <p:cNvPr id="8" name="Rounded Rectangle 7"/>
           <p:cNvSpPr/>
           <p:nvPr/>
         </p:nvSpPr>
         <p:spPr>
           <a:xfrm>
-            <a:off x="594360" y="6409944"/>
-            <a:ext cx="11000232" cy="10972"/>
-          </a:xfrm>
-          <a:prstGeom prst="rect">
-            <a:avLst/>
+            <a:off x="594360" y="2660904"/>
+            <a:ext cx="393192" cy="393192"/>
+          </a:xfrm>
+          <a:prstGeom prst="roundRect">
+            <a:avLst>
+              <a:gd name="adj" fmla="val 6000"/>
+            </a:avLst>
           </a:prstGeom>
           <a:solidFill>
-            <a:srgbClr val="DCE5EA"/>
+            <a:srgbClr val="087B72"/>
           </a:solidFill>
           <a:ln>
             <a:noFill/>
@@ -4005,100 +4229,139 @@
       </p:sp>
       <p:sp>
         <p:nvSpPr>
-          <p:cNvPr id="7" name="TextBox 6"/>
-          <p:cNvSpPr txBox="1"/>
-          <p:nvPr/>
-        </p:nvSpPr>
-        <p:spPr>
-          <a:xfrm>
-            <a:off x="594360" y="6537960"/>
-            <a:ext cx="9875520" cy="210312"/>
-          </a:xfrm>
-          <a:prstGeom prst="rect">
-            <a:avLst/>
-          </a:prstGeom>
-          <a:noFill/>
-        </p:spPr>
-        <p:txBody>
-          <a:bodyPr wrap="square" tIns="0" bIns="0" lIns="0" rIns="0">
-            <a:spAutoFit/>
-          </a:bodyPr>
-          <a:lstStyle/>
-          <a:p>
-            <a:pPr>
-              <a:spcAft>
-                <a:spcPts val="1000"/>
-              </a:spcAft>
-              <a:defRPr sz="850" b="0">
-                <a:solidFill>
-                  <a:srgbClr val="607482"/>
-                </a:solidFill>
-                <a:latin typeface="DejaVu Sans"/>
-              </a:defRPr>
-            </a:pPr>
-            <a:r>
-              <a:t>Basis: supplied internship posting. This is my understanding, not an assessment of the existing system.</a:t>
-            </a:r>
-          </a:p>
-        </p:txBody>
-      </p:sp>
-      <p:sp>
-        <p:nvSpPr>
-          <p:cNvPr id="8" name="TextBox 7"/>
-          <p:cNvSpPr txBox="1"/>
-          <p:nvPr/>
-        </p:nvSpPr>
-        <p:spPr>
-          <a:xfrm>
-            <a:off x="10881360" y="6501384"/>
-            <a:ext cx="731520" cy="274320"/>
-          </a:xfrm>
-          <a:prstGeom prst="rect">
-            <a:avLst/>
-          </a:prstGeom>
-          <a:noFill/>
-        </p:spPr>
-        <p:txBody>
-          <a:bodyPr wrap="square" tIns="0" bIns="0" lIns="0" rIns="0">
-            <a:spAutoFit/>
-          </a:bodyPr>
-          <a:lstStyle/>
-          <a:p>
-            <a:pPr>
-              <a:spcAft>
-                <a:spcPts val="1000"/>
-              </a:spcAft>
-              <a:defRPr sz="1000" b="0">
-                <a:solidFill>
-                  <a:srgbClr val="607482"/>
-                </a:solidFill>
-                <a:latin typeface="DejaVu Sans"/>
-              </a:defRPr>
-            </a:pPr>
-            <a:r>
-              <a:t>01 / 05</a:t>
-            </a:r>
-          </a:p>
-        </p:txBody>
-      </p:sp>
-      <p:sp>
-        <p:nvSpPr>
-          <p:cNvPr id="9" name="Rounded Rectangle 8"/>
+          <p:cNvPr id="9" name="TextBox 8"/>
+          <p:cNvSpPr txBox="1"/>
+          <p:nvPr/>
+        </p:nvSpPr>
+        <p:spPr>
+          <a:xfrm>
+            <a:off x="685800" y="2738628"/>
+            <a:ext cx="274320" cy="228600"/>
+          </a:xfrm>
+          <a:prstGeom prst="rect">
+            <a:avLst/>
+          </a:prstGeom>
+          <a:noFill/>
+        </p:spPr>
+        <p:txBody>
+          <a:bodyPr wrap="square" lIns="0" rIns="0" tIns="0" bIns="0">
+            <a:spAutoFit/>
+          </a:bodyPr>
+          <a:lstStyle/>
+          <a:p>
+            <a:pPr>
+              <a:spcAft>
+                <a:spcPts val="700"/>
+              </a:spcAft>
+              <a:defRPr sz="1200" b="1">
+                <a:solidFill>
+                  <a:srgbClr val="FFFFFF"/>
+                </a:solidFill>
+                <a:latin typeface="DejaVu Sans"/>
+              </a:defRPr>
+            </a:pPr>
+            <a:r>
+              <a:t>1</a:t>
+            </a:r>
+          </a:p>
+        </p:txBody>
+      </p:sp>
+      <p:sp>
+        <p:nvSpPr>
+          <p:cNvPr id="10" name="TextBox 9"/>
+          <p:cNvSpPr txBox="1"/>
+          <p:nvPr/>
+        </p:nvSpPr>
+        <p:spPr>
+          <a:xfrm>
+            <a:off x="1225296" y="2660904"/>
+            <a:ext cx="4663440" cy="365760"/>
+          </a:xfrm>
+          <a:prstGeom prst="rect">
+            <a:avLst/>
+          </a:prstGeom>
+          <a:noFill/>
+        </p:spPr>
+        <p:txBody>
+          <a:bodyPr wrap="square" lIns="0" rIns="0" tIns="0" bIns="0">
+            <a:spAutoFit/>
+          </a:bodyPr>
+          <a:lstStyle/>
+          <a:p>
+            <a:pPr>
+              <a:spcAft>
+                <a:spcPts val="700"/>
+              </a:spcAft>
+              <a:defRPr sz="1900" b="1">
+                <a:solidFill>
+                  <a:srgbClr val="172F46"/>
+                </a:solidFill>
+                <a:latin typeface="DejaVu Sans"/>
+              </a:defRPr>
+            </a:pPr>
+            <a:r>
+              <a:t>Learn the decisions</a:t>
+            </a:r>
+          </a:p>
+        </p:txBody>
+      </p:sp>
+      <p:sp>
+        <p:nvSpPr>
+          <p:cNvPr id="11" name="TextBox 10"/>
+          <p:cNvSpPr txBox="1"/>
+          <p:nvPr/>
+        </p:nvSpPr>
+        <p:spPr>
+          <a:xfrm>
+            <a:off x="1225296" y="3127248"/>
+            <a:ext cx="4663440" cy="603504"/>
+          </a:xfrm>
+          <a:prstGeom prst="rect">
+            <a:avLst/>
+          </a:prstGeom>
+          <a:noFill/>
+        </p:spPr>
+        <p:txBody>
+          <a:bodyPr wrap="square" lIns="0" rIns="0" tIns="0" bIns="0">
+            <a:spAutoFit/>
+          </a:bodyPr>
+          <a:lstStyle/>
+          <a:p>
+            <a:pPr>
+              <a:spcAft>
+                <a:spcPts val="700"/>
+              </a:spcAft>
+              <a:defRPr sz="1500" b="0">
+                <a:solidFill>
+                  <a:srgbClr val="304455"/>
+                </a:solidFill>
+                <a:latin typeface="DejaVu Sans"/>
+              </a:defRPr>
+            </a:pPr>
+            <a:r>
+              <a:t>Ask when a paragraph applies—and what exceptions stop it.</a:t>
+            </a:r>
+          </a:p>
+        </p:txBody>
+      </p:sp>
+      <p:sp>
+        <p:nvSpPr>
+          <p:cNvPr id="12" name="Rounded Rectangle 11"/>
           <p:cNvSpPr/>
           <p:nvPr/>
         </p:nvSpPr>
         <p:spPr>
           <a:xfrm>
-            <a:off x="594360" y="2852928"/>
-            <a:ext cx="3493008" cy="2203704"/>
+            <a:off x="594360" y="3758184"/>
+            <a:ext cx="393192" cy="393192"/>
           </a:xfrm>
           <a:prstGeom prst="roundRect">
             <a:avLst>
-              <a:gd name="adj" fmla="val 8000"/>
+              <a:gd name="adj" fmla="val 6000"/>
             </a:avLst>
           </a:prstGeom>
           <a:solidFill>
-            <a:srgbClr val="F1F5F7"/>
+            <a:srgbClr val="087B72"/>
           </a:solidFill>
           <a:ln>
             <a:noFill/>
@@ -4128,70 +4391,70 @@
       </p:sp>
       <p:sp>
         <p:nvSpPr>
-          <p:cNvPr id="10" name="TextBox 9"/>
-          <p:cNvSpPr txBox="1"/>
-          <p:nvPr/>
-        </p:nvSpPr>
-        <p:spPr>
-          <a:xfrm>
-            <a:off x="850392" y="3081528"/>
-            <a:ext cx="2980944" cy="329184"/>
-          </a:xfrm>
-          <a:prstGeom prst="rect">
-            <a:avLst/>
-          </a:prstGeom>
-          <a:noFill/>
-        </p:spPr>
-        <p:txBody>
-          <a:bodyPr wrap="square" tIns="0" bIns="0" lIns="0" rIns="0">
-            <a:spAutoFit/>
-          </a:bodyPr>
-          <a:lstStyle/>
-          <a:p>
-            <a:pPr>
-              <a:spcAft>
-                <a:spcPts val="1000"/>
+          <p:cNvPr id="13" name="TextBox 12"/>
+          <p:cNvSpPr txBox="1"/>
+          <p:nvPr/>
+        </p:nvSpPr>
+        <p:spPr>
+          <a:xfrm>
+            <a:off x="685800" y="3835908"/>
+            <a:ext cx="274320" cy="228600"/>
+          </a:xfrm>
+          <a:prstGeom prst="rect">
+            <a:avLst/>
+          </a:prstGeom>
+          <a:noFill/>
+        </p:spPr>
+        <p:txBody>
+          <a:bodyPr wrap="square" lIns="0" rIns="0" tIns="0" bIns="0">
+            <a:spAutoFit/>
+          </a:bodyPr>
+          <a:lstStyle/>
+          <a:p>
+            <a:pPr>
+              <a:spcAft>
+                <a:spcPts val="700"/>
               </a:spcAft>
               <a:defRPr sz="1200" b="1">
                 <a:solidFill>
-                  <a:srgbClr val="117970"/>
-                </a:solidFill>
-                <a:latin typeface="DejaVu Sans"/>
-              </a:defRPr>
-            </a:pPr>
-            <a:r>
-              <a:t>LEARN</a:t>
-            </a:r>
-          </a:p>
-        </p:txBody>
-      </p:sp>
-      <p:sp>
-        <p:nvSpPr>
-          <p:cNvPr id="11" name="TextBox 10"/>
-          <p:cNvSpPr txBox="1"/>
-          <p:nvPr/>
-        </p:nvSpPr>
-        <p:spPr>
-          <a:xfrm>
-            <a:off x="850392" y="3685032"/>
-            <a:ext cx="2980944" cy="1271016"/>
-          </a:xfrm>
-          <a:prstGeom prst="rect">
-            <a:avLst/>
-          </a:prstGeom>
-          <a:noFill/>
-        </p:spPr>
-        <p:txBody>
-          <a:bodyPr wrap="square" tIns="0" bIns="0" lIns="0" rIns="0">
-            <a:spAutoFit/>
-          </a:bodyPr>
-          <a:lstStyle/>
-          <a:p>
-            <a:pPr>
-              <a:spcAft>
-                <a:spcPts val="1000"/>
-              </a:spcAft>
-              <a:defRPr sz="2000" b="1">
+                  <a:srgbClr val="FFFFFF"/>
+                </a:solidFill>
+                <a:latin typeface="DejaVu Sans"/>
+              </a:defRPr>
+            </a:pPr>
+            <a:r>
+              <a:t>2</a:t>
+            </a:r>
+          </a:p>
+        </p:txBody>
+      </p:sp>
+      <p:sp>
+        <p:nvSpPr>
+          <p:cNvPr id="14" name="TextBox 13"/>
+          <p:cNvSpPr txBox="1"/>
+          <p:nvPr/>
+        </p:nvSpPr>
+        <p:spPr>
+          <a:xfrm>
+            <a:off x="1225296" y="3758184"/>
+            <a:ext cx="4663440" cy="365760"/>
+          </a:xfrm>
+          <a:prstGeom prst="rect">
+            <a:avLst/>
+          </a:prstGeom>
+          <a:noFill/>
+        </p:spPr>
+        <p:txBody>
+          <a:bodyPr wrap="square" lIns="0" rIns="0" tIns="0" bIns="0">
+            <a:spAutoFit/>
+          </a:bodyPr>
+          <a:lstStyle/>
+          <a:p>
+            <a:pPr>
+              <a:spcAft>
+                <a:spcPts val="700"/>
+              </a:spcAft>
+              <a:defRPr sz="1900" b="1">
                 <a:solidFill>
                   <a:srgbClr val="172F46"/>
                 </a:solidFill>
@@ -4199,45 +4462,68 @@
               </a:defRPr>
             </a:pPr>
             <a:r>
-              <a:t>Ask why each</a:t>
-            </a:r>
-          </a:p>
-          <a:p>
-            <a:pPr>
-              <a:spcAft>
-                <a:spcPts val="1000"/>
-              </a:spcAft>
-              <a:defRPr sz="2000" b="1">
-                <a:solidFill>
-                  <a:srgbClr val="172F46"/>
-                </a:solidFill>
-                <a:latin typeface="DejaVu Sans"/>
-              </a:defRPr>
-            </a:pPr>
-            <a:r>
-              <a:t>paragraph is used.</a:t>
-            </a:r>
-          </a:p>
-        </p:txBody>
-      </p:sp>
-      <p:sp>
-        <p:nvSpPr>
-          <p:cNvPr id="12" name="Rounded Rectangle 11"/>
+              <a:t>Make the instructions explicit</a:t>
+            </a:r>
+          </a:p>
+        </p:txBody>
+      </p:sp>
+      <p:sp>
+        <p:nvSpPr>
+          <p:cNvPr id="15" name="TextBox 14"/>
+          <p:cNvSpPr txBox="1"/>
+          <p:nvPr/>
+        </p:nvSpPr>
+        <p:spPr>
+          <a:xfrm>
+            <a:off x="1225296" y="4224528"/>
+            <a:ext cx="4663440" cy="603504"/>
+          </a:xfrm>
+          <a:prstGeom prst="rect">
+            <a:avLst/>
+          </a:prstGeom>
+          <a:noFill/>
+        </p:spPr>
+        <p:txBody>
+          <a:bodyPr wrap="square" lIns="0" rIns="0" tIns="0" bIns="0">
+            <a:spAutoFit/>
+          </a:bodyPr>
+          <a:lstStyle/>
+          <a:p>
+            <a:pPr>
+              <a:spcAft>
+                <a:spcPts val="700"/>
+              </a:spcAft>
+              <a:defRPr sz="1500" b="0">
+                <a:solidFill>
+                  <a:srgbClr val="304455"/>
+                </a:solidFill>
+                <a:latin typeface="DejaVu Sans"/>
+              </a:defRPr>
+            </a:pPr>
+            <a:r>
+              <a:t>Record the facts, conditions, dependencies and source links.</a:t>
+            </a:r>
+          </a:p>
+        </p:txBody>
+      </p:sp>
+      <p:sp>
+        <p:nvSpPr>
+          <p:cNvPr id="16" name="Rounded Rectangle 15"/>
           <p:cNvSpPr/>
           <p:nvPr/>
         </p:nvSpPr>
         <p:spPr>
           <a:xfrm>
-            <a:off x="4343400" y="2852928"/>
-            <a:ext cx="3493008" cy="2203704"/>
+            <a:off x="594360" y="4855464"/>
+            <a:ext cx="393192" cy="393192"/>
           </a:xfrm>
           <a:prstGeom prst="roundRect">
             <a:avLst>
-              <a:gd name="adj" fmla="val 8000"/>
+              <a:gd name="adj" fmla="val 6000"/>
             </a:avLst>
           </a:prstGeom>
           <a:solidFill>
-            <a:srgbClr val="F1F5F7"/>
+            <a:srgbClr val="087B72"/>
           </a:solidFill>
           <a:ln>
             <a:noFill/>
@@ -4267,70 +4553,70 @@
       </p:sp>
       <p:sp>
         <p:nvSpPr>
-          <p:cNvPr id="13" name="TextBox 12"/>
-          <p:cNvSpPr txBox="1"/>
-          <p:nvPr/>
-        </p:nvSpPr>
-        <p:spPr>
-          <a:xfrm>
-            <a:off x="4599432" y="3081528"/>
-            <a:ext cx="2980944" cy="329184"/>
-          </a:xfrm>
-          <a:prstGeom prst="rect">
-            <a:avLst/>
-          </a:prstGeom>
-          <a:noFill/>
-        </p:spPr>
-        <p:txBody>
-          <a:bodyPr wrap="square" tIns="0" bIns="0" lIns="0" rIns="0">
-            <a:spAutoFit/>
-          </a:bodyPr>
-          <a:lstStyle/>
-          <a:p>
-            <a:pPr>
-              <a:spcAft>
-                <a:spcPts val="1000"/>
+          <p:cNvPr id="17" name="TextBox 16"/>
+          <p:cNvSpPr txBox="1"/>
+          <p:nvPr/>
+        </p:nvSpPr>
+        <p:spPr>
+          <a:xfrm>
+            <a:off x="685800" y="4933188"/>
+            <a:ext cx="274320" cy="228600"/>
+          </a:xfrm>
+          <a:prstGeom prst="rect">
+            <a:avLst/>
+          </a:prstGeom>
+          <a:noFill/>
+        </p:spPr>
+        <p:txBody>
+          <a:bodyPr wrap="square" lIns="0" rIns="0" tIns="0" bIns="0">
+            <a:spAutoFit/>
+          </a:bodyPr>
+          <a:lstStyle/>
+          <a:p>
+            <a:pPr>
+              <a:spcAft>
+                <a:spcPts val="700"/>
               </a:spcAft>
               <a:defRPr sz="1200" b="1">
                 <a:solidFill>
-                  <a:srgbClr val="117970"/>
-                </a:solidFill>
-                <a:latin typeface="DejaVu Sans"/>
-              </a:defRPr>
-            </a:pPr>
-            <a:r>
-              <a:t>STRUCTURE</a:t>
-            </a:r>
-          </a:p>
-        </p:txBody>
-      </p:sp>
-      <p:sp>
-        <p:nvSpPr>
-          <p:cNvPr id="14" name="TextBox 13"/>
-          <p:cNvSpPr txBox="1"/>
-          <p:nvPr/>
-        </p:nvSpPr>
-        <p:spPr>
-          <a:xfrm>
-            <a:off x="4599432" y="3685032"/>
-            <a:ext cx="2980944" cy="1271016"/>
-          </a:xfrm>
-          <a:prstGeom prst="rect">
-            <a:avLst/>
-          </a:prstGeom>
-          <a:noFill/>
-        </p:spPr>
-        <p:txBody>
-          <a:bodyPr wrap="square" tIns="0" bIns="0" lIns="0" rIns="0">
-            <a:spAutoFit/>
-          </a:bodyPr>
-          <a:lstStyle/>
-          <a:p>
-            <a:pPr>
-              <a:spcAft>
-                <a:spcPts val="1000"/>
-              </a:spcAft>
-              <a:defRPr sz="2000" b="1">
+                  <a:srgbClr val="FFFFFF"/>
+                </a:solidFill>
+                <a:latin typeface="DejaVu Sans"/>
+              </a:defRPr>
+            </a:pPr>
+            <a:r>
+              <a:t>3</a:t>
+            </a:r>
+          </a:p>
+        </p:txBody>
+      </p:sp>
+      <p:sp>
+        <p:nvSpPr>
+          <p:cNvPr id="18" name="TextBox 17"/>
+          <p:cNvSpPr txBox="1"/>
+          <p:nvPr/>
+        </p:nvSpPr>
+        <p:spPr>
+          <a:xfrm>
+            <a:off x="1225296" y="4855464"/>
+            <a:ext cx="4663440" cy="365760"/>
+          </a:xfrm>
+          <a:prstGeom prst="rect">
+            <a:avLst/>
+          </a:prstGeom>
+          <a:noFill/>
+        </p:spPr>
+        <p:txBody>
+          <a:bodyPr wrap="square" lIns="0" rIns="0" tIns="0" bIns="0">
+            <a:spAutoFit/>
+          </a:bodyPr>
+          <a:lstStyle/>
+          <a:p>
+            <a:pPr>
+              <a:spcAft>
+                <a:spcPts val="700"/>
+              </a:spcAft>
+              <a:defRPr sz="1900" b="1">
                 <a:solidFill>
                   <a:srgbClr val="172F46"/>
                 </a:solidFill>
@@ -4338,45 +4624,68 @@
               </a:defRPr>
             </a:pPr>
             <a:r>
-              <a:t>Record conditions,</a:t>
-            </a:r>
-          </a:p>
-          <a:p>
-            <a:pPr>
-              <a:spcAft>
-                <a:spcPts val="1000"/>
-              </a:spcAft>
-              <a:defRPr sz="2000" b="1">
-                <a:solidFill>
-                  <a:srgbClr val="172F46"/>
-                </a:solidFill>
-                <a:latin typeface="DejaVu Sans"/>
-              </a:defRPr>
-            </a:pPr>
-            <a:r>
-              <a:t>exceptions and sources.</a:t>
-            </a:r>
-          </a:p>
-        </p:txBody>
-      </p:sp>
-      <p:sp>
-        <p:nvSpPr>
-          <p:cNvPr id="15" name="Rounded Rectangle 14"/>
+              <a:t>Check the result with the team</a:t>
+            </a:r>
+          </a:p>
+        </p:txBody>
+      </p:sp>
+      <p:sp>
+        <p:nvSpPr>
+          <p:cNvPr id="19" name="TextBox 18"/>
+          <p:cNvSpPr txBox="1"/>
+          <p:nvPr/>
+        </p:nvSpPr>
+        <p:spPr>
+          <a:xfrm>
+            <a:off x="1225296" y="5321807"/>
+            <a:ext cx="4663440" cy="603504"/>
+          </a:xfrm>
+          <a:prstGeom prst="rect">
+            <a:avLst/>
+          </a:prstGeom>
+          <a:noFill/>
+        </p:spPr>
+        <p:txBody>
+          <a:bodyPr wrap="square" lIns="0" rIns="0" tIns="0" bIns="0">
+            <a:spAutoFit/>
+          </a:bodyPr>
+          <a:lstStyle/>
+          <a:p>
+            <a:pPr>
+              <a:spcAft>
+                <a:spcPts val="700"/>
+              </a:spcAft>
+              <a:defRPr sz="1500" b="0">
+                <a:solidFill>
+                  <a:srgbClr val="304455"/>
+                </a:solidFill>
+                <a:latin typeface="DejaVu Sans"/>
+              </a:defRPr>
+            </a:pPr>
+            <a:r>
+              <a:t>Explain selections and test changes before wider use.</a:t>
+            </a:r>
+          </a:p>
+        </p:txBody>
+      </p:sp>
+      <p:sp>
+        <p:nvSpPr>
+          <p:cNvPr id="20" name="Rounded Rectangle 19"/>
           <p:cNvSpPr/>
           <p:nvPr/>
         </p:nvSpPr>
         <p:spPr>
           <a:xfrm>
-            <a:off x="8092440" y="2852928"/>
-            <a:ext cx="3493008" cy="2203704"/>
+            <a:off x="6428232" y="2587752"/>
+            <a:ext cx="5166360" cy="3264408"/>
           </a:xfrm>
           <a:prstGeom prst="roundRect">
             <a:avLst>
-              <a:gd name="adj" fmla="val 8000"/>
+              <a:gd name="adj" fmla="val 6000"/>
             </a:avLst>
           </a:prstGeom>
           <a:solidFill>
-            <a:srgbClr val="F1F5F7"/>
+            <a:srgbClr val="E7F3EF"/>
           </a:solidFill>
           <a:ln>
             <a:noFill/>
@@ -4406,70 +4715,70 @@
       </p:sp>
       <p:sp>
         <p:nvSpPr>
-          <p:cNvPr id="16" name="TextBox 15"/>
-          <p:cNvSpPr txBox="1"/>
-          <p:nvPr/>
-        </p:nvSpPr>
-        <p:spPr>
-          <a:xfrm>
-            <a:off x="8348471" y="3081528"/>
-            <a:ext cx="2980944" cy="329184"/>
-          </a:xfrm>
-          <a:prstGeom prst="rect">
-            <a:avLst/>
-          </a:prstGeom>
-          <a:noFill/>
-        </p:spPr>
-        <p:txBody>
-          <a:bodyPr wrap="square" tIns="0" bIns="0" lIns="0" rIns="0">
-            <a:spAutoFit/>
-          </a:bodyPr>
-          <a:lstStyle/>
-          <a:p>
-            <a:pPr>
-              <a:spcAft>
-                <a:spcPts val="1000"/>
-              </a:spcAft>
-              <a:defRPr sz="1200" b="1">
-                <a:solidFill>
-                  <a:srgbClr val="117970"/>
-                </a:solidFill>
-                <a:latin typeface="DejaVu Sans"/>
-              </a:defRPr>
-            </a:pPr>
-            <a:r>
-              <a:t>CHECK</a:t>
-            </a:r>
-          </a:p>
-        </p:txBody>
-      </p:sp>
-      <p:sp>
-        <p:nvSpPr>
-          <p:cNvPr id="17" name="TextBox 16"/>
-          <p:cNvSpPr txBox="1"/>
-          <p:nvPr/>
-        </p:nvSpPr>
-        <p:spPr>
-          <a:xfrm>
-            <a:off x="8348471" y="3685032"/>
-            <a:ext cx="2980944" cy="1271016"/>
-          </a:xfrm>
-          <a:prstGeom prst="rect">
-            <a:avLst/>
-          </a:prstGeom>
-          <a:noFill/>
-        </p:spPr>
-        <p:txBody>
-          <a:bodyPr wrap="square" tIns="0" bIns="0" lIns="0" rIns="0">
-            <a:spAutoFit/>
-          </a:bodyPr>
-          <a:lstStyle/>
-          <a:p>
-            <a:pPr>
-              <a:spcAft>
-                <a:spcPts val="1000"/>
-              </a:spcAft>
-              <a:defRPr sz="2000" b="1">
+          <p:cNvPr id="21" name="TextBox 20"/>
+          <p:cNvSpPr txBox="1"/>
+          <p:nvPr/>
+        </p:nvSpPr>
+        <p:spPr>
+          <a:xfrm>
+            <a:off x="6702552" y="2862072"/>
+            <a:ext cx="4617720" cy="301752"/>
+          </a:xfrm>
+          <a:prstGeom prst="rect">
+            <a:avLst/>
+          </a:prstGeom>
+          <a:noFill/>
+        </p:spPr>
+        <p:txBody>
+          <a:bodyPr wrap="square" lIns="0" rIns="0" tIns="0" bIns="0">
+            <a:spAutoFit/>
+          </a:bodyPr>
+          <a:lstStyle/>
+          <a:p>
+            <a:pPr>
+              <a:spcAft>
+                <a:spcPts val="700"/>
+              </a:spcAft>
+              <a:defRPr sz="1100" b="1">
+                <a:solidFill>
+                  <a:srgbClr val="087B72"/>
+                </a:solidFill>
+                <a:latin typeface="DejaVu Sans"/>
+              </a:defRPr>
+            </a:pPr>
+            <a:r>
+              <a:t>THE BOUNDARY</a:t>
+            </a:r>
+          </a:p>
+        </p:txBody>
+      </p:sp>
+      <p:sp>
+        <p:nvSpPr>
+          <p:cNvPr id="22" name="TextBox 21"/>
+          <p:cNvSpPr txBox="1"/>
+          <p:nvPr/>
+        </p:nvSpPr>
+        <p:spPr>
+          <a:xfrm>
+            <a:off x="6702552" y="3465576"/>
+            <a:ext cx="4617720" cy="2148840"/>
+          </a:xfrm>
+          <a:prstGeom prst="rect">
+            <a:avLst/>
+          </a:prstGeom>
+          <a:noFill/>
+        </p:spPr>
+        <p:txBody>
+          <a:bodyPr wrap="square" lIns="0" rIns="0" tIns="0" bIns="0">
+            <a:spAutoFit/>
+          </a:bodyPr>
+          <a:lstStyle/>
+          <a:p>
+            <a:pPr>
+              <a:spcAft>
+                <a:spcPts val="700"/>
+              </a:spcAft>
+              <a:defRPr sz="1900" b="0">
                 <a:solidFill>
                   <a:srgbClr val="172F46"/>
                 </a:solidFill>
@@ -4477,43 +4786,87 @@
               </a:defRPr>
             </a:pPr>
             <a:r>
-              <a:t>Explain decisions</a:t>
-            </a:r>
-          </a:p>
-          <a:p>
-            <a:pPr>
-              <a:spcAft>
-                <a:spcPts val="1000"/>
-              </a:spcAft>
-              <a:defRPr sz="2000" b="1">
+              <a:t>Lawyers approve the reasoning.</a:t>
+            </a:r>
+          </a:p>
+          <a:p>
+            <a:pPr>
+              <a:spcAft>
+                <a:spcPts val="700"/>
+              </a:spcAft>
+              <a:defRPr sz="1900" b="0">
                 <a:solidFill>
                   <a:srgbClr val="172F46"/>
                 </a:solidFill>
                 <a:latin typeface="DejaVu Sans"/>
               </a:defRPr>
             </a:pPr>
-            <a:r>
-              <a:t>and test changes.</a:t>
-            </a:r>
-          </a:p>
-        </p:txBody>
-      </p:sp>
-      <p:sp>
-        <p:nvSpPr>
-          <p:cNvPr id="18" name="Rectangle 17"/>
+          </a:p>
+          <a:p>
+            <a:pPr>
+              <a:spcAft>
+                <a:spcPts val="700"/>
+              </a:spcAft>
+              <a:defRPr sz="1900" b="0">
+                <a:solidFill>
+                  <a:srgbClr val="172F46"/>
+                </a:solidFill>
+                <a:latin typeface="DejaVu Sans"/>
+              </a:defRPr>
+            </a:pPr>
+            <a:r>
+              <a:t>Rules assemble the draft.</a:t>
+            </a:r>
+          </a:p>
+          <a:p>
+            <a:pPr>
+              <a:spcAft>
+                <a:spcPts val="700"/>
+              </a:spcAft>
+              <a:defRPr sz="1900" b="0">
+                <a:solidFill>
+                  <a:srgbClr val="172F46"/>
+                </a:solidFill>
+                <a:latin typeface="DejaVu Sans"/>
+              </a:defRPr>
+            </a:pPr>
+          </a:p>
+          <a:p>
+            <a:pPr>
+              <a:spcAft>
+                <a:spcPts val="700"/>
+              </a:spcAft>
+              <a:defRPr sz="1900" b="0">
+                <a:solidFill>
+                  <a:srgbClr val="172F46"/>
+                </a:solidFill>
+                <a:latin typeface="DejaVu Sans"/>
+              </a:defRPr>
+            </a:pPr>
+            <a:r>
+              <a:t>AI can suggest review points.</a:t>
+            </a:r>
+          </a:p>
+        </p:txBody>
+      </p:sp>
+      <p:sp>
+        <p:nvSpPr>
+          <p:cNvPr id="23" name="Rounded Rectangle 22"/>
           <p:cNvSpPr/>
           <p:nvPr/>
         </p:nvSpPr>
         <p:spPr>
           <a:xfrm>
-            <a:off x="594360" y="5559552"/>
-            <a:ext cx="11000232" cy="594360"/>
-          </a:xfrm>
-          <a:prstGeom prst="rect">
-            <a:avLst/>
+            <a:off x="594360" y="6007608"/>
+            <a:ext cx="11000232" cy="320040"/>
+          </a:xfrm>
+          <a:prstGeom prst="roundRect">
+            <a:avLst>
+              <a:gd name="adj" fmla="val 6000"/>
+            </a:avLst>
           </a:prstGeom>
           <a:solidFill>
-            <a:srgbClr val="172F46"/>
+            <a:srgbClr val="EFF4F6"/>
           </a:solidFill>
           <a:ln>
             <a:noFill/>
@@ -4543,39 +4896,39 @@
       </p:sp>
       <p:sp>
         <p:nvSpPr>
-          <p:cNvPr id="19" name="TextBox 18"/>
-          <p:cNvSpPr txBox="1"/>
-          <p:nvPr/>
-        </p:nvSpPr>
-        <p:spPr>
-          <a:xfrm>
-            <a:off x="850392" y="5742432"/>
-            <a:ext cx="10469880" cy="292608"/>
-          </a:xfrm>
-          <a:prstGeom prst="rect">
-            <a:avLst/>
-          </a:prstGeom>
-          <a:noFill/>
-        </p:spPr>
-        <p:txBody>
-          <a:bodyPr wrap="square" tIns="0" bIns="0" lIns="0" rIns="0">
-            <a:spAutoFit/>
-          </a:bodyPr>
-          <a:lstStyle/>
-          <a:p>
-            <a:pPr>
-              <a:spcAft>
-                <a:spcPts val="1000"/>
-              </a:spcAft>
-              <a:defRPr sz="1600" b="1">
-                <a:solidFill>
-                  <a:srgbClr val="FFFFFF"/>
-                </a:solidFill>
-                <a:latin typeface="DejaVu Sans"/>
-              </a:defRPr>
-            </a:pPr>
-            <a:r>
-              <a:t>Lawyers approve the reasoning. Rules assemble. AI supports review.</a:t>
+          <p:cNvPr id="24" name="TextBox 23"/>
+          <p:cNvSpPr txBox="1"/>
+          <p:nvPr/>
+        </p:nvSpPr>
+        <p:spPr>
+          <a:xfrm>
+            <a:off x="758952" y="6053328"/>
+            <a:ext cx="10671048" cy="210312"/>
+          </a:xfrm>
+          <a:prstGeom prst="rect">
+            <a:avLst/>
+          </a:prstGeom>
+          <a:noFill/>
+        </p:spPr>
+        <p:txBody>
+          <a:bodyPr wrap="square" lIns="0" rIns="0" tIns="0" bIns="0">
+            <a:spAutoFit/>
+          </a:bodyPr>
+          <a:lstStyle/>
+          <a:p>
+            <a:pPr>
+              <a:spcAft>
+                <a:spcPts val="700"/>
+              </a:spcAft>
+              <a:defRPr sz="1100" b="1">
+                <a:solidFill>
+                  <a:srgbClr val="172F46"/>
+                </a:solidFill>
+                <a:latin typeface="DejaVu Sans"/>
+              </a:defRPr>
+            </a:pPr>
+            <a:r>
+              <a:t>The engineer makes the approved process clear and testable; the lawyer decides legal applicability.</a:t>
             </a:r>
           </a:p>
         </p:txBody>
@@ -4608,20 +4961,22 @@
       <p:grpSpPr/>
       <p:sp>
         <p:nvSpPr>
-          <p:cNvPr id="2" name="Rectangle 1"/>
+          <p:cNvPr id="2" name="Rounded Rectangle 1"/>
           <p:cNvSpPr/>
           <p:nvPr/>
         </p:nvSpPr>
         <p:spPr>
           <a:xfrm>
-            <a:off x="0" y="0"/>
-            <a:ext cx="12191695" cy="91440"/>
-          </a:xfrm>
-          <a:prstGeom prst="rect">
-            <a:avLst/>
+            <a:off x="512064" y="384048"/>
+            <a:ext cx="91440" cy="329184"/>
+          </a:xfrm>
+          <a:prstGeom prst="roundRect">
+            <a:avLst>
+              <a:gd name="adj" fmla="val 6000"/>
+            </a:avLst>
           </a:prstGeom>
           <a:solidFill>
-            <a:srgbClr val="117970"/>
+            <a:srgbClr val="087B72"/>
           </a:solidFill>
           <a:ln>
             <a:noFill/>
@@ -4657,33 +5012,33 @@
         </p:nvSpPr>
         <p:spPr>
           <a:xfrm>
-            <a:off x="594360" y="365760"/>
-            <a:ext cx="10972800" cy="320040"/>
-          </a:xfrm>
-          <a:prstGeom prst="rect">
-            <a:avLst/>
-          </a:prstGeom>
-          <a:noFill/>
-        </p:spPr>
-        <p:txBody>
-          <a:bodyPr wrap="square" tIns="0" bIns="0" lIns="0" rIns="0">
-            <a:spAutoFit/>
-          </a:bodyPr>
-          <a:lstStyle/>
-          <a:p>
-            <a:pPr>
-              <a:spcAft>
-                <a:spcPts val="1000"/>
+            <a:off x="758952" y="420624"/>
+            <a:ext cx="10058400" cy="237744"/>
+          </a:xfrm>
+          <a:prstGeom prst="rect">
+            <a:avLst/>
+          </a:prstGeom>
+          <a:noFill/>
+        </p:spPr>
+        <p:txBody>
+          <a:bodyPr wrap="square" lIns="0" rIns="0" tIns="0" bIns="0">
+            <a:spAutoFit/>
+          </a:bodyPr>
+          <a:lstStyle/>
+          <a:p>
+            <a:pPr>
+              <a:spcAft>
+                <a:spcPts val="700"/>
               </a:spcAft>
               <a:defRPr sz="1100" b="1">
                 <a:solidFill>
-                  <a:srgbClr val="117970"/>
-                </a:solidFill>
-                <a:latin typeface="DejaVu Sans"/>
-              </a:defRPr>
-            </a:pPr>
-            <a:r>
-              <a:t>MY PREVIOUS EXPERIENCE</a:t>
+                  <a:srgbClr val="087B72"/>
+                </a:solidFill>
+                <a:latin typeface="DejaVu Sans"/>
+              </a:defRPr>
+            </a:pPr>
+            <a:r>
+              <a:t>PREVIOUS EXPERIENCE</a:t>
             </a:r>
           </a:p>
         </p:txBody>
@@ -4696,25 +5051,25 @@
         </p:nvSpPr>
         <p:spPr>
           <a:xfrm>
-            <a:off x="594360" y="960120"/>
-            <a:ext cx="10972800" cy="960120"/>
-          </a:xfrm>
-          <a:prstGeom prst="rect">
-            <a:avLst/>
-          </a:prstGeom>
-          <a:noFill/>
-        </p:spPr>
-        <p:txBody>
-          <a:bodyPr wrap="square" tIns="0" bIns="0" lIns="0" rIns="0">
-            <a:spAutoFit/>
-          </a:bodyPr>
-          <a:lstStyle/>
-          <a:p>
-            <a:pPr>
-              <a:spcAft>
-                <a:spcPts val="1000"/>
-              </a:spcAft>
-              <a:defRPr sz="3100" b="1">
+            <a:off x="594360" y="941832"/>
+            <a:ext cx="10972800" cy="914400"/>
+          </a:xfrm>
+          <a:prstGeom prst="rect">
+            <a:avLst/>
+          </a:prstGeom>
+          <a:noFill/>
+        </p:spPr>
+        <p:txBody>
+          <a:bodyPr wrap="square" lIns="0" rIns="0" tIns="0" bIns="0">
+            <a:spAutoFit/>
+          </a:bodyPr>
+          <a:lstStyle/>
+          <a:p>
+            <a:pPr>
+              <a:spcAft>
+                <a:spcPts val="700"/>
+              </a:spcAft>
+              <a:defRPr sz="3000" b="1">
                 <a:solidFill>
                   <a:srgbClr val="172F46"/>
                 </a:solidFill>
@@ -4722,7 +5077,7 @@
               </a:defRPr>
             </a:pPr>
             <a:r>
-              <a:t>Earlier research: problem finding and initial design</a:t>
+              <a:t>My earlier work in legal question answering</a:t>
             </a:r>
           </a:p>
         </p:txBody>
@@ -4735,53 +5090,133 @@
         </p:nvSpPr>
         <p:spPr>
           <a:xfrm>
-            <a:off x="594360" y="1956816"/>
-            <a:ext cx="10972800" cy="530352"/>
-          </a:xfrm>
-          <a:prstGeom prst="rect">
-            <a:avLst/>
-          </a:prstGeom>
-          <a:noFill/>
-        </p:spPr>
-        <p:txBody>
-          <a:bodyPr wrap="square" tIns="0" bIns="0" lIns="0" rIns="0">
-            <a:spAutoFit/>
-          </a:bodyPr>
-          <a:lstStyle/>
-          <a:p>
-            <a:pPr>
-              <a:spcAft>
-                <a:spcPts val="1000"/>
+            <a:off x="594360" y="1856231"/>
+            <a:ext cx="10972800" cy="548640"/>
+          </a:xfrm>
+          <a:prstGeom prst="rect">
+            <a:avLst/>
+          </a:prstGeom>
+          <a:noFill/>
+        </p:spPr>
+        <p:txBody>
+          <a:bodyPr wrap="square" lIns="0" rIns="0" tIns="0" bIns="0">
+            <a:spAutoFit/>
+          </a:bodyPr>
+          <a:lstStyle/>
+          <a:p>
+            <a:pPr>
+              <a:spcAft>
+                <a:spcPts val="700"/>
               </a:spcAft>
               <a:defRPr sz="1600" b="0">
                 <a:solidFill>
-                  <a:srgbClr val="607482"/>
-                </a:solidFill>
-                <a:latin typeface="DejaVu Sans"/>
-              </a:defRPr>
-            </a:pPr>
-            <a:r>
-              <a:t>Bangladeshi legal question answering at North South University.</a:t>
-            </a:r>
-          </a:p>
-        </p:txBody>
-      </p:sp>
-      <p:sp>
-        <p:nvSpPr>
-          <p:cNvPr id="6" name="Rectangle 5"/>
+                  <a:srgbClr val="617786"/>
+                </a:solidFill>
+                <a:latin typeface="DejaVu Sans"/>
+              </a:defRPr>
+            </a:pPr>
+            <a:r>
+              <a:t>North South University · Bangladeshi statutes · early research contribution</a:t>
+            </a:r>
+          </a:p>
+        </p:txBody>
+      </p:sp>
+      <p:sp>
+        <p:nvSpPr>
+          <p:cNvPr id="6" name="TextBox 5"/>
+          <p:cNvSpPr txBox="1"/>
+          <p:nvPr/>
+        </p:nvSpPr>
+        <p:spPr>
+          <a:xfrm>
+            <a:off x="594360" y="6510528"/>
+            <a:ext cx="10058400" cy="219456"/>
+          </a:xfrm>
+          <a:prstGeom prst="rect">
+            <a:avLst/>
+          </a:prstGeom>
+          <a:noFill/>
+        </p:spPr>
+        <p:txBody>
+          <a:bodyPr wrap="square" lIns="0" rIns="0" tIns="0" bIns="0">
+            <a:spAutoFit/>
+          </a:bodyPr>
+          <a:lstStyle/>
+          <a:p>
+            <a:pPr>
+              <a:spcAft>
+                <a:spcPts val="700"/>
+              </a:spcAft>
+              <a:defRPr sz="800" b="0">
+                <a:solidFill>
+                  <a:srgbClr val="617786"/>
+                </a:solidFill>
+                <a:latin typeface="DejaVu Sans"/>
+              </a:defRPr>
+            </a:pPr>
+            <a:r>
+              <a:t>Earlier responsibilities based on candidate account. The recent prototype is separate from the published implementation.</a:t>
+            </a:r>
+          </a:p>
+        </p:txBody>
+      </p:sp>
+      <p:sp>
+        <p:nvSpPr>
+          <p:cNvPr id="7" name="TextBox 6"/>
+          <p:cNvSpPr txBox="1"/>
+          <p:nvPr/>
+        </p:nvSpPr>
+        <p:spPr>
+          <a:xfrm>
+            <a:off x="10817352" y="6446520"/>
+            <a:ext cx="731520" cy="274320"/>
+          </a:xfrm>
+          <a:prstGeom prst="rect">
+            <a:avLst/>
+          </a:prstGeom>
+          <a:noFill/>
+        </p:spPr>
+        <p:txBody>
+          <a:bodyPr wrap="square" lIns="0" rIns="0" tIns="0" bIns="0">
+            <a:spAutoFit/>
+          </a:bodyPr>
+          <a:lstStyle/>
+          <a:p>
+            <a:pPr>
+              <a:spcAft>
+                <a:spcPts val="700"/>
+              </a:spcAft>
+              <a:defRPr sz="1000" b="0">
+                <a:solidFill>
+                  <a:srgbClr val="617786"/>
+                </a:solidFill>
+                <a:latin typeface="DejaVu Sans"/>
+              </a:defRPr>
+            </a:pPr>
+            <a:r>
+              <a:t>02 / 07</a:t>
+            </a:r>
+          </a:p>
+        </p:txBody>
+      </p:sp>
+      <p:sp>
+        <p:nvSpPr>
+          <p:cNvPr id="8" name="Rounded Rectangle 7"/>
           <p:cNvSpPr/>
           <p:nvPr/>
         </p:nvSpPr>
         <p:spPr>
           <a:xfrm>
-            <a:off x="594360" y="6409944"/>
-            <a:ext cx="11000232" cy="10972"/>
-          </a:xfrm>
-          <a:prstGeom prst="rect">
-            <a:avLst/>
+            <a:off x="594360" y="2660904"/>
+            <a:ext cx="393192" cy="393192"/>
+          </a:xfrm>
+          <a:prstGeom prst="roundRect">
+            <a:avLst>
+              <a:gd name="adj" fmla="val 6000"/>
+            </a:avLst>
           </a:prstGeom>
           <a:solidFill>
-            <a:srgbClr val="DCE5EA"/>
+            <a:srgbClr val="087B72"/>
           </a:solidFill>
           <a:ln>
             <a:noFill/>
@@ -4811,100 +5246,139 @@
       </p:sp>
       <p:sp>
         <p:nvSpPr>
-          <p:cNvPr id="7" name="TextBox 6"/>
-          <p:cNvSpPr txBox="1"/>
-          <p:nvPr/>
-        </p:nvSpPr>
-        <p:spPr>
-          <a:xfrm>
-            <a:off x="594360" y="6537960"/>
-            <a:ext cx="9875520" cy="210312"/>
-          </a:xfrm>
-          <a:prstGeom prst="rect">
-            <a:avLst/>
-          </a:prstGeom>
-          <a:noFill/>
-        </p:spPr>
-        <p:txBody>
-          <a:bodyPr wrap="square" tIns="0" bIns="0" lIns="0" rIns="0">
-            <a:spAutoFit/>
-          </a:bodyPr>
-          <a:lstStyle/>
-          <a:p>
-            <a:pPr>
-              <a:spcAft>
-                <a:spcPts val="1000"/>
-              </a:spcAft>
-              <a:defRPr sz="850" b="0">
-                <a:solidFill>
-                  <a:srgbClr val="607482"/>
-                </a:solidFill>
-                <a:latin typeface="DejaVu Sans"/>
-              </a:defRPr>
-            </a:pPr>
-            <a:r>
-              <a:t>Earlier contribution based on my account. Recent demo is separate from the published research implementation.</a:t>
-            </a:r>
-          </a:p>
-        </p:txBody>
-      </p:sp>
-      <p:sp>
-        <p:nvSpPr>
-          <p:cNvPr id="8" name="TextBox 7"/>
-          <p:cNvSpPr txBox="1"/>
-          <p:nvPr/>
-        </p:nvSpPr>
-        <p:spPr>
-          <a:xfrm>
-            <a:off x="10881360" y="6501384"/>
-            <a:ext cx="731520" cy="274320"/>
-          </a:xfrm>
-          <a:prstGeom prst="rect">
-            <a:avLst/>
-          </a:prstGeom>
-          <a:noFill/>
-        </p:spPr>
-        <p:txBody>
-          <a:bodyPr wrap="square" tIns="0" bIns="0" lIns="0" rIns="0">
-            <a:spAutoFit/>
-          </a:bodyPr>
-          <a:lstStyle/>
-          <a:p>
-            <a:pPr>
-              <a:spcAft>
-                <a:spcPts val="1000"/>
-              </a:spcAft>
-              <a:defRPr sz="1000" b="0">
-                <a:solidFill>
-                  <a:srgbClr val="607482"/>
-                </a:solidFill>
-                <a:latin typeface="DejaVu Sans"/>
-              </a:defRPr>
-            </a:pPr>
-            <a:r>
-              <a:t>02 / 05</a:t>
-            </a:r>
-          </a:p>
-        </p:txBody>
-      </p:sp>
-      <p:sp>
-        <p:nvSpPr>
-          <p:cNvPr id="9" name="Rounded Rectangle 8"/>
+          <p:cNvPr id="9" name="TextBox 8"/>
+          <p:cNvSpPr txBox="1"/>
+          <p:nvPr/>
+        </p:nvSpPr>
+        <p:spPr>
+          <a:xfrm>
+            <a:off x="685800" y="2738628"/>
+            <a:ext cx="274320" cy="228600"/>
+          </a:xfrm>
+          <a:prstGeom prst="rect">
+            <a:avLst/>
+          </a:prstGeom>
+          <a:noFill/>
+        </p:spPr>
+        <p:txBody>
+          <a:bodyPr wrap="square" lIns="0" rIns="0" tIns="0" bIns="0">
+            <a:spAutoFit/>
+          </a:bodyPr>
+          <a:lstStyle/>
+          <a:p>
+            <a:pPr>
+              <a:spcAft>
+                <a:spcPts val="700"/>
+              </a:spcAft>
+              <a:defRPr sz="1200" b="1">
+                <a:solidFill>
+                  <a:srgbClr val="FFFFFF"/>
+                </a:solidFill>
+                <a:latin typeface="DejaVu Sans"/>
+              </a:defRPr>
+            </a:pPr>
+            <a:r>
+              <a:t>1</a:t>
+            </a:r>
+          </a:p>
+        </p:txBody>
+      </p:sp>
+      <p:sp>
+        <p:nvSpPr>
+          <p:cNvPr id="10" name="TextBox 9"/>
+          <p:cNvSpPr txBox="1"/>
+          <p:nvPr/>
+        </p:nvSpPr>
+        <p:spPr>
+          <a:xfrm>
+            <a:off x="1225296" y="2660904"/>
+            <a:ext cx="4663440" cy="365760"/>
+          </a:xfrm>
+          <a:prstGeom prst="rect">
+            <a:avLst/>
+          </a:prstGeom>
+          <a:noFill/>
+        </p:spPr>
+        <p:txBody>
+          <a:bodyPr wrap="square" lIns="0" rIns="0" tIns="0" bIns="0">
+            <a:spAutoFit/>
+          </a:bodyPr>
+          <a:lstStyle/>
+          <a:p>
+            <a:pPr>
+              <a:spcAft>
+                <a:spcPts val="700"/>
+              </a:spcAft>
+              <a:defRPr sz="1900" b="1">
+                <a:solidFill>
+                  <a:srgbClr val="172F46"/>
+                </a:solidFill>
+                <a:latin typeface="DejaVu Sans"/>
+              </a:defRPr>
+            </a:pPr>
+            <a:r>
+              <a:t>Review the problem</a:t>
+            </a:r>
+          </a:p>
+        </p:txBody>
+      </p:sp>
+      <p:sp>
+        <p:nvSpPr>
+          <p:cNvPr id="11" name="TextBox 10"/>
+          <p:cNvSpPr txBox="1"/>
+          <p:nvPr/>
+        </p:nvSpPr>
+        <p:spPr>
+          <a:xfrm>
+            <a:off x="1225296" y="3127248"/>
+            <a:ext cx="4663440" cy="603504"/>
+          </a:xfrm>
+          <a:prstGeom prst="rect">
+            <a:avLst/>
+          </a:prstGeom>
+          <a:noFill/>
+        </p:spPr>
+        <p:txBody>
+          <a:bodyPr wrap="square" lIns="0" rIns="0" tIns="0" bIns="0">
+            <a:spAutoFit/>
+          </a:bodyPr>
+          <a:lstStyle/>
+          <a:p>
+            <a:pPr>
+              <a:spcAft>
+                <a:spcPts val="700"/>
+              </a:spcAft>
+              <a:defRPr sz="1500" b="0">
+                <a:solidFill>
+                  <a:srgbClr val="304455"/>
+                </a:solidFill>
+                <a:latin typeface="DejaVu Sans"/>
+              </a:defRPr>
+            </a:pPr>
+            <a:r>
+              <a:t>Explore unreliable answers and confusion between legal sources.</a:t>
+            </a:r>
+          </a:p>
+        </p:txBody>
+      </p:sp>
+      <p:sp>
+        <p:nvSpPr>
+          <p:cNvPr id="12" name="Rounded Rectangle 11"/>
           <p:cNvSpPr/>
           <p:nvPr/>
         </p:nvSpPr>
         <p:spPr>
           <a:xfrm>
-            <a:off x="594360" y="2834640"/>
-            <a:ext cx="5193792" cy="2286000"/>
+            <a:off x="594360" y="3758184"/>
+            <a:ext cx="393192" cy="393192"/>
           </a:xfrm>
           <a:prstGeom prst="roundRect">
             <a:avLst>
-              <a:gd name="adj" fmla="val 8000"/>
+              <a:gd name="adj" fmla="val 6000"/>
             </a:avLst>
           </a:prstGeom>
           <a:solidFill>
-            <a:srgbClr val="F1F5F7"/>
+            <a:srgbClr val="087B72"/>
           </a:solidFill>
           <a:ln>
             <a:noFill/>
@@ -4934,70 +5408,70 @@
       </p:sp>
       <p:sp>
         <p:nvSpPr>
-          <p:cNvPr id="10" name="TextBox 9"/>
-          <p:cNvSpPr txBox="1"/>
-          <p:nvPr/>
-        </p:nvSpPr>
-        <p:spPr>
-          <a:xfrm>
-            <a:off x="850392" y="3063240"/>
-            <a:ext cx="4681727" cy="329184"/>
-          </a:xfrm>
-          <a:prstGeom prst="rect">
-            <a:avLst/>
-          </a:prstGeom>
-          <a:noFill/>
-        </p:spPr>
-        <p:txBody>
-          <a:bodyPr wrap="square" tIns="0" bIns="0" lIns="0" rIns="0">
-            <a:spAutoFit/>
-          </a:bodyPr>
-          <a:lstStyle/>
-          <a:p>
-            <a:pPr>
-              <a:spcAft>
-                <a:spcPts val="1000"/>
+          <p:cNvPr id="13" name="TextBox 12"/>
+          <p:cNvSpPr txBox="1"/>
+          <p:nvPr/>
+        </p:nvSpPr>
+        <p:spPr>
+          <a:xfrm>
+            <a:off x="685800" y="3835908"/>
+            <a:ext cx="274320" cy="228600"/>
+          </a:xfrm>
+          <a:prstGeom prst="rect">
+            <a:avLst/>
+          </a:prstGeom>
+          <a:noFill/>
+        </p:spPr>
+        <p:txBody>
+          <a:bodyPr wrap="square" lIns="0" rIns="0" tIns="0" bIns="0">
+            <a:spAutoFit/>
+          </a:bodyPr>
+          <a:lstStyle/>
+          <a:p>
+            <a:pPr>
+              <a:spcAft>
+                <a:spcPts val="700"/>
               </a:spcAft>
               <a:defRPr sz="1200" b="1">
                 <a:solidFill>
-                  <a:srgbClr val="117970"/>
-                </a:solidFill>
-                <a:latin typeface="DejaVu Sans"/>
-              </a:defRPr>
-            </a:pPr>
-            <a:r>
-              <a:t>MY CONTRIBUTION</a:t>
-            </a:r>
-          </a:p>
-        </p:txBody>
-      </p:sp>
-      <p:sp>
-        <p:nvSpPr>
-          <p:cNvPr id="11" name="TextBox 10"/>
-          <p:cNvSpPr txBox="1"/>
-          <p:nvPr/>
-        </p:nvSpPr>
-        <p:spPr>
-          <a:xfrm>
-            <a:off x="850392" y="3666744"/>
-            <a:ext cx="4681727" cy="1353312"/>
-          </a:xfrm>
-          <a:prstGeom prst="rect">
-            <a:avLst/>
-          </a:prstGeom>
-          <a:noFill/>
-        </p:spPr>
-        <p:txBody>
-          <a:bodyPr wrap="square" tIns="0" bIns="0" lIns="0" rIns="0">
-            <a:spAutoFit/>
-          </a:bodyPr>
-          <a:lstStyle/>
-          <a:p>
-            <a:pPr>
-              <a:spcAft>
-                <a:spcPts val="1000"/>
-              </a:spcAft>
-              <a:defRPr sz="2000" b="1">
+                  <a:srgbClr val="FFFFFF"/>
+                </a:solidFill>
+                <a:latin typeface="DejaVu Sans"/>
+              </a:defRPr>
+            </a:pPr>
+            <a:r>
+              <a:t>2</a:t>
+            </a:r>
+          </a:p>
+        </p:txBody>
+      </p:sp>
+      <p:sp>
+        <p:nvSpPr>
+          <p:cNvPr id="14" name="TextBox 13"/>
+          <p:cNvSpPr txBox="1"/>
+          <p:nvPr/>
+        </p:nvSpPr>
+        <p:spPr>
+          <a:xfrm>
+            <a:off x="1225296" y="3758184"/>
+            <a:ext cx="4663440" cy="365760"/>
+          </a:xfrm>
+          <a:prstGeom prst="rect">
+            <a:avLst/>
+          </a:prstGeom>
+          <a:noFill/>
+        </p:spPr>
+        <p:txBody>
+          <a:bodyPr wrap="square" lIns="0" rIns="0" tIns="0" bIns="0">
+            <a:spAutoFit/>
+          </a:bodyPr>
+          <a:lstStyle/>
+          <a:p>
+            <a:pPr>
+              <a:spcAft>
+                <a:spcPts val="700"/>
+              </a:spcAft>
+              <a:defRPr sz="1900" b="1">
                 <a:solidFill>
                   <a:srgbClr val="172F46"/>
                 </a:solidFill>
@@ -5005,61 +5479,68 @@
               </a:defRPr>
             </a:pPr>
             <a:r>
-              <a:t>Literature review</a:t>
-            </a:r>
-          </a:p>
-          <a:p>
-            <a:pPr>
-              <a:spcAft>
-                <a:spcPts val="1000"/>
-              </a:spcAft>
-              <a:defRPr sz="2000" b="1">
-                <a:solidFill>
-                  <a:srgbClr val="172F46"/>
-                </a:solidFill>
-                <a:latin typeface="DejaVu Sans"/>
-              </a:defRPr>
-            </a:pPr>
-            <a:r>
-              <a:t>Problem identification</a:t>
-            </a:r>
-          </a:p>
-          <a:p>
-            <a:pPr>
-              <a:spcAft>
-                <a:spcPts val="1000"/>
-              </a:spcAft>
-              <a:defRPr sz="2000" b="1">
-                <a:solidFill>
-                  <a:srgbClr val="172F46"/>
-                </a:solidFill>
-                <a:latin typeface="DejaVu Sans"/>
-              </a:defRPr>
-            </a:pPr>
-            <a:r>
-              <a:t>Initial design</a:t>
-            </a:r>
-          </a:p>
-        </p:txBody>
-      </p:sp>
-      <p:sp>
-        <p:nvSpPr>
-          <p:cNvPr id="12" name="Rounded Rectangle 11"/>
+              <a:t>Organise the legal sources</a:t>
+            </a:r>
+          </a:p>
+        </p:txBody>
+      </p:sp>
+      <p:sp>
+        <p:nvSpPr>
+          <p:cNvPr id="15" name="TextBox 14"/>
+          <p:cNvSpPr txBox="1"/>
+          <p:nvPr/>
+        </p:nvSpPr>
+        <p:spPr>
+          <a:xfrm>
+            <a:off x="1225296" y="4224528"/>
+            <a:ext cx="4663440" cy="603504"/>
+          </a:xfrm>
+          <a:prstGeom prst="rect">
+            <a:avLst/>
+          </a:prstGeom>
+          <a:noFill/>
+        </p:spPr>
+        <p:txBody>
+          <a:bodyPr wrap="square" lIns="0" rIns="0" tIns="0" bIns="0">
+            <a:spAutoFit/>
+          </a:bodyPr>
+          <a:lstStyle/>
+          <a:p>
+            <a:pPr>
+              <a:spcAft>
+                <a:spcPts val="700"/>
+              </a:spcAft>
+              <a:defRPr sz="1500" b="0">
+                <a:solidFill>
+                  <a:srgbClr val="304455"/>
+                </a:solidFill>
+                <a:latin typeface="DejaVu Sans"/>
+              </a:defRPr>
+            </a:pPr>
+            <a:r>
+              <a:t>Keep statutory sections together and retain their Act names.</a:t>
+            </a:r>
+          </a:p>
+        </p:txBody>
+      </p:sp>
+      <p:sp>
+        <p:nvSpPr>
+          <p:cNvPr id="16" name="Rounded Rectangle 15"/>
           <p:cNvSpPr/>
           <p:nvPr/>
         </p:nvSpPr>
         <p:spPr>
           <a:xfrm>
-            <a:off x="6391656" y="2834640"/>
-            <a:ext cx="5202936" cy="2286000"/>
+            <a:off x="594360" y="4855464"/>
+            <a:ext cx="393192" cy="393192"/>
           </a:xfrm>
           <a:prstGeom prst="roundRect">
             <a:avLst>
-              <a:gd name="adj" fmla="val 8000"/>
+              <a:gd name="adj" fmla="val 6000"/>
             </a:avLst>
           </a:prstGeom>
           <a:solidFill>
-            <a:srgbClr val="E8F3F0"/>
+            <a:srgbClr val="087B72"/>
           </a:solidFill>
           <a:ln>
             <a:noFill/>
@@ -5089,70 +5570,70 @@
       </p:sp>
       <p:sp>
         <p:nvSpPr>
-          <p:cNvPr id="13" name="TextBox 12"/>
-          <p:cNvSpPr txBox="1"/>
-          <p:nvPr/>
-        </p:nvSpPr>
-        <p:spPr>
-          <a:xfrm>
-            <a:off x="6647688" y="3063240"/>
-            <a:ext cx="4690872" cy="329184"/>
-          </a:xfrm>
-          <a:prstGeom prst="rect">
-            <a:avLst/>
-          </a:prstGeom>
-          <a:noFill/>
-        </p:spPr>
-        <p:txBody>
-          <a:bodyPr wrap="square" tIns="0" bIns="0" lIns="0" rIns="0">
-            <a:spAutoFit/>
-          </a:bodyPr>
-          <a:lstStyle/>
-          <a:p>
-            <a:pPr>
-              <a:spcAft>
-                <a:spcPts val="1000"/>
+          <p:cNvPr id="17" name="TextBox 16"/>
+          <p:cNvSpPr txBox="1"/>
+          <p:nvPr/>
+        </p:nvSpPr>
+        <p:spPr>
+          <a:xfrm>
+            <a:off x="685800" y="4933188"/>
+            <a:ext cx="274320" cy="228600"/>
+          </a:xfrm>
+          <a:prstGeom prst="rect">
+            <a:avLst/>
+          </a:prstGeom>
+          <a:noFill/>
+        </p:spPr>
+        <p:txBody>
+          <a:bodyPr wrap="square" lIns="0" rIns="0" tIns="0" bIns="0">
+            <a:spAutoFit/>
+          </a:bodyPr>
+          <a:lstStyle/>
+          <a:p>
+            <a:pPr>
+              <a:spcAft>
+                <a:spcPts val="700"/>
               </a:spcAft>
               <a:defRPr sz="1200" b="1">
                 <a:solidFill>
-                  <a:srgbClr val="117970"/>
-                </a:solidFill>
-                <a:latin typeface="DejaVu Sans"/>
-              </a:defRPr>
-            </a:pPr>
-            <a:r>
-              <a:t>WHAT I LEARNED</a:t>
-            </a:r>
-          </a:p>
-        </p:txBody>
-      </p:sp>
-      <p:sp>
-        <p:nvSpPr>
-          <p:cNvPr id="14" name="TextBox 13"/>
-          <p:cNvSpPr txBox="1"/>
-          <p:nvPr/>
-        </p:nvSpPr>
-        <p:spPr>
-          <a:xfrm>
-            <a:off x="6647688" y="3666744"/>
-            <a:ext cx="4690872" cy="1353312"/>
-          </a:xfrm>
-          <a:prstGeom prst="rect">
-            <a:avLst/>
-          </a:prstGeom>
-          <a:noFill/>
-        </p:spPr>
-        <p:txBody>
-          <a:bodyPr wrap="square" tIns="0" bIns="0" lIns="0" rIns="0">
-            <a:spAutoFit/>
-          </a:bodyPr>
-          <a:lstStyle/>
-          <a:p>
-            <a:pPr>
-              <a:spcAft>
-                <a:spcPts val="1000"/>
-              </a:spcAft>
-              <a:defRPr sz="2000" b="1">
+                  <a:srgbClr val="FFFFFF"/>
+                </a:solidFill>
+                <a:latin typeface="DejaVu Sans"/>
+              </a:defRPr>
+            </a:pPr>
+            <a:r>
+              <a:t>3</a:t>
+            </a:r>
+          </a:p>
+        </p:txBody>
+      </p:sp>
+      <p:sp>
+        <p:nvSpPr>
+          <p:cNvPr id="18" name="TextBox 17"/>
+          <p:cNvSpPr txBox="1"/>
+          <p:nvPr/>
+        </p:nvSpPr>
+        <p:spPr>
+          <a:xfrm>
+            <a:off x="1225296" y="4855464"/>
+            <a:ext cx="4663440" cy="365760"/>
+          </a:xfrm>
+          <a:prstGeom prst="rect">
+            <a:avLst/>
+          </a:prstGeom>
+          <a:noFill/>
+        </p:spPr>
+        <p:txBody>
+          <a:bodyPr wrap="square" lIns="0" rIns="0" tIns="0" bIns="0">
+            <a:spAutoFit/>
+          </a:bodyPr>
+          <a:lstStyle/>
+          <a:p>
+            <a:pPr>
+              <a:spcAft>
+                <a:spcPts val="700"/>
+              </a:spcAft>
+              <a:defRPr sz="1900" b="1">
                 <a:solidFill>
                   <a:srgbClr val="172F46"/>
                 </a:solidFill>
@@ -5160,59 +5641,68 @@
               </a:defRPr>
             </a:pPr>
             <a:r>
-              <a:t>Keep sections together</a:t>
-            </a:r>
-          </a:p>
-          <a:p>
-            <a:pPr>
-              <a:spcAft>
-                <a:spcPts val="1000"/>
-              </a:spcAft>
-              <a:defRPr sz="2000" b="1">
-                <a:solidFill>
-                  <a:srgbClr val="172F46"/>
-                </a:solidFill>
-                <a:latin typeface="DejaVu Sans"/>
-              </a:defRPr>
-            </a:pPr>
-            <a:r>
-              <a:t>Retain the Act name</a:t>
-            </a:r>
-          </a:p>
-          <a:p>
-            <a:pPr>
-              <a:spcAft>
-                <a:spcPts val="1000"/>
-              </a:spcAft>
-              <a:defRPr sz="2000" b="1">
-                <a:solidFill>
-                  <a:srgbClr val="172F46"/>
-                </a:solidFill>
-                <a:latin typeface="DejaVu Sans"/>
-              </a:defRPr>
-            </a:pPr>
-            <a:r>
-              <a:t>Check evidence coverage</a:t>
-            </a:r>
-          </a:p>
-        </p:txBody>
-      </p:sp>
-      <p:sp>
-        <p:nvSpPr>
-          <p:cNvPr id="15" name="Rectangle 14"/>
+              <a:t>Move to LLM inference work</a:t>
+            </a:r>
+          </a:p>
+        </p:txBody>
+      </p:sp>
+      <p:sp>
+        <p:nvSpPr>
+          <p:cNvPr id="19" name="TextBox 18"/>
+          <p:cNvSpPr txBox="1"/>
+          <p:nvPr/>
+        </p:nvSpPr>
+        <p:spPr>
+          <a:xfrm>
+            <a:off x="1225296" y="5321807"/>
+            <a:ext cx="4663440" cy="603504"/>
+          </a:xfrm>
+          <a:prstGeom prst="rect">
+            <a:avLst/>
+          </a:prstGeom>
+          <a:noFill/>
+        </p:spPr>
+        <p:txBody>
+          <a:bodyPr wrap="square" lIns="0" rIns="0" tIns="0" bIns="0">
+            <a:spAutoFit/>
+          </a:bodyPr>
+          <a:lstStyle/>
+          <a:p>
+            <a:pPr>
+              <a:spcAft>
+                <a:spcPts val="700"/>
+              </a:spcAft>
+              <a:defRPr sz="1500" b="0">
+                <a:solidFill>
+                  <a:srgbClr val="304455"/>
+                </a:solidFill>
+                <a:latin typeface="DejaVu Sans"/>
+              </a:defRPr>
+            </a:pPr>
+            <a:r>
+              <a:t>Another sub-team continued the legal research.</a:t>
+            </a:r>
+          </a:p>
+        </p:txBody>
+      </p:sp>
+      <p:sp>
+        <p:nvSpPr>
+          <p:cNvPr id="20" name="Rounded Rectangle 19"/>
           <p:cNvSpPr/>
           <p:nvPr/>
         </p:nvSpPr>
         <p:spPr>
           <a:xfrm>
-            <a:off x="594360" y="5559552"/>
-            <a:ext cx="11000232" cy="594360"/>
-          </a:xfrm>
-          <a:prstGeom prst="rect">
-            <a:avLst/>
+            <a:off x="6428232" y="2587752"/>
+            <a:ext cx="5166360" cy="3264408"/>
+          </a:xfrm>
+          <a:prstGeom prst="roundRect">
+            <a:avLst>
+              <a:gd name="adj" fmla="val 6000"/>
+            </a:avLst>
           </a:prstGeom>
           <a:solidFill>
-            <a:srgbClr val="172F46"/>
+            <a:srgbClr val="E7F3EF"/>
           </a:solidFill>
           <a:ln>
             <a:noFill/>
@@ -5242,39 +5732,223 @@
       </p:sp>
       <p:sp>
         <p:nvSpPr>
-          <p:cNvPr id="16" name="TextBox 15"/>
-          <p:cNvSpPr txBox="1"/>
-          <p:nvPr/>
-        </p:nvSpPr>
-        <p:spPr>
-          <a:xfrm>
-            <a:off x="850392" y="5742432"/>
-            <a:ext cx="10469880" cy="292608"/>
-          </a:xfrm>
-          <a:prstGeom prst="rect">
-            <a:avLst/>
-          </a:prstGeom>
-          <a:noFill/>
-        </p:spPr>
-        <p:txBody>
-          <a:bodyPr wrap="square" tIns="0" bIns="0" lIns="0" rIns="0">
-            <a:spAutoFit/>
-          </a:bodyPr>
-          <a:lstStyle/>
-          <a:p>
-            <a:pPr>
-              <a:spcAft>
-                <a:spcPts val="1000"/>
-              </a:spcAft>
-              <a:defRPr sz="1600" b="1">
-                <a:solidFill>
-                  <a:srgbClr val="FFFFFF"/>
-                </a:solidFill>
-                <a:latin typeface="DejaVu Sans"/>
-              </a:defRPr>
-            </a:pPr>
-            <a:r>
-              <a:t>I later moved to LLM inference work; another sub-team continued the legal project.</a:t>
+          <p:cNvPr id="21" name="TextBox 20"/>
+          <p:cNvSpPr txBox="1"/>
+          <p:nvPr/>
+        </p:nvSpPr>
+        <p:spPr>
+          <a:xfrm>
+            <a:off x="6702552" y="2862072"/>
+            <a:ext cx="4617720" cy="301752"/>
+          </a:xfrm>
+          <a:prstGeom prst="rect">
+            <a:avLst/>
+          </a:prstGeom>
+          <a:noFill/>
+        </p:spPr>
+        <p:txBody>
+          <a:bodyPr wrap="square" lIns="0" rIns="0" tIns="0" bIns="0">
+            <a:spAutoFit/>
+          </a:bodyPr>
+          <a:lstStyle/>
+          <a:p>
+            <a:pPr>
+              <a:spcAft>
+                <a:spcPts val="700"/>
+              </a:spcAft>
+              <a:defRPr sz="1100" b="1">
+                <a:solidFill>
+                  <a:srgbClr val="087B72"/>
+                </a:solidFill>
+                <a:latin typeface="DejaVu Sans"/>
+              </a:defRPr>
+            </a:pPr>
+            <a:r>
+              <a:t>THE CONNECTION TO THIS DEMO</a:t>
+            </a:r>
+          </a:p>
+        </p:txBody>
+      </p:sp>
+      <p:sp>
+        <p:nvSpPr>
+          <p:cNvPr id="22" name="TextBox 21"/>
+          <p:cNvSpPr txBox="1"/>
+          <p:nvPr/>
+        </p:nvSpPr>
+        <p:spPr>
+          <a:xfrm>
+            <a:off x="6702552" y="3465576"/>
+            <a:ext cx="4617720" cy="2148840"/>
+          </a:xfrm>
+          <a:prstGeom prst="rect">
+            <a:avLst/>
+          </a:prstGeom>
+          <a:noFill/>
+        </p:spPr>
+        <p:txBody>
+          <a:bodyPr wrap="square" lIns="0" rIns="0" tIns="0" bIns="0">
+            <a:spAutoFit/>
+          </a:bodyPr>
+          <a:lstStyle/>
+          <a:p>
+            <a:pPr>
+              <a:spcAft>
+                <a:spcPts val="700"/>
+              </a:spcAft>
+              <a:defRPr sz="1800" b="0">
+                <a:solidFill>
+                  <a:srgbClr val="172F46"/>
+                </a:solidFill>
+                <a:latin typeface="DejaVu Sans"/>
+              </a:defRPr>
+            </a:pPr>
+            <a:r>
+              <a:t>Earlier question:</a:t>
+            </a:r>
+          </a:p>
+          <a:p>
+            <a:pPr>
+              <a:spcAft>
+                <a:spcPts val="700"/>
+              </a:spcAft>
+              <a:defRPr sz="1800" b="0">
+                <a:solidFill>
+                  <a:srgbClr val="172F46"/>
+                </a:solidFill>
+                <a:latin typeface="DejaVu Sans"/>
+              </a:defRPr>
+            </a:pPr>
+            <a:r>
+              <a:t>“Where did this legal passage come from?”</a:t>
+            </a:r>
+          </a:p>
+          <a:p>
+            <a:pPr>
+              <a:spcAft>
+                <a:spcPts val="700"/>
+              </a:spcAft>
+              <a:defRPr sz="1800" b="0">
+                <a:solidFill>
+                  <a:srgbClr val="172F46"/>
+                </a:solidFill>
+                <a:latin typeface="DejaVu Sans"/>
+              </a:defRPr>
+            </a:pPr>
+          </a:p>
+          <a:p>
+            <a:pPr>
+              <a:spcAft>
+                <a:spcPts val="700"/>
+              </a:spcAft>
+              <a:defRPr sz="1800" b="0">
+                <a:solidFill>
+                  <a:srgbClr val="172F46"/>
+                </a:solidFill>
+                <a:latin typeface="DejaVu Sans"/>
+              </a:defRPr>
+            </a:pPr>
+            <a:r>
+              <a:t>Recent prototype:</a:t>
+            </a:r>
+          </a:p>
+          <a:p>
+            <a:pPr>
+              <a:spcAft>
+                <a:spcPts val="700"/>
+              </a:spcAft>
+              <a:defRPr sz="1800" b="0">
+                <a:solidFill>
+                  <a:srgbClr val="172F46"/>
+                </a:solidFill>
+                <a:latin typeface="DejaVu Sans"/>
+              </a:defRPr>
+            </a:pPr>
+            <a:r>
+              <a:t>“When should this paragraph be used?”</a:t>
+            </a:r>
+          </a:p>
+        </p:txBody>
+      </p:sp>
+      <p:sp>
+        <p:nvSpPr>
+          <p:cNvPr id="23" name="Rounded Rectangle 22"/>
+          <p:cNvSpPr/>
+          <p:nvPr/>
+        </p:nvSpPr>
+        <p:spPr>
+          <a:xfrm>
+            <a:off x="594360" y="6007608"/>
+            <a:ext cx="11000232" cy="320040"/>
+          </a:xfrm>
+          <a:prstGeom prst="roundRect">
+            <a:avLst>
+              <a:gd name="adj" fmla="val 6000"/>
+            </a:avLst>
+          </a:prstGeom>
+          <a:solidFill>
+            <a:srgbClr val="EFF4F6"/>
+          </a:solidFill>
+          <a:ln>
+            <a:noFill/>
+          </a:ln>
+        </p:spPr>
+        <p:style>
+          <a:lnRef idx="1">
+            <a:schemeClr val="accent1"/>
+          </a:lnRef>
+          <a:fillRef idx="3">
+            <a:schemeClr val="accent1"/>
+          </a:fillRef>
+          <a:effectRef idx="0">
+            <a:schemeClr val="accent1"/>
+          </a:effectRef>
+          <a:fontRef idx="minor">
+            <a:schemeClr val="lt1"/>
+          </a:fontRef>
+        </p:style>
+        <p:txBody>
+          <a:bodyPr rtlCol="0" anchor="ctr"/>
+          <a:lstStyle/>
+          <a:p>
+            <a:pPr algn="ctr"/>
+          </a:p>
+        </p:txBody>
+      </p:sp>
+      <p:sp>
+        <p:nvSpPr>
+          <p:cNvPr id="24" name="TextBox 23"/>
+          <p:cNvSpPr txBox="1"/>
+          <p:nvPr/>
+        </p:nvSpPr>
+        <p:spPr>
+          <a:xfrm>
+            <a:off x="758952" y="6053328"/>
+            <a:ext cx="10671048" cy="210312"/>
+          </a:xfrm>
+          <a:prstGeom prst="rect">
+            <a:avLst/>
+          </a:prstGeom>
+          <a:noFill/>
+        </p:spPr>
+        <p:txBody>
+          <a:bodyPr wrap="square" lIns="0" rIns="0" tIns="0" bIns="0">
+            <a:spAutoFit/>
+          </a:bodyPr>
+          <a:lstStyle/>
+          <a:p>
+            <a:pPr>
+              <a:spcAft>
+                <a:spcPts val="700"/>
+              </a:spcAft>
+              <a:defRPr sz="1100" b="1">
+                <a:solidFill>
+                  <a:srgbClr val="172F46"/>
+                </a:solidFill>
+                <a:latin typeface="DejaVu Sans"/>
+              </a:defRPr>
+            </a:pPr>
+            <a:r>
+              <a:t>UkilRAG is a recent demonstration of my understanding of the internship requirements.</a:t>
             </a:r>
           </a:p>
         </p:txBody>
@@ -5307,20 +5981,22 @@
       <p:grpSpPr/>
       <p:sp>
         <p:nvSpPr>
-          <p:cNvPr id="2" name="Rectangle 1"/>
+          <p:cNvPr id="2" name="Rounded Rectangle 1"/>
           <p:cNvSpPr/>
           <p:nvPr/>
         </p:nvSpPr>
         <p:spPr>
           <a:xfrm>
-            <a:off x="0" y="0"/>
-            <a:ext cx="12191695" cy="91440"/>
-          </a:xfrm>
-          <a:prstGeom prst="rect">
-            <a:avLst/>
+            <a:off x="512064" y="384048"/>
+            <a:ext cx="91440" cy="329184"/>
+          </a:xfrm>
+          <a:prstGeom prst="roundRect">
+            <a:avLst>
+              <a:gd name="adj" fmla="val 6000"/>
+            </a:avLst>
           </a:prstGeom>
           <a:solidFill>
-            <a:srgbClr val="117970"/>
+            <a:srgbClr val="087B72"/>
           </a:solidFill>
           <a:ln>
             <a:noFill/>
@@ -5356,33 +6032,33 @@
         </p:nvSpPr>
         <p:spPr>
           <a:xfrm>
-            <a:off x="594360" y="365760"/>
-            <a:ext cx="10972800" cy="320040"/>
-          </a:xfrm>
-          <a:prstGeom prst="rect">
-            <a:avLst/>
-          </a:prstGeom>
-          <a:noFill/>
-        </p:spPr>
-        <p:txBody>
-          <a:bodyPr wrap="square" tIns="0" bIns="0" lIns="0" rIns="0">
-            <a:spAutoFit/>
-          </a:bodyPr>
-          <a:lstStyle/>
-          <a:p>
-            <a:pPr>
-              <a:spcAft>
-                <a:spcPts val="1000"/>
+            <a:off x="758952" y="420624"/>
+            <a:ext cx="10058400" cy="237744"/>
+          </a:xfrm>
+          <a:prstGeom prst="rect">
+            <a:avLst/>
+          </a:prstGeom>
+          <a:noFill/>
+        </p:spPr>
+        <p:txBody>
+          <a:bodyPr wrap="square" lIns="0" rIns="0" tIns="0" bIns="0">
+            <a:spAutoFit/>
+          </a:bodyPr>
+          <a:lstStyle/>
+          <a:p>
+            <a:pPr>
+              <a:spcAft>
+                <a:spcPts val="700"/>
               </a:spcAft>
               <a:defRPr sz="1100" b="1">
                 <a:solidFill>
-                  <a:srgbClr val="117970"/>
-                </a:solidFill>
-                <a:latin typeface="DejaVu Sans"/>
-              </a:defRPr>
-            </a:pPr>
-            <a:r>
-              <a:t>IMPLEMENTATION · CELLS 1 + 2</a:t>
+                  <a:srgbClr val="087B72"/>
+                </a:solidFill>
+                <a:latin typeface="DejaVu Sans"/>
+              </a:defRPr>
+            </a:pPr>
+            <a:r>
+              <a:t>IMPLEMENTATION · CELLS 1 AND 2</a:t>
             </a:r>
           </a:p>
         </p:txBody>
@@ -5395,25 +6071,25 @@
         </p:nvSpPr>
         <p:spPr>
           <a:xfrm>
-            <a:off x="594360" y="960120"/>
-            <a:ext cx="10972800" cy="960120"/>
-          </a:xfrm>
-          <a:prstGeom prst="rect">
-            <a:avLst/>
-          </a:prstGeom>
-          <a:noFill/>
-        </p:spPr>
-        <p:txBody>
-          <a:bodyPr wrap="square" tIns="0" bIns="0" lIns="0" rIns="0">
-            <a:spAutoFit/>
-          </a:bodyPr>
-          <a:lstStyle/>
-          <a:p>
-            <a:pPr>
-              <a:spcAft>
-                <a:spcPts val="1000"/>
-              </a:spcAft>
-              <a:defRPr sz="3100" b="1">
+            <a:off x="594360" y="941832"/>
+            <a:ext cx="10972800" cy="914400"/>
+          </a:xfrm>
+          <a:prstGeom prst="rect">
+            <a:avLst/>
+          </a:prstGeom>
+          <a:noFill/>
+        </p:spPr>
+        <p:txBody>
+          <a:bodyPr wrap="square" lIns="0" rIns="0" tIns="0" bIns="0">
+            <a:spAutoFit/>
+          </a:bodyPr>
+          <a:lstStyle/>
+          <a:p>
+            <a:pPr>
+              <a:spcAft>
+                <a:spcPts val="700"/>
+              </a:spcAft>
+              <a:defRPr sz="3000" b="1">
                 <a:solidFill>
                   <a:srgbClr val="172F46"/>
                 </a:solidFill>
@@ -5421,7 +6097,7 @@
               </a:defRPr>
             </a:pPr>
             <a:r>
-              <a:t>Store the sources. Define the paragraph rules.</a:t>
+              <a:t>Prepare the legal sources and paragraph rules</a:t>
             </a:r>
           </a:p>
         </p:txBody>
@@ -5434,53 +6110,133 @@
         </p:nvSpPr>
         <p:spPr>
           <a:xfrm>
-            <a:off x="594360" y="1956816"/>
-            <a:ext cx="10972800" cy="530352"/>
-          </a:xfrm>
-          <a:prstGeom prst="rect">
-            <a:avLst/>
-          </a:prstGeom>
-          <a:noFill/>
-        </p:spPr>
-        <p:txBody>
-          <a:bodyPr wrap="square" tIns="0" bIns="0" lIns="0" rIns="0">
-            <a:spAutoFit/>
-          </a:bodyPr>
-          <a:lstStyle/>
-          <a:p>
-            <a:pPr>
-              <a:spcAft>
-                <a:spcPts val="1000"/>
+            <a:off x="594360" y="1856231"/>
+            <a:ext cx="10972800" cy="548640"/>
+          </a:xfrm>
+          <a:prstGeom prst="rect">
+            <a:avLst/>
+          </a:prstGeom>
+          <a:noFill/>
+        </p:spPr>
+        <p:txBody>
+          <a:bodyPr wrap="square" lIns="0" rIns="0" tIns="0" bIns="0">
+            <a:spAutoFit/>
+          </a:bodyPr>
+          <a:lstStyle/>
+          <a:p>
+            <a:pPr>
+              <a:spcAft>
+                <a:spcPts val="700"/>
               </a:spcAft>
               <a:defRPr sz="1600" b="0">
                 <a:solidFill>
-                  <a:srgbClr val="607482"/>
-                </a:solidFill>
-                <a:latin typeface="DejaVu Sans"/>
-              </a:defRPr>
-            </a:pPr>
-            <a:r>
-              <a:t>10 sample legal sources and 7 reusable document blocks, connected by source IDs.</a:t>
-            </a:r>
-          </a:p>
-        </p:txBody>
-      </p:sp>
-      <p:sp>
-        <p:nvSpPr>
-          <p:cNvPr id="6" name="Rectangle 5"/>
+                  <a:srgbClr val="617786"/>
+                </a:solidFill>
+                <a:latin typeface="DejaVu Sans"/>
+              </a:defRPr>
+            </a:pPr>
+            <a:r>
+              <a:t>These cells define the ingredients. They do not write the draft yet.</a:t>
+            </a:r>
+          </a:p>
+        </p:txBody>
+      </p:sp>
+      <p:sp>
+        <p:nvSpPr>
+          <p:cNvPr id="6" name="TextBox 5"/>
+          <p:cNvSpPr txBox="1"/>
+          <p:nvPr/>
+        </p:nvSpPr>
+        <p:spPr>
+          <a:xfrm>
+            <a:off x="594360" y="6510528"/>
+            <a:ext cx="10058400" cy="219456"/>
+          </a:xfrm>
+          <a:prstGeom prst="rect">
+            <a:avLst/>
+          </a:prstGeom>
+          <a:noFill/>
+        </p:spPr>
+        <p:txBody>
+          <a:bodyPr wrap="square" lIns="0" rIns="0" tIns="0" bIns="0">
+            <a:spAutoFit/>
+          </a:bodyPr>
+          <a:lstStyle/>
+          <a:p>
+            <a:pPr>
+              <a:spcAft>
+                <a:spcPts val="700"/>
+              </a:spcAft>
+              <a:defRPr sz="800" b="0">
+                <a:solidFill>
+                  <a:srgbClr val="617786"/>
+                </a:solidFill>
+                <a:latin typeface="DejaVu Sans"/>
+              </a:defRPr>
+            </a:pPr>
+            <a:r>
+              <a:t>Notebook cells 1–2: 10 educational source summaries; 7 modules; fictional judgment updates and teaching rules.</a:t>
+            </a:r>
+          </a:p>
+        </p:txBody>
+      </p:sp>
+      <p:sp>
+        <p:nvSpPr>
+          <p:cNvPr id="7" name="TextBox 6"/>
+          <p:cNvSpPr txBox="1"/>
+          <p:nvPr/>
+        </p:nvSpPr>
+        <p:spPr>
+          <a:xfrm>
+            <a:off x="10817352" y="6446520"/>
+            <a:ext cx="731520" cy="274320"/>
+          </a:xfrm>
+          <a:prstGeom prst="rect">
+            <a:avLst/>
+          </a:prstGeom>
+          <a:noFill/>
+        </p:spPr>
+        <p:txBody>
+          <a:bodyPr wrap="square" lIns="0" rIns="0" tIns="0" bIns="0">
+            <a:spAutoFit/>
+          </a:bodyPr>
+          <a:lstStyle/>
+          <a:p>
+            <a:pPr>
+              <a:spcAft>
+                <a:spcPts val="700"/>
+              </a:spcAft>
+              <a:defRPr sz="1000" b="0">
+                <a:solidFill>
+                  <a:srgbClr val="617786"/>
+                </a:solidFill>
+                <a:latin typeface="DejaVu Sans"/>
+              </a:defRPr>
+            </a:pPr>
+            <a:r>
+              <a:t>03 / 07</a:t>
+            </a:r>
+          </a:p>
+        </p:txBody>
+      </p:sp>
+      <p:sp>
+        <p:nvSpPr>
+          <p:cNvPr id="8" name="Rounded Rectangle 7"/>
           <p:cNvSpPr/>
           <p:nvPr/>
         </p:nvSpPr>
         <p:spPr>
           <a:xfrm>
-            <a:off x="594360" y="6409944"/>
-            <a:ext cx="11000232" cy="10972"/>
-          </a:xfrm>
-          <a:prstGeom prst="rect">
-            <a:avLst/>
+            <a:off x="594360" y="2660904"/>
+            <a:ext cx="393192" cy="393192"/>
+          </a:xfrm>
+          <a:prstGeom prst="roundRect">
+            <a:avLst>
+              <a:gd name="adj" fmla="val 6000"/>
+            </a:avLst>
           </a:prstGeom>
           <a:solidFill>
-            <a:srgbClr val="DCE5EA"/>
+            <a:srgbClr val="087B72"/>
           </a:solidFill>
           <a:ln>
             <a:noFill/>
@@ -5510,100 +6266,139 @@
       </p:sp>
       <p:sp>
         <p:nvSpPr>
-          <p:cNvPr id="7" name="TextBox 6"/>
-          <p:cNvSpPr txBox="1"/>
-          <p:nvPr/>
-        </p:nvSpPr>
-        <p:spPr>
-          <a:xfrm>
-            <a:off x="594360" y="6537960"/>
-            <a:ext cx="9875520" cy="210312"/>
-          </a:xfrm>
-          <a:prstGeom prst="rect">
-            <a:avLst/>
-          </a:prstGeom>
-          <a:noFill/>
-        </p:spPr>
-        <p:txBody>
-          <a:bodyPr wrap="square" tIns="0" bIns="0" lIns="0" rIns="0">
-            <a:spAutoFit/>
-          </a:bodyPr>
-          <a:lstStyle/>
-          <a:p>
-            <a:pPr>
-              <a:spcAft>
-                <a:spcPts val="1000"/>
-              </a:spcAft>
-              <a:defRPr sz="850" b="0">
-                <a:solidFill>
-                  <a:srgbClr val="607482"/>
-                </a:solidFill>
-                <a:latin typeface="DejaVu Sans"/>
-              </a:defRPr>
-            </a:pPr>
-            <a:r>
-              <a:t>Cells 1–2: educational legal summaries and teaching rules; no complete official text or real judgment update.</a:t>
-            </a:r>
-          </a:p>
-        </p:txBody>
-      </p:sp>
-      <p:sp>
-        <p:nvSpPr>
-          <p:cNvPr id="8" name="TextBox 7"/>
-          <p:cNvSpPr txBox="1"/>
-          <p:nvPr/>
-        </p:nvSpPr>
-        <p:spPr>
-          <a:xfrm>
-            <a:off x="10881360" y="6501384"/>
-            <a:ext cx="731520" cy="274320"/>
-          </a:xfrm>
-          <a:prstGeom prst="rect">
-            <a:avLst/>
-          </a:prstGeom>
-          <a:noFill/>
-        </p:spPr>
-        <p:txBody>
-          <a:bodyPr wrap="square" tIns="0" bIns="0" lIns="0" rIns="0">
-            <a:spAutoFit/>
-          </a:bodyPr>
-          <a:lstStyle/>
-          <a:p>
-            <a:pPr>
-              <a:spcAft>
-                <a:spcPts val="1000"/>
-              </a:spcAft>
-              <a:defRPr sz="1000" b="0">
-                <a:solidFill>
-                  <a:srgbClr val="607482"/>
-                </a:solidFill>
-                <a:latin typeface="DejaVu Sans"/>
-              </a:defRPr>
-            </a:pPr>
-            <a:r>
-              <a:t>03 / 05</a:t>
-            </a:r>
-          </a:p>
-        </p:txBody>
-      </p:sp>
-      <p:sp>
-        <p:nvSpPr>
-          <p:cNvPr id="9" name="Rounded Rectangle 8"/>
+          <p:cNvPr id="9" name="TextBox 8"/>
+          <p:cNvSpPr txBox="1"/>
+          <p:nvPr/>
+        </p:nvSpPr>
+        <p:spPr>
+          <a:xfrm>
+            <a:off x="685800" y="2738628"/>
+            <a:ext cx="274320" cy="228600"/>
+          </a:xfrm>
+          <a:prstGeom prst="rect">
+            <a:avLst/>
+          </a:prstGeom>
+          <a:noFill/>
+        </p:spPr>
+        <p:txBody>
+          <a:bodyPr wrap="square" lIns="0" rIns="0" tIns="0" bIns="0">
+            <a:spAutoFit/>
+          </a:bodyPr>
+          <a:lstStyle/>
+          <a:p>
+            <a:pPr>
+              <a:spcAft>
+                <a:spcPts val="700"/>
+              </a:spcAft>
+              <a:defRPr sz="1200" b="1">
+                <a:solidFill>
+                  <a:srgbClr val="FFFFFF"/>
+                </a:solidFill>
+                <a:latin typeface="DejaVu Sans"/>
+              </a:defRPr>
+            </a:pPr>
+            <a:r>
+              <a:t>1</a:t>
+            </a:r>
+          </a:p>
+        </p:txBody>
+      </p:sp>
+      <p:sp>
+        <p:nvSpPr>
+          <p:cNvPr id="10" name="TextBox 9"/>
+          <p:cNvSpPr txBox="1"/>
+          <p:nvPr/>
+        </p:nvSpPr>
+        <p:spPr>
+          <a:xfrm>
+            <a:off x="1225296" y="2660904"/>
+            <a:ext cx="4663440" cy="365760"/>
+          </a:xfrm>
+          <a:prstGeom prst="rect">
+            <a:avLst/>
+          </a:prstGeom>
+          <a:noFill/>
+        </p:spPr>
+        <p:txBody>
+          <a:bodyPr wrap="square" lIns="0" rIns="0" tIns="0" bIns="0">
+            <a:spAutoFit/>
+          </a:bodyPr>
+          <a:lstStyle/>
+          <a:p>
+            <a:pPr>
+              <a:spcAft>
+                <a:spcPts val="700"/>
+              </a:spcAft>
+              <a:defRPr sz="1900" b="1">
+                <a:solidFill>
+                  <a:srgbClr val="172F46"/>
+                </a:solidFill>
+                <a:latin typeface="DejaVu Sans"/>
+              </a:defRPr>
+            </a:pPr>
+            <a:r>
+              <a:t>Label the legal sources</a:t>
+            </a:r>
+          </a:p>
+        </p:txBody>
+      </p:sp>
+      <p:sp>
+        <p:nvSpPr>
+          <p:cNvPr id="11" name="TextBox 10"/>
+          <p:cNvSpPr txBox="1"/>
+          <p:nvPr/>
+        </p:nvSpPr>
+        <p:spPr>
+          <a:xfrm>
+            <a:off x="1225296" y="3127248"/>
+            <a:ext cx="4663440" cy="603504"/>
+          </a:xfrm>
+          <a:prstGeom prst="rect">
+            <a:avLst/>
+          </a:prstGeom>
+          <a:noFill/>
+        </p:spPr>
+        <p:txBody>
+          <a:bodyPr wrap="square" lIns="0" rIns="0" tIns="0" bIns="0">
+            <a:spAutoFit/>
+          </a:bodyPr>
+          <a:lstStyle/>
+          <a:p>
+            <a:pPr>
+              <a:spcAft>
+                <a:spcPts val="700"/>
+              </a:spcAft>
+              <a:defRPr sz="1500" b="0">
+                <a:solidFill>
+                  <a:srgbClr val="304455"/>
+                </a:solidFill>
+                <a:latin typeface="DejaVu Sans"/>
+              </a:defRPr>
+            </a:pPr>
+            <a:r>
+              <a:t>Keep its ID, Act, section, summary and recorded update note.</a:t>
+            </a:r>
+          </a:p>
+        </p:txBody>
+      </p:sp>
+      <p:sp>
+        <p:nvSpPr>
+          <p:cNvPr id="12" name="Rounded Rectangle 11"/>
           <p:cNvSpPr/>
           <p:nvPr/>
         </p:nvSpPr>
         <p:spPr>
           <a:xfrm>
-            <a:off x="594360" y="2834640"/>
-            <a:ext cx="5193792" cy="2286000"/>
+            <a:off x="594360" y="3758184"/>
+            <a:ext cx="393192" cy="393192"/>
           </a:xfrm>
           <a:prstGeom prst="roundRect">
             <a:avLst>
-              <a:gd name="adj" fmla="val 8000"/>
+              <a:gd name="adj" fmla="val 6000"/>
             </a:avLst>
           </a:prstGeom>
           <a:solidFill>
-            <a:srgbClr val="F1F5F7"/>
+            <a:srgbClr val="087B72"/>
           </a:solidFill>
           <a:ln>
             <a:noFill/>
@@ -5633,70 +6428,70 @@
       </p:sp>
       <p:sp>
         <p:nvSpPr>
-          <p:cNvPr id="10" name="TextBox 9"/>
-          <p:cNvSpPr txBox="1"/>
-          <p:nvPr/>
-        </p:nvSpPr>
-        <p:spPr>
-          <a:xfrm>
-            <a:off x="850392" y="3063240"/>
-            <a:ext cx="4681727" cy="329184"/>
-          </a:xfrm>
-          <a:prstGeom prst="rect">
-            <a:avLst/>
-          </a:prstGeom>
-          <a:noFill/>
-        </p:spPr>
-        <p:txBody>
-          <a:bodyPr wrap="square" tIns="0" bIns="0" lIns="0" rIns="0">
-            <a:spAutoFit/>
-          </a:bodyPr>
-          <a:lstStyle/>
-          <a:p>
-            <a:pPr>
-              <a:spcAft>
-                <a:spcPts val="1000"/>
+          <p:cNvPr id="13" name="TextBox 12"/>
+          <p:cNvSpPr txBox="1"/>
+          <p:nvPr/>
+        </p:nvSpPr>
+        <p:spPr>
+          <a:xfrm>
+            <a:off x="685800" y="3835908"/>
+            <a:ext cx="274320" cy="228600"/>
+          </a:xfrm>
+          <a:prstGeom prst="rect">
+            <a:avLst/>
+          </a:prstGeom>
+          <a:noFill/>
+        </p:spPr>
+        <p:txBody>
+          <a:bodyPr wrap="square" lIns="0" rIns="0" tIns="0" bIns="0">
+            <a:spAutoFit/>
+          </a:bodyPr>
+          <a:lstStyle/>
+          <a:p>
+            <a:pPr>
+              <a:spcAft>
+                <a:spcPts val="700"/>
               </a:spcAft>
               <a:defRPr sz="1200" b="1">
                 <a:solidFill>
-                  <a:srgbClr val="117970"/>
-                </a:solidFill>
-                <a:latin typeface="DejaVu Sans"/>
-              </a:defRPr>
-            </a:pPr>
-            <a:r>
-              <a:t>CELL 1 · A SOURCE RECORD</a:t>
-            </a:r>
-          </a:p>
-        </p:txBody>
-      </p:sp>
-      <p:sp>
-        <p:nvSpPr>
-          <p:cNvPr id="11" name="TextBox 10"/>
-          <p:cNvSpPr txBox="1"/>
-          <p:nvPr/>
-        </p:nvSpPr>
-        <p:spPr>
-          <a:xfrm>
-            <a:off x="850392" y="3666744"/>
-            <a:ext cx="4681727" cy="1353312"/>
-          </a:xfrm>
-          <a:prstGeom prst="rect">
-            <a:avLst/>
-          </a:prstGeom>
-          <a:noFill/>
-        </p:spPr>
-        <p:txBody>
-          <a:bodyPr wrap="square" tIns="0" bIns="0" lIns="0" rIns="0">
-            <a:spAutoFit/>
-          </a:bodyPr>
-          <a:lstStyle/>
-          <a:p>
-            <a:pPr>
-              <a:spcAft>
-                <a:spcPts val="1000"/>
-              </a:spcAft>
-              <a:defRPr sz="2000" b="1">
+                  <a:srgbClr val="FFFFFF"/>
+                </a:solidFill>
+                <a:latin typeface="DejaVu Sans"/>
+              </a:defRPr>
+            </a:pPr>
+            <a:r>
+              <a:t>2</a:t>
+            </a:r>
+          </a:p>
+        </p:txBody>
+      </p:sp>
+      <p:sp>
+        <p:nvSpPr>
+          <p:cNvPr id="14" name="TextBox 13"/>
+          <p:cNvSpPr txBox="1"/>
+          <p:nvPr/>
+        </p:nvSpPr>
+        <p:spPr>
+          <a:xfrm>
+            <a:off x="1225296" y="3758184"/>
+            <a:ext cx="4663440" cy="365760"/>
+          </a:xfrm>
+          <a:prstGeom prst="rect">
+            <a:avLst/>
+          </a:prstGeom>
+          <a:noFill/>
+        </p:spPr>
+        <p:txBody>
+          <a:bodyPr wrap="square" lIns="0" rIns="0" tIns="0" bIns="0">
+            <a:spAutoFit/>
+          </a:bodyPr>
+          <a:lstStyle/>
+          <a:p>
+            <a:pPr>
+              <a:spcAft>
+                <a:spcPts val="700"/>
+              </a:spcAft>
+              <a:defRPr sz="1900" b="1">
                 <a:solidFill>
                   <a:srgbClr val="172F46"/>
                 </a:solidFill>
@@ -5704,61 +6499,68 @@
               </a:defRPr>
             </a:pPr>
             <a:r>
-              <a:t>ID: C167</a:t>
-            </a:r>
-          </a:p>
-          <a:p>
-            <a:pPr>
-              <a:spcAft>
-                <a:spcPts val="1000"/>
-              </a:spcAft>
-              <a:defRPr sz="2000" b="1">
-                <a:solidFill>
-                  <a:srgbClr val="172F46"/>
-                </a:solidFill>
-                <a:latin typeface="DejaVu Sans"/>
-              </a:defRPr>
-            </a:pPr>
-            <a:r>
-              <a:t>Section: 167</a:t>
-            </a:r>
-          </a:p>
-          <a:p>
-            <a:pPr>
-              <a:spcAft>
-                <a:spcPts val="1000"/>
-              </a:spcAft>
-              <a:defRPr sz="2000" b="1">
-                <a:solidFill>
-                  <a:srgbClr val="172F46"/>
-                </a:solidFill>
-                <a:latin typeface="DejaVu Sans"/>
-              </a:defRPr>
-            </a:pPr>
-            <a:r>
-              <a:t>Act: Criminal Procedure, 1898</a:t>
-            </a:r>
-          </a:p>
-        </p:txBody>
-      </p:sp>
-      <p:sp>
-        <p:nvSpPr>
-          <p:cNvPr id="12" name="Rounded Rectangle 11"/>
+              <a:t>Define each paragraph’s rules</a:t>
+            </a:r>
+          </a:p>
+        </p:txBody>
+      </p:sp>
+      <p:sp>
+        <p:nvSpPr>
+          <p:cNvPr id="15" name="TextBox 14"/>
+          <p:cNvSpPr txBox="1"/>
+          <p:nvPr/>
+        </p:nvSpPr>
+        <p:spPr>
+          <a:xfrm>
+            <a:off x="1225296" y="4224528"/>
+            <a:ext cx="4663440" cy="603504"/>
+          </a:xfrm>
+          <a:prstGeom prst="rect">
+            <a:avLst/>
+          </a:prstGeom>
+          <a:noFill/>
+        </p:spPr>
+        <p:txBody>
+          <a:bodyPr wrap="square" lIns="0" rIns="0" tIns="0" bIns="0">
+            <a:spAutoFit/>
+          </a:bodyPr>
+          <a:lstStyle/>
+          <a:p>
+            <a:pPr>
+              <a:spcAft>
+                <a:spcPts val="700"/>
+              </a:spcAft>
+              <a:defRPr sz="1500" b="0">
+                <a:solidFill>
+                  <a:srgbClr val="304455"/>
+                </a:solidFill>
+                <a:latin typeface="DejaVu Sans"/>
+              </a:defRPr>
+            </a:pPr>
+            <a:r>
+              <a:t>Record when to include it, what must come first and what conflicts.</a:t>
+            </a:r>
+          </a:p>
+        </p:txBody>
+      </p:sp>
+      <p:sp>
+        <p:nvSpPr>
+          <p:cNvPr id="16" name="Rounded Rectangle 15"/>
           <p:cNvSpPr/>
           <p:nvPr/>
         </p:nvSpPr>
         <p:spPr>
           <a:xfrm>
-            <a:off x="6391656" y="2834640"/>
-            <a:ext cx="5202936" cy="2286000"/>
+            <a:off x="594360" y="4855464"/>
+            <a:ext cx="393192" cy="393192"/>
           </a:xfrm>
           <a:prstGeom prst="roundRect">
             <a:avLst>
-              <a:gd name="adj" fmla="val 8000"/>
+              <a:gd name="adj" fmla="val 6000"/>
             </a:avLst>
           </a:prstGeom>
           <a:solidFill>
-            <a:srgbClr val="E8F3F0"/>
+            <a:srgbClr val="087B72"/>
           </a:solidFill>
           <a:ln>
             <a:noFill/>
@@ -5788,70 +6590,70 @@
       </p:sp>
       <p:sp>
         <p:nvSpPr>
-          <p:cNvPr id="13" name="TextBox 12"/>
-          <p:cNvSpPr txBox="1"/>
-          <p:nvPr/>
-        </p:nvSpPr>
-        <p:spPr>
-          <a:xfrm>
-            <a:off x="6647688" y="3063240"/>
-            <a:ext cx="4690872" cy="329184"/>
-          </a:xfrm>
-          <a:prstGeom prst="rect">
-            <a:avLst/>
-          </a:prstGeom>
-          <a:noFill/>
-        </p:spPr>
-        <p:txBody>
-          <a:bodyPr wrap="square" tIns="0" bIns="0" lIns="0" rIns="0">
-            <a:spAutoFit/>
-          </a:bodyPr>
-          <a:lstStyle/>
-          <a:p>
-            <a:pPr>
-              <a:spcAft>
-                <a:spcPts val="1000"/>
+          <p:cNvPr id="17" name="TextBox 16"/>
+          <p:cNvSpPr txBox="1"/>
+          <p:nvPr/>
+        </p:nvSpPr>
+        <p:spPr>
+          <a:xfrm>
+            <a:off x="685800" y="4933188"/>
+            <a:ext cx="274320" cy="228600"/>
+          </a:xfrm>
+          <a:prstGeom prst="rect">
+            <a:avLst/>
+          </a:prstGeom>
+          <a:noFill/>
+        </p:spPr>
+        <p:txBody>
+          <a:bodyPr wrap="square" lIns="0" rIns="0" tIns="0" bIns="0">
+            <a:spAutoFit/>
+          </a:bodyPr>
+          <a:lstStyle/>
+          <a:p>
+            <a:pPr>
+              <a:spcAft>
+                <a:spcPts val="700"/>
               </a:spcAft>
               <a:defRPr sz="1200" b="1">
                 <a:solidFill>
-                  <a:srgbClr val="117970"/>
-                </a:solidFill>
-                <a:latin typeface="DejaVu Sans"/>
-              </a:defRPr>
-            </a:pPr>
-            <a:r>
-              <a:t>CELL 2 · A PARAGRAPH RULE</a:t>
-            </a:r>
-          </a:p>
-        </p:txBody>
-      </p:sp>
-      <p:sp>
-        <p:nvSpPr>
-          <p:cNvPr id="14" name="TextBox 13"/>
-          <p:cNvSpPr txBox="1"/>
-          <p:nvPr/>
-        </p:nvSpPr>
-        <p:spPr>
-          <a:xfrm>
-            <a:off x="6647688" y="3666744"/>
-            <a:ext cx="4690872" cy="1335024"/>
-          </a:xfrm>
-          <a:prstGeom prst="rect">
-            <a:avLst/>
-          </a:prstGeom>
-          <a:noFill/>
-        </p:spPr>
-        <p:txBody>
-          <a:bodyPr wrap="square" tIns="0" bIns="0" lIns="0" rIns="0">
-            <a:spAutoFit/>
-          </a:bodyPr>
-          <a:lstStyle/>
-          <a:p>
-            <a:pPr>
-              <a:spcAft>
-                <a:spcPts val="1000"/>
-              </a:spcAft>
-              <a:defRPr sz="1700" b="1">
+                  <a:srgbClr val="FFFFFF"/>
+                </a:solidFill>
+                <a:latin typeface="DejaVu Sans"/>
+              </a:defRPr>
+            </a:pPr>
+            <a:r>
+              <a:t>3</a:t>
+            </a:r>
+          </a:p>
+        </p:txBody>
+      </p:sp>
+      <p:sp>
+        <p:nvSpPr>
+          <p:cNvPr id="18" name="TextBox 17"/>
+          <p:cNvSpPr txBox="1"/>
+          <p:nvPr/>
+        </p:nvSpPr>
+        <p:spPr>
+          <a:xfrm>
+            <a:off x="1225296" y="4855464"/>
+            <a:ext cx="4663440" cy="365760"/>
+          </a:xfrm>
+          <a:prstGeom prst="rect">
+            <a:avLst/>
+          </a:prstGeom>
+          <a:noFill/>
+        </p:spPr>
+        <p:txBody>
+          <a:bodyPr wrap="square" lIns="0" rIns="0" tIns="0" bIns="0">
+            <a:spAutoFit/>
+          </a:bodyPr>
+          <a:lstStyle/>
+          <a:p>
+            <a:pPr>
+              <a:spcAft>
+                <a:spcPts val="700"/>
+              </a:spcAft>
+              <a:defRPr sz="1900" b="1">
                 <a:solidFill>
                   <a:srgbClr val="172F46"/>
                 </a:solidFill>
@@ -5859,59 +6661,68 @@
               </a:defRPr>
             </a:pPr>
             <a:r>
-              <a:t>Records available + M3 selected</a:t>
-            </a:r>
-          </a:p>
-          <a:p>
-            <a:pPr>
-              <a:spcAft>
-                <a:spcPts val="1000"/>
-              </a:spcAft>
-              <a:defRPr sz="1700" b="1">
-                <a:solidFill>
-                  <a:srgbClr val="172F46"/>
-                </a:solidFill>
-                <a:latin typeface="DejaVu Sans"/>
-              </a:defRPr>
-            </a:pPr>
-            <a:r>
-              <a:t>→ include the records paragraph</a:t>
-            </a:r>
-          </a:p>
-          <a:p>
-            <a:pPr>
-              <a:spcAft>
-                <a:spcPts val="1000"/>
-              </a:spcAft>
-              <a:defRPr sz="1700" b="1">
-                <a:solidFill>
-                  <a:srgbClr val="172F46"/>
-                </a:solidFill>
-                <a:latin typeface="DejaVu Sans"/>
-              </a:defRPr>
-            </a:pPr>
-            <a:r>
-              <a:t>→ cite C167</a:t>
-            </a:r>
-          </a:p>
-        </p:txBody>
-      </p:sp>
-      <p:sp>
-        <p:nvSpPr>
-          <p:cNvPr id="15" name="Rectangle 14"/>
+              <a:t>Link the paragraph to its sources</a:t>
+            </a:r>
+          </a:p>
+        </p:txBody>
+      </p:sp>
+      <p:sp>
+        <p:nvSpPr>
+          <p:cNvPr id="19" name="TextBox 18"/>
+          <p:cNvSpPr txBox="1"/>
+          <p:nvPr/>
+        </p:nvSpPr>
+        <p:spPr>
+          <a:xfrm>
+            <a:off x="1225296" y="5321807"/>
+            <a:ext cx="4663440" cy="603504"/>
+          </a:xfrm>
+          <a:prstGeom prst="rect">
+            <a:avLst/>
+          </a:prstGeom>
+          <a:noFill/>
+        </p:spPr>
+        <p:txBody>
+          <a:bodyPr wrap="square" lIns="0" rIns="0" tIns="0" bIns="0">
+            <a:spAutoFit/>
+          </a:bodyPr>
+          <a:lstStyle/>
+          <a:p>
+            <a:pPr>
+              <a:spcAft>
+                <a:spcPts val="700"/>
+              </a:spcAft>
+              <a:defRPr sz="1500" b="0">
+                <a:solidFill>
+                  <a:srgbClr val="304455"/>
+                </a:solidFill>
+                <a:latin typeface="DejaVu Sans"/>
+              </a:defRPr>
+            </a:pPr>
+            <a:r>
+              <a:t>The same source ID connects the two records.</a:t>
+            </a:r>
+          </a:p>
+        </p:txBody>
+      </p:sp>
+      <p:sp>
+        <p:nvSpPr>
+          <p:cNvPr id="20" name="Rounded Rectangle 19"/>
           <p:cNvSpPr/>
           <p:nvPr/>
         </p:nvSpPr>
         <p:spPr>
           <a:xfrm>
-            <a:off x="594360" y="5559552"/>
-            <a:ext cx="11000232" cy="594360"/>
-          </a:xfrm>
-          <a:prstGeom prst="rect">
-            <a:avLst/>
+            <a:off x="6428232" y="2587752"/>
+            <a:ext cx="5166360" cy="3264408"/>
+          </a:xfrm>
+          <a:prstGeom prst="roundRect">
+            <a:avLst>
+              <a:gd name="adj" fmla="val 6000"/>
+            </a:avLst>
           </a:prstGeom>
           <a:solidFill>
-            <a:srgbClr val="172F46"/>
+            <a:srgbClr val="E7F3EF"/>
           </a:solidFill>
           <a:ln>
             <a:noFill/>
@@ -5941,39 +6752,239 @@
       </p:sp>
       <p:sp>
         <p:nvSpPr>
-          <p:cNvPr id="16" name="TextBox 15"/>
-          <p:cNvSpPr txBox="1"/>
-          <p:nvPr/>
-        </p:nvSpPr>
-        <p:spPr>
-          <a:xfrm>
-            <a:off x="850392" y="5742432"/>
-            <a:ext cx="10469880" cy="292608"/>
-          </a:xfrm>
-          <a:prstGeom prst="rect">
-            <a:avLst/>
-          </a:prstGeom>
-          <a:noFill/>
-        </p:spPr>
-        <p:txBody>
-          <a:bodyPr wrap="square" tIns="0" bIns="0" lIns="0" rIns="0">
-            <a:spAutoFit/>
-          </a:bodyPr>
-          <a:lstStyle/>
-          <a:p>
-            <a:pPr>
-              <a:spcAft>
-                <a:spcPts val="1000"/>
-              </a:spcAft>
-              <a:defRPr sz="1600" b="1">
-                <a:solidFill>
-                  <a:srgbClr val="FFFFFF"/>
-                </a:solidFill>
-                <a:latin typeface="DejaVu Sans"/>
-              </a:defRPr>
-            </a:pPr>
-            <a:r>
-              <a:t>The source ID links a paragraph to the legal information used in its review.</a:t>
+          <p:cNvPr id="21" name="TextBox 20"/>
+          <p:cNvSpPr txBox="1"/>
+          <p:nvPr/>
+        </p:nvSpPr>
+        <p:spPr>
+          <a:xfrm>
+            <a:off x="6702552" y="2862072"/>
+            <a:ext cx="4617720" cy="301752"/>
+          </a:xfrm>
+          <a:prstGeom prst="rect">
+            <a:avLst/>
+          </a:prstGeom>
+          <a:noFill/>
+        </p:spPr>
+        <p:txBody>
+          <a:bodyPr wrap="square" lIns="0" rIns="0" tIns="0" bIns="0">
+            <a:spAutoFit/>
+          </a:bodyPr>
+          <a:lstStyle/>
+          <a:p>
+            <a:pPr>
+              <a:spcAft>
+                <a:spcPts val="700"/>
+              </a:spcAft>
+              <a:defRPr sz="1100" b="1">
+                <a:solidFill>
+                  <a:srgbClr val="087B72"/>
+                </a:solidFill>
+                <a:latin typeface="DejaVu Sans"/>
+              </a:defRPr>
+            </a:pPr>
+            <a:r>
+              <a:t>SMALL EXAMPLE</a:t>
+            </a:r>
+          </a:p>
+        </p:txBody>
+      </p:sp>
+      <p:sp>
+        <p:nvSpPr>
+          <p:cNvPr id="22" name="TextBox 21"/>
+          <p:cNvSpPr txBox="1"/>
+          <p:nvPr/>
+        </p:nvSpPr>
+        <p:spPr>
+          <a:xfrm>
+            <a:off x="6702552" y="3465576"/>
+            <a:ext cx="4617720" cy="2148840"/>
+          </a:xfrm>
+          <a:prstGeom prst="rect">
+            <a:avLst/>
+          </a:prstGeom>
+          <a:noFill/>
+        </p:spPr>
+        <p:txBody>
+          <a:bodyPr wrap="square" lIns="0" rIns="0" tIns="0" bIns="0">
+            <a:spAutoFit/>
+          </a:bodyPr>
+          <a:lstStyle/>
+          <a:p>
+            <a:pPr>
+              <a:spcAft>
+                <a:spcPts val="700"/>
+              </a:spcAft>
+              <a:defRPr sz="1700" b="0">
+                <a:solidFill>
+                  <a:srgbClr val="172F46"/>
+                </a:solidFill>
+                <a:latin typeface="DejaVu Sans"/>
+              </a:defRPr>
+            </a:pPr>
+            <a:r>
+              <a:t>Source: C167</a:t>
+            </a:r>
+          </a:p>
+          <a:p>
+            <a:pPr>
+              <a:spcAft>
+                <a:spcPts val="700"/>
+              </a:spcAft>
+              <a:defRPr sz="1700" b="0">
+                <a:solidFill>
+                  <a:srgbClr val="172F46"/>
+                </a:solidFill>
+                <a:latin typeface="DejaVu Sans"/>
+              </a:defRPr>
+            </a:pPr>
+            <a:r>
+              <a:t>Criminal Procedure, section 167</a:t>
+            </a:r>
+          </a:p>
+          <a:p>
+            <a:pPr>
+              <a:spcAft>
+                <a:spcPts val="700"/>
+              </a:spcAft>
+              <a:defRPr sz="1700" b="0">
+                <a:solidFill>
+                  <a:srgbClr val="172F46"/>
+                </a:solidFill>
+                <a:latin typeface="DejaVu Sans"/>
+              </a:defRPr>
+            </a:pPr>
+          </a:p>
+          <a:p>
+            <a:pPr>
+              <a:spcAft>
+                <a:spcPts val="700"/>
+              </a:spcAft>
+              <a:defRPr sz="1700" b="0">
+                <a:solidFill>
+                  <a:srgbClr val="172F46"/>
+                </a:solidFill>
+                <a:latin typeface="DejaVu Sans"/>
+              </a:defRPr>
+            </a:pPr>
+            <a:r>
+              <a:t>Records paragraph (M5):</a:t>
+            </a:r>
+          </a:p>
+          <a:p>
+            <a:pPr>
+              <a:spcAft>
+                <a:spcPts val="700"/>
+              </a:spcAft>
+              <a:defRPr sz="1700" b="0">
+                <a:solidFill>
+                  <a:srgbClr val="172F46"/>
+                </a:solidFill>
+                <a:latin typeface="DejaVu Sans"/>
+              </a:defRPr>
+            </a:pPr>
+            <a:r>
+              <a:t>Needs records AND selected M3.</a:t>
+            </a:r>
+          </a:p>
+          <a:p>
+            <a:pPr>
+              <a:spcAft>
+                <a:spcPts val="700"/>
+              </a:spcAft>
+              <a:defRPr sz="1700" b="0">
+                <a:solidFill>
+                  <a:srgbClr val="172F46"/>
+                </a:solidFill>
+                <a:latin typeface="DejaVu Sans"/>
+              </a:defRPr>
+            </a:pPr>
+            <a:r>
+              <a:t>Must cite C167.</a:t>
+            </a:r>
+          </a:p>
+        </p:txBody>
+      </p:sp>
+      <p:sp>
+        <p:nvSpPr>
+          <p:cNvPr id="23" name="Rounded Rectangle 22"/>
+          <p:cNvSpPr/>
+          <p:nvPr/>
+        </p:nvSpPr>
+        <p:spPr>
+          <a:xfrm>
+            <a:off x="594360" y="6007608"/>
+            <a:ext cx="11000232" cy="320040"/>
+          </a:xfrm>
+          <a:prstGeom prst="roundRect">
+            <a:avLst>
+              <a:gd name="adj" fmla="val 6000"/>
+            </a:avLst>
+          </a:prstGeom>
+          <a:solidFill>
+            <a:srgbClr val="EFF4F6"/>
+          </a:solidFill>
+          <a:ln>
+            <a:noFill/>
+          </a:ln>
+        </p:spPr>
+        <p:style>
+          <a:lnRef idx="1">
+            <a:schemeClr val="accent1"/>
+          </a:lnRef>
+          <a:fillRef idx="3">
+            <a:schemeClr val="accent1"/>
+          </a:fillRef>
+          <a:effectRef idx="0">
+            <a:schemeClr val="accent1"/>
+          </a:effectRef>
+          <a:fontRef idx="minor">
+            <a:schemeClr val="lt1"/>
+          </a:fontRef>
+        </p:style>
+        <p:txBody>
+          <a:bodyPr rtlCol="0" anchor="ctr"/>
+          <a:lstStyle/>
+          <a:p>
+            <a:pPr algn="ctr"/>
+          </a:p>
+        </p:txBody>
+      </p:sp>
+      <p:sp>
+        <p:nvSpPr>
+          <p:cNvPr id="24" name="TextBox 23"/>
+          <p:cNvSpPr txBox="1"/>
+          <p:nvPr/>
+        </p:nvSpPr>
+        <p:spPr>
+          <a:xfrm>
+            <a:off x="758952" y="6053328"/>
+            <a:ext cx="10671048" cy="210312"/>
+          </a:xfrm>
+          <a:prstGeom prst="rect">
+            <a:avLst/>
+          </a:prstGeom>
+          <a:noFill/>
+        </p:spPr>
+        <p:txBody>
+          <a:bodyPr wrap="square" lIns="0" rIns="0" tIns="0" bIns="0">
+            <a:spAutoFit/>
+          </a:bodyPr>
+          <a:lstStyle/>
+          <a:p>
+            <a:pPr>
+              <a:spcAft>
+                <a:spcPts val="700"/>
+              </a:spcAft>
+              <a:defRPr sz="1100" b="1">
+                <a:solidFill>
+                  <a:srgbClr val="172F46"/>
+                </a:solidFill>
+                <a:latin typeface="DejaVu Sans"/>
+              </a:defRPr>
+            </a:pPr>
+            <a:r>
+              <a:t>Output: a source table and a versioned list of paragraphs with their rules.</a:t>
             </a:r>
           </a:p>
         </p:txBody>
@@ -6006,20 +7017,22 @@
       <p:grpSpPr/>
       <p:sp>
         <p:nvSpPr>
-          <p:cNvPr id="2" name="Rectangle 1"/>
+          <p:cNvPr id="2" name="Rounded Rectangle 1"/>
           <p:cNvSpPr/>
           <p:nvPr/>
         </p:nvSpPr>
         <p:spPr>
           <a:xfrm>
-            <a:off x="0" y="0"/>
-            <a:ext cx="12191695" cy="91440"/>
-          </a:xfrm>
-          <a:prstGeom prst="rect">
-            <a:avLst/>
+            <a:off x="512064" y="384048"/>
+            <a:ext cx="91440" cy="329184"/>
+          </a:xfrm>
+          <a:prstGeom prst="roundRect">
+            <a:avLst>
+              <a:gd name="adj" fmla="val 6000"/>
+            </a:avLst>
           </a:prstGeom>
           <a:solidFill>
-            <a:srgbClr val="117970"/>
+            <a:srgbClr val="087B72"/>
           </a:solidFill>
           <a:ln>
             <a:noFill/>
@@ -6055,27 +7068,27 @@
         </p:nvSpPr>
         <p:spPr>
           <a:xfrm>
-            <a:off x="594360" y="365760"/>
-            <a:ext cx="10972800" cy="320040"/>
-          </a:xfrm>
-          <a:prstGeom prst="rect">
-            <a:avLst/>
-          </a:prstGeom>
-          <a:noFill/>
-        </p:spPr>
-        <p:txBody>
-          <a:bodyPr wrap="square" tIns="0" bIns="0" lIns="0" rIns="0">
-            <a:spAutoFit/>
-          </a:bodyPr>
-          <a:lstStyle/>
-          <a:p>
-            <a:pPr>
-              <a:spcAft>
-                <a:spcPts val="1000"/>
+            <a:off x="758952" y="420624"/>
+            <a:ext cx="10058400" cy="237744"/>
+          </a:xfrm>
+          <a:prstGeom prst="rect">
+            <a:avLst/>
+          </a:prstGeom>
+          <a:noFill/>
+        </p:spPr>
+        <p:txBody>
+          <a:bodyPr wrap="square" lIns="0" rIns="0" tIns="0" bIns="0">
+            <a:spAutoFit/>
+          </a:bodyPr>
+          <a:lstStyle/>
+          <a:p>
+            <a:pPr>
+              <a:spcAft>
+                <a:spcPts val="700"/>
               </a:spcAft>
               <a:defRPr sz="1100" b="1">
                 <a:solidFill>
-                  <a:srgbClr val="117970"/>
+                  <a:srgbClr val="087B72"/>
                 </a:solidFill>
                 <a:latin typeface="DejaVu Sans"/>
               </a:defRPr>
@@ -6094,25 +7107,25 @@
         </p:nvSpPr>
         <p:spPr>
           <a:xfrm>
-            <a:off x="594360" y="960120"/>
-            <a:ext cx="10972800" cy="960120"/>
-          </a:xfrm>
-          <a:prstGeom prst="rect">
-            <a:avLst/>
-          </a:prstGeom>
-          <a:noFill/>
-        </p:spPr>
-        <p:txBody>
-          <a:bodyPr wrap="square" tIns="0" bIns="0" lIns="0" rIns="0">
-            <a:spAutoFit/>
-          </a:bodyPr>
-          <a:lstStyle/>
-          <a:p>
-            <a:pPr>
-              <a:spcAft>
-                <a:spcPts val="1000"/>
-              </a:spcAft>
-              <a:defRPr sz="3100" b="1">
+            <a:off x="594360" y="941832"/>
+            <a:ext cx="10972800" cy="914400"/>
+          </a:xfrm>
+          <a:prstGeom prst="rect">
+            <a:avLst/>
+          </a:prstGeom>
+          <a:noFill/>
+        </p:spPr>
+        <p:txBody>
+          <a:bodyPr wrap="square" lIns="0" rIns="0" tIns="0" bIns="0">
+            <a:spAutoFit/>
+          </a:bodyPr>
+          <a:lstStyle/>
+          <a:p>
+            <a:pPr>
+              <a:spcAft>
+                <a:spcPts val="700"/>
+              </a:spcAft>
+              <a:defRPr sz="3000" b="1">
                 <a:solidFill>
                   <a:srgbClr val="172F46"/>
                 </a:solidFill>
@@ -6120,7 +7133,7 @@
               </a:defRPr>
             </a:pPr>
             <a:r>
-              <a:t>Apply the rules and explain the selection</a:t>
+              <a:t>Use the facts to build and explain the draft</a:t>
             </a:r>
           </a:p>
         </p:txBody>
@@ -6133,53 +7146,133 @@
         </p:nvSpPr>
         <p:spPr>
           <a:xfrm>
-            <a:off x="594360" y="1956816"/>
-            <a:ext cx="10972800" cy="530352"/>
-          </a:xfrm>
-          <a:prstGeom prst="rect">
-            <a:avLst/>
-          </a:prstGeom>
-          <a:noFill/>
-        </p:spPr>
-        <p:txBody>
-          <a:bodyPr wrap="square" tIns="0" bIns="0" lIns="0" rIns="0">
-            <a:spAutoFit/>
-          </a:bodyPr>
-          <a:lstStyle/>
-          <a:p>
-            <a:pPr>
-              <a:spcAft>
-                <a:spcPts val="1000"/>
+            <a:off x="594360" y="1856231"/>
+            <a:ext cx="10972800" cy="548640"/>
+          </a:xfrm>
+          <a:prstGeom prst="rect">
+            <a:avLst/>
+          </a:prstGeom>
+          <a:noFill/>
+        </p:spPr>
+        <p:txBody>
+          <a:bodyPr wrap="square" lIns="0" rIns="0" tIns="0" bIns="0">
+            <a:spAutoFit/>
+          </a:bodyPr>
+          <a:lstStyle/>
+          <a:p>
+            <a:pPr>
+              <a:spcAft>
+                <a:spcPts val="700"/>
               </a:spcAft>
               <a:defRPr sz="1600" b="0">
                 <a:solidFill>
-                  <a:srgbClr val="607482"/>
-                </a:solidFill>
-                <a:latin typeface="DejaVu Sans"/>
-              </a:defRPr>
-            </a:pPr>
-            <a:r>
-              <a:t>Same facts and rule version → the same prepared draft.</a:t>
-            </a:r>
-          </a:p>
-        </p:txBody>
-      </p:sp>
-      <p:sp>
-        <p:nvSpPr>
-          <p:cNvPr id="6" name="Rectangle 5"/>
+                  <a:srgbClr val="617786"/>
+                </a:solidFill>
+                <a:latin typeface="DejaVu Sans"/>
+              </a:defRPr>
+            </a:pPr>
+            <a:r>
+              <a:t>The same facts and rule version produce the same prepared output.</a:t>
+            </a:r>
+          </a:p>
+        </p:txBody>
+      </p:sp>
+      <p:sp>
+        <p:nvSpPr>
+          <p:cNvPr id="6" name="TextBox 5"/>
+          <p:cNvSpPr txBox="1"/>
+          <p:nvPr/>
+        </p:nvSpPr>
+        <p:spPr>
+          <a:xfrm>
+            <a:off x="594360" y="6510528"/>
+            <a:ext cx="10058400" cy="219456"/>
+          </a:xfrm>
+          <a:prstGeom prst="rect">
+            <a:avLst/>
+          </a:prstGeom>
+          <a:noFill/>
+        </p:spPr>
+        <p:txBody>
+          <a:bodyPr wrap="square" lIns="0" rIns="0" tIns="0" bIns="0">
+            <a:spAutoFit/>
+          </a:bodyPr>
+          <a:lstStyle/>
+          <a:p>
+            <a:pPr>
+              <a:spcAft>
+                <a:spcPts val="700"/>
+              </a:spcAft>
+              <a:defRPr sz="800" b="0">
+                <a:solidFill>
+                  <a:srgbClr val="617786"/>
+                </a:solidFill>
+                <a:latin typeface="DejaVu Sans"/>
+              </a:defRPr>
+            </a:pPr>
+            <a:r>
+              <a:t>Notebook cell 3: actual selected sequence for fictional SAMPLE_CASE; no generative model assembles this draft.</a:t>
+            </a:r>
+          </a:p>
+        </p:txBody>
+      </p:sp>
+      <p:sp>
+        <p:nvSpPr>
+          <p:cNvPr id="7" name="TextBox 6"/>
+          <p:cNvSpPr txBox="1"/>
+          <p:nvPr/>
+        </p:nvSpPr>
+        <p:spPr>
+          <a:xfrm>
+            <a:off x="10817352" y="6446520"/>
+            <a:ext cx="731520" cy="274320"/>
+          </a:xfrm>
+          <a:prstGeom prst="rect">
+            <a:avLst/>
+          </a:prstGeom>
+          <a:noFill/>
+        </p:spPr>
+        <p:txBody>
+          <a:bodyPr wrap="square" lIns="0" rIns="0" tIns="0" bIns="0">
+            <a:spAutoFit/>
+          </a:bodyPr>
+          <a:lstStyle/>
+          <a:p>
+            <a:pPr>
+              <a:spcAft>
+                <a:spcPts val="700"/>
+              </a:spcAft>
+              <a:defRPr sz="1000" b="0">
+                <a:solidFill>
+                  <a:srgbClr val="617786"/>
+                </a:solidFill>
+                <a:latin typeface="DejaVu Sans"/>
+              </a:defRPr>
+            </a:pPr>
+            <a:r>
+              <a:t>04 / 07</a:t>
+            </a:r>
+          </a:p>
+        </p:txBody>
+      </p:sp>
+      <p:sp>
+        <p:nvSpPr>
+          <p:cNvPr id="8" name="Rounded Rectangle 7"/>
           <p:cNvSpPr/>
           <p:nvPr/>
         </p:nvSpPr>
         <p:spPr>
           <a:xfrm>
-            <a:off x="594360" y="6409944"/>
-            <a:ext cx="11000232" cy="10972"/>
-          </a:xfrm>
-          <a:prstGeom prst="rect">
-            <a:avLst/>
+            <a:off x="594360" y="2660904"/>
+            <a:ext cx="393192" cy="393192"/>
+          </a:xfrm>
+          <a:prstGeom prst="roundRect">
+            <a:avLst>
+              <a:gd name="adj" fmla="val 6000"/>
+            </a:avLst>
           </a:prstGeom>
           <a:solidFill>
-            <a:srgbClr val="DCE5EA"/>
+            <a:srgbClr val="087B72"/>
           </a:solidFill>
           <a:ln>
             <a:noFill/>
@@ -6209,100 +7302,139 @@
       </p:sp>
       <p:sp>
         <p:nvSpPr>
-          <p:cNvPr id="7" name="TextBox 6"/>
-          <p:cNvSpPr txBox="1"/>
-          <p:nvPr/>
-        </p:nvSpPr>
-        <p:spPr>
-          <a:xfrm>
-            <a:off x="594360" y="6537960"/>
-            <a:ext cx="9875520" cy="210312"/>
-          </a:xfrm>
-          <a:prstGeom prst="rect">
-            <a:avLst/>
-          </a:prstGeom>
-          <a:noFill/>
-        </p:spPr>
-        <p:txBody>
-          <a:bodyPr wrap="square" tIns="0" bIns="0" lIns="0" rIns="0">
-            <a:spAutoFit/>
-          </a:bodyPr>
-          <a:lstStyle/>
-          <a:p>
-            <a:pPr>
-              <a:spcAft>
-                <a:spcPts val="1000"/>
-              </a:spcAft>
-              <a:defRPr sz="850" b="0">
-                <a:solidFill>
-                  <a:srgbClr val="607482"/>
-                </a:solidFill>
-                <a:latin typeface="DejaVu Sans"/>
-              </a:defRPr>
-            </a:pPr>
-            <a:r>
-              <a:t>Cell 3: actual selected sequence from fictional SAMPLE_CASE. Prepared templates, not generated legal arguments.</a:t>
-            </a:r>
-          </a:p>
-        </p:txBody>
-      </p:sp>
-      <p:sp>
-        <p:nvSpPr>
-          <p:cNvPr id="8" name="TextBox 7"/>
-          <p:cNvSpPr txBox="1"/>
-          <p:nvPr/>
-        </p:nvSpPr>
-        <p:spPr>
-          <a:xfrm>
-            <a:off x="10881360" y="6501384"/>
-            <a:ext cx="731520" cy="274320"/>
-          </a:xfrm>
-          <a:prstGeom prst="rect">
-            <a:avLst/>
-          </a:prstGeom>
-          <a:noFill/>
-        </p:spPr>
-        <p:txBody>
-          <a:bodyPr wrap="square" tIns="0" bIns="0" lIns="0" rIns="0">
-            <a:spAutoFit/>
-          </a:bodyPr>
-          <a:lstStyle/>
-          <a:p>
-            <a:pPr>
-              <a:spcAft>
-                <a:spcPts val="1000"/>
-              </a:spcAft>
-              <a:defRPr sz="1000" b="0">
-                <a:solidFill>
-                  <a:srgbClr val="607482"/>
-                </a:solidFill>
-                <a:latin typeface="DejaVu Sans"/>
-              </a:defRPr>
-            </a:pPr>
-            <a:r>
-              <a:t>04 / 05</a:t>
-            </a:r>
-          </a:p>
-        </p:txBody>
-      </p:sp>
-      <p:sp>
-        <p:nvSpPr>
-          <p:cNvPr id="9" name="Rounded Rectangle 8"/>
+          <p:cNvPr id="9" name="TextBox 8"/>
+          <p:cNvSpPr txBox="1"/>
+          <p:nvPr/>
+        </p:nvSpPr>
+        <p:spPr>
+          <a:xfrm>
+            <a:off x="685800" y="2738628"/>
+            <a:ext cx="274320" cy="228600"/>
+          </a:xfrm>
+          <a:prstGeom prst="rect">
+            <a:avLst/>
+          </a:prstGeom>
+          <a:noFill/>
+        </p:spPr>
+        <p:txBody>
+          <a:bodyPr wrap="square" lIns="0" rIns="0" tIns="0" bIns="0">
+            <a:spAutoFit/>
+          </a:bodyPr>
+          <a:lstStyle/>
+          <a:p>
+            <a:pPr>
+              <a:spcAft>
+                <a:spcPts val="700"/>
+              </a:spcAft>
+              <a:defRPr sz="1200" b="1">
+                <a:solidFill>
+                  <a:srgbClr val="FFFFFF"/>
+                </a:solidFill>
+                <a:latin typeface="DejaVu Sans"/>
+              </a:defRPr>
+            </a:pPr>
+            <a:r>
+              <a:t>1</a:t>
+            </a:r>
+          </a:p>
+        </p:txBody>
+      </p:sp>
+      <p:sp>
+        <p:nvSpPr>
+          <p:cNvPr id="10" name="TextBox 9"/>
+          <p:cNvSpPr txBox="1"/>
+          <p:nvPr/>
+        </p:nvSpPr>
+        <p:spPr>
+          <a:xfrm>
+            <a:off x="1225296" y="2660904"/>
+            <a:ext cx="4663440" cy="365760"/>
+          </a:xfrm>
+          <a:prstGeom prst="rect">
+            <a:avLst/>
+          </a:prstGeom>
+          <a:noFill/>
+        </p:spPr>
+        <p:txBody>
+          <a:bodyPr wrap="square" lIns="0" rIns="0" tIns="0" bIns="0">
+            <a:spAutoFit/>
+          </a:bodyPr>
+          <a:lstStyle/>
+          <a:p>
+            <a:pPr>
+              <a:spcAft>
+                <a:spcPts val="700"/>
+              </a:spcAft>
+              <a:defRPr sz="1900" b="1">
+                <a:solidFill>
+                  <a:srgbClr val="172F46"/>
+                </a:solidFill>
+                <a:latin typeface="DejaVu Sans"/>
+              </a:defRPr>
+            </a:pPr>
+            <a:r>
+              <a:t>Check the facts and conditions</a:t>
+            </a:r>
+          </a:p>
+        </p:txBody>
+      </p:sp>
+      <p:sp>
+        <p:nvSpPr>
+          <p:cNvPr id="11" name="TextBox 10"/>
+          <p:cNvSpPr txBox="1"/>
+          <p:nvPr/>
+        </p:nvSpPr>
+        <p:spPr>
+          <a:xfrm>
+            <a:off x="1225296" y="3127248"/>
+            <a:ext cx="4663440" cy="603504"/>
+          </a:xfrm>
+          <a:prstGeom prst="rect">
+            <a:avLst/>
+          </a:prstGeom>
+          <a:noFill/>
+        </p:spPr>
+        <p:txBody>
+          <a:bodyPr wrap="square" lIns="0" rIns="0" tIns="0" bIns="0">
+            <a:spAutoFit/>
+          </a:bodyPr>
+          <a:lstStyle/>
+          <a:p>
+            <a:pPr>
+              <a:spcAft>
+                <a:spcPts val="700"/>
+              </a:spcAft>
+              <a:defRPr sz="1500" b="0">
+                <a:solidFill>
+                  <a:srgbClr val="304455"/>
+                </a:solidFill>
+                <a:latin typeface="DejaVu Sans"/>
+              </a:defRPr>
+            </a:pPr>
+            <a:r>
+              <a:t>Reject invalid values; check facts and required earlier blocks.</a:t>
+            </a:r>
+          </a:p>
+        </p:txBody>
+      </p:sp>
+      <p:sp>
+        <p:nvSpPr>
+          <p:cNvPr id="12" name="Rounded Rectangle 11"/>
           <p:cNvSpPr/>
           <p:nvPr/>
         </p:nvSpPr>
         <p:spPr>
           <a:xfrm>
-            <a:off x="594360" y="2743200"/>
-            <a:ext cx="3529584" cy="2487168"/>
+            <a:off x="594360" y="3758184"/>
+            <a:ext cx="393192" cy="393192"/>
           </a:xfrm>
           <a:prstGeom prst="roundRect">
             <a:avLst>
-              <a:gd name="adj" fmla="val 8000"/>
+              <a:gd name="adj" fmla="val 6000"/>
             </a:avLst>
           </a:prstGeom>
           <a:solidFill>
-            <a:srgbClr val="F1F5F7"/>
+            <a:srgbClr val="087B72"/>
           </a:solidFill>
           <a:ln>
             <a:noFill/>
@@ -6332,70 +7464,70 @@
       </p:sp>
       <p:sp>
         <p:nvSpPr>
-          <p:cNvPr id="10" name="TextBox 9"/>
-          <p:cNvSpPr txBox="1"/>
-          <p:nvPr/>
-        </p:nvSpPr>
-        <p:spPr>
-          <a:xfrm>
-            <a:off x="850392" y="2971800"/>
-            <a:ext cx="3017520" cy="329184"/>
-          </a:xfrm>
-          <a:prstGeom prst="rect">
-            <a:avLst/>
-          </a:prstGeom>
-          <a:noFill/>
-        </p:spPr>
-        <p:txBody>
-          <a:bodyPr wrap="square" tIns="0" bIns="0" lIns="0" rIns="0">
-            <a:spAutoFit/>
-          </a:bodyPr>
-          <a:lstStyle/>
-          <a:p>
-            <a:pPr>
-              <a:spcAft>
-                <a:spcPts val="1000"/>
+          <p:cNvPr id="13" name="TextBox 12"/>
+          <p:cNvSpPr txBox="1"/>
+          <p:nvPr/>
+        </p:nvSpPr>
+        <p:spPr>
+          <a:xfrm>
+            <a:off x="685800" y="3835908"/>
+            <a:ext cx="274320" cy="228600"/>
+          </a:xfrm>
+          <a:prstGeom prst="rect">
+            <a:avLst/>
+          </a:prstGeom>
+          <a:noFill/>
+        </p:spPr>
+        <p:txBody>
+          <a:bodyPr wrap="square" lIns="0" rIns="0" tIns="0" bIns="0">
+            <a:spAutoFit/>
+          </a:bodyPr>
+          <a:lstStyle/>
+          <a:p>
+            <a:pPr>
+              <a:spcAft>
+                <a:spcPts val="700"/>
               </a:spcAft>
               <a:defRPr sz="1200" b="1">
                 <a:solidFill>
-                  <a:srgbClr val="117970"/>
-                </a:solidFill>
-                <a:latin typeface="DejaVu Sans"/>
-              </a:defRPr>
-            </a:pPr>
-            <a:r>
-              <a:t>INPUT FACTS</a:t>
-            </a:r>
-          </a:p>
-        </p:txBody>
-      </p:sp>
-      <p:sp>
-        <p:nvSpPr>
-          <p:cNvPr id="11" name="TextBox 10"/>
-          <p:cNvSpPr txBox="1"/>
-          <p:nvPr/>
-        </p:nvSpPr>
-        <p:spPr>
-          <a:xfrm>
-            <a:off x="850392" y="3575304"/>
-            <a:ext cx="3017520" cy="1554480"/>
-          </a:xfrm>
-          <a:prstGeom prst="rect">
-            <a:avLst/>
-          </a:prstGeom>
-          <a:noFill/>
-        </p:spPr>
-        <p:txBody>
-          <a:bodyPr wrap="square" tIns="0" bIns="0" lIns="0" rIns="0">
-            <a:spAutoFit/>
-          </a:bodyPr>
-          <a:lstStyle/>
-          <a:p>
-            <a:pPr>
-              <a:spcAft>
-                <a:spcPts val="1000"/>
-              </a:spcAft>
-              <a:defRPr sz="2000" b="1">
+                  <a:srgbClr val="FFFFFF"/>
+                </a:solidFill>
+                <a:latin typeface="DejaVu Sans"/>
+              </a:defRPr>
+            </a:pPr>
+            <a:r>
+              <a:t>2</a:t>
+            </a:r>
+          </a:p>
+        </p:txBody>
+      </p:sp>
+      <p:sp>
+        <p:nvSpPr>
+          <p:cNvPr id="14" name="TextBox 13"/>
+          <p:cNvSpPr txBox="1"/>
+          <p:nvPr/>
+        </p:nvSpPr>
+        <p:spPr>
+          <a:xfrm>
+            <a:off x="1225296" y="3758184"/>
+            <a:ext cx="4663440" cy="365760"/>
+          </a:xfrm>
+          <a:prstGeom prst="rect">
+            <a:avLst/>
+          </a:prstGeom>
+          <a:noFill/>
+        </p:spPr>
+        <p:txBody>
+          <a:bodyPr wrap="square" lIns="0" rIns="0" tIns="0" bIns="0">
+            <a:spAutoFit/>
+          </a:bodyPr>
+          <a:lstStyle/>
+          <a:p>
+            <a:pPr>
+              <a:spcAft>
+                <a:spcPts val="700"/>
+              </a:spcAft>
+              <a:defRPr sz="1900" b="1">
                 <a:solidFill>
                   <a:srgbClr val="172F46"/>
                 </a:solidFill>
@@ -6403,100 +7535,68 @@
               </a:defRPr>
             </a:pPr>
             <a:r>
-              <a:t>Procedure: yes</a:t>
-            </a:r>
-          </a:p>
-          <a:p>
-            <a:pPr>
-              <a:spcAft>
-                <a:spcPts val="1000"/>
-              </a:spcAft>
-              <a:defRPr sz="2000" b="1">
-                <a:solidFill>
-                  <a:srgbClr val="172F46"/>
-                </a:solidFill>
-                <a:latin typeface="DejaVu Sans"/>
-              </a:defRPr>
-            </a:pPr>
-            <a:r>
-              <a:t>Records: yes</a:t>
-            </a:r>
-          </a:p>
-          <a:p>
-            <a:pPr>
-              <a:spcAft>
-                <a:spcPts val="1000"/>
-              </a:spcAft>
-              <a:defRPr sz="2000" b="1">
-                <a:solidFill>
-                  <a:srgbClr val="172F46"/>
-                </a:solidFill>
-                <a:latin typeface="DejaVu Sans"/>
-              </a:defRPr>
-            </a:pPr>
-            <a:r>
-              <a:t>Relief: yes</a:t>
-            </a:r>
-          </a:p>
-        </p:txBody>
-      </p:sp>
-      <p:sp>
-        <p:nvSpPr>
-          <p:cNvPr id="12" name="TextBox 11"/>
-          <p:cNvSpPr txBox="1"/>
-          <p:nvPr/>
-        </p:nvSpPr>
-        <p:spPr>
-          <a:xfrm>
-            <a:off x="4215384" y="3767328"/>
-            <a:ext cx="320040" cy="411480"/>
-          </a:xfrm>
-          <a:prstGeom prst="rect">
-            <a:avLst/>
-          </a:prstGeom>
-          <a:noFill/>
-        </p:spPr>
-        <p:txBody>
-          <a:bodyPr wrap="square" tIns="0" bIns="0" lIns="0" rIns="0">
-            <a:spAutoFit/>
-          </a:bodyPr>
-          <a:lstStyle/>
-          <a:p>
-            <a:pPr>
-              <a:spcAft>
-                <a:spcPts val="1000"/>
-              </a:spcAft>
-              <a:defRPr sz="2400" b="1">
-                <a:solidFill>
-                  <a:srgbClr val="117970"/>
-                </a:solidFill>
-                <a:latin typeface="DejaVu Sans"/>
-              </a:defRPr>
-            </a:pPr>
-            <a:r>
-              <a:t>→</a:t>
-            </a:r>
-          </a:p>
-        </p:txBody>
-      </p:sp>
-      <p:sp>
-        <p:nvSpPr>
-          <p:cNvPr id="13" name="Rounded Rectangle 12"/>
+              <a:t>Reject conflicting choices</a:t>
+            </a:r>
+          </a:p>
+        </p:txBody>
+      </p:sp>
+      <p:sp>
+        <p:nvSpPr>
+          <p:cNvPr id="15" name="TextBox 14"/>
+          <p:cNvSpPr txBox="1"/>
+          <p:nvPr/>
+        </p:nvSpPr>
+        <p:spPr>
+          <a:xfrm>
+            <a:off x="1225296" y="4224528"/>
+            <a:ext cx="4663440" cy="603504"/>
+          </a:xfrm>
+          <a:prstGeom prst="rect">
+            <a:avLst/>
+          </a:prstGeom>
+          <a:noFill/>
+        </p:spPr>
+        <p:txBody>
+          <a:bodyPr wrap="square" lIns="0" rIns="0" tIns="0" bIns="0">
+            <a:spAutoFit/>
+          </a:bodyPr>
+          <a:lstStyle/>
+          <a:p>
+            <a:pPr>
+              <a:spcAft>
+                <a:spcPts val="700"/>
+              </a:spcAft>
+              <a:defRPr sz="1500" b="0">
+                <a:solidFill>
+                  <a:srgbClr val="304455"/>
+                </a:solidFill>
+                <a:latin typeface="DejaVu Sans"/>
+              </a:defRPr>
+            </a:pPr>
+            <a:r>
+              <a:t>Stop if two configured exclusive routes were selected.</a:t>
+            </a:r>
+          </a:p>
+        </p:txBody>
+      </p:sp>
+      <p:sp>
+        <p:nvSpPr>
+          <p:cNvPr id="16" name="Rounded Rectangle 15"/>
           <p:cNvSpPr/>
           <p:nvPr/>
         </p:nvSpPr>
         <p:spPr>
           <a:xfrm>
-            <a:off x="4663440" y="2743200"/>
-            <a:ext cx="6931152" cy="2487168"/>
+            <a:off x="594360" y="4855464"/>
+            <a:ext cx="393192" cy="393192"/>
           </a:xfrm>
           <a:prstGeom prst="roundRect">
             <a:avLst>
-              <a:gd name="adj" fmla="val 8000"/>
+              <a:gd name="adj" fmla="val 6000"/>
             </a:avLst>
           </a:prstGeom>
           <a:solidFill>
-            <a:srgbClr val="E8F3F0"/>
+            <a:srgbClr val="087B72"/>
           </a:solidFill>
           <a:ln>
             <a:noFill/>
@@ -6526,68 +7626,68 @@
       </p:sp>
       <p:sp>
         <p:nvSpPr>
-          <p:cNvPr id="14" name="TextBox 13"/>
-          <p:cNvSpPr txBox="1"/>
-          <p:nvPr/>
-        </p:nvSpPr>
-        <p:spPr>
-          <a:xfrm>
-            <a:off x="4919472" y="2971800"/>
-            <a:ext cx="6419088" cy="329184"/>
-          </a:xfrm>
-          <a:prstGeom prst="rect">
-            <a:avLst/>
-          </a:prstGeom>
-          <a:noFill/>
-        </p:spPr>
-        <p:txBody>
-          <a:bodyPr wrap="square" tIns="0" bIns="0" lIns="0" rIns="0">
-            <a:spAutoFit/>
-          </a:bodyPr>
-          <a:lstStyle/>
-          <a:p>
-            <a:pPr>
-              <a:spcAft>
-                <a:spcPts val="1000"/>
+          <p:cNvPr id="17" name="TextBox 16"/>
+          <p:cNvSpPr txBox="1"/>
+          <p:nvPr/>
+        </p:nvSpPr>
+        <p:spPr>
+          <a:xfrm>
+            <a:off x="685800" y="4933188"/>
+            <a:ext cx="274320" cy="228600"/>
+          </a:xfrm>
+          <a:prstGeom prst="rect">
+            <a:avLst/>
+          </a:prstGeom>
+          <a:noFill/>
+        </p:spPr>
+        <p:txBody>
+          <a:bodyPr wrap="square" lIns="0" rIns="0" tIns="0" bIns="0">
+            <a:spAutoFit/>
+          </a:bodyPr>
+          <a:lstStyle/>
+          <a:p>
+            <a:pPr>
+              <a:spcAft>
+                <a:spcPts val="700"/>
               </a:spcAft>
               <a:defRPr sz="1200" b="1">
                 <a:solidFill>
-                  <a:srgbClr val="117970"/>
-                </a:solidFill>
-                <a:latin typeface="DejaVu Sans"/>
-              </a:defRPr>
-            </a:pPr>
-            <a:r>
-              <a:t>BASIC OUTPUT · SELECTED PARAGRAPHS</a:t>
-            </a:r>
-          </a:p>
-        </p:txBody>
-      </p:sp>
-      <p:sp>
-        <p:nvSpPr>
-          <p:cNvPr id="15" name="TextBox 14"/>
-          <p:cNvSpPr txBox="1"/>
-          <p:nvPr/>
-        </p:nvSpPr>
-        <p:spPr>
-          <a:xfrm>
-            <a:off x="4919472" y="3575304"/>
-            <a:ext cx="6419088" cy="795528"/>
-          </a:xfrm>
-          <a:prstGeom prst="rect">
-            <a:avLst/>
-          </a:prstGeom>
-          <a:noFill/>
-        </p:spPr>
-        <p:txBody>
-          <a:bodyPr wrap="square" tIns="0" bIns="0" lIns="0" rIns="0">
-            <a:spAutoFit/>
-          </a:bodyPr>
-          <a:lstStyle/>
-          <a:p>
-            <a:pPr>
-              <a:spcAft>
-                <a:spcPts val="1000"/>
+                  <a:srgbClr val="FFFFFF"/>
+                </a:solidFill>
+                <a:latin typeface="DejaVu Sans"/>
+              </a:defRPr>
+            </a:pPr>
+            <a:r>
+              <a:t>3</a:t>
+            </a:r>
+          </a:p>
+        </p:txBody>
+      </p:sp>
+      <p:sp>
+        <p:nvSpPr>
+          <p:cNvPr id="18" name="TextBox 17"/>
+          <p:cNvSpPr txBox="1"/>
+          <p:nvPr/>
+        </p:nvSpPr>
+        <p:spPr>
+          <a:xfrm>
+            <a:off x="1225296" y="4855464"/>
+            <a:ext cx="4663440" cy="365760"/>
+          </a:xfrm>
+          <a:prstGeom prst="rect">
+            <a:avLst/>
+          </a:prstGeom>
+          <a:noFill/>
+        </p:spPr>
+        <p:txBody>
+          <a:bodyPr wrap="square" lIns="0" rIns="0" tIns="0" bIns="0">
+            <a:spAutoFit/>
+          </a:bodyPr>
+          <a:lstStyle/>
+          <a:p>
+            <a:pPr>
+              <a:spcAft>
+                <a:spcPts val="700"/>
               </a:spcAft>
               <a:defRPr sz="1900" b="1">
                 <a:solidFill>
@@ -6597,82 +7697,68 @@
               </a:defRPr>
             </a:pPr>
             <a:r>
-              <a:t>Jurisdiction → Facts → Procedure</a:t>
-            </a:r>
-          </a:p>
-          <a:p>
-            <a:pPr>
-              <a:spcAft>
-                <a:spcPts val="1000"/>
-              </a:spcAft>
-              <a:defRPr sz="1900" b="1">
-                <a:solidFill>
-                  <a:srgbClr val="172F46"/>
-                </a:solidFill>
-                <a:latin typeface="DejaVu Sans"/>
-              </a:defRPr>
-            </a:pPr>
-            <a:r>
-              <a:t>→ Records → Relief</a:t>
-            </a:r>
-          </a:p>
-        </p:txBody>
-      </p:sp>
-      <p:sp>
-        <p:nvSpPr>
-          <p:cNvPr id="16" name="TextBox 15"/>
-          <p:cNvSpPr txBox="1"/>
-          <p:nvPr/>
-        </p:nvSpPr>
-        <p:spPr>
-          <a:xfrm>
-            <a:off x="4919472" y="4581144"/>
-            <a:ext cx="6419088" cy="512064"/>
-          </a:xfrm>
-          <a:prstGeom prst="rect">
-            <a:avLst/>
-          </a:prstGeom>
-          <a:noFill/>
-        </p:spPr>
-        <p:txBody>
-          <a:bodyPr wrap="square" tIns="0" bIns="0" lIns="0" rIns="0">
-            <a:spAutoFit/>
-          </a:bodyPr>
-          <a:lstStyle/>
-          <a:p>
-            <a:pPr>
-              <a:spcAft>
-                <a:spcPts val="1000"/>
-              </a:spcAft>
-              <a:defRPr sz="1300" b="0">
-                <a:solidFill>
-                  <a:srgbClr val="263B4B"/>
-                </a:solidFill>
-                <a:latin typeface="DejaVu Sans"/>
-              </a:defRPr>
-            </a:pPr>
-            <a:r>
-              <a:t>Decision record: M5 INCLUDED — records are available and M3 is selected.</a:t>
-            </a:r>
-          </a:p>
-        </p:txBody>
-      </p:sp>
-      <p:sp>
-        <p:nvSpPr>
-          <p:cNvPr id="17" name="Rectangle 16"/>
+              <a:t>Assemble prepared paragraphs</a:t>
+            </a:r>
+          </a:p>
+        </p:txBody>
+      </p:sp>
+      <p:sp>
+        <p:nvSpPr>
+          <p:cNvPr id="19" name="TextBox 18"/>
+          <p:cNvSpPr txBox="1"/>
+          <p:nvPr/>
+        </p:nvSpPr>
+        <p:spPr>
+          <a:xfrm>
+            <a:off x="1225296" y="5321807"/>
+            <a:ext cx="4663440" cy="603504"/>
+          </a:xfrm>
+          <a:prstGeom prst="rect">
+            <a:avLst/>
+          </a:prstGeom>
+          <a:noFill/>
+        </p:spPr>
+        <p:txBody>
+          <a:bodyPr wrap="square" lIns="0" rIns="0" tIns="0" bIns="0">
+            <a:spAutoFit/>
+          </a:bodyPr>
+          <a:lstStyle/>
+          <a:p>
+            <a:pPr>
+              <a:spcAft>
+                <a:spcPts val="700"/>
+              </a:spcAft>
+              <a:defRPr sz="1500" b="0">
+                <a:solidFill>
+                  <a:srgbClr val="304455"/>
+                </a:solidFill>
+                <a:latin typeface="DejaVu Sans"/>
+              </a:defRPr>
+            </a:pPr>
+            <a:r>
+              <a:t>Fill in case details and record why every block was used or skipped.</a:t>
+            </a:r>
+          </a:p>
+        </p:txBody>
+      </p:sp>
+      <p:sp>
+        <p:nvSpPr>
+          <p:cNvPr id="20" name="Rounded Rectangle 19"/>
           <p:cNvSpPr/>
           <p:nvPr/>
         </p:nvSpPr>
         <p:spPr>
           <a:xfrm>
-            <a:off x="594360" y="5559552"/>
-            <a:ext cx="11000232" cy="594360"/>
-          </a:xfrm>
-          <a:prstGeom prst="rect">
-            <a:avLst/>
+            <a:off x="6428232" y="2587752"/>
+            <a:ext cx="5166360" cy="3264408"/>
+          </a:xfrm>
+          <a:prstGeom prst="roundRect">
+            <a:avLst>
+              <a:gd name="adj" fmla="val 6000"/>
+            </a:avLst>
           </a:prstGeom>
           <a:solidFill>
-            <a:srgbClr val="172F46"/>
+            <a:srgbClr val="E7F3EF"/>
           </a:solidFill>
           <a:ln>
             <a:noFill/>
@@ -6702,39 +7788,239 @@
       </p:sp>
       <p:sp>
         <p:nvSpPr>
-          <p:cNvPr id="18" name="TextBox 17"/>
-          <p:cNvSpPr txBox="1"/>
-          <p:nvPr/>
-        </p:nvSpPr>
-        <p:spPr>
-          <a:xfrm>
-            <a:off x="850392" y="5742432"/>
-            <a:ext cx="10469880" cy="292608"/>
-          </a:xfrm>
-          <a:prstGeom prst="rect">
-            <a:avLst/>
-          </a:prstGeom>
-          <a:noFill/>
-        </p:spPr>
-        <p:txBody>
-          <a:bodyPr wrap="square" tIns="0" bIns="0" lIns="0" rIns="0">
-            <a:spAutoFit/>
-          </a:bodyPr>
-          <a:lstStyle/>
-          <a:p>
-            <a:pPr>
-              <a:spcAft>
-                <a:spcPts val="1000"/>
-              </a:spcAft>
-              <a:defRPr sz="1600" b="1">
-                <a:solidFill>
-                  <a:srgbClr val="FFFFFF"/>
-                </a:solidFill>
-                <a:latin typeface="DejaVu Sans"/>
-              </a:defRPr>
-            </a:pPr>
-            <a:r>
-              <a:t>Other blocks are skipped when their conditions fail; conflicting choices stop assembly.</a:t>
+          <p:cNvPr id="21" name="TextBox 20"/>
+          <p:cNvSpPr txBox="1"/>
+          <p:nvPr/>
+        </p:nvSpPr>
+        <p:spPr>
+          <a:xfrm>
+            <a:off x="6702552" y="2862072"/>
+            <a:ext cx="4617720" cy="301752"/>
+          </a:xfrm>
+          <a:prstGeom prst="rect">
+            <a:avLst/>
+          </a:prstGeom>
+          <a:noFill/>
+        </p:spPr>
+        <p:txBody>
+          <a:bodyPr wrap="square" lIns="0" rIns="0" tIns="0" bIns="0">
+            <a:spAutoFit/>
+          </a:bodyPr>
+          <a:lstStyle/>
+          <a:p>
+            <a:pPr>
+              <a:spcAft>
+                <a:spcPts val="700"/>
+              </a:spcAft>
+              <a:defRPr sz="1100" b="1">
+                <a:solidFill>
+                  <a:srgbClr val="087B72"/>
+                </a:solidFill>
+                <a:latin typeface="DejaVu Sans"/>
+              </a:defRPr>
+            </a:pPr>
+            <a:r>
+              <a:t>SAMPLE OUTPUT</a:t>
+            </a:r>
+          </a:p>
+        </p:txBody>
+      </p:sp>
+      <p:sp>
+        <p:nvSpPr>
+          <p:cNvPr id="22" name="TextBox 21"/>
+          <p:cNvSpPr txBox="1"/>
+          <p:nvPr/>
+        </p:nvSpPr>
+        <p:spPr>
+          <a:xfrm>
+            <a:off x="6702552" y="3465576"/>
+            <a:ext cx="4617720" cy="2148840"/>
+          </a:xfrm>
+          <a:prstGeom prst="rect">
+            <a:avLst/>
+          </a:prstGeom>
+          <a:noFill/>
+        </p:spPr>
+        <p:txBody>
+          <a:bodyPr wrap="square" lIns="0" rIns="0" tIns="0" bIns="0">
+            <a:spAutoFit/>
+          </a:bodyPr>
+          <a:lstStyle/>
+          <a:p>
+            <a:pPr>
+              <a:spcAft>
+                <a:spcPts val="700"/>
+              </a:spcAft>
+              <a:defRPr sz="1700" b="0">
+                <a:solidFill>
+                  <a:srgbClr val="172F46"/>
+                </a:solidFill>
+                <a:latin typeface="DejaVu Sans"/>
+              </a:defRPr>
+            </a:pPr>
+            <a:r>
+              <a:t>Jurisdiction → Facts → Procedure</a:t>
+            </a:r>
+          </a:p>
+          <a:p>
+            <a:pPr>
+              <a:spcAft>
+                <a:spcPts val="700"/>
+              </a:spcAft>
+              <a:defRPr sz="1700" b="0">
+                <a:solidFill>
+                  <a:srgbClr val="172F46"/>
+                </a:solidFill>
+                <a:latin typeface="DejaVu Sans"/>
+              </a:defRPr>
+            </a:pPr>
+            <a:r>
+              <a:t>→ Records → Relief</a:t>
+            </a:r>
+          </a:p>
+          <a:p>
+            <a:pPr>
+              <a:spcAft>
+                <a:spcPts val="700"/>
+              </a:spcAft>
+              <a:defRPr sz="1700" b="0">
+                <a:solidFill>
+                  <a:srgbClr val="172F46"/>
+                </a:solidFill>
+                <a:latin typeface="DejaVu Sans"/>
+              </a:defRPr>
+            </a:pPr>
+          </a:p>
+          <a:p>
+            <a:pPr>
+              <a:spcAft>
+                <a:spcPts val="700"/>
+              </a:spcAft>
+              <a:defRPr sz="1700" b="0">
+                <a:solidFill>
+                  <a:srgbClr val="172F46"/>
+                </a:solidFill>
+                <a:latin typeface="DejaVu Sans"/>
+              </a:defRPr>
+            </a:pPr>
+            <a:r>
+              <a:t>Decision record:</a:t>
+            </a:r>
+          </a:p>
+          <a:p>
+            <a:pPr>
+              <a:spcAft>
+                <a:spcPts val="700"/>
+              </a:spcAft>
+              <a:defRPr sz="1700" b="0">
+                <a:solidFill>
+                  <a:srgbClr val="172F46"/>
+                </a:solidFill>
+                <a:latin typeface="DejaVu Sans"/>
+              </a:defRPr>
+            </a:pPr>
+            <a:r>
+              <a:t>M5 INCLUDED: records exist</a:t>
+            </a:r>
+          </a:p>
+          <a:p>
+            <a:pPr>
+              <a:spcAft>
+                <a:spcPts val="700"/>
+              </a:spcAft>
+              <a:defRPr sz="1700" b="0">
+                <a:solidFill>
+                  <a:srgbClr val="172F46"/>
+                </a:solidFill>
+                <a:latin typeface="DejaVu Sans"/>
+              </a:defRPr>
+            </a:pPr>
+            <a:r>
+              <a:t>and M3 was selected.</a:t>
+            </a:r>
+          </a:p>
+        </p:txBody>
+      </p:sp>
+      <p:sp>
+        <p:nvSpPr>
+          <p:cNvPr id="23" name="Rounded Rectangle 22"/>
+          <p:cNvSpPr/>
+          <p:nvPr/>
+        </p:nvSpPr>
+        <p:spPr>
+          <a:xfrm>
+            <a:off x="594360" y="6007608"/>
+            <a:ext cx="11000232" cy="320040"/>
+          </a:xfrm>
+          <a:prstGeom prst="roundRect">
+            <a:avLst>
+              <a:gd name="adj" fmla="val 6000"/>
+            </a:avLst>
+          </a:prstGeom>
+          <a:solidFill>
+            <a:srgbClr val="EFF4F6"/>
+          </a:solidFill>
+          <a:ln>
+            <a:noFill/>
+          </a:ln>
+        </p:spPr>
+        <p:style>
+          <a:lnRef idx="1">
+            <a:schemeClr val="accent1"/>
+          </a:lnRef>
+          <a:fillRef idx="3">
+            <a:schemeClr val="accent1"/>
+          </a:fillRef>
+          <a:effectRef idx="0">
+            <a:schemeClr val="accent1"/>
+          </a:effectRef>
+          <a:fontRef idx="minor">
+            <a:schemeClr val="lt1"/>
+          </a:fontRef>
+        </p:style>
+        <p:txBody>
+          <a:bodyPr rtlCol="0" anchor="ctr"/>
+          <a:lstStyle/>
+          <a:p>
+            <a:pPr algn="ctr"/>
+          </a:p>
+        </p:txBody>
+      </p:sp>
+      <p:sp>
+        <p:nvSpPr>
+          <p:cNvPr id="24" name="TextBox 23"/>
+          <p:cNvSpPr txBox="1"/>
+          <p:nvPr/>
+        </p:nvSpPr>
+        <p:spPr>
+          <a:xfrm>
+            <a:off x="758952" y="6053328"/>
+            <a:ext cx="10671048" cy="210312"/>
+          </a:xfrm>
+          <a:prstGeom prst="rect">
+            <a:avLst/>
+          </a:prstGeom>
+          <a:noFill/>
+        </p:spPr>
+        <p:txBody>
+          <a:bodyPr wrap="square" lIns="0" rIns="0" tIns="0" bIns="0">
+            <a:spAutoFit/>
+          </a:bodyPr>
+          <a:lstStyle/>
+          <a:p>
+            <a:pPr>
+              <a:spcAft>
+                <a:spcPts val="700"/>
+              </a:spcAft>
+              <a:defRPr sz="1100" b="1">
+                <a:solidFill>
+                  <a:srgbClr val="172F46"/>
+                </a:solidFill>
+                <a:latin typeface="DejaVu Sans"/>
+              </a:defRPr>
+            </a:pPr>
+            <a:r>
+              <a:t>The output is a document plus a trace: the program shows its working.</a:t>
             </a:r>
           </a:p>
         </p:txBody>
@@ -6767,20 +8053,22 @@
       <p:grpSpPr/>
       <p:sp>
         <p:nvSpPr>
-          <p:cNvPr id="2" name="Rectangle 1"/>
+          <p:cNvPr id="2" name="Rounded Rectangle 1"/>
           <p:cNvSpPr/>
           <p:nvPr/>
         </p:nvSpPr>
         <p:spPr>
           <a:xfrm>
-            <a:off x="0" y="0"/>
-            <a:ext cx="12191695" cy="91440"/>
-          </a:xfrm>
-          <a:prstGeom prst="rect">
-            <a:avLst/>
+            <a:off x="512064" y="384048"/>
+            <a:ext cx="91440" cy="329184"/>
+          </a:xfrm>
+          <a:prstGeom prst="roundRect">
+            <a:avLst>
+              <a:gd name="adj" fmla="val 6000"/>
+            </a:avLst>
           </a:prstGeom>
           <a:solidFill>
-            <a:srgbClr val="117970"/>
+            <a:srgbClr val="087B72"/>
           </a:solidFill>
           <a:ln>
             <a:noFill/>
@@ -6816,33 +8104,33 @@
         </p:nvSpPr>
         <p:spPr>
           <a:xfrm>
-            <a:off x="594360" y="365760"/>
-            <a:ext cx="10972800" cy="320040"/>
-          </a:xfrm>
-          <a:prstGeom prst="rect">
-            <a:avLst/>
-          </a:prstGeom>
-          <a:noFill/>
-        </p:spPr>
-        <p:txBody>
-          <a:bodyPr wrap="square" tIns="0" bIns="0" lIns="0" rIns="0">
-            <a:spAutoFit/>
-          </a:bodyPr>
-          <a:lstStyle/>
-          <a:p>
-            <a:pPr>
-              <a:spcAft>
-                <a:spcPts val="1000"/>
+            <a:off x="758952" y="420624"/>
+            <a:ext cx="10058400" cy="237744"/>
+          </a:xfrm>
+          <a:prstGeom prst="rect">
+            <a:avLst/>
+          </a:prstGeom>
+          <a:noFill/>
+        </p:spPr>
+        <p:txBody>
+          <a:bodyPr wrap="square" lIns="0" rIns="0" tIns="0" bIns="0">
+            <a:spAutoFit/>
+          </a:bodyPr>
+          <a:lstStyle/>
+          <a:p>
+            <a:pPr>
+              <a:spcAft>
+                <a:spcPts val="700"/>
               </a:spcAft>
               <a:defRPr sz="1100" b="1">
                 <a:solidFill>
-                  <a:srgbClr val="117970"/>
-                </a:solidFill>
-                <a:latin typeface="DejaVu Sans"/>
-              </a:defRPr>
-            </a:pPr>
-            <a:r>
-              <a:t>IMPLEMENTATION · CELLS 4 + 5</a:t>
+                  <a:srgbClr val="087B72"/>
+                </a:solidFill>
+                <a:latin typeface="DejaVu Sans"/>
+              </a:defRPr>
+            </a:pPr>
+            <a:r>
+              <a:t>IMPLEMENTATION · CELL 4</a:t>
             </a:r>
           </a:p>
         </p:txBody>
@@ -6855,25 +8143,25 @@
         </p:nvSpPr>
         <p:spPr>
           <a:xfrm>
-            <a:off x="594360" y="960120"/>
-            <a:ext cx="10972800" cy="960120"/>
-          </a:xfrm>
-          <a:prstGeom prst="rect">
-            <a:avLst/>
-          </a:prstGeom>
-          <a:noFill/>
-        </p:spPr>
-        <p:txBody>
-          <a:bodyPr wrap="square" tIns="0" bIns="0" lIns="0" rIns="0">
-            <a:spAutoFit/>
-          </a:bodyPr>
-          <a:lstStyle/>
-          <a:p>
-            <a:pPr>
-              <a:spcAft>
-                <a:spcPts val="1000"/>
-              </a:spcAft>
-              <a:defRPr sz="3100" b="1">
+            <a:off x="594360" y="941832"/>
+            <a:ext cx="10972800" cy="914400"/>
+          </a:xfrm>
+          <a:prstGeom prst="rect">
+            <a:avLst/>
+          </a:prstGeom>
+          <a:noFill/>
+        </p:spPr>
+        <p:txBody>
+          <a:bodyPr wrap="square" lIns="0" rIns="0" tIns="0" bIns="0">
+            <a:spAutoFit/>
+          </a:bodyPr>
+          <a:lstStyle/>
+          <a:p>
+            <a:pPr>
+              <a:spcAft>
+                <a:spcPts val="700"/>
+              </a:spcAft>
+              <a:defRPr sz="3000" b="1">
                 <a:solidFill>
                   <a:srgbClr val="172F46"/>
                 </a:solidFill>
@@ -6881,7 +8169,7 @@
               </a:defRPr>
             </a:pPr>
             <a:r>
-              <a:t>Review the draft. Test the behaviour.</a:t>
+              <a:t>Search for sources and flag what needs review</a:t>
             </a:r>
           </a:p>
         </p:txBody>
@@ -6894,53 +8182,133 @@
         </p:nvSpPr>
         <p:spPr>
           <a:xfrm>
-            <a:off x="594360" y="1956816"/>
-            <a:ext cx="10972800" cy="530352"/>
-          </a:xfrm>
-          <a:prstGeom prst="rect">
-            <a:avLst/>
-          </a:prstGeom>
-          <a:noFill/>
-        </p:spPr>
-        <p:txBody>
-          <a:bodyPr wrap="square" tIns="0" bIns="0" lIns="0" rIns="0">
-            <a:spAutoFit/>
-          </a:bodyPr>
-          <a:lstStyle/>
-          <a:p>
-            <a:pPr>
-              <a:spcAft>
-                <a:spcPts val="1000"/>
+            <a:off x="594360" y="1856231"/>
+            <a:ext cx="10972800" cy="548640"/>
+          </a:xfrm>
+          <a:prstGeom prst="rect">
+            <a:avLst/>
+          </a:prstGeom>
+          <a:noFill/>
+        </p:spPr>
+        <p:txBody>
+          <a:bodyPr wrap="square" lIns="0" rIns="0" tIns="0" bIns="0">
+            <a:spAutoFit/>
+          </a:bodyPr>
+          <a:lstStyle/>
+          <a:p>
+            <a:pPr>
+              <a:spcAft>
+                <a:spcPts val="700"/>
               </a:spcAft>
               <a:defRPr sz="1600" b="0">
                 <a:solidFill>
-                  <a:srgbClr val="607482"/>
-                </a:solidFill>
-                <a:latin typeface="DejaVu Sans"/>
-              </a:defRPr>
-            </a:pPr>
-            <a:r>
-              <a:t>Check references and recorded updates, then rerun known examples after changes.</a:t>
-            </a:r>
-          </a:p>
-        </p:txBody>
-      </p:sp>
-      <p:sp>
-        <p:nvSpPr>
-          <p:cNvPr id="6" name="Rectangle 5"/>
+                  <a:srgbClr val="617786"/>
+                </a:solidFill>
+                <a:latin typeface="DejaVu Sans"/>
+              </a:defRPr>
+            </a:pPr>
+            <a:r>
+              <a:t>Text search and citation checks are separate; neither decides the legal strategy.</a:t>
+            </a:r>
+          </a:p>
+        </p:txBody>
+      </p:sp>
+      <p:sp>
+        <p:nvSpPr>
+          <p:cNvPr id="6" name="TextBox 5"/>
+          <p:cNvSpPr txBox="1"/>
+          <p:nvPr/>
+        </p:nvSpPr>
+        <p:spPr>
+          <a:xfrm>
+            <a:off x="594360" y="6510528"/>
+            <a:ext cx="10058400" cy="219456"/>
+          </a:xfrm>
+          <a:prstGeom prst="rect">
+            <a:avLst/>
+          </a:prstGeom>
+          <a:noFill/>
+        </p:spPr>
+        <p:txBody>
+          <a:bodyPr wrap="square" lIns="0" rIns="0" tIns="0" bIns="0">
+            <a:spAutoFit/>
+          </a:bodyPr>
+          <a:lstStyle/>
+          <a:p>
+            <a:pPr>
+              <a:spcAft>
+                <a:spcPts val="700"/>
+              </a:spcAft>
+              <a:defRPr sz="800" b="0">
+                <a:solidFill>
+                  <a:srgbClr val="617786"/>
+                </a:solidFill>
+                <a:latin typeface="DejaVu Sans"/>
+              </a:defRPr>
+            </a:pPr>
+            <a:r>
+              <a:t>Notebook cell 4: saved sample output. Notes are simulated; source applicability requires professional assessment.</a:t>
+            </a:r>
+          </a:p>
+        </p:txBody>
+      </p:sp>
+      <p:sp>
+        <p:nvSpPr>
+          <p:cNvPr id="7" name="TextBox 6"/>
+          <p:cNvSpPr txBox="1"/>
+          <p:nvPr/>
+        </p:nvSpPr>
+        <p:spPr>
+          <a:xfrm>
+            <a:off x="10817352" y="6446520"/>
+            <a:ext cx="731520" cy="274320"/>
+          </a:xfrm>
+          <a:prstGeom prst="rect">
+            <a:avLst/>
+          </a:prstGeom>
+          <a:noFill/>
+        </p:spPr>
+        <p:txBody>
+          <a:bodyPr wrap="square" lIns="0" rIns="0" tIns="0" bIns="0">
+            <a:spAutoFit/>
+          </a:bodyPr>
+          <a:lstStyle/>
+          <a:p>
+            <a:pPr>
+              <a:spcAft>
+                <a:spcPts val="700"/>
+              </a:spcAft>
+              <a:defRPr sz="1000" b="0">
+                <a:solidFill>
+                  <a:srgbClr val="617786"/>
+                </a:solidFill>
+                <a:latin typeface="DejaVu Sans"/>
+              </a:defRPr>
+            </a:pPr>
+            <a:r>
+              <a:t>05 / 07</a:t>
+            </a:r>
+          </a:p>
+        </p:txBody>
+      </p:sp>
+      <p:sp>
+        <p:nvSpPr>
+          <p:cNvPr id="8" name="Rounded Rectangle 7"/>
           <p:cNvSpPr/>
           <p:nvPr/>
         </p:nvSpPr>
         <p:spPr>
           <a:xfrm>
-            <a:off x="594360" y="6409944"/>
-            <a:ext cx="11000232" cy="10972"/>
-          </a:xfrm>
-          <a:prstGeom prst="rect">
-            <a:avLst/>
+            <a:off x="594360" y="2660904"/>
+            <a:ext cx="393192" cy="393192"/>
+          </a:xfrm>
+          <a:prstGeom prst="roundRect">
+            <a:avLst>
+              <a:gd name="adj" fmla="val 6000"/>
+            </a:avLst>
           </a:prstGeom>
           <a:solidFill>
-            <a:srgbClr val="DCE5EA"/>
+            <a:srgbClr val="087B72"/>
           </a:solidFill>
           <a:ln>
             <a:noFill/>
@@ -6970,100 +8338,139 @@
       </p:sp>
       <p:sp>
         <p:nvSpPr>
-          <p:cNvPr id="7" name="TextBox 6"/>
-          <p:cNvSpPr txBox="1"/>
-          <p:nvPr/>
-        </p:nvSpPr>
-        <p:spPr>
-          <a:xfrm>
-            <a:off x="594360" y="6537960"/>
-            <a:ext cx="9875520" cy="210312"/>
-          </a:xfrm>
-          <a:prstGeom prst="rect">
-            <a:avLst/>
-          </a:prstGeom>
-          <a:noFill/>
-        </p:spPr>
-        <p:txBody>
-          <a:bodyPr wrap="square" tIns="0" bIns="0" lIns="0" rIns="0">
-            <a:spAutoFit/>
-          </a:bodyPr>
-          <a:lstStyle/>
-          <a:p>
-            <a:pPr>
-              <a:spcAft>
-                <a:spcPts val="1000"/>
-              </a:spcAft>
-              <a:defRPr sz="850" b="0">
-                <a:solidFill>
-                  <a:srgbClr val="607482"/>
-                </a:solidFill>
-                <a:latin typeface="DejaVu Sans"/>
-              </a:defRPr>
-            </a:pPr>
-            <a:r>
-              <a:t>Cells 4–5: saved notebook outputs. Judgment notes and reference cases are synthetic; warnings need human assessment.</a:t>
-            </a:r>
-          </a:p>
-        </p:txBody>
-      </p:sp>
-      <p:sp>
-        <p:nvSpPr>
-          <p:cNvPr id="8" name="TextBox 7"/>
-          <p:cNvSpPr txBox="1"/>
-          <p:nvPr/>
-        </p:nvSpPr>
-        <p:spPr>
-          <a:xfrm>
-            <a:off x="10881360" y="6501384"/>
-            <a:ext cx="731520" cy="274320"/>
-          </a:xfrm>
-          <a:prstGeom prst="rect">
-            <a:avLst/>
-          </a:prstGeom>
-          <a:noFill/>
-        </p:spPr>
-        <p:txBody>
-          <a:bodyPr wrap="square" tIns="0" bIns="0" lIns="0" rIns="0">
-            <a:spAutoFit/>
-          </a:bodyPr>
-          <a:lstStyle/>
-          <a:p>
-            <a:pPr>
-              <a:spcAft>
-                <a:spcPts val="1000"/>
-              </a:spcAft>
-              <a:defRPr sz="1000" b="0">
-                <a:solidFill>
-                  <a:srgbClr val="607482"/>
-                </a:solidFill>
-                <a:latin typeface="DejaVu Sans"/>
-              </a:defRPr>
-            </a:pPr>
-            <a:r>
-              <a:t>05 / 05</a:t>
-            </a:r>
-          </a:p>
-        </p:txBody>
-      </p:sp>
-      <p:sp>
-        <p:nvSpPr>
-          <p:cNvPr id="9" name="Rounded Rectangle 8"/>
+          <p:cNvPr id="9" name="TextBox 8"/>
+          <p:cNvSpPr txBox="1"/>
+          <p:nvPr/>
+        </p:nvSpPr>
+        <p:spPr>
+          <a:xfrm>
+            <a:off x="685800" y="2738628"/>
+            <a:ext cx="274320" cy="228600"/>
+          </a:xfrm>
+          <a:prstGeom prst="rect">
+            <a:avLst/>
+          </a:prstGeom>
+          <a:noFill/>
+        </p:spPr>
+        <p:txBody>
+          <a:bodyPr wrap="square" lIns="0" rIns="0" tIns="0" bIns="0">
+            <a:spAutoFit/>
+          </a:bodyPr>
+          <a:lstStyle/>
+          <a:p>
+            <a:pPr>
+              <a:spcAft>
+                <a:spcPts val="700"/>
+              </a:spcAft>
+              <a:defRPr sz="1200" b="1">
+                <a:solidFill>
+                  <a:srgbClr val="FFFFFF"/>
+                </a:solidFill>
+                <a:latin typeface="DejaVu Sans"/>
+              </a:defRPr>
+            </a:pPr>
+            <a:r>
+              <a:t>1</a:t>
+            </a:r>
+          </a:p>
+        </p:txBody>
+      </p:sp>
+      <p:sp>
+        <p:nvSpPr>
+          <p:cNvPr id="10" name="TextBox 9"/>
+          <p:cNvSpPr txBox="1"/>
+          <p:nvPr/>
+        </p:nvSpPr>
+        <p:spPr>
+          <a:xfrm>
+            <a:off x="1225296" y="2660904"/>
+            <a:ext cx="4663440" cy="365760"/>
+          </a:xfrm>
+          <a:prstGeom prst="rect">
+            <a:avLst/>
+          </a:prstGeom>
+          <a:noFill/>
+        </p:spPr>
+        <p:txBody>
+          <a:bodyPr wrap="square" lIns="0" rIns="0" tIns="0" bIns="0">
+            <a:spAutoFit/>
+          </a:bodyPr>
+          <a:lstStyle/>
+          <a:p>
+            <a:pPr>
+              <a:spcAft>
+                <a:spcPts val="700"/>
+              </a:spcAft>
+              <a:defRPr sz="1900" b="1">
+                <a:solidFill>
+                  <a:srgbClr val="172F46"/>
+                </a:solidFill>
+                <a:latin typeface="DejaVu Sans"/>
+              </a:defRPr>
+            </a:pPr>
+            <a:r>
+              <a:t>Search the source summaries</a:t>
+            </a:r>
+          </a:p>
+        </p:txBody>
+      </p:sp>
+      <p:sp>
+        <p:nvSpPr>
+          <p:cNvPr id="11" name="TextBox 10"/>
+          <p:cNvSpPr txBox="1"/>
+          <p:nvPr/>
+        </p:nvSpPr>
+        <p:spPr>
+          <a:xfrm>
+            <a:off x="1225296" y="3127248"/>
+            <a:ext cx="4663440" cy="603504"/>
+          </a:xfrm>
+          <a:prstGeom prst="rect">
+            <a:avLst/>
+          </a:prstGeom>
+          <a:noFill/>
+        </p:spPr>
+        <p:txBody>
+          <a:bodyPr wrap="square" lIns="0" rIns="0" tIns="0" bIns="0">
+            <a:spAutoFit/>
+          </a:bodyPr>
+          <a:lstStyle/>
+          <a:p>
+            <a:pPr>
+              <a:spcAft>
+                <a:spcPts val="700"/>
+              </a:spcAft>
+              <a:defRPr sz="1500" b="0">
+                <a:solidFill>
+                  <a:srgbClr val="304455"/>
+                </a:solidFill>
+                <a:latin typeface="DejaVu Sans"/>
+              </a:defRPr>
+            </a:pPr>
+            <a:r>
+              <a:t>Try the whole query; if no match passes, split explicit parts and retry.</a:t>
+            </a:r>
+          </a:p>
+        </p:txBody>
+      </p:sp>
+      <p:sp>
+        <p:nvSpPr>
+          <p:cNvPr id="12" name="Rounded Rectangle 11"/>
           <p:cNvSpPr/>
           <p:nvPr/>
         </p:nvSpPr>
         <p:spPr>
           <a:xfrm>
-            <a:off x="594360" y="2834640"/>
-            <a:ext cx="5193792" cy="2286000"/>
+            <a:off x="594360" y="3758184"/>
+            <a:ext cx="393192" cy="393192"/>
           </a:xfrm>
           <a:prstGeom prst="roundRect">
             <a:avLst>
-              <a:gd name="adj" fmla="val 8000"/>
+              <a:gd name="adj" fmla="val 6000"/>
             </a:avLst>
           </a:prstGeom>
           <a:solidFill>
-            <a:srgbClr val="F1F5F7"/>
+            <a:srgbClr val="087B72"/>
           </a:solidFill>
           <a:ln>
             <a:noFill/>
@@ -7093,70 +8500,70 @@
       </p:sp>
       <p:sp>
         <p:nvSpPr>
-          <p:cNvPr id="10" name="TextBox 9"/>
-          <p:cNvSpPr txBox="1"/>
-          <p:nvPr/>
-        </p:nvSpPr>
-        <p:spPr>
-          <a:xfrm>
-            <a:off x="850392" y="3063240"/>
-            <a:ext cx="4681728" cy="329184"/>
-          </a:xfrm>
-          <a:prstGeom prst="rect">
-            <a:avLst/>
-          </a:prstGeom>
-          <a:noFill/>
-        </p:spPr>
-        <p:txBody>
-          <a:bodyPr wrap="square" tIns="0" bIns="0" lIns="0" rIns="0">
-            <a:spAutoFit/>
-          </a:bodyPr>
-          <a:lstStyle/>
-          <a:p>
-            <a:pPr>
-              <a:spcAft>
-                <a:spcPts val="1000"/>
+          <p:cNvPr id="13" name="TextBox 12"/>
+          <p:cNvSpPr txBox="1"/>
+          <p:nvPr/>
+        </p:nvSpPr>
+        <p:spPr>
+          <a:xfrm>
+            <a:off x="685800" y="3835908"/>
+            <a:ext cx="274320" cy="228600"/>
+          </a:xfrm>
+          <a:prstGeom prst="rect">
+            <a:avLst/>
+          </a:prstGeom>
+          <a:noFill/>
+        </p:spPr>
+        <p:txBody>
+          <a:bodyPr wrap="square" lIns="0" rIns="0" tIns="0" bIns="0">
+            <a:spAutoFit/>
+          </a:bodyPr>
+          <a:lstStyle/>
+          <a:p>
+            <a:pPr>
+              <a:spcAft>
+                <a:spcPts val="700"/>
               </a:spcAft>
               <a:defRPr sz="1200" b="1">
                 <a:solidFill>
-                  <a:srgbClr val="117970"/>
-                </a:solidFill>
-                <a:latin typeface="DejaVu Sans"/>
-              </a:defRPr>
-            </a:pPr>
-            <a:r>
-              <a:t>CELL 4 · EXAMPLE REVIEW OUTPUT</a:t>
-            </a:r>
-          </a:p>
-        </p:txBody>
-      </p:sp>
-      <p:sp>
-        <p:nvSpPr>
-          <p:cNvPr id="11" name="TextBox 10"/>
-          <p:cNvSpPr txBox="1"/>
-          <p:nvPr/>
-        </p:nvSpPr>
-        <p:spPr>
-          <a:xfrm>
-            <a:off x="850392" y="3666744"/>
-            <a:ext cx="4681728" cy="1335024"/>
-          </a:xfrm>
-          <a:prstGeom prst="rect">
-            <a:avLst/>
-          </a:prstGeom>
-          <a:noFill/>
-        </p:spPr>
-        <p:txBody>
-          <a:bodyPr wrap="square" tIns="0" bIns="0" lIns="0" rIns="0">
-            <a:spAutoFit/>
-          </a:bodyPr>
-          <a:lstStyle/>
-          <a:p>
-            <a:pPr>
-              <a:spcAft>
-                <a:spcPts val="1000"/>
-              </a:spcAft>
-              <a:defRPr sz="1700" b="1">
+                  <a:srgbClr val="FFFFFF"/>
+                </a:solidFill>
+                <a:latin typeface="DejaVu Sans"/>
+              </a:defRPr>
+            </a:pPr>
+            <a:r>
+              <a:t>2</a:t>
+            </a:r>
+          </a:p>
+        </p:txBody>
+      </p:sp>
+      <p:sp>
+        <p:nvSpPr>
+          <p:cNvPr id="14" name="TextBox 13"/>
+          <p:cNvSpPr txBox="1"/>
+          <p:nvPr/>
+        </p:nvSpPr>
+        <p:spPr>
+          <a:xfrm>
+            <a:off x="1225296" y="3758184"/>
+            <a:ext cx="4663440" cy="365760"/>
+          </a:xfrm>
+          <a:prstGeom prst="rect">
+            <a:avLst/>
+          </a:prstGeom>
+          <a:noFill/>
+        </p:spPr>
+        <p:txBody>
+          <a:bodyPr wrap="square" lIns="0" rIns="0" tIns="0" bIns="0">
+            <a:spAutoFit/>
+          </a:bodyPr>
+          <a:lstStyle/>
+          <a:p>
+            <a:pPr>
+              <a:spcAft>
+                <a:spcPts val="700"/>
+              </a:spcAft>
+              <a:defRPr sz="1900" b="1">
                 <a:solidFill>
                   <a:srgbClr val="172F46"/>
                 </a:solidFill>
@@ -7164,61 +8571,68 @@
               </a:defRPr>
             </a:pPr>
             <a:r>
-              <a:t>Search demo: C54 + P420 found</a:t>
-            </a:r>
-          </a:p>
-          <a:p>
-            <a:pPr>
-              <a:spcAft>
-                <a:spcPts val="1000"/>
-              </a:spcAft>
-              <a:defRPr sz="1700" b="1">
-                <a:solidFill>
-                  <a:srgbClr val="172F46"/>
-                </a:solidFill>
-                <a:latin typeface="DejaVu Sans"/>
-              </a:defRPr>
-            </a:pPr>
-            <a:r>
-              <a:t>Draft review: 3 update warnings</a:t>
-            </a:r>
-          </a:p>
-          <a:p>
-            <a:pPr>
-              <a:spcAft>
-                <a:spcPts val="1000"/>
-              </a:spcAft>
-              <a:defRPr sz="1700" b="1">
-                <a:solidFill>
-                  <a:srgbClr val="172F46"/>
-                </a:solidFill>
-                <a:latin typeface="DejaVu Sans"/>
-              </a:defRPr>
-            </a:pPr>
-            <a:r>
-              <a:t>Case summary: no accepted sources</a:t>
-            </a:r>
-          </a:p>
-        </p:txBody>
-      </p:sp>
-      <p:sp>
-        <p:nvSpPr>
-          <p:cNvPr id="12" name="Rounded Rectangle 11"/>
+              <a:t>Check the draft’s references</a:t>
+            </a:r>
+          </a:p>
+        </p:txBody>
+      </p:sp>
+      <p:sp>
+        <p:nvSpPr>
+          <p:cNvPr id="15" name="TextBox 14"/>
+          <p:cNvSpPr txBox="1"/>
+          <p:nvPr/>
+        </p:nvSpPr>
+        <p:spPr>
+          <a:xfrm>
+            <a:off x="1225296" y="4224528"/>
+            <a:ext cx="4663440" cy="603504"/>
+          </a:xfrm>
+          <a:prstGeom prst="rect">
+            <a:avLst/>
+          </a:prstGeom>
+          <a:noFill/>
+        </p:spPr>
+        <p:txBody>
+          <a:bodyPr wrap="square" lIns="0" rIns="0" tIns="0" bIns="0">
+            <a:spAutoFit/>
+          </a:bodyPr>
+          <a:lstStyle/>
+          <a:p>
+            <a:pPr>
+              <a:spcAft>
+                <a:spcPts val="700"/>
+              </a:spcAft>
+              <a:defRPr sz="1500" b="0">
+                <a:solidFill>
+                  <a:srgbClr val="304455"/>
+                </a:solidFill>
+                <a:latin typeface="DejaVu Sans"/>
+              </a:defRPr>
+            </a:pPr>
+            <a:r>
+              <a:t>Flag required markers that are missing, unknown or unlinked.</a:t>
+            </a:r>
+          </a:p>
+        </p:txBody>
+      </p:sp>
+      <p:sp>
+        <p:nvSpPr>
+          <p:cNvPr id="16" name="Rounded Rectangle 15"/>
           <p:cNvSpPr/>
           <p:nvPr/>
         </p:nvSpPr>
         <p:spPr>
           <a:xfrm>
-            <a:off x="6391656" y="2834640"/>
-            <a:ext cx="5202936" cy="2286000"/>
+            <a:off x="594360" y="4855464"/>
+            <a:ext cx="393192" cy="393192"/>
           </a:xfrm>
           <a:prstGeom prst="roundRect">
             <a:avLst>
-              <a:gd name="adj" fmla="val 8000"/>
+              <a:gd name="adj" fmla="val 6000"/>
             </a:avLst>
           </a:prstGeom>
           <a:solidFill>
-            <a:srgbClr val="E8F3F0"/>
+            <a:srgbClr val="087B72"/>
           </a:solidFill>
           <a:ln>
             <a:noFill/>
@@ -7248,70 +8662,70 @@
       </p:sp>
       <p:sp>
         <p:nvSpPr>
-          <p:cNvPr id="13" name="TextBox 12"/>
-          <p:cNvSpPr txBox="1"/>
-          <p:nvPr/>
-        </p:nvSpPr>
-        <p:spPr>
-          <a:xfrm>
-            <a:off x="6647688" y="3063240"/>
-            <a:ext cx="4690872" cy="329184"/>
-          </a:xfrm>
-          <a:prstGeom prst="rect">
-            <a:avLst/>
-          </a:prstGeom>
-          <a:noFill/>
-        </p:spPr>
-        <p:txBody>
-          <a:bodyPr wrap="square" tIns="0" bIns="0" lIns="0" rIns="0">
-            <a:spAutoFit/>
-          </a:bodyPr>
-          <a:lstStyle/>
-          <a:p>
-            <a:pPr>
-              <a:spcAft>
-                <a:spcPts val="1000"/>
+          <p:cNvPr id="17" name="TextBox 16"/>
+          <p:cNvSpPr txBox="1"/>
+          <p:nvPr/>
+        </p:nvSpPr>
+        <p:spPr>
+          <a:xfrm>
+            <a:off x="685800" y="4933188"/>
+            <a:ext cx="274320" cy="228600"/>
+          </a:xfrm>
+          <a:prstGeom prst="rect">
+            <a:avLst/>
+          </a:prstGeom>
+          <a:noFill/>
+        </p:spPr>
+        <p:txBody>
+          <a:bodyPr wrap="square" lIns="0" rIns="0" tIns="0" bIns="0">
+            <a:spAutoFit/>
+          </a:bodyPr>
+          <a:lstStyle/>
+          <a:p>
+            <a:pPr>
+              <a:spcAft>
+                <a:spcPts val="700"/>
               </a:spcAft>
               <a:defRPr sz="1200" b="1">
                 <a:solidFill>
-                  <a:srgbClr val="117970"/>
-                </a:solidFill>
-                <a:latin typeface="DejaVu Sans"/>
-              </a:defRPr>
-            </a:pPr>
-            <a:r>
-              <a:t>CELL 5 · FOUR TEST GROUPS PASS</a:t>
-            </a:r>
-          </a:p>
-        </p:txBody>
-      </p:sp>
-      <p:sp>
-        <p:nvSpPr>
-          <p:cNvPr id="14" name="TextBox 13"/>
-          <p:cNvSpPr txBox="1"/>
-          <p:nvPr/>
-        </p:nvSpPr>
-        <p:spPr>
-          <a:xfrm>
-            <a:off x="6647688" y="3666744"/>
-            <a:ext cx="4690872" cy="1335024"/>
-          </a:xfrm>
-          <a:prstGeom prst="rect">
-            <a:avLst/>
-          </a:prstGeom>
-          <a:noFill/>
-        </p:spPr>
-        <p:txBody>
-          <a:bodyPr wrap="square" tIns="0" bIns="0" lIns="0" rIns="0">
-            <a:spAutoFit/>
-          </a:bodyPr>
-          <a:lstStyle/>
-          <a:p>
-            <a:pPr>
-              <a:spcAft>
-                <a:spcPts val="1000"/>
-              </a:spcAft>
-              <a:defRPr sz="1700" b="1">
+                  <a:srgbClr val="FFFFFF"/>
+                </a:solidFill>
+                <a:latin typeface="DejaVu Sans"/>
+              </a:defRPr>
+            </a:pPr>
+            <a:r>
+              <a:t>3</a:t>
+            </a:r>
+          </a:p>
+        </p:txBody>
+      </p:sp>
+      <p:sp>
+        <p:nvSpPr>
+          <p:cNvPr id="18" name="TextBox 17"/>
+          <p:cNvSpPr txBox="1"/>
+          <p:nvPr/>
+        </p:nvSpPr>
+        <p:spPr>
+          <a:xfrm>
+            <a:off x="1225296" y="4855464"/>
+            <a:ext cx="4663440" cy="365760"/>
+          </a:xfrm>
+          <a:prstGeom prst="rect">
+            <a:avLst/>
+          </a:prstGeom>
+          <a:noFill/>
+        </p:spPr>
+        <p:txBody>
+          <a:bodyPr wrap="square" lIns="0" rIns="0" tIns="0" bIns="0">
+            <a:spAutoFit/>
+          </a:bodyPr>
+          <a:lstStyle/>
+          <a:p>
+            <a:pPr>
+              <a:spcAft>
+                <a:spcPts val="700"/>
+              </a:spcAft>
+              <a:defRPr sz="1900" b="1">
                 <a:solidFill>
                   <a:srgbClr val="172F46"/>
                 </a:solidFill>
@@ -7319,59 +8733,68 @@
               </a:defRPr>
             </a:pPr>
             <a:r>
-              <a:t>25 runs give matching results</a:t>
-            </a:r>
-          </a:p>
-          <a:p>
-            <a:pPr>
-              <a:spcAft>
-                <a:spcPts val="1000"/>
-              </a:spcAft>
-              <a:defRPr sz="1700" b="1">
-                <a:solidFill>
-                  <a:srgbClr val="172F46"/>
-                </a:solidFill>
-                <a:latin typeface="DejaVu Sans"/>
-              </a:defRPr>
-            </a:pPr>
-            <a:r>
-              <a:t>4 cases match their expectations</a:t>
-            </a:r>
-          </a:p>
-          <a:p>
-            <a:pPr>
-              <a:spcAft>
-                <a:spcPts val="1000"/>
-              </a:spcAft>
-              <a:defRPr sz="1700" b="1">
-                <a:solidFill>
-                  <a:srgbClr val="172F46"/>
-                </a:solidFill>
-                <a:latin typeface="DejaVu Sans"/>
-              </a:defRPr>
-            </a:pPr>
-            <a:r>
-              <a:t>Conflicts rejected; updates flagged</a:t>
-            </a:r>
-          </a:p>
-        </p:txBody>
-      </p:sp>
-      <p:sp>
-        <p:nvSpPr>
-          <p:cNvPr id="15" name="Rectangle 14"/>
+              <a:t>Check recorded judgment notes</a:t>
+            </a:r>
+          </a:p>
+        </p:txBody>
+      </p:sp>
+      <p:sp>
+        <p:nvSpPr>
+          <p:cNvPr id="19" name="TextBox 18"/>
+          <p:cNvSpPr txBox="1"/>
+          <p:nvPr/>
+        </p:nvSpPr>
+        <p:spPr>
+          <a:xfrm>
+            <a:off x="1225296" y="5321807"/>
+            <a:ext cx="4663440" cy="603504"/>
+          </a:xfrm>
+          <a:prstGeom prst="rect">
+            <a:avLst/>
+          </a:prstGeom>
+          <a:noFill/>
+        </p:spPr>
+        <p:txBody>
+          <a:bodyPr wrap="square" lIns="0" rIns="0" tIns="0" bIns="0">
+            <a:spAutoFit/>
+          </a:bodyPr>
+          <a:lstStyle/>
+          <a:p>
+            <a:pPr>
+              <a:spcAft>
+                <a:spcPts val="700"/>
+              </a:spcAft>
+              <a:defRPr sz="1500" b="0">
+                <a:solidFill>
+                  <a:srgbClr val="304455"/>
+                </a:solidFill>
+                <a:latin typeface="DejaVu Sans"/>
+              </a:defRPr>
+            </a:pPr>
+            <a:r>
+              <a:t>Flag selected paragraphs linked to notes newer than the rule snapshot.</a:t>
+            </a:r>
+          </a:p>
+        </p:txBody>
+      </p:sp>
+      <p:sp>
+        <p:nvSpPr>
+          <p:cNvPr id="20" name="Rounded Rectangle 19"/>
           <p:cNvSpPr/>
           <p:nvPr/>
         </p:nvSpPr>
         <p:spPr>
           <a:xfrm>
-            <a:off x="594360" y="5559552"/>
-            <a:ext cx="11000232" cy="594360"/>
-          </a:xfrm>
-          <a:prstGeom prst="rect">
-            <a:avLst/>
+            <a:off x="6428232" y="2587752"/>
+            <a:ext cx="5166360" cy="3264408"/>
+          </a:xfrm>
+          <a:prstGeom prst="roundRect">
+            <a:avLst>
+              <a:gd name="adj" fmla="val 6000"/>
+            </a:avLst>
           </a:prstGeom>
           <a:solidFill>
-            <a:srgbClr val="172F46"/>
+            <a:srgbClr val="E7F3EF"/>
           </a:solidFill>
           <a:ln>
             <a:noFill/>
@@ -7401,31 +8824,581 @@
       </p:sp>
       <p:sp>
         <p:nvSpPr>
-          <p:cNvPr id="16" name="TextBox 15"/>
-          <p:cNvSpPr txBox="1"/>
-          <p:nvPr/>
-        </p:nvSpPr>
-        <p:spPr>
-          <a:xfrm>
-            <a:off x="850392" y="5742432"/>
-            <a:ext cx="10469880" cy="292608"/>
-          </a:xfrm>
-          <a:prstGeom prst="rect">
-            <a:avLst/>
-          </a:prstGeom>
-          <a:noFill/>
-        </p:spPr>
-        <p:txBody>
-          <a:bodyPr wrap="square" tIns="0" bIns="0" lIns="0" rIns="0">
-            <a:spAutoFit/>
-          </a:bodyPr>
-          <a:lstStyle/>
-          <a:p>
-            <a:pPr>
-              <a:spcAft>
-                <a:spcPts val="1000"/>
-              </a:spcAft>
-              <a:defRPr sz="1600" b="1">
+          <p:cNvPr id="21" name="TextBox 20"/>
+          <p:cNvSpPr txBox="1"/>
+          <p:nvPr/>
+        </p:nvSpPr>
+        <p:spPr>
+          <a:xfrm>
+            <a:off x="6702552" y="2862072"/>
+            <a:ext cx="4617720" cy="301752"/>
+          </a:xfrm>
+          <a:prstGeom prst="rect">
+            <a:avLst/>
+          </a:prstGeom>
+          <a:noFill/>
+        </p:spPr>
+        <p:txBody>
+          <a:bodyPr wrap="square" lIns="0" rIns="0" tIns="0" bIns="0">
+            <a:spAutoFit/>
+          </a:bodyPr>
+          <a:lstStyle/>
+          <a:p>
+            <a:pPr>
+              <a:spcAft>
+                <a:spcPts val="700"/>
+              </a:spcAft>
+              <a:defRPr sz="1100" b="1">
+                <a:solidFill>
+                  <a:srgbClr val="087B72"/>
+                </a:solidFill>
+                <a:latin typeface="DejaVu Sans"/>
+              </a:defRPr>
+            </a:pPr>
+            <a:r>
+              <a:t>ACTUAL SAMPLE REPORT</a:t>
+            </a:r>
+          </a:p>
+        </p:txBody>
+      </p:sp>
+      <p:sp>
+        <p:nvSpPr>
+          <p:cNvPr id="22" name="TextBox 21"/>
+          <p:cNvSpPr txBox="1"/>
+          <p:nvPr/>
+        </p:nvSpPr>
+        <p:spPr>
+          <a:xfrm>
+            <a:off x="6702552" y="3465576"/>
+            <a:ext cx="4617720" cy="2148840"/>
+          </a:xfrm>
+          <a:prstGeom prst="rect">
+            <a:avLst/>
+          </a:prstGeom>
+          <a:noFill/>
+        </p:spPr>
+        <p:txBody>
+          <a:bodyPr wrap="square" lIns="0" rIns="0" tIns="0" bIns="0">
+            <a:spAutoFit/>
+          </a:bodyPr>
+          <a:lstStyle/>
+          <a:p>
+            <a:pPr>
+              <a:spcAft>
+                <a:spcPts val="700"/>
+              </a:spcAft>
+              <a:defRPr sz="1600" b="0">
+                <a:solidFill>
+                  <a:srgbClr val="172F46"/>
+                </a:solidFill>
+                <a:latin typeface="DejaVu Sans"/>
+              </a:defRPr>
+            </a:pPr>
+            <a:r>
+              <a:t>3 update warnings:</a:t>
+            </a:r>
+          </a:p>
+          <a:p>
+            <a:pPr>
+              <a:spcAft>
+                <a:spcPts val="700"/>
+              </a:spcAft>
+              <a:defRPr sz="1600" b="0">
+                <a:solidFill>
+                  <a:srgbClr val="172F46"/>
+                </a:solidFill>
+                <a:latin typeface="DejaVu Sans"/>
+              </a:defRPr>
+            </a:pPr>
+            <a:r>
+              <a:t>M3 → C54 and C167</a:t>
+            </a:r>
+          </a:p>
+          <a:p>
+            <a:pPr>
+              <a:spcAft>
+                <a:spcPts val="700"/>
+              </a:spcAft>
+              <a:defRPr sz="1600" b="0">
+                <a:solidFill>
+                  <a:srgbClr val="172F46"/>
+                </a:solidFill>
+                <a:latin typeface="DejaVu Sans"/>
+              </a:defRPr>
+            </a:pPr>
+            <a:r>
+              <a:t>M5 → C167</a:t>
+            </a:r>
+          </a:p>
+          <a:p>
+            <a:pPr>
+              <a:spcAft>
+                <a:spcPts val="700"/>
+              </a:spcAft>
+              <a:defRPr sz="1600" b="0">
+                <a:solidFill>
+                  <a:srgbClr val="172F46"/>
+                </a:solidFill>
+                <a:latin typeface="DejaVu Sans"/>
+              </a:defRPr>
+            </a:pPr>
+          </a:p>
+          <a:p>
+            <a:pPr>
+              <a:spcAft>
+                <a:spcPts val="700"/>
+              </a:spcAft>
+              <a:defRPr sz="1600" b="0">
+                <a:solidFill>
+                  <a:srgbClr val="172F46"/>
+                </a:solidFill>
+                <a:latin typeface="DejaVu Sans"/>
+              </a:defRPr>
+            </a:pPr>
+            <a:r>
+              <a:t>No missing-citation warnings.</a:t>
+            </a:r>
+          </a:p>
+          <a:p>
+            <a:pPr>
+              <a:spcAft>
+                <a:spcPts val="700"/>
+              </a:spcAft>
+              <a:defRPr sz="1600" b="0">
+                <a:solidFill>
+                  <a:srgbClr val="172F46"/>
+                </a:solidFill>
+                <a:latin typeface="DejaVu Sans"/>
+              </a:defRPr>
+            </a:pPr>
+            <a:r>
+              <a:t>Case summary: no accepted sources.</a:t>
+            </a:r>
+          </a:p>
+        </p:txBody>
+      </p:sp>
+      <p:sp>
+        <p:nvSpPr>
+          <p:cNvPr id="23" name="Rounded Rectangle 22"/>
+          <p:cNvSpPr/>
+          <p:nvPr/>
+        </p:nvSpPr>
+        <p:spPr>
+          <a:xfrm>
+            <a:off x="594360" y="6007608"/>
+            <a:ext cx="11000232" cy="320040"/>
+          </a:xfrm>
+          <a:prstGeom prst="roundRect">
+            <a:avLst>
+              <a:gd name="adj" fmla="val 6000"/>
+            </a:avLst>
+          </a:prstGeom>
+          <a:solidFill>
+            <a:srgbClr val="EFF4F6"/>
+          </a:solidFill>
+          <a:ln>
+            <a:noFill/>
+          </a:ln>
+        </p:spPr>
+        <p:style>
+          <a:lnRef idx="1">
+            <a:schemeClr val="accent1"/>
+          </a:lnRef>
+          <a:fillRef idx="3">
+            <a:schemeClr val="accent1"/>
+          </a:fillRef>
+          <a:effectRef idx="0">
+            <a:schemeClr val="accent1"/>
+          </a:effectRef>
+          <a:fontRef idx="minor">
+            <a:schemeClr val="lt1"/>
+          </a:fontRef>
+        </p:style>
+        <p:txBody>
+          <a:bodyPr rtlCol="0" anchor="ctr"/>
+          <a:lstStyle/>
+          <a:p>
+            <a:pPr algn="ctr"/>
+          </a:p>
+        </p:txBody>
+      </p:sp>
+      <p:sp>
+        <p:nvSpPr>
+          <p:cNvPr id="24" name="TextBox 23"/>
+          <p:cNvSpPr txBox="1"/>
+          <p:nvPr/>
+        </p:nvSpPr>
+        <p:spPr>
+          <a:xfrm>
+            <a:off x="758952" y="6053328"/>
+            <a:ext cx="10671048" cy="210312"/>
+          </a:xfrm>
+          <a:prstGeom prst="rect">
+            <a:avLst/>
+          </a:prstGeom>
+          <a:noFill/>
+        </p:spPr>
+        <p:txBody>
+          <a:bodyPr wrap="square" lIns="0" rIns="0" tIns="0" bIns="0">
+            <a:spAutoFit/>
+          </a:bodyPr>
+          <a:lstStyle/>
+          <a:p>
+            <a:pPr>
+              <a:spcAft>
+                <a:spcPts val="700"/>
+              </a:spcAft>
+              <a:defRPr sz="1100" b="1">
+                <a:solidFill>
+                  <a:srgbClr val="172F46"/>
+                </a:solidFill>
+                <a:latin typeface="DejaVu Sans"/>
+              </a:defRPr>
+            </a:pPr>
+            <a:r>
+              <a:t>A warning means “please review this”—not “this argument is definitely wrong.”</a:t>
+            </a:r>
+          </a:p>
+        </p:txBody>
+      </p:sp>
+    </p:spTree>
+  </p:cSld>
+  <p:clrMapOvr>
+    <a:masterClrMapping/>
+  </p:clrMapOvr>
+</p:sld>
+</file>
+
+<file path=ppt/slides/slide6.xml><?xml version="1.0" encoding="utf-8"?>
+<p:sld xmlns:a="http://schemas.openxmlformats.org/drawingml/2006/main" xmlns:p="http://schemas.openxmlformats.org/presentationml/2006/main" xmlns:r="http://schemas.openxmlformats.org/officeDocument/2006/relationships">
+  <p:cSld>
+    <p:bg>
+      <p:bgPr>
+        <a:solidFill>
+          <a:srgbClr val="FFFFFF"/>
+        </a:solidFill>
+        <a:effectLst/>
+      </p:bgPr>
+    </p:bg>
+    <p:spTree>
+      <p:nvGrpSpPr>
+        <p:cNvPr id="1" name=""/>
+        <p:cNvGrpSpPr/>
+        <p:nvPr/>
+      </p:nvGrpSpPr>
+      <p:grpSpPr/>
+      <p:sp>
+        <p:nvSpPr>
+          <p:cNvPr id="2" name="Rounded Rectangle 1"/>
+          <p:cNvSpPr/>
+          <p:nvPr/>
+        </p:nvSpPr>
+        <p:spPr>
+          <a:xfrm>
+            <a:off x="512064" y="384048"/>
+            <a:ext cx="91440" cy="329184"/>
+          </a:xfrm>
+          <a:prstGeom prst="roundRect">
+            <a:avLst>
+              <a:gd name="adj" fmla="val 6000"/>
+            </a:avLst>
+          </a:prstGeom>
+          <a:solidFill>
+            <a:srgbClr val="087B72"/>
+          </a:solidFill>
+          <a:ln>
+            <a:noFill/>
+          </a:ln>
+        </p:spPr>
+        <p:style>
+          <a:lnRef idx="1">
+            <a:schemeClr val="accent1"/>
+          </a:lnRef>
+          <a:fillRef idx="3">
+            <a:schemeClr val="accent1"/>
+          </a:fillRef>
+          <a:effectRef idx="0">
+            <a:schemeClr val="accent1"/>
+          </a:effectRef>
+          <a:fontRef idx="minor">
+            <a:schemeClr val="lt1"/>
+          </a:fontRef>
+        </p:style>
+        <p:txBody>
+          <a:bodyPr rtlCol="0" anchor="ctr"/>
+          <a:lstStyle/>
+          <a:p>
+            <a:pPr algn="ctr"/>
+          </a:p>
+        </p:txBody>
+      </p:sp>
+      <p:sp>
+        <p:nvSpPr>
+          <p:cNvPr id="3" name="TextBox 2"/>
+          <p:cNvSpPr txBox="1"/>
+          <p:nvPr/>
+        </p:nvSpPr>
+        <p:spPr>
+          <a:xfrm>
+            <a:off x="758952" y="420624"/>
+            <a:ext cx="10058400" cy="237744"/>
+          </a:xfrm>
+          <a:prstGeom prst="rect">
+            <a:avLst/>
+          </a:prstGeom>
+          <a:noFill/>
+        </p:spPr>
+        <p:txBody>
+          <a:bodyPr wrap="square" lIns="0" rIns="0" tIns="0" bIns="0">
+            <a:spAutoFit/>
+          </a:bodyPr>
+          <a:lstStyle/>
+          <a:p>
+            <a:pPr>
+              <a:spcAft>
+                <a:spcPts val="700"/>
+              </a:spcAft>
+              <a:defRPr sz="1100" b="1">
+                <a:solidFill>
+                  <a:srgbClr val="087B72"/>
+                </a:solidFill>
+                <a:latin typeface="DejaVu Sans"/>
+              </a:defRPr>
+            </a:pPr>
+            <a:r>
+              <a:t>IMPLEMENTATION · CELL 5</a:t>
+            </a:r>
+          </a:p>
+        </p:txBody>
+      </p:sp>
+      <p:sp>
+        <p:nvSpPr>
+          <p:cNvPr id="4" name="TextBox 3"/>
+          <p:cNvSpPr txBox="1"/>
+          <p:nvPr/>
+        </p:nvSpPr>
+        <p:spPr>
+          <a:xfrm>
+            <a:off x="594360" y="941832"/>
+            <a:ext cx="10972800" cy="914400"/>
+          </a:xfrm>
+          <a:prstGeom prst="rect">
+            <a:avLst/>
+          </a:prstGeom>
+          <a:noFill/>
+        </p:spPr>
+        <p:txBody>
+          <a:bodyPr wrap="square" lIns="0" rIns="0" tIns="0" bIns="0">
+            <a:spAutoFit/>
+          </a:bodyPr>
+          <a:lstStyle/>
+          <a:p>
+            <a:pPr>
+              <a:spcAft>
+                <a:spcPts val="700"/>
+              </a:spcAft>
+              <a:defRPr sz="3000" b="1">
+                <a:solidFill>
+                  <a:srgbClr val="172F46"/>
+                </a:solidFill>
+                <a:latin typeface="DejaVu Sans"/>
+              </a:defRPr>
+            </a:pPr>
+            <a:r>
+              <a:t>Test whether changes break expected behaviour</a:t>
+            </a:r>
+          </a:p>
+        </p:txBody>
+      </p:sp>
+      <p:sp>
+        <p:nvSpPr>
+          <p:cNvPr id="5" name="TextBox 4"/>
+          <p:cNvSpPr txBox="1"/>
+          <p:nvPr/>
+        </p:nvSpPr>
+        <p:spPr>
+          <a:xfrm>
+            <a:off x="594360" y="1856231"/>
+            <a:ext cx="10972800" cy="548640"/>
+          </a:xfrm>
+          <a:prstGeom prst="rect">
+            <a:avLst/>
+          </a:prstGeom>
+          <a:noFill/>
+        </p:spPr>
+        <p:txBody>
+          <a:bodyPr wrap="square" lIns="0" rIns="0" tIns="0" bIns="0">
+            <a:spAutoFit/>
+          </a:bodyPr>
+          <a:lstStyle/>
+          <a:p>
+            <a:pPr>
+              <a:spcAft>
+                <a:spcPts val="700"/>
+              </a:spcAft>
+              <a:defRPr sz="1600" b="0">
+                <a:solidFill>
+                  <a:srgbClr val="617786"/>
+                </a:solidFill>
+                <a:latin typeface="DejaVu Sans"/>
+              </a:defRPr>
+            </a:pPr>
+            <a:r>
+              <a:t>Use fixed examples with written expectations, then report PASS or FAIL.</a:t>
+            </a:r>
+          </a:p>
+        </p:txBody>
+      </p:sp>
+      <p:sp>
+        <p:nvSpPr>
+          <p:cNvPr id="6" name="TextBox 5"/>
+          <p:cNvSpPr txBox="1"/>
+          <p:nvPr/>
+        </p:nvSpPr>
+        <p:spPr>
+          <a:xfrm>
+            <a:off x="594360" y="6510528"/>
+            <a:ext cx="10058400" cy="219456"/>
+          </a:xfrm>
+          <a:prstGeom prst="rect">
+            <a:avLst/>
+          </a:prstGeom>
+          <a:noFill/>
+        </p:spPr>
+        <p:txBody>
+          <a:bodyPr wrap="square" lIns="0" rIns="0" tIns="0" bIns="0">
+            <a:spAutoFit/>
+          </a:bodyPr>
+          <a:lstStyle/>
+          <a:p>
+            <a:pPr>
+              <a:spcAft>
+                <a:spcPts val="700"/>
+              </a:spcAft>
+              <a:defRPr sz="800" b="0">
+                <a:solidFill>
+                  <a:srgbClr val="617786"/>
+                </a:solidFill>
+                <a:latin typeface="DejaVu Sans"/>
+              </a:defRPr>
+            </a:pPr>
+            <a:r>
+              <a:t>Notebook cell 5: four test groups passed; fixtures are synthetic, not genuinely lawyer-approved historical files.</a:t>
+            </a:r>
+          </a:p>
+        </p:txBody>
+      </p:sp>
+      <p:sp>
+        <p:nvSpPr>
+          <p:cNvPr id="7" name="TextBox 6"/>
+          <p:cNvSpPr txBox="1"/>
+          <p:nvPr/>
+        </p:nvSpPr>
+        <p:spPr>
+          <a:xfrm>
+            <a:off x="10817352" y="6446520"/>
+            <a:ext cx="731520" cy="274320"/>
+          </a:xfrm>
+          <a:prstGeom prst="rect">
+            <a:avLst/>
+          </a:prstGeom>
+          <a:noFill/>
+        </p:spPr>
+        <p:txBody>
+          <a:bodyPr wrap="square" lIns="0" rIns="0" tIns="0" bIns="0">
+            <a:spAutoFit/>
+          </a:bodyPr>
+          <a:lstStyle/>
+          <a:p>
+            <a:pPr>
+              <a:spcAft>
+                <a:spcPts val="700"/>
+              </a:spcAft>
+              <a:defRPr sz="1000" b="0">
+                <a:solidFill>
+                  <a:srgbClr val="617786"/>
+                </a:solidFill>
+                <a:latin typeface="DejaVu Sans"/>
+              </a:defRPr>
+            </a:pPr>
+            <a:r>
+              <a:t>06 / 07</a:t>
+            </a:r>
+          </a:p>
+        </p:txBody>
+      </p:sp>
+      <p:sp>
+        <p:nvSpPr>
+          <p:cNvPr id="8" name="Rounded Rectangle 7"/>
+          <p:cNvSpPr/>
+          <p:nvPr/>
+        </p:nvSpPr>
+        <p:spPr>
+          <a:xfrm>
+            <a:off x="594360" y="2660904"/>
+            <a:ext cx="393192" cy="393192"/>
+          </a:xfrm>
+          <a:prstGeom prst="roundRect">
+            <a:avLst>
+              <a:gd name="adj" fmla="val 6000"/>
+            </a:avLst>
+          </a:prstGeom>
+          <a:solidFill>
+            <a:srgbClr val="087B72"/>
+          </a:solidFill>
+          <a:ln>
+            <a:noFill/>
+          </a:ln>
+        </p:spPr>
+        <p:style>
+          <a:lnRef idx="1">
+            <a:schemeClr val="accent1"/>
+          </a:lnRef>
+          <a:fillRef idx="3">
+            <a:schemeClr val="accent1"/>
+          </a:fillRef>
+          <a:effectRef idx="0">
+            <a:schemeClr val="accent1"/>
+          </a:effectRef>
+          <a:fontRef idx="minor">
+            <a:schemeClr val="lt1"/>
+          </a:fontRef>
+        </p:style>
+        <p:txBody>
+          <a:bodyPr rtlCol="0" anchor="ctr"/>
+          <a:lstStyle/>
+          <a:p>
+            <a:pPr algn="ctr"/>
+          </a:p>
+        </p:txBody>
+      </p:sp>
+      <p:sp>
+        <p:nvSpPr>
+          <p:cNvPr id="9" name="TextBox 8"/>
+          <p:cNvSpPr txBox="1"/>
+          <p:nvPr/>
+        </p:nvSpPr>
+        <p:spPr>
+          <a:xfrm>
+            <a:off x="685800" y="2738628"/>
+            <a:ext cx="274320" cy="228600"/>
+          </a:xfrm>
+          <a:prstGeom prst="rect">
+            <a:avLst/>
+          </a:prstGeom>
+          <a:noFill/>
+        </p:spPr>
+        <p:txBody>
+          <a:bodyPr wrap="square" lIns="0" rIns="0" tIns="0" bIns="0">
+            <a:spAutoFit/>
+          </a:bodyPr>
+          <a:lstStyle/>
+          <a:p>
+            <a:pPr>
+              <a:spcAft>
+                <a:spcPts val="700"/>
+              </a:spcAft>
+              <a:defRPr sz="1200" b="1">
                 <a:solidFill>
                   <a:srgbClr val="FFFFFF"/>
                 </a:solidFill>
@@ -7433,8 +9406,293 @@
               </a:defRPr>
             </a:pPr>
             <a:r>
-              <a:t>A warning prompts review. Passing tests is not a guarantee of legal accuracy.</a:t>
-            </a:r>
+              <a:t>1</a:t>
+            </a:r>
+          </a:p>
+        </p:txBody>
+      </p:sp>
+      <p:sp>
+        <p:nvSpPr>
+          <p:cNvPr id="10" name="TextBox 9"/>
+          <p:cNvSpPr txBox="1"/>
+          <p:nvPr/>
+        </p:nvSpPr>
+        <p:spPr>
+          <a:xfrm>
+            <a:off x="1225296" y="2660904"/>
+            <a:ext cx="4663440" cy="365760"/>
+          </a:xfrm>
+          <a:prstGeom prst="rect">
+            <a:avLst/>
+          </a:prstGeom>
+          <a:noFill/>
+        </p:spPr>
+        <p:txBody>
+          <a:bodyPr wrap="square" lIns="0" rIns="0" tIns="0" bIns="0">
+            <a:spAutoFit/>
+          </a:bodyPr>
+          <a:lstStyle/>
+          <a:p>
+            <a:pPr>
+              <a:spcAft>
+                <a:spcPts val="700"/>
+              </a:spcAft>
+              <a:defRPr sz="1900" b="1">
+                <a:solidFill>
+                  <a:srgbClr val="172F46"/>
+                </a:solidFill>
+                <a:latin typeface="DejaVu Sans"/>
+              </a:defRPr>
+            </a:pPr>
+            <a:r>
+              <a:t>Repeat the same case</a:t>
+            </a:r>
+          </a:p>
+        </p:txBody>
+      </p:sp>
+      <p:sp>
+        <p:nvSpPr>
+          <p:cNvPr id="11" name="TextBox 10"/>
+          <p:cNvSpPr txBox="1"/>
+          <p:nvPr/>
+        </p:nvSpPr>
+        <p:spPr>
+          <a:xfrm>
+            <a:off x="1225296" y="3127248"/>
+            <a:ext cx="4663440" cy="603504"/>
+          </a:xfrm>
+          <a:prstGeom prst="rect">
+            <a:avLst/>
+          </a:prstGeom>
+          <a:noFill/>
+        </p:spPr>
+        <p:txBody>
+          <a:bodyPr wrap="square" lIns="0" rIns="0" tIns="0" bIns="0">
+            <a:spAutoFit/>
+          </a:bodyPr>
+          <a:lstStyle/>
+          <a:p>
+            <a:pPr>
+              <a:spcAft>
+                <a:spcPts val="700"/>
+              </a:spcAft>
+              <a:defRPr sz="1500" b="0">
+                <a:solidFill>
+                  <a:srgbClr val="304455"/>
+                </a:solidFill>
+                <a:latin typeface="DejaVu Sans"/>
+              </a:defRPr>
+            </a:pPr>
+            <a:r>
+              <a:t>Run it 25 times and compare the document and full-result fingerprints.</a:t>
+            </a:r>
+          </a:p>
+        </p:txBody>
+      </p:sp>
+      <p:sp>
+        <p:nvSpPr>
+          <p:cNvPr id="12" name="Rounded Rectangle 11"/>
+          <p:cNvSpPr/>
+          <p:nvPr/>
+        </p:nvSpPr>
+        <p:spPr>
+          <a:xfrm>
+            <a:off x="594360" y="3758184"/>
+            <a:ext cx="393192" cy="393192"/>
+          </a:xfrm>
+          <a:prstGeom prst="roundRect">
+            <a:avLst>
+              <a:gd name="adj" fmla="val 6000"/>
+            </a:avLst>
+          </a:prstGeom>
+          <a:solidFill>
+            <a:srgbClr val="087B72"/>
+          </a:solidFill>
+          <a:ln>
+            <a:noFill/>
+          </a:ln>
+        </p:spPr>
+        <p:style>
+          <a:lnRef idx="1">
+            <a:schemeClr val="accent1"/>
+          </a:lnRef>
+          <a:fillRef idx="3">
+            <a:schemeClr val="accent1"/>
+          </a:fillRef>
+          <a:effectRef idx="0">
+            <a:schemeClr val="accent1"/>
+          </a:effectRef>
+          <a:fontRef idx="minor">
+            <a:schemeClr val="lt1"/>
+          </a:fontRef>
+        </p:style>
+        <p:txBody>
+          <a:bodyPr rtlCol="0" anchor="ctr"/>
+          <a:lstStyle/>
+          <a:p>
+            <a:pPr algn="ctr"/>
+          </a:p>
+        </p:txBody>
+      </p:sp>
+      <p:sp>
+        <p:nvSpPr>
+          <p:cNvPr id="13" name="TextBox 12"/>
+          <p:cNvSpPr txBox="1"/>
+          <p:nvPr/>
+        </p:nvSpPr>
+        <p:spPr>
+          <a:xfrm>
+            <a:off x="685800" y="3835908"/>
+            <a:ext cx="274320" cy="228600"/>
+          </a:xfrm>
+          <a:prstGeom prst="rect">
+            <a:avLst/>
+          </a:prstGeom>
+          <a:noFill/>
+        </p:spPr>
+        <p:txBody>
+          <a:bodyPr wrap="square" lIns="0" rIns="0" tIns="0" bIns="0">
+            <a:spAutoFit/>
+          </a:bodyPr>
+          <a:lstStyle/>
+          <a:p>
+            <a:pPr>
+              <a:spcAft>
+                <a:spcPts val="700"/>
+              </a:spcAft>
+              <a:defRPr sz="1200" b="1">
+                <a:solidFill>
+                  <a:srgbClr val="FFFFFF"/>
+                </a:solidFill>
+                <a:latin typeface="DejaVu Sans"/>
+              </a:defRPr>
+            </a:pPr>
+            <a:r>
+              <a:t>2</a:t>
+            </a:r>
+          </a:p>
+        </p:txBody>
+      </p:sp>
+      <p:sp>
+        <p:nvSpPr>
+          <p:cNvPr id="14" name="TextBox 13"/>
+          <p:cNvSpPr txBox="1"/>
+          <p:nvPr/>
+        </p:nvSpPr>
+        <p:spPr>
+          <a:xfrm>
+            <a:off x="1225296" y="3758184"/>
+            <a:ext cx="4663440" cy="365760"/>
+          </a:xfrm>
+          <a:prstGeom prst="rect">
+            <a:avLst/>
+          </a:prstGeom>
+          <a:noFill/>
+        </p:spPr>
+        <p:txBody>
+          <a:bodyPr wrap="square" lIns="0" rIns="0" tIns="0" bIns="0">
+            <a:spAutoFit/>
+          </a:bodyPr>
+          <a:lstStyle/>
+          <a:p>
+            <a:pPr>
+              <a:spcAft>
+                <a:spcPts val="700"/>
+              </a:spcAft>
+              <a:defRPr sz="1900" b="1">
+                <a:solidFill>
+                  <a:srgbClr val="172F46"/>
+                </a:solidFill>
+                <a:latin typeface="DejaVu Sans"/>
+              </a:defRPr>
+            </a:pPr>
+            <a:r>
+              <a:t>Check four cases and conflicts</a:t>
+            </a:r>
+          </a:p>
+        </p:txBody>
+      </p:sp>
+      <p:sp>
+        <p:nvSpPr>
+          <p:cNvPr id="15" name="TextBox 14"/>
+          <p:cNvSpPr txBox="1"/>
+          <p:nvPr/>
+        </p:nvSpPr>
+        <p:spPr>
+          <a:xfrm>
+            <a:off x="1225296" y="4224528"/>
+            <a:ext cx="4663440" cy="603504"/>
+          </a:xfrm>
+          <a:prstGeom prst="rect">
+            <a:avLst/>
+          </a:prstGeom>
+          <a:noFill/>
+        </p:spPr>
+        <p:txBody>
+          <a:bodyPr wrap="square" lIns="0" rIns="0" tIns="0" bIns="0">
+            <a:spAutoFit/>
+          </a:bodyPr>
+          <a:lstStyle/>
+          <a:p>
+            <a:pPr>
+              <a:spcAft>
+                <a:spcPts val="700"/>
+              </a:spcAft>
+              <a:defRPr sz="1500" b="0">
+                <a:solidFill>
+                  <a:srgbClr val="304455"/>
+                </a:solidFill>
+                <a:latin typeface="DejaVu Sans"/>
+              </a:defRPr>
+            </a:pPr>
+            <a:r>
+              <a:t>Check four expected module/citation lists; request both exclusive routes.</a:t>
+            </a:r>
+          </a:p>
+        </p:txBody>
+      </p:sp>
+      <p:sp>
+        <p:nvSpPr>
+          <p:cNvPr id="16" name="Rounded Rectangle 15"/>
+          <p:cNvSpPr/>
+          <p:nvPr/>
+        </p:nvSpPr>
+        <p:spPr>
+          <a:xfrm>
+            <a:off x="594360" y="4855464"/>
+            <a:ext cx="393192" cy="393192"/>
+          </a:xfrm>
+          <a:prstGeom prst="roundRect">
+            <a:avLst>
+              <a:gd name="adj" fmla="val 6000"/>
+            </a:avLst>
+          </a:prstGeom>
+          <a:solidFill>
+            <a:srgbClr val="087B72"/>
+          </a:solidFill>
+          <a:ln>
+            <a:noFill/>
+          </a:ln>
+        </p:spPr>
+        <p:style>
+          <a:lnRef idx="1">
+            <a:schemeClr val="accent1"/>
+          </a:lnRef>
+          <a:fillRef idx="3">
+            <a:schemeClr val="accent1"/>
+          </a:fillRef>
+          <a:effectRef idx="0">
+            <a:schemeClr val="accent1"/>
+          </a:effectRef>
+          <a:fontRef idx="minor">
+            <a:schemeClr val="lt1"/>
+          </a:fontRef>
+        </p:style>
+        <p:txBody>
+          <a:bodyPr rtlCol="0" anchor="ctr"/>
+          <a:lstStyle/>
+          <a:p>
+            <a:pPr algn="ctr"/>
           </a:p>
         </p:txBody>
       </p:sp>
@@ -7446,36 +9704,1431 @@
         </p:nvSpPr>
         <p:spPr>
           <a:xfrm>
-            <a:off x="594360" y="6227064"/>
-            <a:ext cx="10058400" cy="182880"/>
-          </a:xfrm>
-          <a:prstGeom prst="rect">
-            <a:avLst/>
-          </a:prstGeom>
-          <a:noFill/>
-        </p:spPr>
-        <p:txBody>
-          <a:bodyPr wrap="square" tIns="0" bIns="0" lIns="0" rIns="0">
-            <a:spAutoFit/>
-          </a:bodyPr>
-          <a:lstStyle/>
-          <a:p>
-            <a:pPr>
-              <a:spcAft>
-                <a:spcPts val="1000"/>
-              </a:spcAft>
-              <a:defRPr sz="900" b="0">
-                <a:solidFill>
-                  <a:srgbClr val="117970"/>
-                </a:solidFill>
-                <a:latin typeface="DejaVu Sans"/>
-              </a:defRPr>
-            </a:pPr>
-            <a:r>
-              <a:rPr>
-                <a:hlinkClick r:id="rId2"/>
-              </a:rPr>
-              <a:t>Code and executed notebook: github.com/nafismam/UkilRAG</a:t>
+            <a:off x="685800" y="4933188"/>
+            <a:ext cx="274320" cy="228600"/>
+          </a:xfrm>
+          <a:prstGeom prst="rect">
+            <a:avLst/>
+          </a:prstGeom>
+          <a:noFill/>
+        </p:spPr>
+        <p:txBody>
+          <a:bodyPr wrap="square" lIns="0" rIns="0" tIns="0" bIns="0">
+            <a:spAutoFit/>
+          </a:bodyPr>
+          <a:lstStyle/>
+          <a:p>
+            <a:pPr>
+              <a:spcAft>
+                <a:spcPts val="700"/>
+              </a:spcAft>
+              <a:defRPr sz="1200" b="1">
+                <a:solidFill>
+                  <a:srgbClr val="FFFFFF"/>
+                </a:solidFill>
+                <a:latin typeface="DejaVu Sans"/>
+              </a:defRPr>
+            </a:pPr>
+            <a:r>
+              <a:t>3</a:t>
+            </a:r>
+          </a:p>
+        </p:txBody>
+      </p:sp>
+      <p:sp>
+        <p:nvSpPr>
+          <p:cNvPr id="18" name="TextBox 17"/>
+          <p:cNvSpPr txBox="1"/>
+          <p:nvPr/>
+        </p:nvSpPr>
+        <p:spPr>
+          <a:xfrm>
+            <a:off x="1225296" y="4855464"/>
+            <a:ext cx="4663440" cy="365760"/>
+          </a:xfrm>
+          <a:prstGeom prst="rect">
+            <a:avLst/>
+          </a:prstGeom>
+          <a:noFill/>
+        </p:spPr>
+        <p:txBody>
+          <a:bodyPr wrap="square" lIns="0" rIns="0" tIns="0" bIns="0">
+            <a:spAutoFit/>
+          </a:bodyPr>
+          <a:lstStyle/>
+          <a:p>
+            <a:pPr>
+              <a:spcAft>
+                <a:spcPts val="700"/>
+              </a:spcAft>
+              <a:defRPr sz="1900" b="1">
+                <a:solidFill>
+                  <a:srgbClr val="172F46"/>
+                </a:solidFill>
+                <a:latin typeface="DejaVu Sans"/>
+              </a:defRPr>
+            </a:pPr>
+            <a:r>
+              <a:t>Add a simulated source update</a:t>
+            </a:r>
+          </a:p>
+        </p:txBody>
+      </p:sp>
+      <p:sp>
+        <p:nvSpPr>
+          <p:cNvPr id="19" name="TextBox 18"/>
+          <p:cNvSpPr txBox="1"/>
+          <p:nvPr/>
+        </p:nvSpPr>
+        <p:spPr>
+          <a:xfrm>
+            <a:off x="1225296" y="5321807"/>
+            <a:ext cx="4663440" cy="603504"/>
+          </a:xfrm>
+          <a:prstGeom prst="rect">
+            <a:avLst/>
+          </a:prstGeom>
+          <a:noFill/>
+        </p:spPr>
+        <p:txBody>
+          <a:bodyPr wrap="square" lIns="0" rIns="0" tIns="0" bIns="0">
+            <a:spAutoFit/>
+          </a:bodyPr>
+          <a:lstStyle/>
+          <a:p>
+            <a:pPr>
+              <a:spcAft>
+                <a:spcPts val="700"/>
+              </a:spcAft>
+              <a:defRPr sz="1500" b="0">
+                <a:solidFill>
+                  <a:srgbClr val="304455"/>
+                </a:solidFill>
+                <a:latin typeface="DejaVu Sans"/>
+              </a:defRPr>
+            </a:pPr>
+            <a:r>
+              <a:t>Check the correct paragraphs receive warnings after the change.</a:t>
+            </a:r>
+          </a:p>
+        </p:txBody>
+      </p:sp>
+      <p:sp>
+        <p:nvSpPr>
+          <p:cNvPr id="20" name="Rounded Rectangle 19"/>
+          <p:cNvSpPr/>
+          <p:nvPr/>
+        </p:nvSpPr>
+        <p:spPr>
+          <a:xfrm>
+            <a:off x="6428232" y="2587752"/>
+            <a:ext cx="5166360" cy="3264408"/>
+          </a:xfrm>
+          <a:prstGeom prst="roundRect">
+            <a:avLst>
+              <a:gd name="adj" fmla="val 6000"/>
+            </a:avLst>
+          </a:prstGeom>
+          <a:solidFill>
+            <a:srgbClr val="E7F3EF"/>
+          </a:solidFill>
+          <a:ln>
+            <a:noFill/>
+          </a:ln>
+        </p:spPr>
+        <p:style>
+          <a:lnRef idx="1">
+            <a:schemeClr val="accent1"/>
+          </a:lnRef>
+          <a:fillRef idx="3">
+            <a:schemeClr val="accent1"/>
+          </a:fillRef>
+          <a:effectRef idx="0">
+            <a:schemeClr val="accent1"/>
+          </a:effectRef>
+          <a:fontRef idx="minor">
+            <a:schemeClr val="lt1"/>
+          </a:fontRef>
+        </p:style>
+        <p:txBody>
+          <a:bodyPr rtlCol="0" anchor="ctr"/>
+          <a:lstStyle/>
+          <a:p>
+            <a:pPr algn="ctr"/>
+          </a:p>
+        </p:txBody>
+      </p:sp>
+      <p:sp>
+        <p:nvSpPr>
+          <p:cNvPr id="21" name="TextBox 20"/>
+          <p:cNvSpPr txBox="1"/>
+          <p:nvPr/>
+        </p:nvSpPr>
+        <p:spPr>
+          <a:xfrm>
+            <a:off x="6702552" y="2862072"/>
+            <a:ext cx="4617720" cy="301752"/>
+          </a:xfrm>
+          <a:prstGeom prst="rect">
+            <a:avLst/>
+          </a:prstGeom>
+          <a:noFill/>
+        </p:spPr>
+        <p:txBody>
+          <a:bodyPr wrap="square" lIns="0" rIns="0" tIns="0" bIns="0">
+            <a:spAutoFit/>
+          </a:bodyPr>
+          <a:lstStyle/>
+          <a:p>
+            <a:pPr>
+              <a:spcAft>
+                <a:spcPts val="700"/>
+              </a:spcAft>
+              <a:defRPr sz="1100" b="1">
+                <a:solidFill>
+                  <a:srgbClr val="087B72"/>
+                </a:solidFill>
+                <a:latin typeface="DejaVu Sans"/>
+              </a:defRPr>
+            </a:pPr>
+            <a:r>
+              <a:t>RESULTS</a:t>
+            </a:r>
+          </a:p>
+        </p:txBody>
+      </p:sp>
+      <p:sp>
+        <p:nvSpPr>
+          <p:cNvPr id="22" name="TextBox 21"/>
+          <p:cNvSpPr txBox="1"/>
+          <p:nvPr/>
+        </p:nvSpPr>
+        <p:spPr>
+          <a:xfrm>
+            <a:off x="6702552" y="3465576"/>
+            <a:ext cx="4617720" cy="2148840"/>
+          </a:xfrm>
+          <a:prstGeom prst="rect">
+            <a:avLst/>
+          </a:prstGeom>
+          <a:noFill/>
+        </p:spPr>
+        <p:txBody>
+          <a:bodyPr wrap="square" lIns="0" rIns="0" tIns="0" bIns="0">
+            <a:spAutoFit/>
+          </a:bodyPr>
+          <a:lstStyle/>
+          <a:p>
+            <a:pPr>
+              <a:spcAft>
+                <a:spcPts val="700"/>
+              </a:spcAft>
+              <a:defRPr sz="1600" b="0">
+                <a:solidFill>
+                  <a:srgbClr val="172F46"/>
+                </a:solidFill>
+                <a:latin typeface="DejaVu Sans"/>
+              </a:defRPr>
+            </a:pPr>
+            <a:r>
+              <a:t>Repeatability: PASS</a:t>
+            </a:r>
+          </a:p>
+          <a:p>
+            <a:pPr>
+              <a:spcAft>
+                <a:spcPts val="700"/>
+              </a:spcAft>
+              <a:defRPr sz="1600" b="0">
+                <a:solidFill>
+                  <a:srgbClr val="172F46"/>
+                </a:solidFill>
+                <a:latin typeface="DejaVu Sans"/>
+              </a:defRPr>
+            </a:pPr>
+            <a:r>
+              <a:t>Four reference cases: PASS</a:t>
+            </a:r>
+          </a:p>
+          <a:p>
+            <a:pPr>
+              <a:spcAft>
+                <a:spcPts val="700"/>
+              </a:spcAft>
+              <a:defRPr sz="1600" b="0">
+                <a:solidFill>
+                  <a:srgbClr val="172F46"/>
+                </a:solidFill>
+                <a:latin typeface="DejaVu Sans"/>
+              </a:defRPr>
+            </a:pPr>
+            <a:r>
+              <a:t>Conflict guard: PASS</a:t>
+            </a:r>
+          </a:p>
+          <a:p>
+            <a:pPr>
+              <a:spcAft>
+                <a:spcPts val="700"/>
+              </a:spcAft>
+              <a:defRPr sz="1600" b="0">
+                <a:solidFill>
+                  <a:srgbClr val="172F46"/>
+                </a:solidFill>
+                <a:latin typeface="DejaVu Sans"/>
+              </a:defRPr>
+            </a:pPr>
+            <a:r>
+              <a:t>Update warning check: PASS</a:t>
+            </a:r>
+          </a:p>
+          <a:p>
+            <a:pPr>
+              <a:spcAft>
+                <a:spcPts val="700"/>
+              </a:spcAft>
+              <a:defRPr sz="1600" b="0">
+                <a:solidFill>
+                  <a:srgbClr val="172F46"/>
+                </a:solidFill>
+                <a:latin typeface="DejaVu Sans"/>
+              </a:defRPr>
+            </a:pPr>
+          </a:p>
+          <a:p>
+            <a:pPr>
+              <a:spcAft>
+                <a:spcPts val="700"/>
+              </a:spcAft>
+              <a:defRPr sz="1600" b="0">
+                <a:solidFill>
+                  <a:srgbClr val="172F46"/>
+                </a:solidFill>
+                <a:latin typeface="DejaVu Sans"/>
+              </a:defRPr>
+            </a:pPr>
+            <a:r>
+              <a:t>Extra checks cover citations and search.</a:t>
+            </a:r>
+          </a:p>
+        </p:txBody>
+      </p:sp>
+      <p:sp>
+        <p:nvSpPr>
+          <p:cNvPr id="23" name="Rounded Rectangle 22"/>
+          <p:cNvSpPr/>
+          <p:nvPr/>
+        </p:nvSpPr>
+        <p:spPr>
+          <a:xfrm>
+            <a:off x="594360" y="6007608"/>
+            <a:ext cx="11000232" cy="320040"/>
+          </a:xfrm>
+          <a:prstGeom prst="roundRect">
+            <a:avLst>
+              <a:gd name="adj" fmla="val 6000"/>
+            </a:avLst>
+          </a:prstGeom>
+          <a:solidFill>
+            <a:srgbClr val="EFF4F6"/>
+          </a:solidFill>
+          <a:ln>
+            <a:noFill/>
+          </a:ln>
+        </p:spPr>
+        <p:style>
+          <a:lnRef idx="1">
+            <a:schemeClr val="accent1"/>
+          </a:lnRef>
+          <a:fillRef idx="3">
+            <a:schemeClr val="accent1"/>
+          </a:fillRef>
+          <a:effectRef idx="0">
+            <a:schemeClr val="accent1"/>
+          </a:effectRef>
+          <a:fontRef idx="minor">
+            <a:schemeClr val="lt1"/>
+          </a:fontRef>
+        </p:style>
+        <p:txBody>
+          <a:bodyPr rtlCol="0" anchor="ctr"/>
+          <a:lstStyle/>
+          <a:p>
+            <a:pPr algn="ctr"/>
+          </a:p>
+        </p:txBody>
+      </p:sp>
+      <p:sp>
+        <p:nvSpPr>
+          <p:cNvPr id="24" name="TextBox 23"/>
+          <p:cNvSpPr txBox="1"/>
+          <p:nvPr/>
+        </p:nvSpPr>
+        <p:spPr>
+          <a:xfrm>
+            <a:off x="758952" y="6053328"/>
+            <a:ext cx="10671048" cy="210312"/>
+          </a:xfrm>
+          <a:prstGeom prst="rect">
+            <a:avLst/>
+          </a:prstGeom>
+          <a:noFill/>
+        </p:spPr>
+        <p:txBody>
+          <a:bodyPr wrap="square" lIns="0" rIns="0" tIns="0" bIns="0">
+            <a:spAutoFit/>
+          </a:bodyPr>
+          <a:lstStyle/>
+          <a:p>
+            <a:pPr>
+              <a:spcAft>
+                <a:spcPts val="700"/>
+              </a:spcAft>
+              <a:defRPr sz="1100" b="1">
+                <a:solidFill>
+                  <a:srgbClr val="172F46"/>
+                </a:solidFill>
+                <a:latin typeface="DejaVu Sans"/>
+              </a:defRPr>
+            </a:pPr>
+            <a:r>
+              <a:t>Passing shows expected software behaviour on these examples—not universal legal accuracy.</a:t>
+            </a:r>
+          </a:p>
+        </p:txBody>
+      </p:sp>
+    </p:spTree>
+  </p:cSld>
+  <p:clrMapOvr>
+    <a:masterClrMapping/>
+  </p:clrMapOvr>
+</p:sld>
+</file>
+
+<file path=ppt/slides/slide7.xml><?xml version="1.0" encoding="utf-8"?>
+<p:sld xmlns:a="http://schemas.openxmlformats.org/drawingml/2006/main" xmlns:p="http://schemas.openxmlformats.org/presentationml/2006/main" xmlns:r="http://schemas.openxmlformats.org/officeDocument/2006/relationships">
+  <p:cSld>
+    <p:bg>
+      <p:bgPr>
+        <a:solidFill>
+          <a:srgbClr val="FFFFFF"/>
+        </a:solidFill>
+        <a:effectLst/>
+      </p:bgPr>
+    </p:bg>
+    <p:spTree>
+      <p:nvGrpSpPr>
+        <p:cNvPr id="1" name=""/>
+        <p:cNvGrpSpPr/>
+        <p:nvPr/>
+      </p:nvGrpSpPr>
+      <p:grpSpPr/>
+      <p:sp>
+        <p:nvSpPr>
+          <p:cNvPr id="2" name="Rounded Rectangle 1"/>
+          <p:cNvSpPr/>
+          <p:nvPr/>
+        </p:nvSpPr>
+        <p:spPr>
+          <a:xfrm>
+            <a:off x="512064" y="384048"/>
+            <a:ext cx="91440" cy="329184"/>
+          </a:xfrm>
+          <a:prstGeom prst="roundRect">
+            <a:avLst>
+              <a:gd name="adj" fmla="val 6000"/>
+            </a:avLst>
+          </a:prstGeom>
+          <a:solidFill>
+            <a:srgbClr val="087B72"/>
+          </a:solidFill>
+          <a:ln>
+            <a:noFill/>
+          </a:ln>
+        </p:spPr>
+        <p:style>
+          <a:lnRef idx="1">
+            <a:schemeClr val="accent1"/>
+          </a:lnRef>
+          <a:fillRef idx="3">
+            <a:schemeClr val="accent1"/>
+          </a:fillRef>
+          <a:effectRef idx="0">
+            <a:schemeClr val="accent1"/>
+          </a:effectRef>
+          <a:fontRef idx="minor">
+            <a:schemeClr val="lt1"/>
+          </a:fontRef>
+        </p:style>
+        <p:txBody>
+          <a:bodyPr rtlCol="0" anchor="ctr"/>
+          <a:lstStyle/>
+          <a:p>
+            <a:pPr algn="ctr"/>
+          </a:p>
+        </p:txBody>
+      </p:sp>
+      <p:sp>
+        <p:nvSpPr>
+          <p:cNvPr id="3" name="TextBox 2"/>
+          <p:cNvSpPr txBox="1"/>
+          <p:nvPr/>
+        </p:nvSpPr>
+        <p:spPr>
+          <a:xfrm>
+            <a:off x="758952" y="420624"/>
+            <a:ext cx="10058400" cy="237744"/>
+          </a:xfrm>
+          <a:prstGeom prst="rect">
+            <a:avLst/>
+          </a:prstGeom>
+          <a:noFill/>
+        </p:spPr>
+        <p:txBody>
+          <a:bodyPr wrap="square" lIns="0" rIns="0" tIns="0" bIns="0">
+            <a:spAutoFit/>
+          </a:bodyPr>
+          <a:lstStyle/>
+          <a:p>
+            <a:pPr>
+              <a:spcAft>
+                <a:spcPts val="700"/>
+              </a:spcAft>
+              <a:defRPr sz="1100" b="1">
+                <a:solidFill>
+                  <a:srgbClr val="087B72"/>
+                </a:solidFill>
+                <a:latin typeface="DejaVu Sans"/>
+              </a:defRPr>
+            </a:pPr>
+            <a:r>
+              <a:t>REAL-USE RELIABILITY · PROPOSED NEXT STEPS</a:t>
+            </a:r>
+          </a:p>
+        </p:txBody>
+      </p:sp>
+      <p:sp>
+        <p:nvSpPr>
+          <p:cNvPr id="4" name="TextBox 3"/>
+          <p:cNvSpPr txBox="1"/>
+          <p:nvPr/>
+        </p:nvSpPr>
+        <p:spPr>
+          <a:xfrm>
+            <a:off x="594360" y="941832"/>
+            <a:ext cx="10972800" cy="914400"/>
+          </a:xfrm>
+          <a:prstGeom prst="rect">
+            <a:avLst/>
+          </a:prstGeom>
+          <a:noFill/>
+        </p:spPr>
+        <p:txBody>
+          <a:bodyPr wrap="square" lIns="0" rIns="0" tIns="0" bIns="0">
+            <a:spAutoFit/>
+          </a:bodyPr>
+          <a:lstStyle/>
+          <a:p>
+            <a:pPr>
+              <a:spcAft>
+                <a:spcPts val="700"/>
+              </a:spcAft>
+              <a:defRPr sz="3000" b="1">
+                <a:solidFill>
+                  <a:srgbClr val="172F46"/>
+                </a:solidFill>
+                <a:latin typeface="DejaVu Sans"/>
+              </a:defRPr>
+            </a:pPr>
+            <a:r>
+              <a:t>How I would keep it reliable in real use</a:t>
+            </a:r>
+          </a:p>
+        </p:txBody>
+      </p:sp>
+      <p:sp>
+        <p:nvSpPr>
+          <p:cNvPr id="5" name="TextBox 4"/>
+          <p:cNvSpPr txBox="1"/>
+          <p:nvPr/>
+        </p:nvSpPr>
+        <p:spPr>
+          <a:xfrm>
+            <a:off x="594360" y="1856231"/>
+            <a:ext cx="10972800" cy="548640"/>
+          </a:xfrm>
+          <a:prstGeom prst="rect">
+            <a:avLst/>
+          </a:prstGeom>
+          <a:noFill/>
+        </p:spPr>
+        <p:txBody>
+          <a:bodyPr wrap="square" lIns="0" rIns="0" tIns="0" bIns="0">
+            <a:spAutoFit/>
+          </a:bodyPr>
+          <a:lstStyle/>
+          <a:p>
+            <a:pPr>
+              <a:spcAft>
+                <a:spcPts val="700"/>
+              </a:spcAft>
+              <a:defRPr sz="1600" b="0">
+                <a:solidFill>
+                  <a:srgbClr val="617786"/>
+                </a:solidFill>
+                <a:latin typeface="DejaVu Sans"/>
+              </a:defRPr>
+            </a:pPr>
+            <a:r>
+              <a:t>Develop one narrow workflow with the team before expanding the system.</a:t>
+            </a:r>
+          </a:p>
+        </p:txBody>
+      </p:sp>
+      <p:sp>
+        <p:nvSpPr>
+          <p:cNvPr id="6" name="TextBox 5"/>
+          <p:cNvSpPr txBox="1"/>
+          <p:nvPr/>
+        </p:nvSpPr>
+        <p:spPr>
+          <a:xfrm>
+            <a:off x="594360" y="6510528"/>
+            <a:ext cx="10058400" cy="219456"/>
+          </a:xfrm>
+          <a:prstGeom prst="rect">
+            <a:avLst/>
+          </a:prstGeom>
+          <a:noFill/>
+        </p:spPr>
+        <p:txBody>
+          <a:bodyPr wrap="square" lIns="0" rIns="0" tIns="0" bIns="0">
+            <a:spAutoFit/>
+          </a:bodyPr>
+          <a:lstStyle/>
+          <a:p>
+            <a:pPr>
+              <a:spcAft>
+                <a:spcPts val="700"/>
+              </a:spcAft>
+              <a:defRPr sz="800" b="0">
+                <a:solidFill>
+                  <a:srgbClr val="617786"/>
+                </a:solidFill>
+                <a:latin typeface="DejaVu Sans"/>
+              </a:defRPr>
+            </a:pPr>
+            <a:r>
+              <a:t>Proposed improvements based on the brief and demo limitations, not verified shortcomings in the existing company system.</a:t>
+            </a:r>
+          </a:p>
+        </p:txBody>
+      </p:sp>
+      <p:sp>
+        <p:nvSpPr>
+          <p:cNvPr id="7" name="TextBox 6"/>
+          <p:cNvSpPr txBox="1"/>
+          <p:nvPr/>
+        </p:nvSpPr>
+        <p:spPr>
+          <a:xfrm>
+            <a:off x="10817352" y="6446520"/>
+            <a:ext cx="731520" cy="274320"/>
+          </a:xfrm>
+          <a:prstGeom prst="rect">
+            <a:avLst/>
+          </a:prstGeom>
+          <a:noFill/>
+        </p:spPr>
+        <p:txBody>
+          <a:bodyPr wrap="square" lIns="0" rIns="0" tIns="0" bIns="0">
+            <a:spAutoFit/>
+          </a:bodyPr>
+          <a:lstStyle/>
+          <a:p>
+            <a:pPr>
+              <a:spcAft>
+                <a:spcPts val="700"/>
+              </a:spcAft>
+              <a:defRPr sz="1000" b="0">
+                <a:solidFill>
+                  <a:srgbClr val="617786"/>
+                </a:solidFill>
+                <a:latin typeface="DejaVu Sans"/>
+              </a:defRPr>
+            </a:pPr>
+            <a:r>
+              <a:t>07 / 07</a:t>
+            </a:r>
+          </a:p>
+        </p:txBody>
+      </p:sp>
+      <p:sp>
+        <p:nvSpPr>
+          <p:cNvPr id="8" name="Rounded Rectangle 7"/>
+          <p:cNvSpPr/>
+          <p:nvPr/>
+        </p:nvSpPr>
+        <p:spPr>
+          <a:xfrm>
+            <a:off x="594360" y="2660904"/>
+            <a:ext cx="393192" cy="393192"/>
+          </a:xfrm>
+          <a:prstGeom prst="roundRect">
+            <a:avLst>
+              <a:gd name="adj" fmla="val 6000"/>
+            </a:avLst>
+          </a:prstGeom>
+          <a:solidFill>
+            <a:srgbClr val="087B72"/>
+          </a:solidFill>
+          <a:ln>
+            <a:noFill/>
+          </a:ln>
+        </p:spPr>
+        <p:style>
+          <a:lnRef idx="1">
+            <a:schemeClr val="accent1"/>
+          </a:lnRef>
+          <a:fillRef idx="3">
+            <a:schemeClr val="accent1"/>
+          </a:fillRef>
+          <a:effectRef idx="0">
+            <a:schemeClr val="accent1"/>
+          </a:effectRef>
+          <a:fontRef idx="minor">
+            <a:schemeClr val="lt1"/>
+          </a:fontRef>
+        </p:style>
+        <p:txBody>
+          <a:bodyPr rtlCol="0" anchor="ctr"/>
+          <a:lstStyle/>
+          <a:p>
+            <a:pPr algn="ctr"/>
+          </a:p>
+        </p:txBody>
+      </p:sp>
+      <p:sp>
+        <p:nvSpPr>
+          <p:cNvPr id="9" name="TextBox 8"/>
+          <p:cNvSpPr txBox="1"/>
+          <p:nvPr/>
+        </p:nvSpPr>
+        <p:spPr>
+          <a:xfrm>
+            <a:off x="685800" y="2738628"/>
+            <a:ext cx="274320" cy="228600"/>
+          </a:xfrm>
+          <a:prstGeom prst="rect">
+            <a:avLst/>
+          </a:prstGeom>
+          <a:noFill/>
+        </p:spPr>
+        <p:txBody>
+          <a:bodyPr wrap="square" lIns="0" rIns="0" tIns="0" bIns="0">
+            <a:spAutoFit/>
+          </a:bodyPr>
+          <a:lstStyle/>
+          <a:p>
+            <a:pPr>
+              <a:spcAft>
+                <a:spcPts val="700"/>
+              </a:spcAft>
+              <a:defRPr sz="1200" b="1">
+                <a:solidFill>
+                  <a:srgbClr val="FFFFFF"/>
+                </a:solidFill>
+                <a:latin typeface="DejaVu Sans"/>
+              </a:defRPr>
+            </a:pPr>
+            <a:r>
+              <a:t>1</a:t>
+            </a:r>
+          </a:p>
+        </p:txBody>
+      </p:sp>
+      <p:sp>
+        <p:nvSpPr>
+          <p:cNvPr id="10" name="TextBox 9"/>
+          <p:cNvSpPr txBox="1"/>
+          <p:nvPr/>
+        </p:nvSpPr>
+        <p:spPr>
+          <a:xfrm>
+            <a:off x="1225296" y="2660904"/>
+            <a:ext cx="4663440" cy="365760"/>
+          </a:xfrm>
+          <a:prstGeom prst="rect">
+            <a:avLst/>
+          </a:prstGeom>
+          <a:noFill/>
+        </p:spPr>
+        <p:txBody>
+          <a:bodyPr wrap="square" lIns="0" rIns="0" tIns="0" bIns="0">
+            <a:spAutoFit/>
+          </a:bodyPr>
+          <a:lstStyle/>
+          <a:p>
+            <a:pPr>
+              <a:spcAft>
+                <a:spcPts val="700"/>
+              </a:spcAft>
+              <a:defRPr sz="1900" b="1">
+                <a:solidFill>
+                  <a:srgbClr val="172F46"/>
+                </a:solidFill>
+                <a:latin typeface="DejaVu Sans"/>
+              </a:defRPr>
+            </a:pPr>
+            <a:r>
+              <a:t>Start with approved material</a:t>
+            </a:r>
+          </a:p>
+        </p:txBody>
+      </p:sp>
+      <p:sp>
+        <p:nvSpPr>
+          <p:cNvPr id="11" name="TextBox 10"/>
+          <p:cNvSpPr txBox="1"/>
+          <p:nvPr/>
+        </p:nvSpPr>
+        <p:spPr>
+          <a:xfrm>
+            <a:off x="1225296" y="3127248"/>
+            <a:ext cx="4663440" cy="603504"/>
+          </a:xfrm>
+          <a:prstGeom prst="rect">
+            <a:avLst/>
+          </a:prstGeom>
+          <a:noFill/>
+        </p:spPr>
+        <p:txBody>
+          <a:bodyPr wrap="square" lIns="0" rIns="0" tIns="0" bIns="0">
+            <a:spAutoFit/>
+          </a:bodyPr>
+          <a:lstStyle/>
+          <a:p>
+            <a:pPr>
+              <a:spcAft>
+                <a:spcPts val="700"/>
+              </a:spcAft>
+              <a:defRPr sz="1500" b="0">
+                <a:solidFill>
+                  <a:srgbClr val="304455"/>
+                </a:solidFill>
+                <a:latin typeface="DejaVu Sans"/>
+              </a:defRPr>
+            </a:pPr>
+            <a:r>
+              <a:t>Use verified full sources, agreed rules and authorised example cases.</a:t>
+            </a:r>
+          </a:p>
+        </p:txBody>
+      </p:sp>
+      <p:sp>
+        <p:nvSpPr>
+          <p:cNvPr id="12" name="Rounded Rectangle 11"/>
+          <p:cNvSpPr/>
+          <p:nvPr/>
+        </p:nvSpPr>
+        <p:spPr>
+          <a:xfrm>
+            <a:off x="594360" y="3758184"/>
+            <a:ext cx="393192" cy="393192"/>
+          </a:xfrm>
+          <a:prstGeom prst="roundRect">
+            <a:avLst>
+              <a:gd name="adj" fmla="val 6000"/>
+            </a:avLst>
+          </a:prstGeom>
+          <a:solidFill>
+            <a:srgbClr val="087B72"/>
+          </a:solidFill>
+          <a:ln>
+            <a:noFill/>
+          </a:ln>
+        </p:spPr>
+        <p:style>
+          <a:lnRef idx="1">
+            <a:schemeClr val="accent1"/>
+          </a:lnRef>
+          <a:fillRef idx="3">
+            <a:schemeClr val="accent1"/>
+          </a:fillRef>
+          <a:effectRef idx="0">
+            <a:schemeClr val="accent1"/>
+          </a:effectRef>
+          <a:fontRef idx="minor">
+            <a:schemeClr val="lt1"/>
+          </a:fontRef>
+        </p:style>
+        <p:txBody>
+          <a:bodyPr rtlCol="0" anchor="ctr"/>
+          <a:lstStyle/>
+          <a:p>
+            <a:pPr algn="ctr"/>
+          </a:p>
+        </p:txBody>
+      </p:sp>
+      <p:sp>
+        <p:nvSpPr>
+          <p:cNvPr id="13" name="TextBox 12"/>
+          <p:cNvSpPr txBox="1"/>
+          <p:nvPr/>
+        </p:nvSpPr>
+        <p:spPr>
+          <a:xfrm>
+            <a:off x="685800" y="3835908"/>
+            <a:ext cx="274320" cy="228600"/>
+          </a:xfrm>
+          <a:prstGeom prst="rect">
+            <a:avLst/>
+          </a:prstGeom>
+          <a:noFill/>
+        </p:spPr>
+        <p:txBody>
+          <a:bodyPr wrap="square" lIns="0" rIns="0" tIns="0" bIns="0">
+            <a:spAutoFit/>
+          </a:bodyPr>
+          <a:lstStyle/>
+          <a:p>
+            <a:pPr>
+              <a:spcAft>
+                <a:spcPts val="700"/>
+              </a:spcAft>
+              <a:defRPr sz="1200" b="1">
+                <a:solidFill>
+                  <a:srgbClr val="FFFFFF"/>
+                </a:solidFill>
+                <a:latin typeface="DejaVu Sans"/>
+              </a:defRPr>
+            </a:pPr>
+            <a:r>
+              <a:t>2</a:t>
+            </a:r>
+          </a:p>
+        </p:txBody>
+      </p:sp>
+      <p:sp>
+        <p:nvSpPr>
+          <p:cNvPr id="14" name="TextBox 13"/>
+          <p:cNvSpPr txBox="1"/>
+          <p:nvPr/>
+        </p:nvSpPr>
+        <p:spPr>
+          <a:xfrm>
+            <a:off x="1225296" y="3758184"/>
+            <a:ext cx="4663440" cy="365760"/>
+          </a:xfrm>
+          <a:prstGeom prst="rect">
+            <a:avLst/>
+          </a:prstGeom>
+          <a:noFill/>
+        </p:spPr>
+        <p:txBody>
+          <a:bodyPr wrap="square" lIns="0" rIns="0" tIns="0" bIns="0">
+            <a:spAutoFit/>
+          </a:bodyPr>
+          <a:lstStyle/>
+          <a:p>
+            <a:pPr>
+              <a:spcAft>
+                <a:spcPts val="700"/>
+              </a:spcAft>
+              <a:defRPr sz="1900" b="1">
+                <a:solidFill>
+                  <a:srgbClr val="172F46"/>
+                </a:solidFill>
+                <a:latin typeface="DejaVu Sans"/>
+              </a:defRPr>
+            </a:pPr>
+            <a:r>
+              <a:t>Review each change</a:t>
+            </a:r>
+          </a:p>
+        </p:txBody>
+      </p:sp>
+      <p:sp>
+        <p:nvSpPr>
+          <p:cNvPr id="15" name="TextBox 14"/>
+          <p:cNvSpPr txBox="1"/>
+          <p:nvPr/>
+        </p:nvSpPr>
+        <p:spPr>
+          <a:xfrm>
+            <a:off x="1225296" y="4224528"/>
+            <a:ext cx="4663440" cy="603504"/>
+          </a:xfrm>
+          <a:prstGeom prst="rect">
+            <a:avLst/>
+          </a:prstGeom>
+          <a:noFill/>
+        </p:spPr>
+        <p:txBody>
+          <a:bodyPr wrap="square" lIns="0" rIns="0" tIns="0" bIns="0">
+            <a:spAutoFit/>
+          </a:bodyPr>
+          <a:lstStyle/>
+          <a:p>
+            <a:pPr>
+              <a:spcAft>
+                <a:spcPts val="700"/>
+              </a:spcAft>
+              <a:defRPr sz="1500" b="0">
+                <a:solidFill>
+                  <a:srgbClr val="304455"/>
+                </a:solidFill>
+                <a:latin typeface="DejaVu Sans"/>
+              </a:defRPr>
+            </a:pPr>
+            <a:r>
+              <a:t>Save versions, rerun examples and explain intended and unexpected differences.</a:t>
+            </a:r>
+          </a:p>
+        </p:txBody>
+      </p:sp>
+      <p:sp>
+        <p:nvSpPr>
+          <p:cNvPr id="16" name="Rounded Rectangle 15"/>
+          <p:cNvSpPr/>
+          <p:nvPr/>
+        </p:nvSpPr>
+        <p:spPr>
+          <a:xfrm>
+            <a:off x="594360" y="4855464"/>
+            <a:ext cx="393192" cy="393192"/>
+          </a:xfrm>
+          <a:prstGeom prst="roundRect">
+            <a:avLst>
+              <a:gd name="adj" fmla="val 6000"/>
+            </a:avLst>
+          </a:prstGeom>
+          <a:solidFill>
+            <a:srgbClr val="087B72"/>
+          </a:solidFill>
+          <a:ln>
+            <a:noFill/>
+          </a:ln>
+        </p:spPr>
+        <p:style>
+          <a:lnRef idx="1">
+            <a:schemeClr val="accent1"/>
+          </a:lnRef>
+          <a:fillRef idx="3">
+            <a:schemeClr val="accent1"/>
+          </a:fillRef>
+          <a:effectRef idx="0">
+            <a:schemeClr val="accent1"/>
+          </a:effectRef>
+          <a:fontRef idx="minor">
+            <a:schemeClr val="lt1"/>
+          </a:fontRef>
+        </p:style>
+        <p:txBody>
+          <a:bodyPr rtlCol="0" anchor="ctr"/>
+          <a:lstStyle/>
+          <a:p>
+            <a:pPr algn="ctr"/>
+          </a:p>
+        </p:txBody>
+      </p:sp>
+      <p:sp>
+        <p:nvSpPr>
+          <p:cNvPr id="17" name="TextBox 16"/>
+          <p:cNvSpPr txBox="1"/>
+          <p:nvPr/>
+        </p:nvSpPr>
+        <p:spPr>
+          <a:xfrm>
+            <a:off x="685800" y="4933188"/>
+            <a:ext cx="274320" cy="228600"/>
+          </a:xfrm>
+          <a:prstGeom prst="rect">
+            <a:avLst/>
+          </a:prstGeom>
+          <a:noFill/>
+        </p:spPr>
+        <p:txBody>
+          <a:bodyPr wrap="square" lIns="0" rIns="0" tIns="0" bIns="0">
+            <a:spAutoFit/>
+          </a:bodyPr>
+          <a:lstStyle/>
+          <a:p>
+            <a:pPr>
+              <a:spcAft>
+                <a:spcPts val="700"/>
+              </a:spcAft>
+              <a:defRPr sz="1200" b="1">
+                <a:solidFill>
+                  <a:srgbClr val="FFFFFF"/>
+                </a:solidFill>
+                <a:latin typeface="DejaVu Sans"/>
+              </a:defRPr>
+            </a:pPr>
+            <a:r>
+              <a:t>3</a:t>
+            </a:r>
+          </a:p>
+        </p:txBody>
+      </p:sp>
+      <p:sp>
+        <p:nvSpPr>
+          <p:cNvPr id="18" name="TextBox 17"/>
+          <p:cNvSpPr txBox="1"/>
+          <p:nvPr/>
+        </p:nvSpPr>
+        <p:spPr>
+          <a:xfrm>
+            <a:off x="1225296" y="4855464"/>
+            <a:ext cx="4663440" cy="365760"/>
+          </a:xfrm>
+          <a:prstGeom prst="rect">
+            <a:avLst/>
+          </a:prstGeom>
+          <a:noFill/>
+        </p:spPr>
+        <p:txBody>
+          <a:bodyPr wrap="square" lIns="0" rIns="0" tIns="0" bIns="0">
+            <a:spAutoFit/>
+          </a:bodyPr>
+          <a:lstStyle/>
+          <a:p>
+            <a:pPr>
+              <a:spcAft>
+                <a:spcPts val="700"/>
+              </a:spcAft>
+              <a:defRPr sz="1900" b="1">
+                <a:solidFill>
+                  <a:srgbClr val="172F46"/>
+                </a:solidFill>
+                <a:latin typeface="DejaVu Sans"/>
+              </a:defRPr>
+            </a:pPr>
+            <a:r>
+              <a:t>Evaluate the weak points</a:t>
+            </a:r>
+          </a:p>
+        </p:txBody>
+      </p:sp>
+      <p:sp>
+        <p:nvSpPr>
+          <p:cNvPr id="19" name="TextBox 18"/>
+          <p:cNvSpPr txBox="1"/>
+          <p:nvPr/>
+        </p:nvSpPr>
+        <p:spPr>
+          <a:xfrm>
+            <a:off x="1225296" y="5321807"/>
+            <a:ext cx="4663440" cy="603504"/>
+          </a:xfrm>
+          <a:prstGeom prst="rect">
+            <a:avLst/>
+          </a:prstGeom>
+          <a:noFill/>
+        </p:spPr>
+        <p:txBody>
+          <a:bodyPr wrap="square" lIns="0" rIns="0" tIns="0" bIns="0">
+            <a:spAutoFit/>
+          </a:bodyPr>
+          <a:lstStyle/>
+          <a:p>
+            <a:pPr>
+              <a:spcAft>
+                <a:spcPts val="700"/>
+              </a:spcAft>
+              <a:defRPr sz="1500" b="0">
+                <a:solidFill>
+                  <a:srgbClr val="304455"/>
+                </a:solidFill>
+                <a:latin typeface="DejaVu Sans"/>
+              </a:defRPr>
+            </a:pPr>
+            <a:r>
+              <a:t>Evaluate retrieval and citation support; keep ambiguous findings with reviewers.</a:t>
+            </a:r>
+          </a:p>
+        </p:txBody>
+      </p:sp>
+      <p:sp>
+        <p:nvSpPr>
+          <p:cNvPr id="20" name="Rounded Rectangle 19"/>
+          <p:cNvSpPr/>
+          <p:nvPr/>
+        </p:nvSpPr>
+        <p:spPr>
+          <a:xfrm>
+            <a:off x="6428232" y="2587752"/>
+            <a:ext cx="5166360" cy="3264408"/>
+          </a:xfrm>
+          <a:prstGeom prst="roundRect">
+            <a:avLst>
+              <a:gd name="adj" fmla="val 6000"/>
+            </a:avLst>
+          </a:prstGeom>
+          <a:solidFill>
+            <a:srgbClr val="E7F3EF"/>
+          </a:solidFill>
+          <a:ln>
+            <a:noFill/>
+          </a:ln>
+        </p:spPr>
+        <p:style>
+          <a:lnRef idx="1">
+            <a:schemeClr val="accent1"/>
+          </a:lnRef>
+          <a:fillRef idx="3">
+            <a:schemeClr val="accent1"/>
+          </a:fillRef>
+          <a:effectRef idx="0">
+            <a:schemeClr val="accent1"/>
+          </a:effectRef>
+          <a:fontRef idx="minor">
+            <a:schemeClr val="lt1"/>
+          </a:fontRef>
+        </p:style>
+        <p:txBody>
+          <a:bodyPr rtlCol="0" anchor="ctr"/>
+          <a:lstStyle/>
+          <a:p>
+            <a:pPr algn="ctr"/>
+          </a:p>
+        </p:txBody>
+      </p:sp>
+      <p:sp>
+        <p:nvSpPr>
+          <p:cNvPr id="21" name="TextBox 20"/>
+          <p:cNvSpPr txBox="1"/>
+          <p:nvPr/>
+        </p:nvSpPr>
+        <p:spPr>
+          <a:xfrm>
+            <a:off x="6702552" y="2862072"/>
+            <a:ext cx="4617720" cy="301752"/>
+          </a:xfrm>
+          <a:prstGeom prst="rect">
+            <a:avLst/>
+          </a:prstGeom>
+          <a:noFill/>
+        </p:spPr>
+        <p:txBody>
+          <a:bodyPr wrap="square" lIns="0" rIns="0" tIns="0" bIns="0">
+            <a:spAutoFit/>
+          </a:bodyPr>
+          <a:lstStyle/>
+          <a:p>
+            <a:pPr>
+              <a:spcAft>
+                <a:spcPts val="700"/>
+              </a:spcAft>
+              <a:defRPr sz="1100" b="1">
+                <a:solidFill>
+                  <a:srgbClr val="087B72"/>
+                </a:solidFill>
+                <a:latin typeface="DejaVu Sans"/>
+              </a:defRPr>
+            </a:pPr>
+            <a:r>
+              <a:t>FIRST PILOT</a:t>
+            </a:r>
+          </a:p>
+        </p:txBody>
+      </p:sp>
+      <p:sp>
+        <p:nvSpPr>
+          <p:cNvPr id="22" name="TextBox 21"/>
+          <p:cNvSpPr txBox="1"/>
+          <p:nvPr/>
+        </p:nvSpPr>
+        <p:spPr>
+          <a:xfrm>
+            <a:off x="6702552" y="3465576"/>
+            <a:ext cx="4617720" cy="2148840"/>
+          </a:xfrm>
+          <a:prstGeom prst="rect">
+            <a:avLst/>
+          </a:prstGeom>
+          <a:noFill/>
+        </p:spPr>
+        <p:txBody>
+          <a:bodyPr wrap="square" lIns="0" rIns="0" tIns="0" bIns="0">
+            <a:spAutoFit/>
+          </a:bodyPr>
+          <a:lstStyle/>
+          <a:p>
+            <a:pPr>
+              <a:spcAft>
+                <a:spcPts val="700"/>
+              </a:spcAft>
+              <a:defRPr sz="1700" b="0">
+                <a:solidFill>
+                  <a:srgbClr val="172F46"/>
+                </a:solidFill>
+                <a:latin typeface="DejaVu Sans"/>
+              </a:defRPr>
+            </a:pPr>
+            <a:r>
+              <a:t>One workflow</a:t>
+            </a:r>
+          </a:p>
+          <a:p>
+            <a:pPr>
+              <a:spcAft>
+                <a:spcPts val="700"/>
+              </a:spcAft>
+              <a:defRPr sz="1700" b="0">
+                <a:solidFill>
+                  <a:srgbClr val="172F46"/>
+                </a:solidFill>
+                <a:latin typeface="DejaVu Sans"/>
+              </a:defRPr>
+            </a:pPr>
+            <a:r>
+              <a:t>One agreed reference set</a:t>
+            </a:r>
+          </a:p>
+          <a:p>
+            <a:pPr>
+              <a:spcAft>
+                <a:spcPts val="700"/>
+              </a:spcAft>
+              <a:defRPr sz="1700" b="0">
+                <a:solidFill>
+                  <a:srgbClr val="172F46"/>
+                </a:solidFill>
+                <a:latin typeface="DejaVu Sans"/>
+              </a:defRPr>
+            </a:pPr>
+            <a:r>
+              <a:t>A small implementation</a:t>
+            </a:r>
+          </a:p>
+          <a:p>
+            <a:pPr>
+              <a:spcAft>
+                <a:spcPts val="700"/>
+              </a:spcAft>
+              <a:defRPr sz="1700" b="0">
+                <a:solidFill>
+                  <a:srgbClr val="172F46"/>
+                </a:solidFill>
+                <a:latin typeface="DejaVu Sans"/>
+              </a:defRPr>
+            </a:pPr>
+            <a:r>
+              <a:t>A review with lawyers and engineers</a:t>
+            </a:r>
+          </a:p>
+          <a:p>
+            <a:pPr>
+              <a:spcAft>
+                <a:spcPts val="700"/>
+              </a:spcAft>
+              <a:defRPr sz="1700" b="0">
+                <a:solidFill>
+                  <a:srgbClr val="172F46"/>
+                </a:solidFill>
+                <a:latin typeface="DejaVu Sans"/>
+              </a:defRPr>
+            </a:pPr>
+          </a:p>
+          <a:p>
+            <a:pPr>
+              <a:spcAft>
+                <a:spcPts val="700"/>
+              </a:spcAft>
+              <a:defRPr sz="1700" b="0">
+                <a:solidFill>
+                  <a:srgbClr val="172F46"/>
+                </a:solidFill>
+                <a:latin typeface="DejaVu Sans"/>
+              </a:defRPr>
+            </a:pPr>
+            <a:r>
+              <a:t>Then decide what to improve.</a:t>
+            </a:r>
+          </a:p>
+        </p:txBody>
+      </p:sp>
+      <p:sp>
+        <p:nvSpPr>
+          <p:cNvPr id="23" name="Rounded Rectangle 22"/>
+          <p:cNvSpPr/>
+          <p:nvPr/>
+        </p:nvSpPr>
+        <p:spPr>
+          <a:xfrm>
+            <a:off x="594360" y="6007608"/>
+            <a:ext cx="11000232" cy="320040"/>
+          </a:xfrm>
+          <a:prstGeom prst="roundRect">
+            <a:avLst>
+              <a:gd name="adj" fmla="val 6000"/>
+            </a:avLst>
+          </a:prstGeom>
+          <a:solidFill>
+            <a:srgbClr val="EFF4F6"/>
+          </a:solidFill>
+          <a:ln>
+            <a:noFill/>
+          </a:ln>
+        </p:spPr>
+        <p:style>
+          <a:lnRef idx="1">
+            <a:schemeClr val="accent1"/>
+          </a:lnRef>
+          <a:fillRef idx="3">
+            <a:schemeClr val="accent1"/>
+          </a:fillRef>
+          <a:effectRef idx="0">
+            <a:schemeClr val="accent1"/>
+          </a:effectRef>
+          <a:fontRef idx="minor">
+            <a:schemeClr val="lt1"/>
+          </a:fontRef>
+        </p:style>
+        <p:txBody>
+          <a:bodyPr rtlCol="0" anchor="ctr"/>
+          <a:lstStyle/>
+          <a:p>
+            <a:pPr algn="ctr"/>
+          </a:p>
+        </p:txBody>
+      </p:sp>
+      <p:sp>
+        <p:nvSpPr>
+          <p:cNvPr id="24" name="TextBox 23"/>
+          <p:cNvSpPr txBox="1"/>
+          <p:nvPr/>
+        </p:nvSpPr>
+        <p:spPr>
+          <a:xfrm>
+            <a:off x="758952" y="6053328"/>
+            <a:ext cx="10671048" cy="210312"/>
+          </a:xfrm>
+          <a:prstGeom prst="rect">
+            <a:avLst/>
+          </a:prstGeom>
+          <a:noFill/>
+        </p:spPr>
+        <p:txBody>
+          <a:bodyPr wrap="square" lIns="0" rIns="0" tIns="0" bIns="0">
+            <a:spAutoFit/>
+          </a:bodyPr>
+          <a:lstStyle/>
+          <a:p>
+            <a:pPr>
+              <a:spcAft>
+                <a:spcPts val="700"/>
+              </a:spcAft>
+              <a:defRPr sz="1100" b="1">
+                <a:solidFill>
+                  <a:srgbClr val="172F46"/>
+                </a:solidFill>
+                <a:latin typeface="DejaVu Sans"/>
+              </a:defRPr>
+            </a:pPr>
+            <a:r>
+              <a:t>Which workflow would be the most useful starting point for this internship?</a:t>
             </a:r>
           </a:p>
         </p:txBody>

--- a/presentation/Nafis_Ismam_Docitalis_Final.pptx
+++ b/presentation/Nafis_Ismam_Docitalis_Final.pptx
@@ -12,6 +12,7 @@
     <p:sldId id="260" r:id="rId12"/>
     <p:sldId id="261" r:id="rId13"/>
     <p:sldId id="262" r:id="rId14"/>
+    <p:sldId id="263" r:id="rId15"/>
   </p:sldIdLst>
   <p:sldSz cx="12191695" cy="6858000" type="screen4x3"/>
   <p:notesSz cx="6858000" cy="9144000"/>
@@ -648,7 +649,7 @@
           <a:lstStyle/>
           <a:p>
             <a:r>
-              <a:t>About 45 seconds. “Cell 1 creates the Legal Sources Matrix. Cell 2 defines seven prepared document blocks and their rules in version 1.2.0. The source ID connects each paragraph to the legal records it references.” Example: M5 requires records and selected M3, and links to C167. Show these are definitions, not a completed draft. The source texts are summaries rather than verified full provisions. Two judgment notes are simulated. Versions and dates are manually assigned. The legacy limitation_defense flag is a supplied request for the procedural example, not a calculation of a breached legal deadline. Exclusive routes are teaching configuration, not universal legal rules.</a:t>
+              <a:t>About 50 seconds. Cell 1 creates a catalogue with source IDs, Act names, section numbers, prepared summaries, status and judgment notes. Cell 2 creates reusable paragraph definitions: conditions, prerequisites, configured exclusions, order, source links and prepared text. The shared ID C167 connects source and paragraph. M5 needs records AND selected M3, has order 50, and cites C167. Ten records and seven modules are definitions, not a draft. Version 1.2.0 and its snapshot date are manually assigned. Summaries and judgment notes are illustrative, not verified full official law. Legal time limits are not calculated by the legacy limitation_defense flag.</a:t>
             </a:r>
           </a:p>
         </p:txBody>
@@ -718,7 +719,7 @@
           <a:lstStyle/>
           <a:p>
             <a:r>
-              <a:t>About 45 seconds. “The sample requests the procedural route, has records and requests relief. The engine validates fields, checks conditions and prerequisites, records every inclusion or skip, checks active conflicts and fills selected templates in order.” The sample selects M1, M2, M3, M5 and M7. M4 and M6 are skipped because their flags default to False. Defaulting unknown facts to False would need careful agreement in a real workflow. The returned trace includes rules, missing dependencies, source links, version and fingerprints. Hashes help compare outputs; they do not make them legally correct. No LLM invents the wording.</a:t>
+              <a:t>About 55 seconds. These are the sample facts and actual decisions. Missing optional flags default to False. Every block must satisfy its own required facts AND have every prerequisite included. Conditions select M1, M2, M3, M5 and M7; M4 and M6 are skipped. Both configured exclusive routes would raise an error before text is returned. The selected prepared templates are filled with the name, case ID and summary, then joined in order. The trace records both inclusion and skipping with expected/actual facts, prerequisites, source IDs and version fingerprints. Same facts and rule snapshot produce the same result. It is not LLM drafting or automated legal fact verification.</a:t>
             </a:r>
           </a:p>
         </p:txBody>
@@ -788,7 +789,7 @@
           <a:lstStyle/>
           <a:p>
             <a:r>
-              <a:t>About 50 seconds. “Retrieval uses TF-IDF word matching and cosine similarity with an uncalibrated 0.80 gate. If direct retrieval accepts nothing, explicit separators can split the query. The controlled two-source text example retrieves C54 and P420 after splitting.” That is not proof of paraphrase accuracy. “Separately, the review derives required citations from module definitions, checks markers in the actual text and compares stored judgment-note dates.” The unchanged draft has three newer-note warnings: M3-C54, M3-C167 and M5-C167. It has no missing-citation alerts. The ordinary case summary and both split parts accept no sources. Explicit source-link warnings do not depend on search success. No new judgments are discovered automatically, no generative reviewer runs, and marker presence does not establish semantic citation support.</a:t>
+              <a:t>About 60 seconds. The two-part exact-source query first has a best score of 0.787877, below the uncalibrated 0.80 threshold, so nothing is accepted. The method splits on the semicolon, searches each exact source text, and accepts C54 and P420 at approximately 1.0. It interleaves ranked groups and removes duplicate IDs. No model performs this split: it uses explicit text separators. Ordinary case-summary retrieval and both split parts accept no sources, and are returned as unresolved. Retrieval does not determine strategy. Separately, review derives required citations from module definitions and reads markers from actual text. The sample has no missing markers but newer recorded notes produce three module-source warnings. Notes are manually entered and simulated; the program does not discover judgments or determine legal applicability. TF-IDF matching is word-based and the threshold is not an accuracy percentage.</a:t>
             </a:r>
           </a:p>
         </p:txBody>
@@ -858,7 +859,7 @@
           <a:lstStyle/>
           <a:p>
             <a:r>
-              <a:t>About 45 seconds. “These checks target the prototype’s promises: repeatable outputs, expected module order and citations, conflict rejection and recorded update alerts. All four groups pass.” Twenty-five repetitions were specified for the demo and are not a mathematically special number. Expected fixture lists are written separately. The conflict test passes when the intended error is raised. The update test removes notes, inserts a new simulated C167 note and checks M3 and M5; it also deliberately damages citations and checks retrieval paths. These are not approved real historical cases. A reviewed legal change may intentionally change expected outputs, so failures require investigation rather than blindly forcing old results.</a:t>
+              <a:t>About 50 seconds. Reproducibility compares document and full-output fingerprints across 25 runs. Reference parity compares four synthetic cases against independently written module sequences, citation lists and actual text markers. The conflict test expects an exception when both teaching routes are requested, and checks consistent messages. The update test begins with no notes, adds a simulated C167 note and expects M3 and M5 warnings. Additional checks remove C54, add unknown C999 and exercise retrieval paths. All four groups pass. These checks were specified for this role-focused demonstration, not taken as an evaluation suite from the research paper. Twenty-five is a demonstration count, not a statistical guarantee. Synthetic fixtures are not genuinely lawyer-approved historical cases. Passing checks software expectations, not legal correctness.</a:t>
             </a:r>
           </a:p>
         </p:txBody>
@@ -884,6 +885,76 @@
 </file>
 
 <file path=ppt/notesSlides/notesSlide7.xml><?xml version="1.0" encoding="utf-8"?>
+<p:notes xmlns:a="http://schemas.openxmlformats.org/drawingml/2006/main" xmlns:p="http://schemas.openxmlformats.org/presentationml/2006/main" xmlns:r="http://schemas.openxmlformats.org/officeDocument/2006/relationships">
+  <p:cSld>
+    <p:spTree>
+      <p:nvGrpSpPr>
+        <p:cNvPr id="1" name=""/>
+        <p:cNvGrpSpPr/>
+        <p:nvPr/>
+      </p:nvGrpSpPr>
+      <p:grpSpPr>
+        <a:xfrm>
+          <a:off x="0" y="0"/>
+          <a:ext cx="0" cy="0"/>
+          <a:chOff x="0" y="0"/>
+          <a:chExt cx="0" cy="0"/>
+        </a:xfrm>
+      </p:grpSpPr>
+      <p:sp>
+        <p:nvSpPr>
+          <p:cNvPr id="2" name="Slide Image Placeholder 1"/>
+          <p:cNvSpPr>
+            <a:spLocks noGrp="1"/>
+          </p:cNvSpPr>
+          <p:nvPr>
+            <p:ph type="sldImg" idx="2"/>
+          </p:nvPr>
+        </p:nvSpPr>
+        <p:spPr/>
+      </p:sp>
+      <p:sp>
+        <p:nvSpPr>
+          <p:cNvPr id="3" name="Notes Placeholder 2"/>
+          <p:cNvSpPr>
+            <a:spLocks noGrp="1"/>
+          </p:cNvSpPr>
+          <p:nvPr>
+            <p:ph type="body" idx="3" sz="quarter"/>
+          </p:nvPr>
+        </p:nvSpPr>
+        <p:spPr/>
+        <p:txBody>
+          <a:bodyPr/>
+          <a:lstStyle/>
+          <a:p>
+            <a:r>
+              <a:t>About 45 seconds. Present this as design reasoning rather than invented project history. “The demo makes three concerns visible. A compound query can fail the gate, so the controlled example tries explicit decomposition. Conflicting module choices must not silently coexist, so assembly raises an error. Citation metadata may claim a source is required even when the text omits it, so the review checks actual markers.” These are chosen failure modes and scripted checks, not evidence of a real customer incident or measured business improvement. The search is not validated on natural legal queries, legal exclusions require domain approval, and marker checks do not assess semantic support. Do not claim an optimal threshold or a fully solved legal retrieval problem.</a:t>
+            </a:r>
+          </a:p>
+        </p:txBody>
+      </p:sp>
+      <p:sp>
+        <p:nvSpPr>
+          <p:cNvPr id="4" name="Slide Number Placeholder 3"/>
+          <p:cNvSpPr>
+            <a:spLocks noGrp="1"/>
+          </p:cNvSpPr>
+          <p:nvPr>
+            <p:ph type="sldNum" idx="5" sz="quarter"/>
+          </p:nvPr>
+        </p:nvSpPr>
+        <p:spPr/>
+      </p:sp>
+    </p:spTree>
+  </p:cSld>
+  <p:clrMapOvr>
+    <a:masterClrMapping/>
+  </p:clrMapOvr>
+</p:notes>
+</file>
+
+<file path=ppt/notesSlides/notesSlide8.xml><?xml version="1.0" encoding="utf-8"?>
 <p:notes xmlns:a="http://schemas.openxmlformats.org/drawingml/2006/main" xmlns:p="http://schemas.openxmlformats.org/presentationml/2006/main" xmlns:r="http://schemas.openxmlformats.org/officeDocument/2006/relationships">
   <p:cSld>
     <p:spTree>
@@ -4054,7 +4125,7 @@
               </a:defRPr>
             </a:pPr>
             <a:r>
-              <a:t>01 / 07</a:t>
+              <a:t>01 / 08</a:t>
             </a:r>
           </a:p>
         </p:txBody>
@@ -4809,7 +4880,7 @@
               </a:defRPr>
             </a:pPr>
             <a:r>
-              <a:t>02 / 07</a:t>
+              <a:t>02 / 08</a:t>
             </a:r>
           </a:p>
         </p:txBody>
@@ -5584,7 +5655,7 @@
               </a:defRPr>
             </a:pPr>
             <a:r>
-              <a:t>Prepare the sources and the paragraph rules</a:t>
+              <a:t>Define the sources, paragraphs and their rules</a:t>
             </a:r>
           </a:p>
         </p:txBody>
@@ -5623,7 +5694,7 @@
               </a:defRPr>
             </a:pPr>
             <a:r>
-              <a:t>The ingredients: 10 sample legal summaries and 7 reusable document blocks.</a:t>
+              <a:t>Cell 1 stores the evidence. Cell 2 says when each prepared paragraph can be used.</a:t>
             </a:r>
           </a:p>
         </p:txBody>
@@ -5701,99 +5772,21 @@
               </a:defRPr>
             </a:pPr>
             <a:r>
-              <a:t>03 / 07</a:t>
-            </a:r>
-          </a:p>
-        </p:txBody>
-      </p:sp>
-      <p:sp>
-        <p:nvSpPr>
-          <p:cNvPr id="7" name="TextBox 6"/>
-          <p:cNvSpPr txBox="1"/>
-          <p:nvPr/>
-        </p:nvSpPr>
-        <p:spPr>
-          <a:xfrm>
-            <a:off x="749808" y="2679192"/>
-            <a:ext cx="4681728" cy="274320"/>
-          </a:xfrm>
-          <a:prstGeom prst="rect">
-            <a:avLst/>
-          </a:prstGeom>
-          <a:noFill/>
-        </p:spPr>
-        <p:txBody>
-          <a:bodyPr wrap="square" lIns="0" rIns="0" tIns="0" bIns="0">
-            <a:spAutoFit/>
-          </a:bodyPr>
-          <a:lstStyle/>
-          <a:p>
-            <a:pPr>
-              <a:spcAft>
-                <a:spcPts val="500"/>
-              </a:spcAft>
-              <a:defRPr sz="1200" b="1">
-                <a:solidFill>
-                  <a:srgbClr val="087F76"/>
-                </a:solidFill>
-                <a:latin typeface="DejaVu Sans"/>
-              </a:defRPr>
-            </a:pPr>
-            <a:r>
-              <a:t>CELL 1 · LEGAL SOURCE RECORD</a:t>
-            </a:r>
-          </a:p>
-        </p:txBody>
-      </p:sp>
-      <p:sp>
-        <p:nvSpPr>
-          <p:cNvPr id="8" name="TextBox 7"/>
-          <p:cNvSpPr txBox="1"/>
-          <p:nvPr/>
-        </p:nvSpPr>
-        <p:spPr>
-          <a:xfrm>
-            <a:off x="6565392" y="2679192"/>
-            <a:ext cx="4681728" cy="274320"/>
-          </a:xfrm>
-          <a:prstGeom prst="rect">
-            <a:avLst/>
-          </a:prstGeom>
-          <a:noFill/>
-        </p:spPr>
-        <p:txBody>
-          <a:bodyPr wrap="square" lIns="0" rIns="0" tIns="0" bIns="0">
-            <a:spAutoFit/>
-          </a:bodyPr>
-          <a:lstStyle/>
-          <a:p>
-            <a:pPr>
-              <a:spcAft>
-                <a:spcPts val="500"/>
-              </a:spcAft>
-              <a:defRPr sz="1200" b="1">
-                <a:solidFill>
-                  <a:srgbClr val="087F76"/>
-                </a:solidFill>
-                <a:latin typeface="DejaVu Sans"/>
-              </a:defRPr>
-            </a:pPr>
-            <a:r>
-              <a:t>CELL 2 · PARAGRAPH INSTRUCTIONS</a:t>
-            </a:r>
-          </a:p>
-        </p:txBody>
-      </p:sp>
-      <p:sp>
-        <p:nvSpPr>
-          <p:cNvPr id="9" name="Rounded Rectangle 8"/>
+              <a:t>03 / 08</a:t>
+            </a:r>
+          </a:p>
+        </p:txBody>
+      </p:sp>
+      <p:sp>
+        <p:nvSpPr>
+          <p:cNvPr id="7" name="Rounded Rectangle 6"/>
           <p:cNvSpPr/>
           <p:nvPr/>
         </p:nvSpPr>
         <p:spPr>
           <a:xfrm>
-            <a:off x="594360" y="3136392"/>
-            <a:ext cx="4681728" cy="2505456"/>
+            <a:off x="594360" y="2706624"/>
+            <a:ext cx="4224528" cy="2880360"/>
           </a:xfrm>
           <a:prstGeom prst="roundRect">
             <a:avLst>
@@ -5831,304 +5824,170 @@
       </p:sp>
       <p:sp>
         <p:nvSpPr>
+          <p:cNvPr id="8" name="TextBox 7"/>
+          <p:cNvSpPr txBox="1"/>
+          <p:nvPr/>
+        </p:nvSpPr>
+        <p:spPr>
+          <a:xfrm>
+            <a:off x="832104" y="2926080"/>
+            <a:ext cx="3749039" cy="274320"/>
+          </a:xfrm>
+          <a:prstGeom prst="rect">
+            <a:avLst/>
+          </a:prstGeom>
+          <a:noFill/>
+        </p:spPr>
+        <p:txBody>
+          <a:bodyPr wrap="square" lIns="0" rIns="0" tIns="0" bIns="0">
+            <a:spAutoFit/>
+          </a:bodyPr>
+          <a:lstStyle/>
+          <a:p>
+            <a:pPr>
+              <a:spcAft>
+                <a:spcPts val="500"/>
+              </a:spcAft>
+              <a:defRPr sz="1200" b="1">
+                <a:solidFill>
+                  <a:srgbClr val="087F76"/>
+                </a:solidFill>
+                <a:latin typeface="DejaVu Sans"/>
+              </a:defRPr>
+            </a:pPr>
+            <a:r>
+              <a:t>SOURCE RECORD · C167</a:t>
+            </a:r>
+          </a:p>
+        </p:txBody>
+      </p:sp>
+      <p:sp>
+        <p:nvSpPr>
+          <p:cNvPr id="9" name="TextBox 8"/>
+          <p:cNvSpPr txBox="1"/>
+          <p:nvPr/>
+        </p:nvSpPr>
+        <p:spPr>
+          <a:xfrm>
+            <a:off x="832104" y="3502152"/>
+            <a:ext cx="3749039" cy="1719072"/>
+          </a:xfrm>
+          <a:prstGeom prst="rect">
+            <a:avLst/>
+          </a:prstGeom>
+          <a:noFill/>
+        </p:spPr>
+        <p:txBody>
+          <a:bodyPr wrap="square" lIns="0" rIns="0" tIns="0" bIns="0">
+            <a:spAutoFit/>
+          </a:bodyPr>
+          <a:lstStyle/>
+          <a:p>
+            <a:pPr>
+              <a:spcAft>
+                <a:spcPts val="600"/>
+              </a:spcAft>
+              <a:defRPr sz="1600" b="0">
+                <a:solidFill>
+                  <a:srgbClr val="21394D"/>
+                </a:solidFill>
+                <a:latin typeface="DejaVu Sans"/>
+              </a:defRPr>
+            </a:pPr>
+            <a:r>
+              <a:t>Act + section number</a:t>
+            </a:r>
+          </a:p>
+          <a:p>
+            <a:pPr>
+              <a:spcAft>
+                <a:spcPts val="600"/>
+              </a:spcAft>
+              <a:defRPr sz="1600" b="0">
+                <a:solidFill>
+                  <a:srgbClr val="21394D"/>
+                </a:solidFill>
+                <a:latin typeface="DejaVu Sans"/>
+              </a:defRPr>
+            </a:pPr>
+            <a:r>
+              <a:t>Prepared summary text</a:t>
+            </a:r>
+          </a:p>
+          <a:p>
+            <a:pPr>
+              <a:spcAft>
+                <a:spcPts val="600"/>
+              </a:spcAft>
+              <a:defRPr sz="1600" b="0">
+                <a:solidFill>
+                  <a:srgbClr val="21394D"/>
+                </a:solidFill>
+                <a:latin typeface="DejaVu Sans"/>
+              </a:defRPr>
+            </a:pPr>
+            <a:r>
+              <a:t>Status + recorded judgment note</a:t>
+            </a:r>
+          </a:p>
+          <a:p>
+            <a:pPr>
+              <a:spcAft>
+                <a:spcPts val="600"/>
+              </a:spcAft>
+              <a:defRPr sz="1600" b="0">
+                <a:solidFill>
+                  <a:srgbClr val="21394D"/>
+                </a:solidFill>
+                <a:latin typeface="DejaVu Sans"/>
+              </a:defRPr>
+            </a:pPr>
+          </a:p>
+          <a:p>
+            <a:pPr>
+              <a:spcAft>
+                <a:spcPts val="600"/>
+              </a:spcAft>
+              <a:defRPr sz="1600" b="0">
+                <a:solidFill>
+                  <a:srgbClr val="21394D"/>
+                </a:solidFill>
+                <a:latin typeface="DejaVu Sans"/>
+              </a:defRPr>
+            </a:pPr>
+            <a:r>
+              <a:t>10 labelled sample sources</a:t>
+            </a:r>
+          </a:p>
+        </p:txBody>
+      </p:sp>
+      <p:sp>
+        <p:nvSpPr>
           <p:cNvPr id="10" name="TextBox 9"/>
           <p:cNvSpPr txBox="1"/>
           <p:nvPr/>
         </p:nvSpPr>
         <p:spPr>
           <a:xfrm>
-            <a:off x="850392" y="3401568"/>
-            <a:ext cx="1243584" cy="219456"/>
-          </a:xfrm>
-          <a:prstGeom prst="rect">
-            <a:avLst/>
-          </a:prstGeom>
-          <a:noFill/>
-        </p:spPr>
-        <p:txBody>
-          <a:bodyPr wrap="square" lIns="0" rIns="0" tIns="0" bIns="0">
-            <a:spAutoFit/>
-          </a:bodyPr>
-          <a:lstStyle/>
-          <a:p>
-            <a:pPr>
-              <a:spcAft>
-                <a:spcPts val="500"/>
-              </a:spcAft>
-              <a:defRPr sz="1000" b="1">
-                <a:solidFill>
-                  <a:srgbClr val="62798A"/>
-                </a:solidFill>
-                <a:latin typeface="DejaVu Sans"/>
-              </a:defRPr>
-            </a:pPr>
-            <a:r>
-              <a:t>SOURCE ID</a:t>
-            </a:r>
-          </a:p>
-        </p:txBody>
-      </p:sp>
-      <p:sp>
-        <p:nvSpPr>
-          <p:cNvPr id="11" name="TextBox 10"/>
-          <p:cNvSpPr txBox="1"/>
-          <p:nvPr/>
-        </p:nvSpPr>
-        <p:spPr>
-          <a:xfrm>
-            <a:off x="2240280" y="3378708"/>
-            <a:ext cx="2743200" cy="429768"/>
-          </a:xfrm>
-          <a:prstGeom prst="rect">
-            <a:avLst/>
-          </a:prstGeom>
-          <a:noFill/>
-        </p:spPr>
-        <p:txBody>
-          <a:bodyPr wrap="square" lIns="0" rIns="0" tIns="0" bIns="0">
-            <a:spAutoFit/>
-          </a:bodyPr>
-          <a:lstStyle/>
-          <a:p>
-            <a:pPr>
-              <a:spcAft>
-                <a:spcPts val="500"/>
-              </a:spcAft>
-              <a:defRPr sz="1600" b="1">
-                <a:solidFill>
-                  <a:srgbClr val="142C43"/>
-                </a:solidFill>
-                <a:latin typeface="DejaVu Sans"/>
-              </a:defRPr>
-            </a:pPr>
-            <a:r>
-              <a:t>C167</a:t>
-            </a:r>
-          </a:p>
-        </p:txBody>
-      </p:sp>
-      <p:sp>
-        <p:nvSpPr>
-          <p:cNvPr id="12" name="TextBox 11"/>
-          <p:cNvSpPr txBox="1"/>
-          <p:nvPr/>
-        </p:nvSpPr>
-        <p:spPr>
-          <a:xfrm>
-            <a:off x="850392" y="4014215"/>
-            <a:ext cx="1243584" cy="219456"/>
-          </a:xfrm>
-          <a:prstGeom prst="rect">
-            <a:avLst/>
-          </a:prstGeom>
-          <a:noFill/>
-        </p:spPr>
-        <p:txBody>
-          <a:bodyPr wrap="square" lIns="0" rIns="0" tIns="0" bIns="0">
-            <a:spAutoFit/>
-          </a:bodyPr>
-          <a:lstStyle/>
-          <a:p>
-            <a:pPr>
-              <a:spcAft>
-                <a:spcPts val="500"/>
-              </a:spcAft>
-              <a:defRPr sz="1000" b="1">
-                <a:solidFill>
-                  <a:srgbClr val="62798A"/>
-                </a:solidFill>
-                <a:latin typeface="DejaVu Sans"/>
-              </a:defRPr>
-            </a:pPr>
-            <a:r>
-              <a:t>ACT</a:t>
-            </a:r>
-          </a:p>
-        </p:txBody>
-      </p:sp>
-      <p:sp>
-        <p:nvSpPr>
-          <p:cNvPr id="13" name="TextBox 12"/>
-          <p:cNvSpPr txBox="1"/>
-          <p:nvPr/>
-        </p:nvSpPr>
-        <p:spPr>
-          <a:xfrm>
-            <a:off x="2240280" y="3991355"/>
-            <a:ext cx="2743200" cy="429768"/>
-          </a:xfrm>
-          <a:prstGeom prst="rect">
-            <a:avLst/>
-          </a:prstGeom>
-          <a:noFill/>
-        </p:spPr>
-        <p:txBody>
-          <a:bodyPr wrap="square" lIns="0" rIns="0" tIns="0" bIns="0">
-            <a:spAutoFit/>
-          </a:bodyPr>
-          <a:lstStyle/>
-          <a:p>
-            <a:pPr>
-              <a:spcAft>
-                <a:spcPts val="500"/>
-              </a:spcAft>
-              <a:defRPr sz="1600" b="1">
-                <a:solidFill>
-                  <a:srgbClr val="142C43"/>
-                </a:solidFill>
-                <a:latin typeface="DejaVu Sans"/>
-              </a:defRPr>
-            </a:pPr>
-            <a:r>
-              <a:t>Criminal Procedure, 1898</a:t>
-            </a:r>
-          </a:p>
-        </p:txBody>
-      </p:sp>
-      <p:sp>
-        <p:nvSpPr>
-          <p:cNvPr id="14" name="TextBox 13"/>
-          <p:cNvSpPr txBox="1"/>
-          <p:nvPr/>
-        </p:nvSpPr>
-        <p:spPr>
-          <a:xfrm>
-            <a:off x="850392" y="4626864"/>
-            <a:ext cx="1243584" cy="219456"/>
-          </a:xfrm>
-          <a:prstGeom prst="rect">
-            <a:avLst/>
-          </a:prstGeom>
-          <a:noFill/>
-        </p:spPr>
-        <p:txBody>
-          <a:bodyPr wrap="square" lIns="0" rIns="0" tIns="0" bIns="0">
-            <a:spAutoFit/>
-          </a:bodyPr>
-          <a:lstStyle/>
-          <a:p>
-            <a:pPr>
-              <a:spcAft>
-                <a:spcPts val="500"/>
-              </a:spcAft>
-              <a:defRPr sz="1000" b="1">
-                <a:solidFill>
-                  <a:srgbClr val="62798A"/>
-                </a:solidFill>
-                <a:latin typeface="DejaVu Sans"/>
-              </a:defRPr>
-            </a:pPr>
-            <a:r>
-              <a:t>SECTION</a:t>
-            </a:r>
-          </a:p>
-        </p:txBody>
-      </p:sp>
-      <p:sp>
-        <p:nvSpPr>
-          <p:cNvPr id="15" name="TextBox 14"/>
-          <p:cNvSpPr txBox="1"/>
-          <p:nvPr/>
-        </p:nvSpPr>
-        <p:spPr>
-          <a:xfrm>
-            <a:off x="2240280" y="4604003"/>
-            <a:ext cx="2743200" cy="429768"/>
-          </a:xfrm>
-          <a:prstGeom prst="rect">
-            <a:avLst/>
-          </a:prstGeom>
-          <a:noFill/>
-        </p:spPr>
-        <p:txBody>
-          <a:bodyPr wrap="square" lIns="0" rIns="0" tIns="0" bIns="0">
-            <a:spAutoFit/>
-          </a:bodyPr>
-          <a:lstStyle/>
-          <a:p>
-            <a:pPr>
-              <a:spcAft>
-                <a:spcPts val="500"/>
-              </a:spcAft>
-              <a:defRPr sz="1600" b="1">
-                <a:solidFill>
-                  <a:srgbClr val="142C43"/>
-                </a:solidFill>
-                <a:latin typeface="DejaVu Sans"/>
-              </a:defRPr>
-            </a:pPr>
-            <a:r>
-              <a:t>167</a:t>
-            </a:r>
-          </a:p>
-        </p:txBody>
-      </p:sp>
-      <p:sp>
-        <p:nvSpPr>
-          <p:cNvPr id="16" name="TextBox 15"/>
-          <p:cNvSpPr txBox="1"/>
-          <p:nvPr/>
-        </p:nvSpPr>
-        <p:spPr>
-          <a:xfrm>
-            <a:off x="850392" y="5221224"/>
-            <a:ext cx="4206240" cy="228600"/>
-          </a:xfrm>
-          <a:prstGeom prst="rect">
-            <a:avLst/>
-          </a:prstGeom>
-          <a:noFill/>
-        </p:spPr>
-        <p:txBody>
-          <a:bodyPr wrap="square" lIns="0" rIns="0" tIns="0" bIns="0">
-            <a:spAutoFit/>
-          </a:bodyPr>
-          <a:lstStyle/>
-          <a:p>
-            <a:pPr>
-              <a:spcAft>
-                <a:spcPts val="500"/>
-              </a:spcAft>
-              <a:defRPr sz="1100" b="0">
-                <a:solidFill>
-                  <a:srgbClr val="62798A"/>
-                </a:solidFill>
-                <a:latin typeface="DejaVu Sans"/>
-              </a:defRPr>
-            </a:pPr>
-            <a:r>
-              <a:t>Also stores summary text and update notes.</a:t>
-            </a:r>
-          </a:p>
-        </p:txBody>
-      </p:sp>
-      <p:sp>
-        <p:nvSpPr>
-          <p:cNvPr id="17" name="TextBox 16"/>
-          <p:cNvSpPr txBox="1"/>
-          <p:nvPr/>
-        </p:nvSpPr>
-        <p:spPr>
-          <a:xfrm>
-            <a:off x="5468112" y="4096512"/>
-            <a:ext cx="749808" cy="384048"/>
-          </a:xfrm>
-          <a:prstGeom prst="rect">
-            <a:avLst/>
-          </a:prstGeom>
-          <a:noFill/>
-        </p:spPr>
-        <p:txBody>
-          <a:bodyPr wrap="square" lIns="0" rIns="0" tIns="0" bIns="0">
-            <a:spAutoFit/>
-          </a:bodyPr>
-          <a:lstStyle/>
-          <a:p>
-            <a:pPr>
-              <a:spcAft>
-                <a:spcPts val="500"/>
-              </a:spcAft>
-              <a:defRPr sz="1500" b="1">
+            <a:off x="4956048" y="3904487"/>
+            <a:ext cx="530352" cy="365760"/>
+          </a:xfrm>
+          <a:prstGeom prst="rect">
+            <a:avLst/>
+          </a:prstGeom>
+          <a:noFill/>
+        </p:spPr>
+        <p:txBody>
+          <a:bodyPr wrap="square" lIns="0" rIns="0" tIns="0" bIns="0">
+            <a:spAutoFit/>
+          </a:bodyPr>
+          <a:lstStyle/>
+          <a:p>
+            <a:pPr>
+              <a:spcAft>
+                <a:spcPts val="500"/>
+              </a:spcAft>
+              <a:defRPr sz="2400" b="1">
                 <a:solidFill>
                   <a:srgbClr val="087F76"/>
                 </a:solidFill>
@@ -6136,21 +5995,21 @@
               </a:defRPr>
             </a:pPr>
             <a:r>
-              <a:t>C167 →</a:t>
-            </a:r>
-          </a:p>
-        </p:txBody>
-      </p:sp>
-      <p:sp>
-        <p:nvSpPr>
-          <p:cNvPr id="18" name="Rounded Rectangle 17"/>
+              <a:t>→</a:t>
+            </a:r>
+          </a:p>
+        </p:txBody>
+      </p:sp>
+      <p:sp>
+        <p:nvSpPr>
+          <p:cNvPr id="11" name="Rounded Rectangle 10"/>
           <p:cNvSpPr/>
           <p:nvPr/>
         </p:nvSpPr>
         <p:spPr>
           <a:xfrm>
-            <a:off x="6428232" y="3136392"/>
-            <a:ext cx="5166360" cy="2505456"/>
+            <a:off x="5623560" y="2706624"/>
+            <a:ext cx="5971032" cy="2880360"/>
           </a:xfrm>
           <a:prstGeom prst="roundRect">
             <a:avLst>
@@ -6188,39 +6047,312 @@
       </p:sp>
       <p:sp>
         <p:nvSpPr>
+          <p:cNvPr id="12" name="TextBox 11"/>
+          <p:cNvSpPr txBox="1"/>
+          <p:nvPr/>
+        </p:nvSpPr>
+        <p:spPr>
+          <a:xfrm>
+            <a:off x="5861304" y="2926080"/>
+            <a:ext cx="5486400" cy="274320"/>
+          </a:xfrm>
+          <a:prstGeom prst="rect">
+            <a:avLst/>
+          </a:prstGeom>
+          <a:noFill/>
+        </p:spPr>
+        <p:txBody>
+          <a:bodyPr wrap="square" lIns="0" rIns="0" tIns="0" bIns="0">
+            <a:spAutoFit/>
+          </a:bodyPr>
+          <a:lstStyle/>
+          <a:p>
+            <a:pPr>
+              <a:spcAft>
+                <a:spcPts val="500"/>
+              </a:spcAft>
+              <a:defRPr sz="1200" b="1">
+                <a:solidFill>
+                  <a:srgbClr val="087F76"/>
+                </a:solidFill>
+                <a:latin typeface="DejaVu Sans"/>
+              </a:defRPr>
+            </a:pPr>
+            <a:r>
+              <a:t>PARAGRAPH RULE · M5 RECORDS</a:t>
+            </a:r>
+          </a:p>
+        </p:txBody>
+      </p:sp>
+      <p:sp>
+        <p:nvSpPr>
+          <p:cNvPr id="13" name="TextBox 12"/>
+          <p:cNvSpPr txBox="1"/>
+          <p:nvPr/>
+        </p:nvSpPr>
+        <p:spPr>
+          <a:xfrm>
+            <a:off x="5870448" y="3456432"/>
+            <a:ext cx="1545336" cy="292608"/>
+          </a:xfrm>
+          <a:prstGeom prst="rect">
+            <a:avLst/>
+          </a:prstGeom>
+          <a:noFill/>
+        </p:spPr>
+        <p:txBody>
+          <a:bodyPr wrap="square" lIns="0" rIns="0" tIns="0" bIns="0">
+            <a:spAutoFit/>
+          </a:bodyPr>
+          <a:lstStyle/>
+          <a:p>
+            <a:pPr>
+              <a:spcAft>
+                <a:spcPts val="500"/>
+              </a:spcAft>
+              <a:defRPr sz="1200" b="1">
+                <a:solidFill>
+                  <a:srgbClr val="62798A"/>
+                </a:solidFill>
+                <a:latin typeface="DejaVu Sans"/>
+              </a:defRPr>
+            </a:pPr>
+            <a:r>
+              <a:t>Condition</a:t>
+            </a:r>
+          </a:p>
+        </p:txBody>
+      </p:sp>
+      <p:sp>
+        <p:nvSpPr>
+          <p:cNvPr id="14" name="TextBox 13"/>
+          <p:cNvSpPr txBox="1"/>
+          <p:nvPr/>
+        </p:nvSpPr>
+        <p:spPr>
+          <a:xfrm>
+            <a:off x="7653527" y="3442715"/>
+            <a:ext cx="3657600" cy="356616"/>
+          </a:xfrm>
+          <a:prstGeom prst="rect">
+            <a:avLst/>
+          </a:prstGeom>
+          <a:noFill/>
+        </p:spPr>
+        <p:txBody>
+          <a:bodyPr wrap="square" lIns="0" rIns="0" tIns="0" bIns="0">
+            <a:spAutoFit/>
+          </a:bodyPr>
+          <a:lstStyle/>
+          <a:p>
+            <a:pPr>
+              <a:spcAft>
+                <a:spcPts val="500"/>
+              </a:spcAft>
+              <a:defRPr sz="1400" b="0">
+                <a:solidFill>
+                  <a:srgbClr val="21394D"/>
+                </a:solidFill>
+                <a:latin typeface="DejaVu Sans"/>
+              </a:defRPr>
+            </a:pPr>
+            <a:r>
+              <a:t>Records available = True</a:t>
+            </a:r>
+          </a:p>
+        </p:txBody>
+      </p:sp>
+      <p:sp>
+        <p:nvSpPr>
+          <p:cNvPr id="15" name="TextBox 14"/>
+          <p:cNvSpPr txBox="1"/>
+          <p:nvPr/>
+        </p:nvSpPr>
+        <p:spPr>
+          <a:xfrm>
+            <a:off x="5870448" y="3877056"/>
+            <a:ext cx="1545336" cy="292608"/>
+          </a:xfrm>
+          <a:prstGeom prst="rect">
+            <a:avLst/>
+          </a:prstGeom>
+          <a:noFill/>
+        </p:spPr>
+        <p:txBody>
+          <a:bodyPr wrap="square" lIns="0" rIns="0" tIns="0" bIns="0">
+            <a:spAutoFit/>
+          </a:bodyPr>
+          <a:lstStyle/>
+          <a:p>
+            <a:pPr>
+              <a:spcAft>
+                <a:spcPts val="500"/>
+              </a:spcAft>
+              <a:defRPr sz="1200" b="1">
+                <a:solidFill>
+                  <a:srgbClr val="62798A"/>
+                </a:solidFill>
+                <a:latin typeface="DejaVu Sans"/>
+              </a:defRPr>
+            </a:pPr>
+            <a:r>
+              <a:t>Dependency</a:t>
+            </a:r>
+          </a:p>
+        </p:txBody>
+      </p:sp>
+      <p:sp>
+        <p:nvSpPr>
+          <p:cNvPr id="16" name="TextBox 15"/>
+          <p:cNvSpPr txBox="1"/>
+          <p:nvPr/>
+        </p:nvSpPr>
+        <p:spPr>
+          <a:xfrm>
+            <a:off x="7653527" y="3863340"/>
+            <a:ext cx="3657600" cy="356616"/>
+          </a:xfrm>
+          <a:prstGeom prst="rect">
+            <a:avLst/>
+          </a:prstGeom>
+          <a:noFill/>
+        </p:spPr>
+        <p:txBody>
+          <a:bodyPr wrap="square" lIns="0" rIns="0" tIns="0" bIns="0">
+            <a:spAutoFit/>
+          </a:bodyPr>
+          <a:lstStyle/>
+          <a:p>
+            <a:pPr>
+              <a:spcAft>
+                <a:spcPts val="500"/>
+              </a:spcAft>
+              <a:defRPr sz="1400" b="0">
+                <a:solidFill>
+                  <a:srgbClr val="21394D"/>
+                </a:solidFill>
+                <a:latin typeface="DejaVu Sans"/>
+              </a:defRPr>
+            </a:pPr>
+            <a:r>
+              <a:t>Procedural block M3 included</a:t>
+            </a:r>
+          </a:p>
+        </p:txBody>
+      </p:sp>
+      <p:sp>
+        <p:nvSpPr>
+          <p:cNvPr id="17" name="TextBox 16"/>
+          <p:cNvSpPr txBox="1"/>
+          <p:nvPr/>
+        </p:nvSpPr>
+        <p:spPr>
+          <a:xfrm>
+            <a:off x="5870448" y="4297680"/>
+            <a:ext cx="1545336" cy="292608"/>
+          </a:xfrm>
+          <a:prstGeom prst="rect">
+            <a:avLst/>
+          </a:prstGeom>
+          <a:noFill/>
+        </p:spPr>
+        <p:txBody>
+          <a:bodyPr wrap="square" lIns="0" rIns="0" tIns="0" bIns="0">
+            <a:spAutoFit/>
+          </a:bodyPr>
+          <a:lstStyle/>
+          <a:p>
+            <a:pPr>
+              <a:spcAft>
+                <a:spcPts val="500"/>
+              </a:spcAft>
+              <a:defRPr sz="1200" b="1">
+                <a:solidFill>
+                  <a:srgbClr val="62798A"/>
+                </a:solidFill>
+                <a:latin typeface="DejaVu Sans"/>
+              </a:defRPr>
+            </a:pPr>
+            <a:r>
+              <a:t>Order / citation</a:t>
+            </a:r>
+          </a:p>
+        </p:txBody>
+      </p:sp>
+      <p:sp>
+        <p:nvSpPr>
+          <p:cNvPr id="18" name="TextBox 17"/>
+          <p:cNvSpPr txBox="1"/>
+          <p:nvPr/>
+        </p:nvSpPr>
+        <p:spPr>
+          <a:xfrm>
+            <a:off x="7653527" y="4283964"/>
+            <a:ext cx="3657600" cy="356616"/>
+          </a:xfrm>
+          <a:prstGeom prst="rect">
+            <a:avLst/>
+          </a:prstGeom>
+          <a:noFill/>
+        </p:spPr>
+        <p:txBody>
+          <a:bodyPr wrap="square" lIns="0" rIns="0" tIns="0" bIns="0">
+            <a:spAutoFit/>
+          </a:bodyPr>
+          <a:lstStyle/>
+          <a:p>
+            <a:pPr>
+              <a:spcAft>
+                <a:spcPts val="500"/>
+              </a:spcAft>
+              <a:defRPr sz="1400" b="0">
+                <a:solidFill>
+                  <a:srgbClr val="21394D"/>
+                </a:solidFill>
+                <a:latin typeface="DejaVu Sans"/>
+              </a:defRPr>
+            </a:pPr>
+            <a:r>
+              <a:t>Position 50 / source C167</a:t>
+            </a:r>
+          </a:p>
+        </p:txBody>
+      </p:sp>
+      <p:sp>
+        <p:nvSpPr>
           <p:cNvPr id="19" name="TextBox 18"/>
           <p:cNvSpPr txBox="1"/>
           <p:nvPr/>
         </p:nvSpPr>
         <p:spPr>
           <a:xfrm>
-            <a:off x="6693408" y="3410712"/>
-            <a:ext cx="4608576" cy="374904"/>
-          </a:xfrm>
-          <a:prstGeom prst="rect">
-            <a:avLst/>
-          </a:prstGeom>
-          <a:noFill/>
-        </p:spPr>
-        <p:txBody>
-          <a:bodyPr wrap="square" lIns="0" rIns="0" tIns="0" bIns="0">
-            <a:spAutoFit/>
-          </a:bodyPr>
-          <a:lstStyle/>
-          <a:p>
-            <a:pPr>
-              <a:spcAft>
-                <a:spcPts val="500"/>
-              </a:spcAft>
-              <a:defRPr sz="2100" b="1">
-                <a:solidFill>
-                  <a:srgbClr val="142C43"/>
-                </a:solidFill>
-                <a:latin typeface="DejaVu Sans"/>
-              </a:defRPr>
-            </a:pPr>
-            <a:r>
-              <a:t>M5 · Records paragraph</a:t>
+            <a:off x="5870448" y="4718304"/>
+            <a:ext cx="1545336" cy="292608"/>
+          </a:xfrm>
+          <a:prstGeom prst="rect">
+            <a:avLst/>
+          </a:prstGeom>
+          <a:noFill/>
+        </p:spPr>
+        <p:txBody>
+          <a:bodyPr wrap="square" lIns="0" rIns="0" tIns="0" bIns="0">
+            <a:spAutoFit/>
+          </a:bodyPr>
+          <a:lstStyle/>
+          <a:p>
+            <a:pPr>
+              <a:spcAft>
+                <a:spcPts val="500"/>
+              </a:spcAft>
+              <a:defRPr sz="1200" b="1">
+                <a:solidFill>
+                  <a:srgbClr val="62798A"/>
+                </a:solidFill>
+                <a:latin typeface="DejaVu Sans"/>
+              </a:defRPr>
+            </a:pPr>
+            <a:r>
+              <a:t>Text</a:t>
             </a:r>
           </a:p>
         </p:txBody>
@@ -6233,25 +6365,25 @@
         </p:nvSpPr>
         <p:spPr>
           <a:xfrm>
-            <a:off x="6693408" y="4059936"/>
-            <a:ext cx="4608576" cy="1078992"/>
-          </a:xfrm>
-          <a:prstGeom prst="rect">
-            <a:avLst/>
-          </a:prstGeom>
-          <a:noFill/>
-        </p:spPr>
-        <p:txBody>
-          <a:bodyPr wrap="square" lIns="0" rIns="0" tIns="0" bIns="0">
-            <a:spAutoFit/>
-          </a:bodyPr>
-          <a:lstStyle/>
-          <a:p>
-            <a:pPr>
-              <a:spcAft>
-                <a:spcPts val="500"/>
-              </a:spcAft>
-              <a:defRPr sz="1700" b="0">
+            <a:off x="7653527" y="4704588"/>
+            <a:ext cx="3657600" cy="356616"/>
+          </a:xfrm>
+          <a:prstGeom prst="rect">
+            <a:avLst/>
+          </a:prstGeom>
+          <a:noFill/>
+        </p:spPr>
+        <p:txBody>
+          <a:bodyPr wrap="square" lIns="0" rIns="0" tIns="0" bIns="0">
+            <a:spAutoFit/>
+          </a:bodyPr>
+          <a:lstStyle/>
+          <a:p>
+            <a:pPr>
+              <a:spcAft>
+                <a:spcPts val="500"/>
+              </a:spcAft>
+              <a:defRPr sz="1400" b="0">
                 <a:solidFill>
                   <a:srgbClr val="21394D"/>
                 </a:solidFill>
@@ -6259,39 +6391,7 @@
               </a:defRPr>
             </a:pPr>
             <a:r>
-              <a:t>Use if records are available</a:t>
-            </a:r>
-          </a:p>
-          <a:p>
-            <a:pPr>
-              <a:spcAft>
-                <a:spcPts val="500"/>
-              </a:spcAft>
-              <a:defRPr sz="1700" b="0">
-                <a:solidFill>
-                  <a:srgbClr val="21394D"/>
-                </a:solidFill>
-                <a:latin typeface="DejaVu Sans"/>
-              </a:defRPr>
-            </a:pPr>
-            <a:r>
-              <a:t>AND procedural block M3 is selected.</a:t>
-            </a:r>
-          </a:p>
-          <a:p>
-            <a:pPr>
-              <a:spcAft>
-                <a:spcPts val="500"/>
-              </a:spcAft>
-              <a:defRPr sz="1700" b="0">
-                <a:solidFill>
-                  <a:srgbClr val="21394D"/>
-                </a:solidFill>
-                <a:latin typeface="DejaVu Sans"/>
-              </a:defRPr>
-            </a:pPr>
-            <a:r>
-              <a:t>Required reference: C167</a:t>
+              <a:t>A prepared records paragraph</a:t>
             </a:r>
           </a:p>
         </p:txBody>
@@ -6304,33 +6404,33 @@
         </p:nvSpPr>
         <p:spPr>
           <a:xfrm>
-            <a:off x="594360" y="5980176"/>
-            <a:ext cx="10972800" cy="274320"/>
-          </a:xfrm>
-          <a:prstGeom prst="rect">
-            <a:avLst/>
-          </a:prstGeom>
-          <a:noFill/>
-        </p:spPr>
-        <p:txBody>
-          <a:bodyPr wrap="square" lIns="0" rIns="0" tIns="0" bIns="0">
-            <a:spAutoFit/>
-          </a:bodyPr>
-          <a:lstStyle/>
-          <a:p>
-            <a:pPr>
-              <a:spcAft>
-                <a:spcPts val="500"/>
-              </a:spcAft>
-              <a:defRPr sz="1300" b="0">
-                <a:solidFill>
-                  <a:srgbClr val="62798A"/>
-                </a:solidFill>
-                <a:latin typeface="DejaVu Sans"/>
-              </a:defRPr>
-            </a:pPr>
-            <a:r>
-              <a:t>These cells define records and rules. They do not assemble the document yet.</a:t>
+            <a:off x="594360" y="5916168"/>
+            <a:ext cx="10972800" cy="320040"/>
+          </a:xfrm>
+          <a:prstGeom prst="rect">
+            <a:avLst/>
+          </a:prstGeom>
+          <a:noFill/>
+        </p:spPr>
+        <p:txBody>
+          <a:bodyPr wrap="square" lIns="0" rIns="0" tIns="0" bIns="0">
+            <a:spAutoFit/>
+          </a:bodyPr>
+          <a:lstStyle/>
+          <a:p>
+            <a:pPr>
+              <a:spcAft>
+                <a:spcPts val="500"/>
+              </a:spcAft>
+              <a:defRPr sz="1400" b="1">
+                <a:solidFill>
+                  <a:srgbClr val="087F76"/>
+                </a:solidFill>
+                <a:latin typeface="DejaVu Sans"/>
+              </a:defRPr>
+            </a:pPr>
+            <a:r>
+              <a:t>Output: 10 source records + 7 module definitions, held in knowledge-base version 1.2.0.</a:t>
             </a:r>
           </a:p>
         </p:txBody>
@@ -6434,7 +6534,7 @@
               </a:defRPr>
             </a:pPr>
             <a:r>
-              <a:t>Use the facts to build and explain the draft</a:t>
+              <a:t>Show exactly why each paragraph is selected</a:t>
             </a:r>
           </a:p>
         </p:txBody>
@@ -6473,7 +6573,7 @@
               </a:defRPr>
             </a:pPr>
             <a:r>
-              <a:t>Same facts and rule version → the same prepared output.</a:t>
+              <a:t>Validate facts → check conditions and dependencies → reject conflicts → fill templates.</a:t>
             </a:r>
           </a:p>
         </p:txBody>
@@ -6551,7 +6651,7 @@
               </a:defRPr>
             </a:pPr>
             <a:r>
-              <a:t>04 / 07</a:t>
+              <a:t>04 / 08</a:t>
             </a:r>
           </a:p>
         </p:txBody>
@@ -6564,8 +6664,8 @@
         </p:nvSpPr>
         <p:spPr>
           <a:xfrm>
-            <a:off x="594360" y="2788920"/>
-            <a:ext cx="2788920" cy="2450592"/>
+            <a:off x="594360" y="2697480"/>
+            <a:ext cx="3108960" cy="2953512"/>
           </a:xfrm>
           <a:prstGeom prst="roundRect">
             <a:avLst>
@@ -6609,25 +6709,25 @@
         </p:nvSpPr>
         <p:spPr>
           <a:xfrm>
-            <a:off x="804672" y="3017520"/>
-            <a:ext cx="2368296" cy="274320"/>
-          </a:xfrm>
-          <a:prstGeom prst="rect">
-            <a:avLst/>
-          </a:prstGeom>
-          <a:noFill/>
-        </p:spPr>
-        <p:txBody>
-          <a:bodyPr wrap="square" lIns="0" rIns="0" tIns="0" bIns="0">
-            <a:spAutoFit/>
-          </a:bodyPr>
-          <a:lstStyle/>
-          <a:p>
-            <a:pPr>
-              <a:spcAft>
-                <a:spcPts val="500"/>
-              </a:spcAft>
-              <a:defRPr sz="1100" b="1">
+            <a:off x="822960" y="2926080"/>
+            <a:ext cx="2651760" cy="265176"/>
+          </a:xfrm>
+          <a:prstGeom prst="rect">
+            <a:avLst/>
+          </a:prstGeom>
+          <a:noFill/>
+        </p:spPr>
+        <p:txBody>
+          <a:bodyPr wrap="square" lIns="0" rIns="0" tIns="0" bIns="0">
+            <a:spAutoFit/>
+          </a:bodyPr>
+          <a:lstStyle/>
+          <a:p>
+            <a:pPr>
+              <a:spcAft>
+                <a:spcPts val="500"/>
+              </a:spcAft>
+              <a:defRPr sz="1200" b="1">
                 <a:solidFill>
                   <a:srgbClr val="087F76"/>
                 </a:solidFill>
@@ -6635,29 +6735,146 @@
               </a:defRPr>
             </a:pPr>
             <a:r>
-              <a:t>CASE FACTS</a:t>
-            </a:r>
-          </a:p>
-        </p:txBody>
-      </p:sp>
-      <p:sp>
-        <p:nvSpPr>
-          <p:cNvPr id="9" name="Rounded Rectangle 8"/>
+              <a:t>SAMPLE INPUT</a:t>
+            </a:r>
+          </a:p>
+        </p:txBody>
+      </p:sp>
+      <p:sp>
+        <p:nvSpPr>
+          <p:cNvPr id="9" name="TextBox 8"/>
+          <p:cNvSpPr txBox="1"/>
+          <p:nvPr/>
+        </p:nvSpPr>
+        <p:spPr>
+          <a:xfrm>
+            <a:off x="822960" y="3474720"/>
+            <a:ext cx="2651760" cy="1901952"/>
+          </a:xfrm>
+          <a:prstGeom prst="rect">
+            <a:avLst/>
+          </a:prstGeom>
+          <a:noFill/>
+        </p:spPr>
+        <p:txBody>
+          <a:bodyPr wrap="square" lIns="0" rIns="0" tIns="0" bIns="0">
+            <a:spAutoFit/>
+          </a:bodyPr>
+          <a:lstStyle/>
+          <a:p>
+            <a:pPr>
+              <a:spcAft>
+                <a:spcPts val="700"/>
+              </a:spcAft>
+              <a:defRPr sz="1400" b="0">
+                <a:solidFill>
+                  <a:srgbClr val="21394D"/>
+                </a:solidFill>
+                <a:latin typeface="DejaVu Sans"/>
+              </a:defRPr>
+            </a:pPr>
+            <a:r>
+              <a:t>Forum: magistrate</a:t>
+            </a:r>
+          </a:p>
+          <a:p>
+            <a:pPr>
+              <a:spcAft>
+                <a:spcPts val="700"/>
+              </a:spcAft>
+              <a:defRPr sz="1400" b="0">
+                <a:solidFill>
+                  <a:srgbClr val="21394D"/>
+                </a:solidFill>
+                <a:latin typeface="DejaVu Sans"/>
+              </a:defRPr>
+            </a:pPr>
+            <a:r>
+              <a:t>Facts: available</a:t>
+            </a:r>
+          </a:p>
+          <a:p>
+            <a:pPr>
+              <a:spcAft>
+                <a:spcPts val="700"/>
+              </a:spcAft>
+              <a:defRPr sz="1400" b="0">
+                <a:solidFill>
+                  <a:srgbClr val="21394D"/>
+                </a:solidFill>
+                <a:latin typeface="DejaVu Sans"/>
+              </a:defRPr>
+            </a:pPr>
+            <a:r>
+              <a:t>Procedure: requested</a:t>
+            </a:r>
+          </a:p>
+          <a:p>
+            <a:pPr>
+              <a:spcAft>
+                <a:spcPts val="700"/>
+              </a:spcAft>
+              <a:defRPr sz="1400" b="0">
+                <a:solidFill>
+                  <a:srgbClr val="21394D"/>
+                </a:solidFill>
+                <a:latin typeface="DejaVu Sans"/>
+              </a:defRPr>
+            </a:pPr>
+            <a:r>
+              <a:t>Records: available</a:t>
+            </a:r>
+          </a:p>
+          <a:p>
+            <a:pPr>
+              <a:spcAft>
+                <a:spcPts val="700"/>
+              </a:spcAft>
+              <a:defRPr sz="1400" b="0">
+                <a:solidFill>
+                  <a:srgbClr val="21394D"/>
+                </a:solidFill>
+                <a:latin typeface="DejaVu Sans"/>
+              </a:defRPr>
+            </a:pPr>
+            <a:r>
+              <a:t>Relief: requested</a:t>
+            </a:r>
+          </a:p>
+          <a:p>
+            <a:pPr>
+              <a:spcAft>
+                <a:spcPts val="700"/>
+              </a:spcAft>
+              <a:defRPr sz="1400" b="0">
+                <a:solidFill>
+                  <a:srgbClr val="21394D"/>
+                </a:solidFill>
+                <a:latin typeface="DejaVu Sans"/>
+              </a:defRPr>
+            </a:pPr>
+            <a:r>
+              <a:t>Other route flags: false</a:t>
+            </a:r>
+          </a:p>
+        </p:txBody>
+      </p:sp>
+      <p:sp>
+        <p:nvSpPr>
+          <p:cNvPr id="10" name="Rectangle 9"/>
           <p:cNvSpPr/>
           <p:nvPr/>
         </p:nvSpPr>
         <p:spPr>
           <a:xfrm>
-            <a:off x="3858768" y="2788920"/>
-            <a:ext cx="3209544" cy="2450592"/>
-          </a:xfrm>
-          <a:prstGeom prst="roundRect">
-            <a:avLst>
-              <a:gd name="adj" fmla="val 6000"/>
-            </a:avLst>
+            <a:off x="4069080" y="2697480"/>
+            <a:ext cx="7525512" cy="393192"/>
+          </a:xfrm>
+          <a:prstGeom prst="rect">
+            <a:avLst/>
           </a:prstGeom>
           <a:solidFill>
-            <a:srgbClr val="F0F4F6"/>
+            <a:srgbClr val="142C43"/>
           </a:solidFill>
           <a:ln>
             <a:noFill/>
@@ -6687,61 +6904,137 @@
       </p:sp>
       <p:sp>
         <p:nvSpPr>
-          <p:cNvPr id="10" name="TextBox 9"/>
-          <p:cNvSpPr txBox="1"/>
-          <p:nvPr/>
-        </p:nvSpPr>
-        <p:spPr>
-          <a:xfrm>
-            <a:off x="4069080" y="3017520"/>
-            <a:ext cx="2788920" cy="274320"/>
-          </a:xfrm>
-          <a:prstGeom prst="rect">
-            <a:avLst/>
-          </a:prstGeom>
-          <a:noFill/>
-        </p:spPr>
-        <p:txBody>
-          <a:bodyPr wrap="square" lIns="0" rIns="0" tIns="0" bIns="0">
-            <a:spAutoFit/>
-          </a:bodyPr>
-          <a:lstStyle/>
-          <a:p>
-            <a:pPr>
-              <a:spcAft>
-                <a:spcPts val="500"/>
-              </a:spcAft>
-              <a:defRPr sz="1100" b="1">
-                <a:solidFill>
-                  <a:srgbClr val="087F76"/>
-                </a:solidFill>
-                <a:latin typeface="DejaVu Sans"/>
-              </a:defRPr>
-            </a:pPr>
-            <a:r>
-              <a:t>ENGINE CHECKS</a:t>
-            </a:r>
-          </a:p>
-        </p:txBody>
-      </p:sp>
-      <p:sp>
-        <p:nvSpPr>
-          <p:cNvPr id="11" name="Rounded Rectangle 10"/>
+          <p:cNvPr id="11" name="TextBox 10"/>
+          <p:cNvSpPr txBox="1"/>
+          <p:nvPr/>
+        </p:nvSpPr>
+        <p:spPr>
+          <a:xfrm>
+            <a:off x="4233672" y="2788920"/>
+            <a:ext cx="594360" cy="219456"/>
+          </a:xfrm>
+          <a:prstGeom prst="rect">
+            <a:avLst/>
+          </a:prstGeom>
+          <a:noFill/>
+        </p:spPr>
+        <p:txBody>
+          <a:bodyPr wrap="square" lIns="0" rIns="0" tIns="0" bIns="0">
+            <a:spAutoFit/>
+          </a:bodyPr>
+          <a:lstStyle/>
+          <a:p>
+            <a:pPr>
+              <a:spcAft>
+                <a:spcPts val="500"/>
+              </a:spcAft>
+              <a:defRPr sz="1000" b="1">
+                <a:solidFill>
+                  <a:srgbClr val="FFFFFF"/>
+                </a:solidFill>
+                <a:latin typeface="DejaVu Sans"/>
+              </a:defRPr>
+            </a:pPr>
+            <a:r>
+              <a:t>BLOCK</a:t>
+            </a:r>
+          </a:p>
+        </p:txBody>
+      </p:sp>
+      <p:sp>
+        <p:nvSpPr>
+          <p:cNvPr id="12" name="TextBox 11"/>
+          <p:cNvSpPr txBox="1"/>
+          <p:nvPr/>
+        </p:nvSpPr>
+        <p:spPr>
+          <a:xfrm>
+            <a:off x="5020056" y="2788920"/>
+            <a:ext cx="1280160" cy="219456"/>
+          </a:xfrm>
+          <a:prstGeom prst="rect">
+            <a:avLst/>
+          </a:prstGeom>
+          <a:noFill/>
+        </p:spPr>
+        <p:txBody>
+          <a:bodyPr wrap="square" lIns="0" rIns="0" tIns="0" bIns="0">
+            <a:spAutoFit/>
+          </a:bodyPr>
+          <a:lstStyle/>
+          <a:p>
+            <a:pPr>
+              <a:spcAft>
+                <a:spcPts val="500"/>
+              </a:spcAft>
+              <a:defRPr sz="1000" b="1">
+                <a:solidFill>
+                  <a:srgbClr val="FFFFFF"/>
+                </a:solidFill>
+                <a:latin typeface="DejaVu Sans"/>
+              </a:defRPr>
+            </a:pPr>
+            <a:r>
+              <a:t>DECISION</a:t>
+            </a:r>
+          </a:p>
+        </p:txBody>
+      </p:sp>
+      <p:sp>
+        <p:nvSpPr>
+          <p:cNvPr id="13" name="TextBox 12"/>
+          <p:cNvSpPr txBox="1"/>
+          <p:nvPr/>
+        </p:nvSpPr>
+        <p:spPr>
+          <a:xfrm>
+            <a:off x="6483096" y="2788920"/>
+            <a:ext cx="4864608" cy="219456"/>
+          </a:xfrm>
+          <a:prstGeom prst="rect">
+            <a:avLst/>
+          </a:prstGeom>
+          <a:noFill/>
+        </p:spPr>
+        <p:txBody>
+          <a:bodyPr wrap="square" lIns="0" rIns="0" tIns="0" bIns="0">
+            <a:spAutoFit/>
+          </a:bodyPr>
+          <a:lstStyle/>
+          <a:p>
+            <a:pPr>
+              <a:spcAft>
+                <a:spcPts val="500"/>
+              </a:spcAft>
+              <a:defRPr sz="1000" b="1">
+                <a:solidFill>
+                  <a:srgbClr val="FFFFFF"/>
+                </a:solidFill>
+                <a:latin typeface="DejaVu Sans"/>
+              </a:defRPr>
+            </a:pPr>
+            <a:r>
+              <a:t>WHY</a:t>
+            </a:r>
+          </a:p>
+        </p:txBody>
+      </p:sp>
+      <p:sp>
+        <p:nvSpPr>
+          <p:cNvPr id="14" name="Rectangle 13"/>
           <p:cNvSpPr/>
           <p:nvPr/>
         </p:nvSpPr>
         <p:spPr>
           <a:xfrm>
-            <a:off x="7552944" y="2788920"/>
-            <a:ext cx="4041648" cy="2450592"/>
-          </a:xfrm>
-          <a:prstGeom prst="roundRect">
-            <a:avLst>
-              <a:gd name="adj" fmla="val 6000"/>
-            </a:avLst>
+            <a:off x="4069080" y="3108960"/>
+            <a:ext cx="7525512" cy="356616"/>
+          </a:xfrm>
+          <a:prstGeom prst="rect">
+            <a:avLst/>
           </a:prstGeom>
           <a:solidFill>
-            <a:srgbClr val="E9F4F0"/>
+            <a:srgbClr val="F0F4F6"/>
           </a:solidFill>
           <a:ln>
             <a:noFill/>
@@ -6771,31 +7064,70 @@
       </p:sp>
       <p:sp>
         <p:nvSpPr>
-          <p:cNvPr id="12" name="TextBox 11"/>
-          <p:cNvSpPr txBox="1"/>
-          <p:nvPr/>
-        </p:nvSpPr>
-        <p:spPr>
-          <a:xfrm>
-            <a:off x="7763256" y="3017520"/>
-            <a:ext cx="3621024" cy="274320"/>
-          </a:xfrm>
-          <a:prstGeom prst="rect">
-            <a:avLst/>
-          </a:prstGeom>
-          <a:noFill/>
-        </p:spPr>
-        <p:txBody>
-          <a:bodyPr wrap="square" lIns="0" rIns="0" tIns="0" bIns="0">
-            <a:spAutoFit/>
-          </a:bodyPr>
-          <a:lstStyle/>
-          <a:p>
-            <a:pPr>
-              <a:spcAft>
-                <a:spcPts val="500"/>
-              </a:spcAft>
-              <a:defRPr sz="1100" b="1">
+          <p:cNvPr id="15" name="TextBox 14"/>
+          <p:cNvSpPr txBox="1"/>
+          <p:nvPr/>
+        </p:nvSpPr>
+        <p:spPr>
+          <a:xfrm>
+            <a:off x="4233672" y="3172968"/>
+            <a:ext cx="594360" cy="228600"/>
+          </a:xfrm>
+          <a:prstGeom prst="rect">
+            <a:avLst/>
+          </a:prstGeom>
+          <a:noFill/>
+        </p:spPr>
+        <p:txBody>
+          <a:bodyPr wrap="square" lIns="0" rIns="0" tIns="0" bIns="0">
+            <a:spAutoFit/>
+          </a:bodyPr>
+          <a:lstStyle/>
+          <a:p>
+            <a:pPr>
+              <a:spcAft>
+                <a:spcPts val="500"/>
+              </a:spcAft>
+              <a:defRPr sz="1200" b="1">
+                <a:solidFill>
+                  <a:srgbClr val="21394D"/>
+                </a:solidFill>
+                <a:latin typeface="DejaVu Sans"/>
+              </a:defRPr>
+            </a:pPr>
+            <a:r>
+              <a:t>M1</a:t>
+            </a:r>
+          </a:p>
+        </p:txBody>
+      </p:sp>
+      <p:sp>
+        <p:nvSpPr>
+          <p:cNvPr id="16" name="TextBox 15"/>
+          <p:cNvSpPr txBox="1"/>
+          <p:nvPr/>
+        </p:nvSpPr>
+        <p:spPr>
+          <a:xfrm>
+            <a:off x="5020056" y="3172968"/>
+            <a:ext cx="1280160" cy="228600"/>
+          </a:xfrm>
+          <a:prstGeom prst="rect">
+            <a:avLst/>
+          </a:prstGeom>
+          <a:noFill/>
+        </p:spPr>
+        <p:txBody>
+          <a:bodyPr wrap="square" lIns="0" rIns="0" tIns="0" bIns="0">
+            <a:spAutoFit/>
+          </a:bodyPr>
+          <a:lstStyle/>
+          <a:p>
+            <a:pPr>
+              <a:spcAft>
+                <a:spcPts val="500"/>
+              </a:spcAft>
+              <a:defRPr sz="1000" b="1">
                 <a:solidFill>
                   <a:srgbClr val="087F76"/>
                 </a:solidFill>
@@ -6803,38 +7135,38 @@
               </a:defRPr>
             </a:pPr>
             <a:r>
-              <a:t>PREPARED DRAFT</a:t>
-            </a:r>
-          </a:p>
-        </p:txBody>
-      </p:sp>
-      <p:sp>
-        <p:nvSpPr>
-          <p:cNvPr id="13" name="TextBox 12"/>
-          <p:cNvSpPr txBox="1"/>
-          <p:nvPr/>
-        </p:nvSpPr>
-        <p:spPr>
-          <a:xfrm>
-            <a:off x="804672" y="3621024"/>
-            <a:ext cx="2359152" cy="1207008"/>
-          </a:xfrm>
-          <a:prstGeom prst="rect">
-            <a:avLst/>
-          </a:prstGeom>
-          <a:noFill/>
-        </p:spPr>
-        <p:txBody>
-          <a:bodyPr wrap="square" lIns="0" rIns="0" tIns="0" bIns="0">
-            <a:spAutoFit/>
-          </a:bodyPr>
-          <a:lstStyle/>
-          <a:p>
-            <a:pPr>
-              <a:spcAft>
-                <a:spcPts val="500"/>
-              </a:spcAft>
-              <a:defRPr sz="1700" b="0">
+              <a:t>INCLUDED</a:t>
+            </a:r>
+          </a:p>
+        </p:txBody>
+      </p:sp>
+      <p:sp>
+        <p:nvSpPr>
+          <p:cNvPr id="17" name="TextBox 16"/>
+          <p:cNvSpPr txBox="1"/>
+          <p:nvPr/>
+        </p:nvSpPr>
+        <p:spPr>
+          <a:xfrm>
+            <a:off x="6483096" y="3172968"/>
+            <a:ext cx="4864608" cy="237744"/>
+          </a:xfrm>
+          <a:prstGeom prst="rect">
+            <a:avLst/>
+          </a:prstGeom>
+          <a:noFill/>
+        </p:spPr>
+        <p:txBody>
+          <a:bodyPr wrap="square" lIns="0" rIns="0" tIns="0" bIns="0">
+            <a:spAutoFit/>
+          </a:bodyPr>
+          <a:lstStyle/>
+          <a:p>
+            <a:pPr>
+              <a:spcAft>
+                <a:spcPts val="500"/>
+              </a:spcAft>
+              <a:defRPr sz="1200" b="0">
                 <a:solidFill>
                   <a:srgbClr val="21394D"/>
                 </a:solidFill>
@@ -6842,15 +7174,38 @@
               </a:defRPr>
             </a:pPr>
             <a:r>
-              <a:t>Procedure: yes</a:t>
-            </a:r>
-          </a:p>
-          <a:p>
-            <a:pPr>
-              <a:spcAft>
-                <a:spcPts val="500"/>
-              </a:spcAft>
-              <a:defRPr sz="1700" b="0">
+              <a:t>Forum matches</a:t>
+            </a:r>
+          </a:p>
+        </p:txBody>
+      </p:sp>
+      <p:sp>
+        <p:nvSpPr>
+          <p:cNvPr id="18" name="TextBox 17"/>
+          <p:cNvSpPr txBox="1"/>
+          <p:nvPr/>
+        </p:nvSpPr>
+        <p:spPr>
+          <a:xfrm>
+            <a:off x="4233672" y="3538727"/>
+            <a:ext cx="594360" cy="228600"/>
+          </a:xfrm>
+          <a:prstGeom prst="rect">
+            <a:avLst/>
+          </a:prstGeom>
+          <a:noFill/>
+        </p:spPr>
+        <p:txBody>
+          <a:bodyPr wrap="square" lIns="0" rIns="0" tIns="0" bIns="0">
+            <a:spAutoFit/>
+          </a:bodyPr>
+          <a:lstStyle/>
+          <a:p>
+            <a:pPr>
+              <a:spcAft>
+                <a:spcPts val="500"/>
+              </a:spcAft>
+              <a:defRPr sz="1200" b="1">
                 <a:solidFill>
                   <a:srgbClr val="21394D"/>
                 </a:solidFill>
@@ -6858,15 +7213,77 @@
               </a:defRPr>
             </a:pPr>
             <a:r>
-              <a:t>Records: yes</a:t>
-            </a:r>
-          </a:p>
-          <a:p>
-            <a:pPr>
-              <a:spcAft>
-                <a:spcPts val="500"/>
-              </a:spcAft>
-              <a:defRPr sz="1700" b="0">
+              <a:t>M2</a:t>
+            </a:r>
+          </a:p>
+        </p:txBody>
+      </p:sp>
+      <p:sp>
+        <p:nvSpPr>
+          <p:cNvPr id="19" name="TextBox 18"/>
+          <p:cNvSpPr txBox="1"/>
+          <p:nvPr/>
+        </p:nvSpPr>
+        <p:spPr>
+          <a:xfrm>
+            <a:off x="5020056" y="3538727"/>
+            <a:ext cx="1280160" cy="228600"/>
+          </a:xfrm>
+          <a:prstGeom prst="rect">
+            <a:avLst/>
+          </a:prstGeom>
+          <a:noFill/>
+        </p:spPr>
+        <p:txBody>
+          <a:bodyPr wrap="square" lIns="0" rIns="0" tIns="0" bIns="0">
+            <a:spAutoFit/>
+          </a:bodyPr>
+          <a:lstStyle/>
+          <a:p>
+            <a:pPr>
+              <a:spcAft>
+                <a:spcPts val="500"/>
+              </a:spcAft>
+              <a:defRPr sz="1000" b="1">
+                <a:solidFill>
+                  <a:srgbClr val="087F76"/>
+                </a:solidFill>
+                <a:latin typeface="DejaVu Sans"/>
+              </a:defRPr>
+            </a:pPr>
+            <a:r>
+              <a:t>INCLUDED</a:t>
+            </a:r>
+          </a:p>
+        </p:txBody>
+      </p:sp>
+      <p:sp>
+        <p:nvSpPr>
+          <p:cNvPr id="20" name="TextBox 19"/>
+          <p:cNvSpPr txBox="1"/>
+          <p:nvPr/>
+        </p:nvSpPr>
+        <p:spPr>
+          <a:xfrm>
+            <a:off x="6483096" y="3538727"/>
+            <a:ext cx="4864608" cy="237744"/>
+          </a:xfrm>
+          <a:prstGeom prst="rect">
+            <a:avLst/>
+          </a:prstGeom>
+          <a:noFill/>
+        </p:spPr>
+        <p:txBody>
+          <a:bodyPr wrap="square" lIns="0" rIns="0" tIns="0" bIns="0">
+            <a:spAutoFit/>
+          </a:bodyPr>
+          <a:lstStyle/>
+          <a:p>
+            <a:pPr>
+              <a:spcAft>
+                <a:spcPts val="500"/>
+              </a:spcAft>
+              <a:defRPr sz="1200" b="0">
                 <a:solidFill>
                   <a:srgbClr val="21394D"/>
                 </a:solidFill>
@@ -6874,249 +7291,27 @@
               </a:defRPr>
             </a:pPr>
             <a:r>
-              <a:t>Relief: yes</a:t>
-            </a:r>
-          </a:p>
-        </p:txBody>
-      </p:sp>
-      <p:sp>
-        <p:nvSpPr>
-          <p:cNvPr id="14" name="TextBox 13"/>
-          <p:cNvSpPr txBox="1"/>
-          <p:nvPr/>
-        </p:nvSpPr>
-        <p:spPr>
-          <a:xfrm>
-            <a:off x="4069080" y="3621024"/>
-            <a:ext cx="2779776" cy="1207008"/>
-          </a:xfrm>
-          <a:prstGeom prst="rect">
-            <a:avLst/>
-          </a:prstGeom>
-          <a:noFill/>
-        </p:spPr>
-        <p:txBody>
-          <a:bodyPr wrap="square" lIns="0" rIns="0" tIns="0" bIns="0">
-            <a:spAutoFit/>
-          </a:bodyPr>
-          <a:lstStyle/>
-          <a:p>
-            <a:pPr>
-              <a:spcAft>
-                <a:spcPts val="500"/>
-              </a:spcAft>
-              <a:defRPr sz="1600" b="0">
-                <a:solidFill>
-                  <a:srgbClr val="21394D"/>
-                </a:solidFill>
-                <a:latin typeface="DejaVu Sans"/>
-              </a:defRPr>
-            </a:pPr>
-            <a:r>
-              <a:t>Valid inputs?</a:t>
-            </a:r>
-          </a:p>
-          <a:p>
-            <a:pPr>
-              <a:spcAft>
-                <a:spcPts val="500"/>
-              </a:spcAft>
-              <a:defRPr sz="1600" b="0">
-                <a:solidFill>
-                  <a:srgbClr val="21394D"/>
-                </a:solidFill>
-                <a:latin typeface="DejaVu Sans"/>
-              </a:defRPr>
-            </a:pPr>
-            <a:r>
-              <a:t>Conditions + prerequisites?</a:t>
-            </a:r>
-          </a:p>
-          <a:p>
-            <a:pPr>
-              <a:spcAft>
-                <a:spcPts val="500"/>
-              </a:spcAft>
-              <a:defRPr sz="1600" b="0">
-                <a:solidFill>
-                  <a:srgbClr val="21394D"/>
-                </a:solidFill>
-                <a:latin typeface="DejaVu Sans"/>
-              </a:defRPr>
-            </a:pPr>
-            <a:r>
-              <a:t>Conflicting choices?</a:t>
-            </a:r>
-          </a:p>
-        </p:txBody>
-      </p:sp>
-      <p:sp>
-        <p:nvSpPr>
-          <p:cNvPr id="15" name="TextBox 14"/>
-          <p:cNvSpPr txBox="1"/>
-          <p:nvPr/>
-        </p:nvSpPr>
-        <p:spPr>
-          <a:xfrm>
-            <a:off x="7763256" y="3621024"/>
-            <a:ext cx="3611880" cy="1280160"/>
-          </a:xfrm>
-          <a:prstGeom prst="rect">
-            <a:avLst/>
-          </a:prstGeom>
-          <a:noFill/>
-        </p:spPr>
-        <p:txBody>
-          <a:bodyPr wrap="square" lIns="0" rIns="0" tIns="0" bIns="0">
-            <a:spAutoFit/>
-          </a:bodyPr>
-          <a:lstStyle/>
-          <a:p>
-            <a:pPr>
-              <a:spcAft>
-                <a:spcPts val="500"/>
-              </a:spcAft>
-              <a:defRPr sz="1700" b="1">
-                <a:solidFill>
-                  <a:srgbClr val="142C43"/>
-                </a:solidFill>
-                <a:latin typeface="DejaVu Sans"/>
-              </a:defRPr>
-            </a:pPr>
-            <a:r>
-              <a:t>Jurisdiction → Facts</a:t>
-            </a:r>
-          </a:p>
-          <a:p>
-            <a:pPr>
-              <a:spcAft>
-                <a:spcPts val="500"/>
-              </a:spcAft>
-              <a:defRPr sz="1700" b="1">
-                <a:solidFill>
-                  <a:srgbClr val="142C43"/>
-                </a:solidFill>
-                <a:latin typeface="DejaVu Sans"/>
-              </a:defRPr>
-            </a:pPr>
-            <a:r>
-              <a:t>→ Procedure → Records</a:t>
-            </a:r>
-          </a:p>
-          <a:p>
-            <a:pPr>
-              <a:spcAft>
-                <a:spcPts val="500"/>
-              </a:spcAft>
-              <a:defRPr sz="1700" b="1">
-                <a:solidFill>
-                  <a:srgbClr val="142C43"/>
-                </a:solidFill>
-                <a:latin typeface="DejaVu Sans"/>
-              </a:defRPr>
-            </a:pPr>
-            <a:r>
-              <a:t>→ Relief</a:t>
-            </a:r>
-          </a:p>
-        </p:txBody>
-      </p:sp>
-      <p:sp>
-        <p:nvSpPr>
-          <p:cNvPr id="16" name="TextBox 15"/>
-          <p:cNvSpPr txBox="1"/>
-          <p:nvPr/>
-        </p:nvSpPr>
-        <p:spPr>
-          <a:xfrm>
-            <a:off x="3474720" y="3785615"/>
-            <a:ext cx="274320" cy="365760"/>
-          </a:xfrm>
-          <a:prstGeom prst="rect">
-            <a:avLst/>
-          </a:prstGeom>
-          <a:noFill/>
-        </p:spPr>
-        <p:txBody>
-          <a:bodyPr wrap="square" lIns="0" rIns="0" tIns="0" bIns="0">
-            <a:spAutoFit/>
-          </a:bodyPr>
-          <a:lstStyle/>
-          <a:p>
-            <a:pPr>
-              <a:spcAft>
-                <a:spcPts val="500"/>
-              </a:spcAft>
-              <a:defRPr sz="2200" b="1">
-                <a:solidFill>
-                  <a:srgbClr val="087F76"/>
-                </a:solidFill>
-                <a:latin typeface="DejaVu Sans"/>
-              </a:defRPr>
-            </a:pPr>
-            <a:r>
-              <a:t>→</a:t>
-            </a:r>
-          </a:p>
-        </p:txBody>
-      </p:sp>
-      <p:sp>
-        <p:nvSpPr>
-          <p:cNvPr id="17" name="TextBox 16"/>
-          <p:cNvSpPr txBox="1"/>
-          <p:nvPr/>
-        </p:nvSpPr>
-        <p:spPr>
-          <a:xfrm>
-            <a:off x="7168896" y="3785615"/>
-            <a:ext cx="274320" cy="365760"/>
-          </a:xfrm>
-          <a:prstGeom prst="rect">
-            <a:avLst/>
-          </a:prstGeom>
-          <a:noFill/>
-        </p:spPr>
-        <p:txBody>
-          <a:bodyPr wrap="square" lIns="0" rIns="0" tIns="0" bIns="0">
-            <a:spAutoFit/>
-          </a:bodyPr>
-          <a:lstStyle/>
-          <a:p>
-            <a:pPr>
-              <a:spcAft>
-                <a:spcPts val="500"/>
-              </a:spcAft>
-              <a:defRPr sz="2200" b="1">
-                <a:solidFill>
-                  <a:srgbClr val="087F76"/>
-                </a:solidFill>
-                <a:latin typeface="DejaVu Sans"/>
-              </a:defRPr>
-            </a:pPr>
-            <a:r>
-              <a:t>→</a:t>
-            </a:r>
-          </a:p>
-        </p:txBody>
-      </p:sp>
-      <p:sp>
-        <p:nvSpPr>
-          <p:cNvPr id="18" name="Rounded Rectangle 17"/>
+              <a:t>Facts available + M1 included</a:t>
+            </a:r>
+          </a:p>
+        </p:txBody>
+      </p:sp>
+      <p:sp>
+        <p:nvSpPr>
+          <p:cNvPr id="21" name="Rectangle 20"/>
           <p:cNvSpPr/>
           <p:nvPr/>
         </p:nvSpPr>
         <p:spPr>
           <a:xfrm>
-            <a:off x="594360" y="5513832"/>
-            <a:ext cx="11000232" cy="594360"/>
-          </a:xfrm>
-          <a:prstGeom prst="roundRect">
-            <a:avLst>
-              <a:gd name="adj" fmla="val 6000"/>
-            </a:avLst>
+            <a:off x="4069080" y="3840480"/>
+            <a:ext cx="7525512" cy="356616"/>
+          </a:xfrm>
+          <a:prstGeom prst="rect">
+            <a:avLst/>
           </a:prstGeom>
           <a:solidFill>
-            <a:srgbClr val="142C43"/>
+            <a:srgbClr val="F0F4F6"/>
           </a:solidFill>
           <a:ln>
             <a:noFill/>
@@ -7146,39 +7341,755 @@
       </p:sp>
       <p:sp>
         <p:nvSpPr>
-          <p:cNvPr id="19" name="TextBox 18"/>
-          <p:cNvSpPr txBox="1"/>
-          <p:nvPr/>
-        </p:nvSpPr>
-        <p:spPr>
-          <a:xfrm>
-            <a:off x="841248" y="5696712"/>
-            <a:ext cx="10497312" cy="274320"/>
-          </a:xfrm>
-          <a:prstGeom prst="rect">
-            <a:avLst/>
-          </a:prstGeom>
-          <a:noFill/>
-        </p:spPr>
-        <p:txBody>
-          <a:bodyPr wrap="square" lIns="0" rIns="0" tIns="0" bIns="0">
-            <a:spAutoFit/>
-          </a:bodyPr>
-          <a:lstStyle/>
-          <a:p>
-            <a:pPr>
-              <a:spcAft>
-                <a:spcPts val="500"/>
-              </a:spcAft>
-              <a:defRPr sz="1500" b="1">
-                <a:solidFill>
-                  <a:srgbClr val="FFFFFF"/>
-                </a:solidFill>
-                <a:latin typeface="DejaVu Sans"/>
-              </a:defRPr>
-            </a:pPr>
-            <a:r>
-              <a:t>TRACE: M5 INCLUDED — records are available and M3 was selected.</a:t>
+          <p:cNvPr id="22" name="TextBox 21"/>
+          <p:cNvSpPr txBox="1"/>
+          <p:nvPr/>
+        </p:nvSpPr>
+        <p:spPr>
+          <a:xfrm>
+            <a:off x="4233672" y="3904488"/>
+            <a:ext cx="594360" cy="228600"/>
+          </a:xfrm>
+          <a:prstGeom prst="rect">
+            <a:avLst/>
+          </a:prstGeom>
+          <a:noFill/>
+        </p:spPr>
+        <p:txBody>
+          <a:bodyPr wrap="square" lIns="0" rIns="0" tIns="0" bIns="0">
+            <a:spAutoFit/>
+          </a:bodyPr>
+          <a:lstStyle/>
+          <a:p>
+            <a:pPr>
+              <a:spcAft>
+                <a:spcPts val="500"/>
+              </a:spcAft>
+              <a:defRPr sz="1200" b="1">
+                <a:solidFill>
+                  <a:srgbClr val="21394D"/>
+                </a:solidFill>
+                <a:latin typeface="DejaVu Sans"/>
+              </a:defRPr>
+            </a:pPr>
+            <a:r>
+              <a:t>M3</a:t>
+            </a:r>
+          </a:p>
+        </p:txBody>
+      </p:sp>
+      <p:sp>
+        <p:nvSpPr>
+          <p:cNvPr id="23" name="TextBox 22"/>
+          <p:cNvSpPr txBox="1"/>
+          <p:nvPr/>
+        </p:nvSpPr>
+        <p:spPr>
+          <a:xfrm>
+            <a:off x="5020056" y="3904488"/>
+            <a:ext cx="1280160" cy="228600"/>
+          </a:xfrm>
+          <a:prstGeom prst="rect">
+            <a:avLst/>
+          </a:prstGeom>
+          <a:noFill/>
+        </p:spPr>
+        <p:txBody>
+          <a:bodyPr wrap="square" lIns="0" rIns="0" tIns="0" bIns="0">
+            <a:spAutoFit/>
+          </a:bodyPr>
+          <a:lstStyle/>
+          <a:p>
+            <a:pPr>
+              <a:spcAft>
+                <a:spcPts val="500"/>
+              </a:spcAft>
+              <a:defRPr sz="1000" b="1">
+                <a:solidFill>
+                  <a:srgbClr val="087F76"/>
+                </a:solidFill>
+                <a:latin typeface="DejaVu Sans"/>
+              </a:defRPr>
+            </a:pPr>
+            <a:r>
+              <a:t>INCLUDED</a:t>
+            </a:r>
+          </a:p>
+        </p:txBody>
+      </p:sp>
+      <p:sp>
+        <p:nvSpPr>
+          <p:cNvPr id="24" name="TextBox 23"/>
+          <p:cNvSpPr txBox="1"/>
+          <p:nvPr/>
+        </p:nvSpPr>
+        <p:spPr>
+          <a:xfrm>
+            <a:off x="6483096" y="3904488"/>
+            <a:ext cx="4864608" cy="237744"/>
+          </a:xfrm>
+          <a:prstGeom prst="rect">
+            <a:avLst/>
+          </a:prstGeom>
+          <a:noFill/>
+        </p:spPr>
+        <p:txBody>
+          <a:bodyPr wrap="square" lIns="0" rIns="0" tIns="0" bIns="0">
+            <a:spAutoFit/>
+          </a:bodyPr>
+          <a:lstStyle/>
+          <a:p>
+            <a:pPr>
+              <a:spcAft>
+                <a:spcPts val="500"/>
+              </a:spcAft>
+              <a:defRPr sz="1200" b="0">
+                <a:solidFill>
+                  <a:srgbClr val="21394D"/>
+                </a:solidFill>
+                <a:latin typeface="DejaVu Sans"/>
+              </a:defRPr>
+            </a:pPr>
+            <a:r>
+              <a:t>Procedure requested + M2 included</a:t>
+            </a:r>
+          </a:p>
+        </p:txBody>
+      </p:sp>
+      <p:sp>
+        <p:nvSpPr>
+          <p:cNvPr id="25" name="TextBox 24"/>
+          <p:cNvSpPr txBox="1"/>
+          <p:nvPr/>
+        </p:nvSpPr>
+        <p:spPr>
+          <a:xfrm>
+            <a:off x="4233672" y="4270248"/>
+            <a:ext cx="594360" cy="228600"/>
+          </a:xfrm>
+          <a:prstGeom prst="rect">
+            <a:avLst/>
+          </a:prstGeom>
+          <a:noFill/>
+        </p:spPr>
+        <p:txBody>
+          <a:bodyPr wrap="square" lIns="0" rIns="0" tIns="0" bIns="0">
+            <a:spAutoFit/>
+          </a:bodyPr>
+          <a:lstStyle/>
+          <a:p>
+            <a:pPr>
+              <a:spcAft>
+                <a:spcPts val="500"/>
+              </a:spcAft>
+              <a:defRPr sz="1200" b="1">
+                <a:solidFill>
+                  <a:srgbClr val="21394D"/>
+                </a:solidFill>
+                <a:latin typeface="DejaVu Sans"/>
+              </a:defRPr>
+            </a:pPr>
+            <a:r>
+              <a:t>M4</a:t>
+            </a:r>
+          </a:p>
+        </p:txBody>
+      </p:sp>
+      <p:sp>
+        <p:nvSpPr>
+          <p:cNvPr id="26" name="TextBox 25"/>
+          <p:cNvSpPr txBox="1"/>
+          <p:nvPr/>
+        </p:nvSpPr>
+        <p:spPr>
+          <a:xfrm>
+            <a:off x="5020056" y="4270248"/>
+            <a:ext cx="1280160" cy="228600"/>
+          </a:xfrm>
+          <a:prstGeom prst="rect">
+            <a:avLst/>
+          </a:prstGeom>
+          <a:noFill/>
+        </p:spPr>
+        <p:txBody>
+          <a:bodyPr wrap="square" lIns="0" rIns="0" tIns="0" bIns="0">
+            <a:spAutoFit/>
+          </a:bodyPr>
+          <a:lstStyle/>
+          <a:p>
+            <a:pPr>
+              <a:spcAft>
+                <a:spcPts val="500"/>
+              </a:spcAft>
+              <a:defRPr sz="1000" b="1">
+                <a:solidFill>
+                  <a:srgbClr val="62798A"/>
+                </a:solidFill>
+                <a:latin typeface="DejaVu Sans"/>
+              </a:defRPr>
+            </a:pPr>
+            <a:r>
+              <a:t>SKIPPED</a:t>
+            </a:r>
+          </a:p>
+        </p:txBody>
+      </p:sp>
+      <p:sp>
+        <p:nvSpPr>
+          <p:cNvPr id="27" name="TextBox 26"/>
+          <p:cNvSpPr txBox="1"/>
+          <p:nvPr/>
+        </p:nvSpPr>
+        <p:spPr>
+          <a:xfrm>
+            <a:off x="6483096" y="4270248"/>
+            <a:ext cx="4864608" cy="237744"/>
+          </a:xfrm>
+          <a:prstGeom prst="rect">
+            <a:avLst/>
+          </a:prstGeom>
+          <a:noFill/>
+        </p:spPr>
+        <p:txBody>
+          <a:bodyPr wrap="square" lIns="0" rIns="0" tIns="0" bIns="0">
+            <a:spAutoFit/>
+          </a:bodyPr>
+          <a:lstStyle/>
+          <a:p>
+            <a:pPr>
+              <a:spcAft>
+                <a:spcPts val="500"/>
+              </a:spcAft>
+              <a:defRPr sz="1200" b="0">
+                <a:solidFill>
+                  <a:srgbClr val="21394D"/>
+                </a:solidFill>
+                <a:latin typeface="DejaVu Sans"/>
+              </a:defRPr>
+            </a:pPr>
+            <a:r>
+              <a:t>Substantive route flag is false</a:t>
+            </a:r>
+          </a:p>
+        </p:txBody>
+      </p:sp>
+      <p:sp>
+        <p:nvSpPr>
+          <p:cNvPr id="28" name="Rectangle 27"/>
+          <p:cNvSpPr/>
+          <p:nvPr/>
+        </p:nvSpPr>
+        <p:spPr>
+          <a:xfrm>
+            <a:off x="4069080" y="4572000"/>
+            <a:ext cx="7525512" cy="356616"/>
+          </a:xfrm>
+          <a:prstGeom prst="rect">
+            <a:avLst/>
+          </a:prstGeom>
+          <a:solidFill>
+            <a:srgbClr val="F0F4F6"/>
+          </a:solidFill>
+          <a:ln>
+            <a:noFill/>
+          </a:ln>
+        </p:spPr>
+        <p:style>
+          <a:lnRef idx="1">
+            <a:schemeClr val="accent1"/>
+          </a:lnRef>
+          <a:fillRef idx="3">
+            <a:schemeClr val="accent1"/>
+          </a:fillRef>
+          <a:effectRef idx="0">
+            <a:schemeClr val="accent1"/>
+          </a:effectRef>
+          <a:fontRef idx="minor">
+            <a:schemeClr val="lt1"/>
+          </a:fontRef>
+        </p:style>
+        <p:txBody>
+          <a:bodyPr rtlCol="0" anchor="ctr"/>
+          <a:lstStyle/>
+          <a:p>
+            <a:pPr algn="ctr"/>
+          </a:p>
+        </p:txBody>
+      </p:sp>
+      <p:sp>
+        <p:nvSpPr>
+          <p:cNvPr id="29" name="TextBox 28"/>
+          <p:cNvSpPr txBox="1"/>
+          <p:nvPr/>
+        </p:nvSpPr>
+        <p:spPr>
+          <a:xfrm>
+            <a:off x="4233672" y="4636008"/>
+            <a:ext cx="594360" cy="228600"/>
+          </a:xfrm>
+          <a:prstGeom prst="rect">
+            <a:avLst/>
+          </a:prstGeom>
+          <a:noFill/>
+        </p:spPr>
+        <p:txBody>
+          <a:bodyPr wrap="square" lIns="0" rIns="0" tIns="0" bIns="0">
+            <a:spAutoFit/>
+          </a:bodyPr>
+          <a:lstStyle/>
+          <a:p>
+            <a:pPr>
+              <a:spcAft>
+                <a:spcPts val="500"/>
+              </a:spcAft>
+              <a:defRPr sz="1200" b="1">
+                <a:solidFill>
+                  <a:srgbClr val="21394D"/>
+                </a:solidFill>
+                <a:latin typeface="DejaVu Sans"/>
+              </a:defRPr>
+            </a:pPr>
+            <a:r>
+              <a:t>M5</a:t>
+            </a:r>
+          </a:p>
+        </p:txBody>
+      </p:sp>
+      <p:sp>
+        <p:nvSpPr>
+          <p:cNvPr id="30" name="TextBox 29"/>
+          <p:cNvSpPr txBox="1"/>
+          <p:nvPr/>
+        </p:nvSpPr>
+        <p:spPr>
+          <a:xfrm>
+            <a:off x="5020056" y="4636008"/>
+            <a:ext cx="1280160" cy="228600"/>
+          </a:xfrm>
+          <a:prstGeom prst="rect">
+            <a:avLst/>
+          </a:prstGeom>
+          <a:noFill/>
+        </p:spPr>
+        <p:txBody>
+          <a:bodyPr wrap="square" lIns="0" rIns="0" tIns="0" bIns="0">
+            <a:spAutoFit/>
+          </a:bodyPr>
+          <a:lstStyle/>
+          <a:p>
+            <a:pPr>
+              <a:spcAft>
+                <a:spcPts val="500"/>
+              </a:spcAft>
+              <a:defRPr sz="1000" b="1">
+                <a:solidFill>
+                  <a:srgbClr val="087F76"/>
+                </a:solidFill>
+                <a:latin typeface="DejaVu Sans"/>
+              </a:defRPr>
+            </a:pPr>
+            <a:r>
+              <a:t>INCLUDED</a:t>
+            </a:r>
+          </a:p>
+        </p:txBody>
+      </p:sp>
+      <p:sp>
+        <p:nvSpPr>
+          <p:cNvPr id="31" name="TextBox 30"/>
+          <p:cNvSpPr txBox="1"/>
+          <p:nvPr/>
+        </p:nvSpPr>
+        <p:spPr>
+          <a:xfrm>
+            <a:off x="6483096" y="4636008"/>
+            <a:ext cx="4864608" cy="237744"/>
+          </a:xfrm>
+          <a:prstGeom prst="rect">
+            <a:avLst/>
+          </a:prstGeom>
+          <a:noFill/>
+        </p:spPr>
+        <p:txBody>
+          <a:bodyPr wrap="square" lIns="0" rIns="0" tIns="0" bIns="0">
+            <a:spAutoFit/>
+          </a:bodyPr>
+          <a:lstStyle/>
+          <a:p>
+            <a:pPr>
+              <a:spcAft>
+                <a:spcPts val="500"/>
+              </a:spcAft>
+              <a:defRPr sz="1200" b="0">
+                <a:solidFill>
+                  <a:srgbClr val="21394D"/>
+                </a:solidFill>
+                <a:latin typeface="DejaVu Sans"/>
+              </a:defRPr>
+            </a:pPr>
+            <a:r>
+              <a:t>Records available + M3 included</a:t>
+            </a:r>
+          </a:p>
+        </p:txBody>
+      </p:sp>
+      <p:sp>
+        <p:nvSpPr>
+          <p:cNvPr id="32" name="TextBox 31"/>
+          <p:cNvSpPr txBox="1"/>
+          <p:nvPr/>
+        </p:nvSpPr>
+        <p:spPr>
+          <a:xfrm>
+            <a:off x="4233672" y="5001768"/>
+            <a:ext cx="594360" cy="228600"/>
+          </a:xfrm>
+          <a:prstGeom prst="rect">
+            <a:avLst/>
+          </a:prstGeom>
+          <a:noFill/>
+        </p:spPr>
+        <p:txBody>
+          <a:bodyPr wrap="square" lIns="0" rIns="0" tIns="0" bIns="0">
+            <a:spAutoFit/>
+          </a:bodyPr>
+          <a:lstStyle/>
+          <a:p>
+            <a:pPr>
+              <a:spcAft>
+                <a:spcPts val="500"/>
+              </a:spcAft>
+              <a:defRPr sz="1200" b="1">
+                <a:solidFill>
+                  <a:srgbClr val="21394D"/>
+                </a:solidFill>
+                <a:latin typeface="DejaVu Sans"/>
+              </a:defRPr>
+            </a:pPr>
+            <a:r>
+              <a:t>M6</a:t>
+            </a:r>
+          </a:p>
+        </p:txBody>
+      </p:sp>
+      <p:sp>
+        <p:nvSpPr>
+          <p:cNvPr id="33" name="TextBox 32"/>
+          <p:cNvSpPr txBox="1"/>
+          <p:nvPr/>
+        </p:nvSpPr>
+        <p:spPr>
+          <a:xfrm>
+            <a:off x="5020056" y="5001768"/>
+            <a:ext cx="1280160" cy="228600"/>
+          </a:xfrm>
+          <a:prstGeom prst="rect">
+            <a:avLst/>
+          </a:prstGeom>
+          <a:noFill/>
+        </p:spPr>
+        <p:txBody>
+          <a:bodyPr wrap="square" lIns="0" rIns="0" tIns="0" bIns="0">
+            <a:spAutoFit/>
+          </a:bodyPr>
+          <a:lstStyle/>
+          <a:p>
+            <a:pPr>
+              <a:spcAft>
+                <a:spcPts val="500"/>
+              </a:spcAft>
+              <a:defRPr sz="1000" b="1">
+                <a:solidFill>
+                  <a:srgbClr val="62798A"/>
+                </a:solidFill>
+                <a:latin typeface="DejaVu Sans"/>
+              </a:defRPr>
+            </a:pPr>
+            <a:r>
+              <a:t>SKIPPED</a:t>
+            </a:r>
+          </a:p>
+        </p:txBody>
+      </p:sp>
+      <p:sp>
+        <p:nvSpPr>
+          <p:cNvPr id="34" name="TextBox 33"/>
+          <p:cNvSpPr txBox="1"/>
+          <p:nvPr/>
+        </p:nvSpPr>
+        <p:spPr>
+          <a:xfrm>
+            <a:off x="6483096" y="5001768"/>
+            <a:ext cx="4864608" cy="237744"/>
+          </a:xfrm>
+          <a:prstGeom prst="rect">
+            <a:avLst/>
+          </a:prstGeom>
+          <a:noFill/>
+        </p:spPr>
+        <p:txBody>
+          <a:bodyPr wrap="square" lIns="0" rIns="0" tIns="0" bIns="0">
+            <a:spAutoFit/>
+          </a:bodyPr>
+          <a:lstStyle/>
+          <a:p>
+            <a:pPr>
+              <a:spcAft>
+                <a:spcPts val="500"/>
+              </a:spcAft>
+              <a:defRPr sz="1200" b="0">
+                <a:solidFill>
+                  <a:srgbClr val="21394D"/>
+                </a:solidFill>
+                <a:latin typeface="DejaVu Sans"/>
+              </a:defRPr>
+            </a:pPr>
+            <a:r>
+              <a:t>Bail flag is false</a:t>
+            </a:r>
+          </a:p>
+        </p:txBody>
+      </p:sp>
+      <p:sp>
+        <p:nvSpPr>
+          <p:cNvPr id="35" name="Rectangle 34"/>
+          <p:cNvSpPr/>
+          <p:nvPr/>
+        </p:nvSpPr>
+        <p:spPr>
+          <a:xfrm>
+            <a:off x="4069080" y="5303520"/>
+            <a:ext cx="7525512" cy="356616"/>
+          </a:xfrm>
+          <a:prstGeom prst="rect">
+            <a:avLst/>
+          </a:prstGeom>
+          <a:solidFill>
+            <a:srgbClr val="F0F4F6"/>
+          </a:solidFill>
+          <a:ln>
+            <a:noFill/>
+          </a:ln>
+        </p:spPr>
+        <p:style>
+          <a:lnRef idx="1">
+            <a:schemeClr val="accent1"/>
+          </a:lnRef>
+          <a:fillRef idx="3">
+            <a:schemeClr val="accent1"/>
+          </a:fillRef>
+          <a:effectRef idx="0">
+            <a:schemeClr val="accent1"/>
+          </a:effectRef>
+          <a:fontRef idx="minor">
+            <a:schemeClr val="lt1"/>
+          </a:fontRef>
+        </p:style>
+        <p:txBody>
+          <a:bodyPr rtlCol="0" anchor="ctr"/>
+          <a:lstStyle/>
+          <a:p>
+            <a:pPr algn="ctr"/>
+          </a:p>
+        </p:txBody>
+      </p:sp>
+      <p:sp>
+        <p:nvSpPr>
+          <p:cNvPr id="36" name="TextBox 35"/>
+          <p:cNvSpPr txBox="1"/>
+          <p:nvPr/>
+        </p:nvSpPr>
+        <p:spPr>
+          <a:xfrm>
+            <a:off x="4233672" y="5367528"/>
+            <a:ext cx="594360" cy="228600"/>
+          </a:xfrm>
+          <a:prstGeom prst="rect">
+            <a:avLst/>
+          </a:prstGeom>
+          <a:noFill/>
+        </p:spPr>
+        <p:txBody>
+          <a:bodyPr wrap="square" lIns="0" rIns="0" tIns="0" bIns="0">
+            <a:spAutoFit/>
+          </a:bodyPr>
+          <a:lstStyle/>
+          <a:p>
+            <a:pPr>
+              <a:spcAft>
+                <a:spcPts val="500"/>
+              </a:spcAft>
+              <a:defRPr sz="1200" b="1">
+                <a:solidFill>
+                  <a:srgbClr val="21394D"/>
+                </a:solidFill>
+                <a:latin typeface="DejaVu Sans"/>
+              </a:defRPr>
+            </a:pPr>
+            <a:r>
+              <a:t>M7</a:t>
+            </a:r>
+          </a:p>
+        </p:txBody>
+      </p:sp>
+      <p:sp>
+        <p:nvSpPr>
+          <p:cNvPr id="37" name="TextBox 36"/>
+          <p:cNvSpPr txBox="1"/>
+          <p:nvPr/>
+        </p:nvSpPr>
+        <p:spPr>
+          <a:xfrm>
+            <a:off x="5020056" y="5367528"/>
+            <a:ext cx="1280160" cy="228600"/>
+          </a:xfrm>
+          <a:prstGeom prst="rect">
+            <a:avLst/>
+          </a:prstGeom>
+          <a:noFill/>
+        </p:spPr>
+        <p:txBody>
+          <a:bodyPr wrap="square" lIns="0" rIns="0" tIns="0" bIns="0">
+            <a:spAutoFit/>
+          </a:bodyPr>
+          <a:lstStyle/>
+          <a:p>
+            <a:pPr>
+              <a:spcAft>
+                <a:spcPts val="500"/>
+              </a:spcAft>
+              <a:defRPr sz="1000" b="1">
+                <a:solidFill>
+                  <a:srgbClr val="087F76"/>
+                </a:solidFill>
+                <a:latin typeface="DejaVu Sans"/>
+              </a:defRPr>
+            </a:pPr>
+            <a:r>
+              <a:t>INCLUDED</a:t>
+            </a:r>
+          </a:p>
+        </p:txBody>
+      </p:sp>
+      <p:sp>
+        <p:nvSpPr>
+          <p:cNvPr id="38" name="TextBox 37"/>
+          <p:cNvSpPr txBox="1"/>
+          <p:nvPr/>
+        </p:nvSpPr>
+        <p:spPr>
+          <a:xfrm>
+            <a:off x="6483096" y="5367528"/>
+            <a:ext cx="4864608" cy="237744"/>
+          </a:xfrm>
+          <a:prstGeom prst="rect">
+            <a:avLst/>
+          </a:prstGeom>
+          <a:noFill/>
+        </p:spPr>
+        <p:txBody>
+          <a:bodyPr wrap="square" lIns="0" rIns="0" tIns="0" bIns="0">
+            <a:spAutoFit/>
+          </a:bodyPr>
+          <a:lstStyle/>
+          <a:p>
+            <a:pPr>
+              <a:spcAft>
+                <a:spcPts val="500"/>
+              </a:spcAft>
+              <a:defRPr sz="1200" b="0">
+                <a:solidFill>
+                  <a:srgbClr val="21394D"/>
+                </a:solidFill>
+                <a:latin typeface="DejaVu Sans"/>
+              </a:defRPr>
+            </a:pPr>
+            <a:r>
+              <a:t>Relief requested + M2 included</a:t>
+            </a:r>
+          </a:p>
+        </p:txBody>
+      </p:sp>
+      <p:sp>
+        <p:nvSpPr>
+          <p:cNvPr id="39" name="Rounded Rectangle 38"/>
+          <p:cNvSpPr/>
+          <p:nvPr/>
+        </p:nvSpPr>
+        <p:spPr>
+          <a:xfrm>
+            <a:off x="594360" y="5879592"/>
+            <a:ext cx="11000232" cy="365760"/>
+          </a:xfrm>
+          <a:prstGeom prst="roundRect">
+            <a:avLst>
+              <a:gd name="adj" fmla="val 6000"/>
+            </a:avLst>
+          </a:prstGeom>
+          <a:solidFill>
+            <a:srgbClr val="E9F4F0"/>
+          </a:solidFill>
+          <a:ln>
+            <a:noFill/>
+          </a:ln>
+        </p:spPr>
+        <p:style>
+          <a:lnRef idx="1">
+            <a:schemeClr val="accent1"/>
+          </a:lnRef>
+          <a:fillRef idx="3">
+            <a:schemeClr val="accent1"/>
+          </a:fillRef>
+          <a:effectRef idx="0">
+            <a:schemeClr val="accent1"/>
+          </a:effectRef>
+          <a:fontRef idx="minor">
+            <a:schemeClr val="lt1"/>
+          </a:fontRef>
+        </p:style>
+        <p:txBody>
+          <a:bodyPr rtlCol="0" anchor="ctr"/>
+          <a:lstStyle/>
+          <a:p>
+            <a:pPr algn="ctr"/>
+          </a:p>
+        </p:txBody>
+      </p:sp>
+      <p:sp>
+        <p:nvSpPr>
+          <p:cNvPr id="40" name="TextBox 39"/>
+          <p:cNvSpPr txBox="1"/>
+          <p:nvPr/>
+        </p:nvSpPr>
+        <p:spPr>
+          <a:xfrm>
+            <a:off x="786384" y="5961888"/>
+            <a:ext cx="10616184" cy="228600"/>
+          </a:xfrm>
+          <a:prstGeom prst="rect">
+            <a:avLst/>
+          </a:prstGeom>
+          <a:noFill/>
+        </p:spPr>
+        <p:txBody>
+          <a:bodyPr wrap="square" lIns="0" rIns="0" tIns="0" bIns="0">
+            <a:spAutoFit/>
+          </a:bodyPr>
+          <a:lstStyle/>
+          <a:p>
+            <a:pPr>
+              <a:spcAft>
+                <a:spcPts val="500"/>
+              </a:spcAft>
+              <a:defRPr sz="1300" b="1">
+                <a:solidFill>
+                  <a:srgbClr val="21394D"/>
+                </a:solidFill>
+                <a:latin typeface="DejaVu Sans"/>
+              </a:defRPr>
+            </a:pPr>
+            <a:r>
+              <a:t>Output: Jurisdiction → Facts → Procedure → Records → Relief, plus this decision trace.</a:t>
             </a:r>
           </a:p>
         </p:txBody>
@@ -7282,7 +8193,7 @@
               </a:defRPr>
             </a:pPr>
             <a:r>
-              <a:t>Search the sources. Review the references.</a:t>
+              <a:t>How search and query decomposition happen</a:t>
             </a:r>
           </a:p>
         </p:txBody>
@@ -7321,7 +8232,7 @@
               </a:defRPr>
             </a:pPr>
             <a:r>
-              <a:t>Search matches text; review follows stored source links and dates.</a:t>
+              <a:t>Controlled example input: C54 section text ; P420 section text. Threshold tau = 0.80.</a:t>
             </a:r>
           </a:p>
         </p:txBody>
@@ -7399,7 +8310,7 @@
               </a:defRPr>
             </a:pPr>
             <a:r>
-              <a:t>05 / 07</a:t>
+              <a:t>05 / 08</a:t>
             </a:r>
           </a:p>
         </p:txBody>
@@ -7412,8 +8323,8 @@
         </p:nvSpPr>
         <p:spPr>
           <a:xfrm>
-            <a:off x="594360" y="2697480"/>
-            <a:ext cx="11000232" cy="630936"/>
+            <a:off x="594360" y="2706624"/>
+            <a:ext cx="2560320" cy="1691640"/>
           </a:xfrm>
           <a:prstGeom prst="roundRect">
             <a:avLst>
@@ -7457,25 +8368,64 @@
         </p:nvSpPr>
         <p:spPr>
           <a:xfrm>
-            <a:off x="813816" y="2898648"/>
-            <a:ext cx="10561320" cy="256032"/>
-          </a:xfrm>
-          <a:prstGeom prst="rect">
-            <a:avLst/>
-          </a:prstGeom>
-          <a:noFill/>
-        </p:spPr>
-        <p:txBody>
-          <a:bodyPr wrap="square" lIns="0" rIns="0" tIns="0" bIns="0">
-            <a:spAutoFit/>
-          </a:bodyPr>
-          <a:lstStyle/>
-          <a:p>
-            <a:pPr>
-              <a:spcAft>
-                <a:spcPts val="500"/>
-              </a:spcAft>
-              <a:defRPr sz="1400" b="1">
+            <a:off x="758952" y="2926080"/>
+            <a:ext cx="2231136" cy="448056"/>
+          </a:xfrm>
+          <a:prstGeom prst="rect">
+            <a:avLst/>
+          </a:prstGeom>
+          <a:noFill/>
+        </p:spPr>
+        <p:txBody>
+          <a:bodyPr wrap="square" lIns="0" rIns="0" tIns="0" bIns="0">
+            <a:spAutoFit/>
+          </a:bodyPr>
+          <a:lstStyle/>
+          <a:p>
+            <a:pPr>
+              <a:spcAft>
+                <a:spcPts val="500"/>
+              </a:spcAft>
+              <a:defRPr sz="1000" b="1">
+                <a:solidFill>
+                  <a:srgbClr val="087F76"/>
+                </a:solidFill>
+                <a:latin typeface="DejaVu Sans"/>
+              </a:defRPr>
+            </a:pPr>
+            <a:r>
+              <a:t>1 · SEARCH WHOLE QUERY</a:t>
+            </a:r>
+          </a:p>
+        </p:txBody>
+      </p:sp>
+      <p:sp>
+        <p:nvSpPr>
+          <p:cNvPr id="9" name="TextBox 8"/>
+          <p:cNvSpPr txBox="1"/>
+          <p:nvPr/>
+        </p:nvSpPr>
+        <p:spPr>
+          <a:xfrm>
+            <a:off x="758952" y="3547872"/>
+            <a:ext cx="2231136" cy="685800"/>
+          </a:xfrm>
+          <a:prstGeom prst="rect">
+            <a:avLst/>
+          </a:prstGeom>
+          <a:noFill/>
+        </p:spPr>
+        <p:txBody>
+          <a:bodyPr wrap="square" lIns="0" rIns="0" tIns="0" bIns="0">
+            <a:spAutoFit/>
+          </a:bodyPr>
+          <a:lstStyle/>
+          <a:p>
+            <a:pPr>
+              <a:spcAft>
+                <a:spcPts val="500"/>
+              </a:spcAft>
+              <a:defRPr sz="1300" b="0">
                 <a:solidFill>
                   <a:srgbClr val="21394D"/>
                 </a:solidFill>
@@ -7483,38 +8433,54 @@
               </a:defRPr>
             </a:pPr>
             <a:r>
-              <a:t>SEARCH: whole query → split if nothing passes → C54 and P420 in the controlled demo</a:t>
-            </a:r>
-          </a:p>
-        </p:txBody>
-      </p:sp>
-      <p:sp>
-        <p:nvSpPr>
-          <p:cNvPr id="9" name="TextBox 8"/>
-          <p:cNvSpPr txBox="1"/>
-          <p:nvPr/>
-        </p:nvSpPr>
-        <p:spPr>
-          <a:xfrm>
-            <a:off x="667512" y="3657600"/>
-            <a:ext cx="6583680" cy="274320"/>
-          </a:xfrm>
-          <a:prstGeom prst="rect">
-            <a:avLst/>
-          </a:prstGeom>
-          <a:noFill/>
-        </p:spPr>
-        <p:txBody>
-          <a:bodyPr wrap="square" lIns="0" rIns="0" tIns="0" bIns="0">
-            <a:spAutoFit/>
-          </a:bodyPr>
-          <a:lstStyle/>
-          <a:p>
-            <a:pPr>
-              <a:spcAft>
-                <a:spcPts val="500"/>
-              </a:spcAft>
-              <a:defRPr sz="1200" b="1">
+              <a:t>Best score: 0.7879</a:t>
+            </a:r>
+          </a:p>
+          <a:p>
+            <a:pPr>
+              <a:spcAft>
+                <a:spcPts val="500"/>
+              </a:spcAft>
+              <a:defRPr sz="1300" b="0">
+                <a:solidFill>
+                  <a:srgbClr val="21394D"/>
+                </a:solidFill>
+                <a:latin typeface="DejaVu Sans"/>
+              </a:defRPr>
+            </a:pPr>
+            <a:r>
+              <a:t>Below 0.80 → no accepted hit</a:t>
+            </a:r>
+          </a:p>
+        </p:txBody>
+      </p:sp>
+      <p:sp>
+        <p:nvSpPr>
+          <p:cNvPr id="10" name="TextBox 9"/>
+          <p:cNvSpPr txBox="1"/>
+          <p:nvPr/>
+        </p:nvSpPr>
+        <p:spPr>
+          <a:xfrm>
+            <a:off x="3200400" y="3374136"/>
+            <a:ext cx="210312" cy="292608"/>
+          </a:xfrm>
+          <a:prstGeom prst="rect">
+            <a:avLst/>
+          </a:prstGeom>
+          <a:noFill/>
+        </p:spPr>
+        <p:txBody>
+          <a:bodyPr wrap="square" lIns="0" rIns="0" tIns="0" bIns="0">
+            <a:spAutoFit/>
+          </a:bodyPr>
+          <a:lstStyle/>
+          <a:p>
+            <a:pPr>
+              <a:spcAft>
+                <a:spcPts val="500"/>
+              </a:spcAft>
+              <a:defRPr sz="1500" b="1">
                 <a:solidFill>
                   <a:srgbClr val="087F76"/>
                 </a:solidFill>
@@ -7522,27 +8488,29 @@
               </a:defRPr>
             </a:pPr>
             <a:r>
-              <a:t>ACTUAL DRAFT REPORT · 3 UPDATE WARNINGS</a:t>
-            </a:r>
-          </a:p>
-        </p:txBody>
-      </p:sp>
-      <p:sp>
-        <p:nvSpPr>
-          <p:cNvPr id="10" name="Rectangle 9"/>
+              <a:t>→</a:t>
+            </a:r>
+          </a:p>
+        </p:txBody>
+      </p:sp>
+      <p:sp>
+        <p:nvSpPr>
+          <p:cNvPr id="11" name="Rounded Rectangle 10"/>
           <p:cNvSpPr/>
           <p:nvPr/>
         </p:nvSpPr>
         <p:spPr>
           <a:xfrm>
-            <a:off x="594360" y="4096512"/>
-            <a:ext cx="6656832" cy="384048"/>
-          </a:xfrm>
-          <a:prstGeom prst="rect">
-            <a:avLst/>
+            <a:off x="3410712" y="2706624"/>
+            <a:ext cx="2560320" cy="1691640"/>
+          </a:xfrm>
+          <a:prstGeom prst="roundRect">
+            <a:avLst>
+              <a:gd name="adj" fmla="val 6000"/>
+            </a:avLst>
           </a:prstGeom>
           <a:solidFill>
-            <a:srgbClr val="142C43"/>
+            <a:srgbClr val="F0F4F6"/>
           </a:solidFill>
           <a:ln>
             <a:noFill/>
@@ -7572,14 +8540,14 @@
       </p:sp>
       <p:sp>
         <p:nvSpPr>
-          <p:cNvPr id="11" name="TextBox 10"/>
-          <p:cNvSpPr txBox="1"/>
-          <p:nvPr/>
-        </p:nvSpPr>
-        <p:spPr>
-          <a:xfrm>
-            <a:off x="822960" y="4178808"/>
-            <a:ext cx="1828800" cy="201168"/>
+          <p:cNvPr id="12" name="TextBox 11"/>
+          <p:cNvSpPr txBox="1"/>
+          <p:nvPr/>
+        </p:nvSpPr>
+        <p:spPr>
+          <a:xfrm>
+            <a:off x="3575304" y="2926080"/>
+            <a:ext cx="2231136" cy="448056"/>
           </a:xfrm>
           <a:prstGeom prst="rect">
             <a:avLst/>
@@ -7598,52 +8566,13 @@
               </a:spcAft>
               <a:defRPr sz="1000" b="1">
                 <a:solidFill>
-                  <a:srgbClr val="FFFFFF"/>
-                </a:solidFill>
-                <a:latin typeface="DejaVu Sans"/>
-              </a:defRPr>
-            </a:pPr>
-            <a:r>
-              <a:t>PARAGRAPH</a:t>
-            </a:r>
-          </a:p>
-        </p:txBody>
-      </p:sp>
-      <p:sp>
-        <p:nvSpPr>
-          <p:cNvPr id="12" name="TextBox 11"/>
-          <p:cNvSpPr txBox="1"/>
-          <p:nvPr/>
-        </p:nvSpPr>
-        <p:spPr>
-          <a:xfrm>
-            <a:off x="2880360" y="4178808"/>
-            <a:ext cx="914400" cy="201168"/>
-          </a:xfrm>
-          <a:prstGeom prst="rect">
-            <a:avLst/>
-          </a:prstGeom>
-          <a:noFill/>
-        </p:spPr>
-        <p:txBody>
-          <a:bodyPr wrap="square" lIns="0" rIns="0" tIns="0" bIns="0">
-            <a:spAutoFit/>
-          </a:bodyPr>
-          <a:lstStyle/>
-          <a:p>
-            <a:pPr>
-              <a:spcAft>
-                <a:spcPts val="500"/>
-              </a:spcAft>
-              <a:defRPr sz="1000" b="1">
-                <a:solidFill>
-                  <a:srgbClr val="FFFFFF"/>
-                </a:solidFill>
-                <a:latin typeface="DejaVu Sans"/>
-              </a:defRPr>
-            </a:pPr>
-            <a:r>
-              <a:t>SOURCE</a:t>
+                  <a:srgbClr val="087F76"/>
+                </a:solidFill>
+                <a:latin typeface="DejaVu Sans"/>
+              </a:defRPr>
+            </a:pPr>
+            <a:r>
+              <a:t>2 · SPLIT THE ISSUES</a:t>
             </a:r>
           </a:p>
         </p:txBody>
@@ -7656,50 +8585,107 @@
         </p:nvSpPr>
         <p:spPr>
           <a:xfrm>
-            <a:off x="4206240" y="4178808"/>
-            <a:ext cx="2743200" cy="201168"/>
-          </a:xfrm>
-          <a:prstGeom prst="rect">
-            <a:avLst/>
-          </a:prstGeom>
-          <a:noFill/>
-        </p:spPr>
-        <p:txBody>
-          <a:bodyPr wrap="square" lIns="0" rIns="0" tIns="0" bIns="0">
-            <a:spAutoFit/>
-          </a:bodyPr>
-          <a:lstStyle/>
-          <a:p>
-            <a:pPr>
-              <a:spcAft>
-                <a:spcPts val="500"/>
-              </a:spcAft>
-              <a:defRPr sz="1000" b="1">
-                <a:solidFill>
-                  <a:srgbClr val="FFFFFF"/>
-                </a:solidFill>
-                <a:latin typeface="DejaVu Sans"/>
-              </a:defRPr>
-            </a:pPr>
-            <a:r>
-              <a:t>REASON</a:t>
-            </a:r>
-          </a:p>
-        </p:txBody>
-      </p:sp>
-      <p:sp>
-        <p:nvSpPr>
-          <p:cNvPr id="14" name="Rectangle 13"/>
+            <a:off x="3575304" y="3547872"/>
+            <a:ext cx="2231136" cy="685800"/>
+          </a:xfrm>
+          <a:prstGeom prst="rect">
+            <a:avLst/>
+          </a:prstGeom>
+          <a:noFill/>
+        </p:spPr>
+        <p:txBody>
+          <a:bodyPr wrap="square" lIns="0" rIns="0" tIns="0" bIns="0">
+            <a:spAutoFit/>
+          </a:bodyPr>
+          <a:lstStyle/>
+          <a:p>
+            <a:pPr>
+              <a:spcAft>
+                <a:spcPts val="500"/>
+              </a:spcAft>
+              <a:defRPr sz="1300" b="0">
+                <a:solidFill>
+                  <a:srgbClr val="21394D"/>
+                </a:solidFill>
+                <a:latin typeface="DejaVu Sans"/>
+              </a:defRPr>
+            </a:pPr>
+            <a:r>
+              <a:t>Split at the semicolon</a:t>
+            </a:r>
+          </a:p>
+          <a:p>
+            <a:pPr>
+              <a:spcAft>
+                <a:spcPts val="500"/>
+              </a:spcAft>
+              <a:defRPr sz="1300" b="0">
+                <a:solidFill>
+                  <a:srgbClr val="21394D"/>
+                </a:solidFill>
+                <a:latin typeface="DejaVu Sans"/>
+              </a:defRPr>
+            </a:pPr>
+            <a:r>
+              <a:t>C54 text / P420 text</a:t>
+            </a:r>
+          </a:p>
+        </p:txBody>
+      </p:sp>
+      <p:sp>
+        <p:nvSpPr>
+          <p:cNvPr id="14" name="TextBox 13"/>
+          <p:cNvSpPr txBox="1"/>
+          <p:nvPr/>
+        </p:nvSpPr>
+        <p:spPr>
+          <a:xfrm>
+            <a:off x="6016752" y="3374136"/>
+            <a:ext cx="210312" cy="292608"/>
+          </a:xfrm>
+          <a:prstGeom prst="rect">
+            <a:avLst/>
+          </a:prstGeom>
+          <a:noFill/>
+        </p:spPr>
+        <p:txBody>
+          <a:bodyPr wrap="square" lIns="0" rIns="0" tIns="0" bIns="0">
+            <a:spAutoFit/>
+          </a:bodyPr>
+          <a:lstStyle/>
+          <a:p>
+            <a:pPr>
+              <a:spcAft>
+                <a:spcPts val="500"/>
+              </a:spcAft>
+              <a:defRPr sz="1500" b="1">
+                <a:solidFill>
+                  <a:srgbClr val="087F76"/>
+                </a:solidFill>
+                <a:latin typeface="DejaVu Sans"/>
+              </a:defRPr>
+            </a:pPr>
+            <a:r>
+              <a:t>→</a:t>
+            </a:r>
+          </a:p>
+        </p:txBody>
+      </p:sp>
+      <p:sp>
+        <p:nvSpPr>
+          <p:cNvPr id="15" name="Rounded Rectangle 14"/>
           <p:cNvSpPr/>
           <p:nvPr/>
         </p:nvSpPr>
         <p:spPr>
           <a:xfrm>
-            <a:off x="594360" y="4489704"/>
-            <a:ext cx="6656832" cy="420624"/>
-          </a:xfrm>
-          <a:prstGeom prst="rect">
-            <a:avLst/>
+            <a:off x="6227064" y="2706624"/>
+            <a:ext cx="2560320" cy="1691640"/>
+          </a:xfrm>
+          <a:prstGeom prst="roundRect">
+            <a:avLst>
+              <a:gd name="adj" fmla="val 6000"/>
+            </a:avLst>
           </a:prstGeom>
           <a:solidFill>
             <a:srgbClr val="F0F4F6"/>
@@ -7732,14 +8718,53 @@
       </p:sp>
       <p:sp>
         <p:nvSpPr>
-          <p:cNvPr id="15" name="TextBox 14"/>
-          <p:cNvSpPr txBox="1"/>
-          <p:nvPr/>
-        </p:nvSpPr>
-        <p:spPr>
-          <a:xfrm>
-            <a:off x="822960" y="4572000"/>
-            <a:ext cx="1645920" cy="237744"/>
+          <p:cNvPr id="16" name="TextBox 15"/>
+          <p:cNvSpPr txBox="1"/>
+          <p:nvPr/>
+        </p:nvSpPr>
+        <p:spPr>
+          <a:xfrm>
+            <a:off x="6391656" y="2926080"/>
+            <a:ext cx="2231136" cy="448056"/>
+          </a:xfrm>
+          <a:prstGeom prst="rect">
+            <a:avLst/>
+          </a:prstGeom>
+          <a:noFill/>
+        </p:spPr>
+        <p:txBody>
+          <a:bodyPr wrap="square" lIns="0" rIns="0" tIns="0" bIns="0">
+            <a:spAutoFit/>
+          </a:bodyPr>
+          <a:lstStyle/>
+          <a:p>
+            <a:pPr>
+              <a:spcAft>
+                <a:spcPts val="500"/>
+              </a:spcAft>
+              <a:defRPr sz="1000" b="1">
+                <a:solidFill>
+                  <a:srgbClr val="087F76"/>
+                </a:solidFill>
+                <a:latin typeface="DejaVu Sans"/>
+              </a:defRPr>
+            </a:pPr>
+            <a:r>
+              <a:t>3 · SEARCH EACH PART</a:t>
+            </a:r>
+          </a:p>
+        </p:txBody>
+      </p:sp>
+      <p:sp>
+        <p:nvSpPr>
+          <p:cNvPr id="17" name="TextBox 16"/>
+          <p:cNvSpPr txBox="1"/>
+          <p:nvPr/>
+        </p:nvSpPr>
+        <p:spPr>
+          <a:xfrm>
+            <a:off x="6391656" y="3547872"/>
+            <a:ext cx="2231136" cy="685800"/>
           </a:xfrm>
           <a:prstGeom prst="rect">
             <a:avLst/>
@@ -7764,32 +8789,9 @@
               </a:defRPr>
             </a:pPr>
             <a:r>
-              <a:t>M3</a:t>
-            </a:r>
-          </a:p>
-        </p:txBody>
-      </p:sp>
-      <p:sp>
-        <p:nvSpPr>
-          <p:cNvPr id="16" name="TextBox 15"/>
-          <p:cNvSpPr txBox="1"/>
-          <p:nvPr/>
-        </p:nvSpPr>
-        <p:spPr>
-          <a:xfrm>
-            <a:off x="2880360" y="4572000"/>
-            <a:ext cx="1097280" cy="237744"/>
-          </a:xfrm>
-          <a:prstGeom prst="rect">
-            <a:avLst/>
-          </a:prstGeom>
-          <a:noFill/>
-        </p:spPr>
-        <p:txBody>
-          <a:bodyPr wrap="square" lIns="0" rIns="0" tIns="0" bIns="0">
-            <a:spAutoFit/>
-          </a:bodyPr>
-          <a:lstStyle/>
+              <a:t>Exact-text matches ≈ 1.0</a:t>
+            </a:r>
+          </a:p>
           <a:p>
             <a:pPr>
               <a:spcAft>
@@ -7803,46 +8805,7 @@
               </a:defRPr>
             </a:pPr>
             <a:r>
-              <a:t>C54</a:t>
-            </a:r>
-          </a:p>
-        </p:txBody>
-      </p:sp>
-      <p:sp>
-        <p:nvSpPr>
-          <p:cNvPr id="17" name="TextBox 16"/>
-          <p:cNvSpPr txBox="1"/>
-          <p:nvPr/>
-        </p:nvSpPr>
-        <p:spPr>
-          <a:xfrm>
-            <a:off x="4206240" y="4572000"/>
-            <a:ext cx="2834640" cy="237744"/>
-          </a:xfrm>
-          <a:prstGeom prst="rect">
-            <a:avLst/>
-          </a:prstGeom>
-          <a:noFill/>
-        </p:spPr>
-        <p:txBody>
-          <a:bodyPr wrap="square" lIns="0" rIns="0" tIns="0" bIns="0">
-            <a:spAutoFit/>
-          </a:bodyPr>
-          <a:lstStyle/>
-          <a:p>
-            <a:pPr>
-              <a:spcAft>
-                <a:spcPts val="500"/>
-              </a:spcAft>
-              <a:defRPr sz="1200" b="0">
-                <a:solidFill>
-                  <a:srgbClr val="21394D"/>
-                </a:solidFill>
-                <a:latin typeface="DejaVu Sans"/>
-              </a:defRPr>
-            </a:pPr>
-            <a:r>
-              <a:t>Newer recorded note</a:t>
+              <a:t>Both pass the same gate</a:t>
             </a:r>
           </a:p>
         </p:txBody>
@@ -7855,131 +8818,55 @@
         </p:nvSpPr>
         <p:spPr>
           <a:xfrm>
-            <a:off x="822960" y="5001768"/>
-            <a:ext cx="1645920" cy="237744"/>
-          </a:xfrm>
-          <a:prstGeom prst="rect">
-            <a:avLst/>
-          </a:prstGeom>
-          <a:noFill/>
-        </p:spPr>
-        <p:txBody>
-          <a:bodyPr wrap="square" lIns="0" rIns="0" tIns="0" bIns="0">
-            <a:spAutoFit/>
-          </a:bodyPr>
-          <a:lstStyle/>
-          <a:p>
-            <a:pPr>
-              <a:spcAft>
-                <a:spcPts val="500"/>
-              </a:spcAft>
-              <a:defRPr sz="1300" b="0">
-                <a:solidFill>
-                  <a:srgbClr val="21394D"/>
-                </a:solidFill>
-                <a:latin typeface="DejaVu Sans"/>
-              </a:defRPr>
-            </a:pPr>
-            <a:r>
-              <a:t>M3</a:t>
-            </a:r>
-          </a:p>
-        </p:txBody>
-      </p:sp>
-      <p:sp>
-        <p:nvSpPr>
-          <p:cNvPr id="19" name="TextBox 18"/>
-          <p:cNvSpPr txBox="1"/>
-          <p:nvPr/>
-        </p:nvSpPr>
-        <p:spPr>
-          <a:xfrm>
-            <a:off x="2880360" y="5001768"/>
-            <a:ext cx="1097280" cy="237744"/>
-          </a:xfrm>
-          <a:prstGeom prst="rect">
-            <a:avLst/>
-          </a:prstGeom>
-          <a:noFill/>
-        </p:spPr>
-        <p:txBody>
-          <a:bodyPr wrap="square" lIns="0" rIns="0" tIns="0" bIns="0">
-            <a:spAutoFit/>
-          </a:bodyPr>
-          <a:lstStyle/>
-          <a:p>
-            <a:pPr>
-              <a:spcAft>
-                <a:spcPts val="500"/>
-              </a:spcAft>
-              <a:defRPr sz="1300" b="0">
-                <a:solidFill>
-                  <a:srgbClr val="21394D"/>
-                </a:solidFill>
-                <a:latin typeface="DejaVu Sans"/>
-              </a:defRPr>
-            </a:pPr>
-            <a:r>
-              <a:t>C167</a:t>
-            </a:r>
-          </a:p>
-        </p:txBody>
-      </p:sp>
-      <p:sp>
-        <p:nvSpPr>
-          <p:cNvPr id="20" name="TextBox 19"/>
-          <p:cNvSpPr txBox="1"/>
-          <p:nvPr/>
-        </p:nvSpPr>
-        <p:spPr>
-          <a:xfrm>
-            <a:off x="4206240" y="5001768"/>
-            <a:ext cx="2834640" cy="237744"/>
-          </a:xfrm>
-          <a:prstGeom prst="rect">
-            <a:avLst/>
-          </a:prstGeom>
-          <a:noFill/>
-        </p:spPr>
-        <p:txBody>
-          <a:bodyPr wrap="square" lIns="0" rIns="0" tIns="0" bIns="0">
-            <a:spAutoFit/>
-          </a:bodyPr>
-          <a:lstStyle/>
-          <a:p>
-            <a:pPr>
-              <a:spcAft>
-                <a:spcPts val="500"/>
-              </a:spcAft>
-              <a:defRPr sz="1200" b="0">
-                <a:solidFill>
-                  <a:srgbClr val="21394D"/>
-                </a:solidFill>
-                <a:latin typeface="DejaVu Sans"/>
-              </a:defRPr>
-            </a:pPr>
-            <a:r>
-              <a:t>Newer recorded note</a:t>
-            </a:r>
-          </a:p>
-        </p:txBody>
-      </p:sp>
-      <p:sp>
-        <p:nvSpPr>
-          <p:cNvPr id="21" name="Rectangle 20"/>
+            <a:off x="8833104" y="3374136"/>
+            <a:ext cx="210312" cy="292608"/>
+          </a:xfrm>
+          <a:prstGeom prst="rect">
+            <a:avLst/>
+          </a:prstGeom>
+          <a:noFill/>
+        </p:spPr>
+        <p:txBody>
+          <a:bodyPr wrap="square" lIns="0" rIns="0" tIns="0" bIns="0">
+            <a:spAutoFit/>
+          </a:bodyPr>
+          <a:lstStyle/>
+          <a:p>
+            <a:pPr>
+              <a:spcAft>
+                <a:spcPts val="500"/>
+              </a:spcAft>
+              <a:defRPr sz="1500" b="1">
+                <a:solidFill>
+                  <a:srgbClr val="087F76"/>
+                </a:solidFill>
+                <a:latin typeface="DejaVu Sans"/>
+              </a:defRPr>
+            </a:pPr>
+            <a:r>
+              <a:t>→</a:t>
+            </a:r>
+          </a:p>
+        </p:txBody>
+      </p:sp>
+      <p:sp>
+        <p:nvSpPr>
+          <p:cNvPr id="19" name="Rounded Rectangle 18"/>
           <p:cNvSpPr/>
           <p:nvPr/>
         </p:nvSpPr>
         <p:spPr>
           <a:xfrm>
-            <a:off x="594360" y="5349240"/>
-            <a:ext cx="6656832" cy="420624"/>
-          </a:xfrm>
-          <a:prstGeom prst="rect">
-            <a:avLst/>
+            <a:off x="9043416" y="2706624"/>
+            <a:ext cx="2560320" cy="1691640"/>
+          </a:xfrm>
+          <a:prstGeom prst="roundRect">
+            <a:avLst>
+              <a:gd name="adj" fmla="val 6000"/>
+            </a:avLst>
           </a:prstGeom>
           <a:solidFill>
-            <a:srgbClr val="F0F4F6"/>
+            <a:srgbClr val="E9F4F0"/>
           </a:solidFill>
           <a:ln>
             <a:noFill/>
@@ -8009,14 +8896,53 @@
       </p:sp>
       <p:sp>
         <p:nvSpPr>
-          <p:cNvPr id="22" name="TextBox 21"/>
-          <p:cNvSpPr txBox="1"/>
-          <p:nvPr/>
-        </p:nvSpPr>
-        <p:spPr>
-          <a:xfrm>
-            <a:off x="822960" y="5431536"/>
-            <a:ext cx="1645920" cy="237744"/>
+          <p:cNvPr id="20" name="TextBox 19"/>
+          <p:cNvSpPr txBox="1"/>
+          <p:nvPr/>
+        </p:nvSpPr>
+        <p:spPr>
+          <a:xfrm>
+            <a:off x="9208008" y="2926080"/>
+            <a:ext cx="2231136" cy="448056"/>
+          </a:xfrm>
+          <a:prstGeom prst="rect">
+            <a:avLst/>
+          </a:prstGeom>
+          <a:noFill/>
+        </p:spPr>
+        <p:txBody>
+          <a:bodyPr wrap="square" lIns="0" rIns="0" tIns="0" bIns="0">
+            <a:spAutoFit/>
+          </a:bodyPr>
+          <a:lstStyle/>
+          <a:p>
+            <a:pPr>
+              <a:spcAft>
+                <a:spcPts val="500"/>
+              </a:spcAft>
+              <a:defRPr sz="1000" b="1">
+                <a:solidFill>
+                  <a:srgbClr val="087F76"/>
+                </a:solidFill>
+                <a:latin typeface="DejaVu Sans"/>
+              </a:defRPr>
+            </a:pPr>
+            <a:r>
+              <a:t>4 · MERGE RESULTS</a:t>
+            </a:r>
+          </a:p>
+        </p:txBody>
+      </p:sp>
+      <p:sp>
+        <p:nvSpPr>
+          <p:cNvPr id="21" name="TextBox 20"/>
+          <p:cNvSpPr txBox="1"/>
+          <p:nvPr/>
+        </p:nvSpPr>
+        <p:spPr>
+          <a:xfrm>
+            <a:off x="9208008" y="3547872"/>
+            <a:ext cx="2231136" cy="685800"/>
           </a:xfrm>
           <a:prstGeom prst="rect">
             <a:avLst/>
@@ -8041,32 +8967,9 @@
               </a:defRPr>
             </a:pPr>
             <a:r>
-              <a:t>M5</a:t>
-            </a:r>
-          </a:p>
-        </p:txBody>
-      </p:sp>
-      <p:sp>
-        <p:nvSpPr>
-          <p:cNvPr id="23" name="TextBox 22"/>
-          <p:cNvSpPr txBox="1"/>
-          <p:nvPr/>
-        </p:nvSpPr>
-        <p:spPr>
-          <a:xfrm>
-            <a:off x="2880360" y="5431536"/>
-            <a:ext cx="1097280" cy="237744"/>
-          </a:xfrm>
-          <a:prstGeom prst="rect">
-            <a:avLst/>
-          </a:prstGeom>
-          <a:noFill/>
-        </p:spPr>
-        <p:txBody>
-          <a:bodyPr wrap="square" lIns="0" rIns="0" tIns="0" bIns="0">
-            <a:spAutoFit/>
-          </a:bodyPr>
-          <a:lstStyle/>
+              <a:t>Return C54 + P420</a:t>
+            </a:r>
+          </a:p>
           <a:p>
             <a:pPr>
               <a:spcAft>
@@ -8080,60 +8983,21 @@
               </a:defRPr>
             </a:pPr>
             <a:r>
-              <a:t>C167</a:t>
-            </a:r>
-          </a:p>
-        </p:txBody>
-      </p:sp>
-      <p:sp>
-        <p:nvSpPr>
-          <p:cNvPr id="24" name="TextBox 23"/>
-          <p:cNvSpPr txBox="1"/>
-          <p:nvPr/>
-        </p:nvSpPr>
-        <p:spPr>
-          <a:xfrm>
-            <a:off x="4206240" y="5431536"/>
-            <a:ext cx="2834640" cy="237744"/>
-          </a:xfrm>
-          <a:prstGeom prst="rect">
-            <a:avLst/>
-          </a:prstGeom>
-          <a:noFill/>
-        </p:spPr>
-        <p:txBody>
-          <a:bodyPr wrap="square" lIns="0" rIns="0" tIns="0" bIns="0">
-            <a:spAutoFit/>
-          </a:bodyPr>
-          <a:lstStyle/>
-          <a:p>
-            <a:pPr>
-              <a:spcAft>
-                <a:spcPts val="500"/>
-              </a:spcAft>
-              <a:defRPr sz="1200" b="0">
-                <a:solidFill>
-                  <a:srgbClr val="21394D"/>
-                </a:solidFill>
-                <a:latin typeface="DejaVu Sans"/>
-              </a:defRPr>
-            </a:pPr>
-            <a:r>
-              <a:t>Newer recorded note</a:t>
-            </a:r>
-          </a:p>
-        </p:txBody>
-      </p:sp>
-      <p:sp>
-        <p:nvSpPr>
-          <p:cNvPr id="25" name="Rounded Rectangle 24"/>
+              <a:t>Remove duplicate sources</a:t>
+            </a:r>
+          </a:p>
+        </p:txBody>
+      </p:sp>
+      <p:sp>
+        <p:nvSpPr>
+          <p:cNvPr id="22" name="Rounded Rectangle 21"/>
           <p:cNvSpPr/>
           <p:nvPr/>
         </p:nvSpPr>
         <p:spPr>
           <a:xfrm>
-            <a:off x="7671816" y="3657600"/>
-            <a:ext cx="3922776" cy="2112264"/>
+            <a:off x="594360" y="4681728"/>
+            <a:ext cx="11000232" cy="1005840"/>
           </a:xfrm>
           <a:prstGeom prst="roundRect">
             <a:avLst>
@@ -8141,7 +9005,7 @@
             </a:avLst>
           </a:prstGeom>
           <a:solidFill>
-            <a:srgbClr val="E9F4F0"/>
+            <a:srgbClr val="142C43"/>
           </a:solidFill>
           <a:ln>
             <a:noFill/>
@@ -8171,14 +9035,14 @@
       </p:sp>
       <p:sp>
         <p:nvSpPr>
-          <p:cNvPr id="26" name="TextBox 25"/>
-          <p:cNvSpPr txBox="1"/>
-          <p:nvPr/>
-        </p:nvSpPr>
-        <p:spPr>
-          <a:xfrm>
-            <a:off x="7900416" y="3877056"/>
-            <a:ext cx="3465576" cy="256032"/>
+          <p:cNvPr id="23" name="TextBox 22"/>
+          <p:cNvSpPr txBox="1"/>
+          <p:nvPr/>
+        </p:nvSpPr>
+        <p:spPr>
+          <a:xfrm>
+            <a:off x="832104" y="4864608"/>
+            <a:ext cx="10515600" cy="256032"/>
           </a:xfrm>
           <a:prstGeom prst="rect">
             <a:avLst/>
@@ -8197,95 +9061,27 @@
               </a:spcAft>
               <a:defRPr sz="1100" b="1">
                 <a:solidFill>
-                  <a:srgbClr val="087F76"/>
-                </a:solidFill>
-                <a:latin typeface="DejaVu Sans"/>
-              </a:defRPr>
-            </a:pPr>
-            <a:r>
-              <a:t>OTHER OBSERVATIONS</a:t>
-            </a:r>
-          </a:p>
-        </p:txBody>
-      </p:sp>
-      <p:sp>
-        <p:nvSpPr>
-          <p:cNvPr id="27" name="TextBox 26"/>
-          <p:cNvSpPr txBox="1"/>
-          <p:nvPr/>
-        </p:nvSpPr>
-        <p:spPr>
-          <a:xfrm>
-            <a:off x="7900416" y="4434840"/>
-            <a:ext cx="3465576" cy="1005840"/>
-          </a:xfrm>
-          <a:prstGeom prst="rect">
-            <a:avLst/>
-          </a:prstGeom>
-          <a:noFill/>
-        </p:spPr>
-        <p:txBody>
-          <a:bodyPr wrap="square" lIns="0" rIns="0" tIns="0" bIns="0">
-            <a:spAutoFit/>
-          </a:bodyPr>
-          <a:lstStyle/>
-          <a:p>
-            <a:pPr>
-              <a:spcAft>
-                <a:spcPts val="400"/>
-              </a:spcAft>
-              <a:defRPr sz="1500" b="0">
-                <a:solidFill>
-                  <a:srgbClr val="21394D"/>
-                </a:solidFill>
-                <a:latin typeface="DejaVu Sans"/>
-              </a:defRPr>
-            </a:pPr>
-            <a:r>
-              <a:t>No missing-citation warnings.</a:t>
-            </a:r>
-          </a:p>
-          <a:p>
-            <a:pPr>
-              <a:spcAft>
-                <a:spcPts val="400"/>
-              </a:spcAft>
-              <a:defRPr sz="1500" b="0">
-                <a:solidFill>
-                  <a:srgbClr val="21394D"/>
-                </a:solidFill>
-                <a:latin typeface="DejaVu Sans"/>
-              </a:defRPr>
-            </a:pPr>
-          </a:p>
-          <a:p>
-            <a:pPr>
-              <a:spcAft>
-                <a:spcPts val="400"/>
-              </a:spcAft>
-              <a:defRPr sz="1500" b="0">
-                <a:solidFill>
-                  <a:srgbClr val="21394D"/>
-                </a:solidFill>
-                <a:latin typeface="DejaVu Sans"/>
-              </a:defRPr>
-            </a:pPr>
-            <a:r>
-              <a:t>Case summary: no accepted sources.</a:t>
-            </a:r>
-          </a:p>
-        </p:txBody>
-      </p:sp>
-      <p:sp>
-        <p:nvSpPr>
-          <p:cNvPr id="28" name="TextBox 27"/>
-          <p:cNvSpPr txBox="1"/>
-          <p:nvPr/>
-        </p:nvSpPr>
-        <p:spPr>
-          <a:xfrm>
-            <a:off x="594360" y="6007608"/>
-            <a:ext cx="10972800" cy="246888"/>
+                  <a:srgbClr val="8DD9C9"/>
+                </a:solidFill>
+                <a:latin typeface="DejaVu Sans"/>
+              </a:defRPr>
+            </a:pPr>
+            <a:r>
+              <a:t>SEPARATE DRAFT REVIEW</a:t>
+            </a:r>
+          </a:p>
+        </p:txBody>
+      </p:sp>
+      <p:sp>
+        <p:nvSpPr>
+          <p:cNvPr id="24" name="TextBox 23"/>
+          <p:cNvSpPr txBox="1"/>
+          <p:nvPr/>
+        </p:nvSpPr>
+        <p:spPr>
+          <a:xfrm>
+            <a:off x="832104" y="5285232"/>
+            <a:ext cx="10515600" cy="274320"/>
           </a:xfrm>
           <a:prstGeom prst="rect">
             <a:avLst/>
@@ -8304,13 +9100,52 @@
               </a:spcAft>
               <a:defRPr sz="1300" b="0">
                 <a:solidFill>
+                  <a:srgbClr val="FFFFFF"/>
+                </a:solidFill>
+                <a:latin typeface="DejaVu Sans"/>
+              </a:defRPr>
+            </a:pPr>
+            <a:r>
+              <a:t>Citation markers + recorded dates → M3/C54, M3/C167 and M5/C167 receive update warnings.</a:t>
+            </a:r>
+          </a:p>
+        </p:txBody>
+      </p:sp>
+      <p:sp>
+        <p:nvSpPr>
+          <p:cNvPr id="25" name="TextBox 24"/>
+          <p:cNvSpPr txBox="1"/>
+          <p:nvPr/>
+        </p:nvSpPr>
+        <p:spPr>
+          <a:xfrm>
+            <a:off x="594360" y="5943600"/>
+            <a:ext cx="10972800" cy="310896"/>
+          </a:xfrm>
+          <a:prstGeom prst="rect">
+            <a:avLst/>
+          </a:prstGeom>
+          <a:noFill/>
+        </p:spPr>
+        <p:txBody>
+          <a:bodyPr wrap="square" lIns="0" rIns="0" tIns="0" bIns="0">
+            <a:spAutoFit/>
+          </a:bodyPr>
+          <a:lstStyle/>
+          <a:p>
+            <a:pPr>
+              <a:spcAft>
+                <a:spcPts val="500"/>
+              </a:spcAft>
+              <a:defRPr sz="1200" b="0">
+                <a:solidFill>
                   <a:srgbClr val="62798A"/>
                 </a:solidFill>
                 <a:latin typeface="DejaVu Sans"/>
               </a:defRPr>
             </a:pPr>
             <a:r>
-              <a:t>A warning asks for legal review. It does not establish that the argument is wrong.</a:t>
+              <a:t>The ordinary case summary has no accepted sources. Exact-text success is not a retrieval-quality benchmark.</a:t>
             </a:r>
           </a:p>
         </p:txBody>
@@ -8414,7 +9249,7 @@
               </a:defRPr>
             </a:pPr>
             <a:r>
-              <a:t>Test that expected behaviour still holds</a:t>
+              <a:t>What each regression test is trying to catch</a:t>
             </a:r>
           </a:p>
         </p:txBody>
@@ -8453,7 +9288,7 @@
               </a:defRPr>
             </a:pPr>
             <a:r>
-              <a:t>Four regression groups passed on synthetic examples.</a:t>
+              <a:t>Each test starts with an input or change, then checks a written expectation.</a:t>
             </a:r>
           </a:p>
         </p:txBody>
@@ -8531,29 +9366,27 @@
               </a:defRPr>
             </a:pPr>
             <a:r>
-              <a:t>06 / 07</a:t>
-            </a:r>
-          </a:p>
-        </p:txBody>
-      </p:sp>
-      <p:sp>
-        <p:nvSpPr>
-          <p:cNvPr id="7" name="Rounded Rectangle 6"/>
+              <a:t>06 / 08</a:t>
+            </a:r>
+          </a:p>
+        </p:txBody>
+      </p:sp>
+      <p:sp>
+        <p:nvSpPr>
+          <p:cNvPr id="7" name="Rectangle 6"/>
           <p:cNvSpPr/>
           <p:nvPr/>
         </p:nvSpPr>
         <p:spPr>
           <a:xfrm>
             <a:off x="594360" y="2724912"/>
-            <a:ext cx="5202936" cy="1399032"/>
-          </a:xfrm>
-          <a:prstGeom prst="roundRect">
-            <a:avLst>
-              <a:gd name="adj" fmla="val 6000"/>
-            </a:avLst>
+            <a:ext cx="11000232" cy="402336"/>
+          </a:xfrm>
+          <a:prstGeom prst="rect">
+            <a:avLst/>
           </a:prstGeom>
           <a:solidFill>
-            <a:srgbClr val="203F56"/>
+            <a:srgbClr val="36556A"/>
           </a:solidFill>
           <a:ln>
             <a:noFill/>
@@ -8589,25 +9422,25 @@
         </p:nvSpPr>
         <p:spPr>
           <a:xfrm>
-            <a:off x="822960" y="2980944"/>
-            <a:ext cx="1225296" cy="539496"/>
-          </a:xfrm>
-          <a:prstGeom prst="rect">
-            <a:avLst/>
-          </a:prstGeom>
-          <a:noFill/>
-        </p:spPr>
-        <p:txBody>
-          <a:bodyPr wrap="square" lIns="0" rIns="0" tIns="0" bIns="0">
-            <a:spAutoFit/>
-          </a:bodyPr>
-          <a:lstStyle/>
-          <a:p>
-            <a:pPr>
-              <a:spcAft>
-                <a:spcPts val="500"/>
-              </a:spcAft>
-              <a:defRPr sz="2700" b="1">
+            <a:off x="804672" y="2834640"/>
+            <a:ext cx="2322576" cy="210312"/>
+          </a:xfrm>
+          <a:prstGeom prst="rect">
+            <a:avLst/>
+          </a:prstGeom>
+          <a:noFill/>
+        </p:spPr>
+        <p:txBody>
+          <a:bodyPr wrap="square" lIns="0" rIns="0" tIns="0" bIns="0">
+            <a:spAutoFit/>
+          </a:bodyPr>
+          <a:lstStyle/>
+          <a:p>
+            <a:pPr>
+              <a:spcAft>
+                <a:spcPts val="500"/>
+              </a:spcAft>
+              <a:defRPr sz="1000" b="1">
                 <a:solidFill>
                   <a:srgbClr val="8DD9C9"/>
                 </a:solidFill>
@@ -8615,7 +9448,7 @@
               </a:defRPr>
             </a:pPr>
             <a:r>
-              <a:t>25</a:t>
+              <a:t>TEST</a:t>
             </a:r>
           </a:p>
         </p:txBody>
@@ -8628,8 +9461,8 @@
         </p:nvSpPr>
         <p:spPr>
           <a:xfrm>
-            <a:off x="2286000" y="2953512"/>
-            <a:ext cx="3273552" cy="265176"/>
+            <a:off x="3273552" y="2834640"/>
+            <a:ext cx="3419856" cy="210312"/>
           </a:xfrm>
           <a:prstGeom prst="rect">
             <a:avLst/>
@@ -8654,7 +9487,7 @@
               </a:defRPr>
             </a:pPr>
             <a:r>
-              <a:t>REPEATED RUNS</a:t>
+              <a:t>INPUT / CHANGE</a:t>
             </a:r>
           </a:p>
         </p:txBody>
@@ -8667,52 +9500,50 @@
         </p:nvSpPr>
         <p:spPr>
           <a:xfrm>
-            <a:off x="2286000" y="3410712"/>
-            <a:ext cx="3246120" cy="585216"/>
-          </a:xfrm>
-          <a:prstGeom prst="rect">
-            <a:avLst/>
-          </a:prstGeom>
-          <a:noFill/>
-        </p:spPr>
-        <p:txBody>
-          <a:bodyPr wrap="square" lIns="0" rIns="0" tIns="0" bIns="0">
-            <a:spAutoFit/>
-          </a:bodyPr>
-          <a:lstStyle/>
-          <a:p>
-            <a:pPr>
-              <a:spcAft>
-                <a:spcPts val="500"/>
-              </a:spcAft>
-              <a:defRPr sz="1300" b="0">
-                <a:solidFill>
-                  <a:srgbClr val="FFFFFF"/>
-                </a:solidFill>
-                <a:latin typeface="DejaVu Sans"/>
-              </a:defRPr>
-            </a:pPr>
-            <a:r>
-              <a:t>Matching document and full-result fingerprints</a:t>
-            </a:r>
-          </a:p>
-        </p:txBody>
-      </p:sp>
-      <p:sp>
-        <p:nvSpPr>
-          <p:cNvPr id="11" name="Rounded Rectangle 10"/>
+            <a:off x="6949440" y="2834640"/>
+            <a:ext cx="4389120" cy="210312"/>
+          </a:xfrm>
+          <a:prstGeom prst="rect">
+            <a:avLst/>
+          </a:prstGeom>
+          <a:noFill/>
+        </p:spPr>
+        <p:txBody>
+          <a:bodyPr wrap="square" lIns="0" rIns="0" tIns="0" bIns="0">
+            <a:spAutoFit/>
+          </a:bodyPr>
+          <a:lstStyle/>
+          <a:p>
+            <a:pPr>
+              <a:spcAft>
+                <a:spcPts val="500"/>
+              </a:spcAft>
+              <a:defRPr sz="1000" b="1">
+                <a:solidFill>
+                  <a:srgbClr val="8DD9C9"/>
+                </a:solidFill>
+                <a:latin typeface="DejaVu Sans"/>
+              </a:defRPr>
+            </a:pPr>
+            <a:r>
+              <a:t>WHAT WE EXPECT</a:t>
+            </a:r>
+          </a:p>
+        </p:txBody>
+      </p:sp>
+      <p:sp>
+        <p:nvSpPr>
+          <p:cNvPr id="11" name="Rectangle 10"/>
           <p:cNvSpPr/>
           <p:nvPr/>
         </p:nvSpPr>
         <p:spPr>
           <a:xfrm>
-            <a:off x="6391656" y="2724912"/>
-            <a:ext cx="5202936" cy="1399032"/>
-          </a:xfrm>
-          <a:prstGeom prst="roundRect">
-            <a:avLst>
-              <a:gd name="adj" fmla="val 6000"/>
-            </a:avLst>
+            <a:off x="594360" y="3145536"/>
+            <a:ext cx="11000232" cy="612648"/>
+          </a:xfrm>
+          <a:prstGeom prst="rect">
+            <a:avLst/>
           </a:prstGeom>
           <a:solidFill>
             <a:srgbClr val="203F56"/>
@@ -8751,33 +9582,33 @@
         </p:nvSpPr>
         <p:spPr>
           <a:xfrm>
-            <a:off x="6620256" y="2980944"/>
-            <a:ext cx="1225296" cy="539496"/>
-          </a:xfrm>
-          <a:prstGeom prst="rect">
-            <a:avLst/>
-          </a:prstGeom>
-          <a:noFill/>
-        </p:spPr>
-        <p:txBody>
-          <a:bodyPr wrap="square" lIns="0" rIns="0" tIns="0" bIns="0">
-            <a:spAutoFit/>
-          </a:bodyPr>
-          <a:lstStyle/>
-          <a:p>
-            <a:pPr>
-              <a:spcAft>
-                <a:spcPts val="500"/>
-              </a:spcAft>
-              <a:defRPr sz="2700" b="1">
-                <a:solidFill>
-                  <a:srgbClr val="8DD9C9"/>
-                </a:solidFill>
-                <a:latin typeface="DejaVu Sans"/>
-              </a:defRPr>
-            </a:pPr>
-            <a:r>
-              <a:t>4</a:t>
+            <a:off x="804672" y="3291840"/>
+            <a:ext cx="2322576" cy="393192"/>
+          </a:xfrm>
+          <a:prstGeom prst="rect">
+            <a:avLst/>
+          </a:prstGeom>
+          <a:noFill/>
+        </p:spPr>
+        <p:txBody>
+          <a:bodyPr wrap="square" lIns="0" rIns="0" tIns="0" bIns="0">
+            <a:spAutoFit/>
+          </a:bodyPr>
+          <a:lstStyle/>
+          <a:p>
+            <a:pPr>
+              <a:spcAft>
+                <a:spcPts val="500"/>
+              </a:spcAft>
+              <a:defRPr sz="1400" b="1">
+                <a:solidFill>
+                  <a:srgbClr val="FFFFFF"/>
+                </a:solidFill>
+                <a:latin typeface="DejaVu Sans"/>
+              </a:defRPr>
+            </a:pPr>
+            <a:r>
+              <a:t>Repeatability</a:t>
             </a:r>
           </a:p>
         </p:txBody>
@@ -8790,33 +9621,33 @@
         </p:nvSpPr>
         <p:spPr>
           <a:xfrm>
-            <a:off x="8083296" y="2953512"/>
-            <a:ext cx="3273552" cy="265176"/>
-          </a:xfrm>
-          <a:prstGeom prst="rect">
-            <a:avLst/>
-          </a:prstGeom>
-          <a:noFill/>
-        </p:spPr>
-        <p:txBody>
-          <a:bodyPr wrap="square" lIns="0" rIns="0" tIns="0" bIns="0">
-            <a:spAutoFit/>
-          </a:bodyPr>
-          <a:lstStyle/>
-          <a:p>
-            <a:pPr>
-              <a:spcAft>
-                <a:spcPts val="500"/>
-              </a:spcAft>
-              <a:defRPr sz="1000" b="1">
-                <a:solidFill>
-                  <a:srgbClr val="8DD9C9"/>
-                </a:solidFill>
-                <a:latin typeface="DejaVu Sans"/>
-              </a:defRPr>
-            </a:pPr>
-            <a:r>
-              <a:t>REFERENCE CASES</a:t>
+            <a:off x="3273552" y="3291840"/>
+            <a:ext cx="3419856" cy="393192"/>
+          </a:xfrm>
+          <a:prstGeom prst="rect">
+            <a:avLst/>
+          </a:prstGeom>
+          <a:noFill/>
+        </p:spPr>
+        <p:txBody>
+          <a:bodyPr wrap="square" lIns="0" rIns="0" tIns="0" bIns="0">
+            <a:spAutoFit/>
+          </a:bodyPr>
+          <a:lstStyle/>
+          <a:p>
+            <a:pPr>
+              <a:spcAft>
+                <a:spcPts val="500"/>
+              </a:spcAft>
+              <a:defRPr sz="1300" b="0">
+                <a:solidFill>
+                  <a:srgbClr val="FFFFFF"/>
+                </a:solidFill>
+                <a:latin typeface="DejaVu Sans"/>
+              </a:defRPr>
+            </a:pPr>
+            <a:r>
+              <a:t>Same case run 25 times</a:t>
             </a:r>
           </a:p>
         </p:txBody>
@@ -8829,8 +9660,8 @@
         </p:nvSpPr>
         <p:spPr>
           <a:xfrm>
-            <a:off x="8083296" y="3410712"/>
-            <a:ext cx="3246120" cy="585216"/>
+            <a:off x="6949440" y="3291840"/>
+            <a:ext cx="4389120" cy="393192"/>
           </a:xfrm>
           <a:prstGeom prst="rect">
             <a:avLst/>
@@ -8855,29 +9686,27 @@
               </a:defRPr>
             </a:pPr>
             <a:r>
-              <a:t>Expected paragraph order and citations</a:t>
-            </a:r>
-          </a:p>
-        </p:txBody>
-      </p:sp>
-      <p:sp>
-        <p:nvSpPr>
-          <p:cNvPr id="15" name="Rounded Rectangle 14"/>
+              <a:t>No drift in text or full result</a:t>
+            </a:r>
+          </a:p>
+        </p:txBody>
+      </p:sp>
+      <p:sp>
+        <p:nvSpPr>
+          <p:cNvPr id="15" name="Rectangle 14"/>
           <p:cNvSpPr/>
           <p:nvPr/>
         </p:nvSpPr>
         <p:spPr>
           <a:xfrm>
-            <a:off x="594360" y="4379976"/>
-            <a:ext cx="5202936" cy="1399032"/>
-          </a:xfrm>
-          <a:prstGeom prst="roundRect">
-            <a:avLst>
-              <a:gd name="adj" fmla="val 6000"/>
-            </a:avLst>
+            <a:off x="594360" y="3785615"/>
+            <a:ext cx="11000232" cy="612648"/>
+          </a:xfrm>
+          <a:prstGeom prst="rect">
+            <a:avLst/>
           </a:prstGeom>
           <a:solidFill>
-            <a:srgbClr val="203F56"/>
+            <a:srgbClr val="142C43"/>
           </a:solidFill>
           <a:ln>
             <a:noFill/>
@@ -8913,33 +9742,33 @@
         </p:nvSpPr>
         <p:spPr>
           <a:xfrm>
-            <a:off x="822960" y="4636008"/>
-            <a:ext cx="1225296" cy="539496"/>
-          </a:xfrm>
-          <a:prstGeom prst="rect">
-            <a:avLst/>
-          </a:prstGeom>
-          <a:noFill/>
-        </p:spPr>
-        <p:txBody>
-          <a:bodyPr wrap="square" lIns="0" rIns="0" tIns="0" bIns="0">
-            <a:spAutoFit/>
-          </a:bodyPr>
-          <a:lstStyle/>
-          <a:p>
-            <a:pPr>
-              <a:spcAft>
-                <a:spcPts val="500"/>
-              </a:spcAft>
-              <a:defRPr sz="1900" b="1">
-                <a:solidFill>
-                  <a:srgbClr val="8DD9C9"/>
-                </a:solidFill>
-                <a:latin typeface="DejaVu Sans"/>
-              </a:defRPr>
-            </a:pPr>
-            <a:r>
-              <a:t>PASS</a:t>
+            <a:off x="804672" y="3931920"/>
+            <a:ext cx="2322576" cy="393192"/>
+          </a:xfrm>
+          <a:prstGeom prst="rect">
+            <a:avLst/>
+          </a:prstGeom>
+          <a:noFill/>
+        </p:spPr>
+        <p:txBody>
+          <a:bodyPr wrap="square" lIns="0" rIns="0" tIns="0" bIns="0">
+            <a:spAutoFit/>
+          </a:bodyPr>
+          <a:lstStyle/>
+          <a:p>
+            <a:pPr>
+              <a:spcAft>
+                <a:spcPts val="500"/>
+              </a:spcAft>
+              <a:defRPr sz="1400" b="1">
+                <a:solidFill>
+                  <a:srgbClr val="FFFFFF"/>
+                </a:solidFill>
+                <a:latin typeface="DejaVu Sans"/>
+              </a:defRPr>
+            </a:pPr>
+            <a:r>
+              <a:t>Reference-case parity</a:t>
             </a:r>
           </a:p>
         </p:txBody>
@@ -8952,33 +9781,33 @@
         </p:nvSpPr>
         <p:spPr>
           <a:xfrm>
-            <a:off x="2286000" y="4608576"/>
-            <a:ext cx="3273552" cy="265176"/>
-          </a:xfrm>
-          <a:prstGeom prst="rect">
-            <a:avLst/>
-          </a:prstGeom>
-          <a:noFill/>
-        </p:spPr>
-        <p:txBody>
-          <a:bodyPr wrap="square" lIns="0" rIns="0" tIns="0" bIns="0">
-            <a:spAutoFit/>
-          </a:bodyPr>
-          <a:lstStyle/>
-          <a:p>
-            <a:pPr>
-              <a:spcAft>
-                <a:spcPts val="500"/>
-              </a:spcAft>
-              <a:defRPr sz="1000" b="1">
-                <a:solidFill>
-                  <a:srgbClr val="8DD9C9"/>
-                </a:solidFill>
-                <a:latin typeface="DejaVu Sans"/>
-              </a:defRPr>
-            </a:pPr>
-            <a:r>
-              <a:t>CONFLICT GUARD</a:t>
+            <a:off x="3273552" y="3931920"/>
+            <a:ext cx="3419856" cy="393192"/>
+          </a:xfrm>
+          <a:prstGeom prst="rect">
+            <a:avLst/>
+          </a:prstGeom>
+          <a:noFill/>
+        </p:spPr>
+        <p:txBody>
+          <a:bodyPr wrap="square" lIns="0" rIns="0" tIns="0" bIns="0">
+            <a:spAutoFit/>
+          </a:bodyPr>
+          <a:lstStyle/>
+          <a:p>
+            <a:pPr>
+              <a:spcAft>
+                <a:spcPts val="500"/>
+              </a:spcAft>
+              <a:defRPr sz="1300" b="0">
+                <a:solidFill>
+                  <a:srgbClr val="FFFFFF"/>
+                </a:solidFill>
+                <a:latin typeface="DejaVu Sans"/>
+              </a:defRPr>
+            </a:pPr>
+            <a:r>
+              <a:t>Four fixed synthetic cases</a:t>
             </a:r>
           </a:p>
         </p:txBody>
@@ -8991,8 +9820,8 @@
         </p:nvSpPr>
         <p:spPr>
           <a:xfrm>
-            <a:off x="2286000" y="5065776"/>
-            <a:ext cx="3246120" cy="585216"/>
+            <a:off x="6949440" y="3931920"/>
+            <a:ext cx="4389120" cy="393192"/>
           </a:xfrm>
           <a:prstGeom prst="rect">
             <a:avLst/>
@@ -9017,26 +9846,24 @@
               </a:defRPr>
             </a:pPr>
             <a:r>
-              <a:t>Both routes selected → expected error</a:t>
-            </a:r>
-          </a:p>
-        </p:txBody>
-      </p:sp>
-      <p:sp>
-        <p:nvSpPr>
-          <p:cNvPr id="19" name="Rounded Rectangle 18"/>
+              <a:t>Expected blocks, order and citations</a:t>
+            </a:r>
+          </a:p>
+        </p:txBody>
+      </p:sp>
+      <p:sp>
+        <p:nvSpPr>
+          <p:cNvPr id="19" name="Rectangle 18"/>
           <p:cNvSpPr/>
           <p:nvPr/>
         </p:nvSpPr>
         <p:spPr>
           <a:xfrm>
-            <a:off x="6391656" y="4379976"/>
-            <a:ext cx="5202936" cy="1399032"/>
-          </a:xfrm>
-          <a:prstGeom prst="roundRect">
-            <a:avLst>
-              <a:gd name="adj" fmla="val 6000"/>
-            </a:avLst>
+            <a:off x="594360" y="4425696"/>
+            <a:ext cx="11000232" cy="612648"/>
+          </a:xfrm>
+          <a:prstGeom prst="rect">
+            <a:avLst/>
           </a:prstGeom>
           <a:solidFill>
             <a:srgbClr val="203F56"/>
@@ -9075,25 +9902,302 @@
         </p:nvSpPr>
         <p:spPr>
           <a:xfrm>
-            <a:off x="6620256" y="4636008"/>
-            <a:ext cx="1225296" cy="539496"/>
-          </a:xfrm>
-          <a:prstGeom prst="rect">
-            <a:avLst/>
-          </a:prstGeom>
-          <a:noFill/>
-        </p:spPr>
-        <p:txBody>
-          <a:bodyPr wrap="square" lIns="0" rIns="0" tIns="0" bIns="0">
-            <a:spAutoFit/>
-          </a:bodyPr>
-          <a:lstStyle/>
-          <a:p>
-            <a:pPr>
-              <a:spcAft>
-                <a:spcPts val="500"/>
-              </a:spcAft>
-              <a:defRPr sz="1900" b="1">
+            <a:off x="804672" y="4572000"/>
+            <a:ext cx="2322576" cy="393192"/>
+          </a:xfrm>
+          <a:prstGeom prst="rect">
+            <a:avLst/>
+          </a:prstGeom>
+          <a:noFill/>
+        </p:spPr>
+        <p:txBody>
+          <a:bodyPr wrap="square" lIns="0" rIns="0" tIns="0" bIns="0">
+            <a:spAutoFit/>
+          </a:bodyPr>
+          <a:lstStyle/>
+          <a:p>
+            <a:pPr>
+              <a:spcAft>
+                <a:spcPts val="500"/>
+              </a:spcAft>
+              <a:defRPr sz="1400" b="1">
+                <a:solidFill>
+                  <a:srgbClr val="FFFFFF"/>
+                </a:solidFill>
+                <a:latin typeface="DejaVu Sans"/>
+              </a:defRPr>
+            </a:pPr>
+            <a:r>
+              <a:t>Conflict guard</a:t>
+            </a:r>
+          </a:p>
+        </p:txBody>
+      </p:sp>
+      <p:sp>
+        <p:nvSpPr>
+          <p:cNvPr id="21" name="TextBox 20"/>
+          <p:cNvSpPr txBox="1"/>
+          <p:nvPr/>
+        </p:nvSpPr>
+        <p:spPr>
+          <a:xfrm>
+            <a:off x="3273552" y="4572000"/>
+            <a:ext cx="3419856" cy="393192"/>
+          </a:xfrm>
+          <a:prstGeom prst="rect">
+            <a:avLst/>
+          </a:prstGeom>
+          <a:noFill/>
+        </p:spPr>
+        <p:txBody>
+          <a:bodyPr wrap="square" lIns="0" rIns="0" tIns="0" bIns="0">
+            <a:spAutoFit/>
+          </a:bodyPr>
+          <a:lstStyle/>
+          <a:p>
+            <a:pPr>
+              <a:spcAft>
+                <a:spcPts val="500"/>
+              </a:spcAft>
+              <a:defRPr sz="1300" b="0">
+                <a:solidFill>
+                  <a:srgbClr val="FFFFFF"/>
+                </a:solidFill>
+                <a:latin typeface="DejaVu Sans"/>
+              </a:defRPr>
+            </a:pPr>
+            <a:r>
+              <a:t>Turn both exclusive routes on</a:t>
+            </a:r>
+          </a:p>
+        </p:txBody>
+      </p:sp>
+      <p:sp>
+        <p:nvSpPr>
+          <p:cNvPr id="22" name="TextBox 21"/>
+          <p:cNvSpPr txBox="1"/>
+          <p:nvPr/>
+        </p:nvSpPr>
+        <p:spPr>
+          <a:xfrm>
+            <a:off x="6949440" y="4572000"/>
+            <a:ext cx="4389120" cy="393192"/>
+          </a:xfrm>
+          <a:prstGeom prst="rect">
+            <a:avLst/>
+          </a:prstGeom>
+          <a:noFill/>
+        </p:spPr>
+        <p:txBody>
+          <a:bodyPr wrap="square" lIns="0" rIns="0" tIns="0" bIns="0">
+            <a:spAutoFit/>
+          </a:bodyPr>
+          <a:lstStyle/>
+          <a:p>
+            <a:pPr>
+              <a:spcAft>
+                <a:spcPts val="500"/>
+              </a:spcAft>
+              <a:defRPr sz="1300" b="0">
+                <a:solidFill>
+                  <a:srgbClr val="FFFFFF"/>
+                </a:solidFill>
+                <a:latin typeface="DejaVu Sans"/>
+              </a:defRPr>
+            </a:pPr>
+            <a:r>
+              <a:t>Reject them with a consistent error</a:t>
+            </a:r>
+          </a:p>
+        </p:txBody>
+      </p:sp>
+      <p:sp>
+        <p:nvSpPr>
+          <p:cNvPr id="23" name="Rectangle 22"/>
+          <p:cNvSpPr/>
+          <p:nvPr/>
+        </p:nvSpPr>
+        <p:spPr>
+          <a:xfrm>
+            <a:off x="594360" y="5065775"/>
+            <a:ext cx="11000232" cy="612648"/>
+          </a:xfrm>
+          <a:prstGeom prst="rect">
+            <a:avLst/>
+          </a:prstGeom>
+          <a:solidFill>
+            <a:srgbClr val="142C43"/>
+          </a:solidFill>
+          <a:ln>
+            <a:noFill/>
+          </a:ln>
+        </p:spPr>
+        <p:style>
+          <a:lnRef idx="1">
+            <a:schemeClr val="accent1"/>
+          </a:lnRef>
+          <a:fillRef idx="3">
+            <a:schemeClr val="accent1"/>
+          </a:fillRef>
+          <a:effectRef idx="0">
+            <a:schemeClr val="accent1"/>
+          </a:effectRef>
+          <a:fontRef idx="minor">
+            <a:schemeClr val="lt1"/>
+          </a:fontRef>
+        </p:style>
+        <p:txBody>
+          <a:bodyPr rtlCol="0" anchor="ctr"/>
+          <a:lstStyle/>
+          <a:p>
+            <a:pPr algn="ctr"/>
+          </a:p>
+        </p:txBody>
+      </p:sp>
+      <p:sp>
+        <p:nvSpPr>
+          <p:cNvPr id="24" name="TextBox 23"/>
+          <p:cNvSpPr txBox="1"/>
+          <p:nvPr/>
+        </p:nvSpPr>
+        <p:spPr>
+          <a:xfrm>
+            <a:off x="804672" y="5212079"/>
+            <a:ext cx="2322576" cy="393192"/>
+          </a:xfrm>
+          <a:prstGeom prst="rect">
+            <a:avLst/>
+          </a:prstGeom>
+          <a:noFill/>
+        </p:spPr>
+        <p:txBody>
+          <a:bodyPr wrap="square" lIns="0" rIns="0" tIns="0" bIns="0">
+            <a:spAutoFit/>
+          </a:bodyPr>
+          <a:lstStyle/>
+          <a:p>
+            <a:pPr>
+              <a:spcAft>
+                <a:spcPts val="500"/>
+              </a:spcAft>
+              <a:defRPr sz="1400" b="1">
+                <a:solidFill>
+                  <a:srgbClr val="FFFFFF"/>
+                </a:solidFill>
+                <a:latin typeface="DejaVu Sans"/>
+              </a:defRPr>
+            </a:pPr>
+            <a:r>
+              <a:t>Update alerting</a:t>
+            </a:r>
+          </a:p>
+        </p:txBody>
+      </p:sp>
+      <p:sp>
+        <p:nvSpPr>
+          <p:cNvPr id="25" name="TextBox 24"/>
+          <p:cNvSpPr txBox="1"/>
+          <p:nvPr/>
+        </p:nvSpPr>
+        <p:spPr>
+          <a:xfrm>
+            <a:off x="3273552" y="5212079"/>
+            <a:ext cx="3419856" cy="393192"/>
+          </a:xfrm>
+          <a:prstGeom prst="rect">
+            <a:avLst/>
+          </a:prstGeom>
+          <a:noFill/>
+        </p:spPr>
+        <p:txBody>
+          <a:bodyPr wrap="square" lIns="0" rIns="0" tIns="0" bIns="0">
+            <a:spAutoFit/>
+          </a:bodyPr>
+          <a:lstStyle/>
+          <a:p>
+            <a:pPr>
+              <a:spcAft>
+                <a:spcPts val="500"/>
+              </a:spcAft>
+              <a:defRPr sz="1300" b="0">
+                <a:solidFill>
+                  <a:srgbClr val="FFFFFF"/>
+                </a:solidFill>
+                <a:latin typeface="DejaVu Sans"/>
+              </a:defRPr>
+            </a:pPr>
+            <a:r>
+              <a:t>Add a simulated C167 judgment note</a:t>
+            </a:r>
+          </a:p>
+        </p:txBody>
+      </p:sp>
+      <p:sp>
+        <p:nvSpPr>
+          <p:cNvPr id="26" name="TextBox 25"/>
+          <p:cNvSpPr txBox="1"/>
+          <p:nvPr/>
+        </p:nvSpPr>
+        <p:spPr>
+          <a:xfrm>
+            <a:off x="6949440" y="5212079"/>
+            <a:ext cx="4389120" cy="393192"/>
+          </a:xfrm>
+          <a:prstGeom prst="rect">
+            <a:avLst/>
+          </a:prstGeom>
+          <a:noFill/>
+        </p:spPr>
+        <p:txBody>
+          <a:bodyPr wrap="square" lIns="0" rIns="0" tIns="0" bIns="0">
+            <a:spAutoFit/>
+          </a:bodyPr>
+          <a:lstStyle/>
+          <a:p>
+            <a:pPr>
+              <a:spcAft>
+                <a:spcPts val="500"/>
+              </a:spcAft>
+              <a:defRPr sz="1300" b="0">
+                <a:solidFill>
+                  <a:srgbClr val="FFFFFF"/>
+                </a:solidFill>
+                <a:latin typeface="DejaVu Sans"/>
+              </a:defRPr>
+            </a:pPr>
+            <a:r>
+              <a:t>Flag M3 and M5 as needing review</a:t>
+            </a:r>
+          </a:p>
+        </p:txBody>
+      </p:sp>
+      <p:sp>
+        <p:nvSpPr>
+          <p:cNvPr id="27" name="TextBox 26"/>
+          <p:cNvSpPr txBox="1"/>
+          <p:nvPr/>
+        </p:nvSpPr>
+        <p:spPr>
+          <a:xfrm>
+            <a:off x="658368" y="5916168"/>
+            <a:ext cx="10881360" cy="320040"/>
+          </a:xfrm>
+          <a:prstGeom prst="rect">
+            <a:avLst/>
+          </a:prstGeom>
+          <a:noFill/>
+        </p:spPr>
+        <p:txBody>
+          <a:bodyPr wrap="square" lIns="0" rIns="0" tIns="0" bIns="0">
+            <a:spAutoFit/>
+          </a:bodyPr>
+          <a:lstStyle/>
+          <a:p>
+            <a:pPr>
+              <a:spcAft>
+                <a:spcPts val="500"/>
+              </a:spcAft>
+              <a:defRPr sz="1300" b="1">
                 <a:solidFill>
                   <a:srgbClr val="8DD9C9"/>
                 </a:solidFill>
@@ -9101,124 +10205,7 @@
               </a:defRPr>
             </a:pPr>
             <a:r>
-              <a:t>PASS</a:t>
-            </a:r>
-          </a:p>
-        </p:txBody>
-      </p:sp>
-      <p:sp>
-        <p:nvSpPr>
-          <p:cNvPr id="21" name="TextBox 20"/>
-          <p:cNvSpPr txBox="1"/>
-          <p:nvPr/>
-        </p:nvSpPr>
-        <p:spPr>
-          <a:xfrm>
-            <a:off x="8083296" y="4608576"/>
-            <a:ext cx="3273552" cy="265176"/>
-          </a:xfrm>
-          <a:prstGeom prst="rect">
-            <a:avLst/>
-          </a:prstGeom>
-          <a:noFill/>
-        </p:spPr>
-        <p:txBody>
-          <a:bodyPr wrap="square" lIns="0" rIns="0" tIns="0" bIns="0">
-            <a:spAutoFit/>
-          </a:bodyPr>
-          <a:lstStyle/>
-          <a:p>
-            <a:pPr>
-              <a:spcAft>
-                <a:spcPts val="500"/>
-              </a:spcAft>
-              <a:defRPr sz="1000" b="1">
-                <a:solidFill>
-                  <a:srgbClr val="8DD9C9"/>
-                </a:solidFill>
-                <a:latin typeface="DejaVu Sans"/>
-              </a:defRPr>
-            </a:pPr>
-            <a:r>
-              <a:t>UPDATE CHECK</a:t>
-            </a:r>
-          </a:p>
-        </p:txBody>
-      </p:sp>
-      <p:sp>
-        <p:nvSpPr>
-          <p:cNvPr id="22" name="TextBox 21"/>
-          <p:cNvSpPr txBox="1"/>
-          <p:nvPr/>
-        </p:nvSpPr>
-        <p:spPr>
-          <a:xfrm>
-            <a:off x="8083296" y="5065776"/>
-            <a:ext cx="3246120" cy="585216"/>
-          </a:xfrm>
-          <a:prstGeom prst="rect">
-            <a:avLst/>
-          </a:prstGeom>
-          <a:noFill/>
-        </p:spPr>
-        <p:txBody>
-          <a:bodyPr wrap="square" lIns="0" rIns="0" tIns="0" bIns="0">
-            <a:spAutoFit/>
-          </a:bodyPr>
-          <a:lstStyle/>
-          <a:p>
-            <a:pPr>
-              <a:spcAft>
-                <a:spcPts val="500"/>
-              </a:spcAft>
-              <a:defRPr sz="1300" b="0">
-                <a:solidFill>
-                  <a:srgbClr val="FFFFFF"/>
-                </a:solidFill>
-                <a:latin typeface="DejaVu Sans"/>
-              </a:defRPr>
-            </a:pPr>
-            <a:r>
-              <a:t>A simulated note flags the linked modules</a:t>
-            </a:r>
-          </a:p>
-        </p:txBody>
-      </p:sp>
-      <p:sp>
-        <p:nvSpPr>
-          <p:cNvPr id="23" name="TextBox 22"/>
-          <p:cNvSpPr txBox="1"/>
-          <p:nvPr/>
-        </p:nvSpPr>
-        <p:spPr>
-          <a:xfrm>
-            <a:off x="594360" y="6053328"/>
-            <a:ext cx="10972800" cy="228600"/>
-          </a:xfrm>
-          <a:prstGeom prst="rect">
-            <a:avLst/>
-          </a:prstGeom>
-          <a:noFill/>
-        </p:spPr>
-        <p:txBody>
-          <a:bodyPr wrap="square" lIns="0" rIns="0" tIns="0" bIns="0">
-            <a:spAutoFit/>
-          </a:bodyPr>
-          <a:lstStyle/>
-          <a:p>
-            <a:pPr>
-              <a:spcAft>
-                <a:spcPts val="500"/>
-              </a:spcAft>
-              <a:defRPr sz="1200" b="0">
-                <a:solidFill>
-                  <a:srgbClr val="C5D7E1"/>
-                </a:solidFill>
-                <a:latin typeface="DejaVu Sans"/>
-              </a:defRPr>
-            </a:pPr>
-            <a:r>
-              <a:t>Also checks missing citations and search paths. Passing is not a legal-accuracy guarantee.</a:t>
+              <a:t>All four groups PASS. Extra assertions check missing/unknown citations and retrieval paths.</a:t>
             </a:r>
           </a:p>
         </p:txBody>
@@ -9283,7 +10270,7 @@
               </a:defRPr>
             </a:pPr>
             <a:r>
-              <a:t>PROPOSED NEXT STEPS</a:t>
+              <a:t>DESIGN RATIONALE · CHALLENGES DEMONSTRATED</a:t>
             </a:r>
           </a:p>
         </p:txBody>
@@ -9322,7 +10309,7 @@
               </a:defRPr>
             </a:pPr>
             <a:r>
-              <a:t>How I would keep it reliable in real use</a:t>
+              <a:t>What could go wrong—and how the demo responds</a:t>
             </a:r>
           </a:p>
         </p:txBody>
@@ -9361,7 +10348,7 @@
               </a:defRPr>
             </a:pPr>
             <a:r>
-              <a:t>Start with one approved workflow, then expand only after review.</a:t>
+              <a:t>These are design concerns and scripted observations, not a real-client incident.</a:t>
             </a:r>
           </a:p>
         </p:txBody>
@@ -9439,7 +10426,952 @@
               </a:defRPr>
             </a:pPr>
             <a:r>
-              <a:t>07 / 07</a:t>
+              <a:t>07 / 08</a:t>
+            </a:r>
+          </a:p>
+        </p:txBody>
+      </p:sp>
+      <p:sp>
+        <p:nvSpPr>
+          <p:cNvPr id="7" name="Rectangle 6"/>
+          <p:cNvSpPr/>
+          <p:nvPr/>
+        </p:nvSpPr>
+        <p:spPr>
+          <a:xfrm>
+            <a:off x="594360" y="2706624"/>
+            <a:ext cx="11000232" cy="393192"/>
+          </a:xfrm>
+          <a:prstGeom prst="rect">
+            <a:avLst/>
+          </a:prstGeom>
+          <a:solidFill>
+            <a:srgbClr val="142C43"/>
+          </a:solidFill>
+          <a:ln>
+            <a:noFill/>
+          </a:ln>
+        </p:spPr>
+        <p:style>
+          <a:lnRef idx="1">
+            <a:schemeClr val="accent1"/>
+          </a:lnRef>
+          <a:fillRef idx="3">
+            <a:schemeClr val="accent1"/>
+          </a:fillRef>
+          <a:effectRef idx="0">
+            <a:schemeClr val="accent1"/>
+          </a:effectRef>
+          <a:fontRef idx="minor">
+            <a:schemeClr val="lt1"/>
+          </a:fontRef>
+        </p:style>
+        <p:txBody>
+          <a:bodyPr rtlCol="0" anchor="ctr"/>
+          <a:lstStyle/>
+          <a:p>
+            <a:pPr algn="ctr"/>
+          </a:p>
+        </p:txBody>
+      </p:sp>
+      <p:sp>
+        <p:nvSpPr>
+          <p:cNvPr id="8" name="TextBox 7"/>
+          <p:cNvSpPr txBox="1"/>
+          <p:nvPr/>
+        </p:nvSpPr>
+        <p:spPr>
+          <a:xfrm>
+            <a:off x="795528" y="2807208"/>
+            <a:ext cx="2834640" cy="219456"/>
+          </a:xfrm>
+          <a:prstGeom prst="rect">
+            <a:avLst/>
+          </a:prstGeom>
+          <a:noFill/>
+        </p:spPr>
+        <p:txBody>
+          <a:bodyPr wrap="square" lIns="0" rIns="0" tIns="0" bIns="0">
+            <a:spAutoFit/>
+          </a:bodyPr>
+          <a:lstStyle/>
+          <a:p>
+            <a:pPr>
+              <a:spcAft>
+                <a:spcPts val="500"/>
+              </a:spcAft>
+              <a:defRPr sz="1000" b="1">
+                <a:solidFill>
+                  <a:srgbClr val="FFFFFF"/>
+                </a:solidFill>
+                <a:latin typeface="DejaVu Sans"/>
+              </a:defRPr>
+            </a:pPr>
+            <a:r>
+              <a:t>CHALLENGE</a:t>
+            </a:r>
+          </a:p>
+        </p:txBody>
+      </p:sp>
+      <p:sp>
+        <p:nvSpPr>
+          <p:cNvPr id="9" name="TextBox 8"/>
+          <p:cNvSpPr txBox="1"/>
+          <p:nvPr/>
+        </p:nvSpPr>
+        <p:spPr>
+          <a:xfrm>
+            <a:off x="3858768" y="2807208"/>
+            <a:ext cx="3657600" cy="219456"/>
+          </a:xfrm>
+          <a:prstGeom prst="rect">
+            <a:avLst/>
+          </a:prstGeom>
+          <a:noFill/>
+        </p:spPr>
+        <p:txBody>
+          <a:bodyPr wrap="square" lIns="0" rIns="0" tIns="0" bIns="0">
+            <a:spAutoFit/>
+          </a:bodyPr>
+          <a:lstStyle/>
+          <a:p>
+            <a:pPr>
+              <a:spcAft>
+                <a:spcPts val="500"/>
+              </a:spcAft>
+              <a:defRPr sz="1000" b="1">
+                <a:solidFill>
+                  <a:srgbClr val="FFFFFF"/>
+                </a:solidFill>
+                <a:latin typeface="DejaVu Sans"/>
+              </a:defRPr>
+            </a:pPr>
+            <a:r>
+              <a:t>APPROACH</a:t>
+            </a:r>
+          </a:p>
+        </p:txBody>
+      </p:sp>
+      <p:sp>
+        <p:nvSpPr>
+          <p:cNvPr id="10" name="TextBox 9"/>
+          <p:cNvSpPr txBox="1"/>
+          <p:nvPr/>
+        </p:nvSpPr>
+        <p:spPr>
+          <a:xfrm>
+            <a:off x="7854696" y="2807208"/>
+            <a:ext cx="3520440" cy="219456"/>
+          </a:xfrm>
+          <a:prstGeom prst="rect">
+            <a:avLst/>
+          </a:prstGeom>
+          <a:noFill/>
+        </p:spPr>
+        <p:txBody>
+          <a:bodyPr wrap="square" lIns="0" rIns="0" tIns="0" bIns="0">
+            <a:spAutoFit/>
+          </a:bodyPr>
+          <a:lstStyle/>
+          <a:p>
+            <a:pPr>
+              <a:spcAft>
+                <a:spcPts val="500"/>
+              </a:spcAft>
+              <a:defRPr sz="1000" b="1">
+                <a:solidFill>
+                  <a:srgbClr val="FFFFFF"/>
+                </a:solidFill>
+                <a:latin typeface="DejaVu Sans"/>
+              </a:defRPr>
+            </a:pPr>
+            <a:r>
+              <a:t>REMAINING LIMIT</a:t>
+            </a:r>
+          </a:p>
+        </p:txBody>
+      </p:sp>
+      <p:sp>
+        <p:nvSpPr>
+          <p:cNvPr id="11" name="Rectangle 10"/>
+          <p:cNvSpPr/>
+          <p:nvPr/>
+        </p:nvSpPr>
+        <p:spPr>
+          <a:xfrm>
+            <a:off x="594360" y="3127248"/>
+            <a:ext cx="11000232" cy="740664"/>
+          </a:xfrm>
+          <a:prstGeom prst="rect">
+            <a:avLst/>
+          </a:prstGeom>
+          <a:solidFill>
+            <a:srgbClr val="F0F4F6"/>
+          </a:solidFill>
+          <a:ln>
+            <a:noFill/>
+          </a:ln>
+        </p:spPr>
+        <p:style>
+          <a:lnRef idx="1">
+            <a:schemeClr val="accent1"/>
+          </a:lnRef>
+          <a:fillRef idx="3">
+            <a:schemeClr val="accent1"/>
+          </a:fillRef>
+          <a:effectRef idx="0">
+            <a:schemeClr val="accent1"/>
+          </a:effectRef>
+          <a:fontRef idx="minor">
+            <a:schemeClr val="lt1"/>
+          </a:fontRef>
+        </p:style>
+        <p:txBody>
+          <a:bodyPr rtlCol="0" anchor="ctr"/>
+          <a:lstStyle/>
+          <a:p>
+            <a:pPr algn="ctr"/>
+          </a:p>
+        </p:txBody>
+      </p:sp>
+      <p:sp>
+        <p:nvSpPr>
+          <p:cNvPr id="12" name="TextBox 11"/>
+          <p:cNvSpPr txBox="1"/>
+          <p:nvPr/>
+        </p:nvSpPr>
+        <p:spPr>
+          <a:xfrm>
+            <a:off x="795528" y="3273552"/>
+            <a:ext cx="2834640" cy="548640"/>
+          </a:xfrm>
+          <a:prstGeom prst="rect">
+            <a:avLst/>
+          </a:prstGeom>
+          <a:noFill/>
+        </p:spPr>
+        <p:txBody>
+          <a:bodyPr wrap="square" lIns="0" rIns="0" tIns="0" bIns="0">
+            <a:spAutoFit/>
+          </a:bodyPr>
+          <a:lstStyle/>
+          <a:p>
+            <a:pPr>
+              <a:spcAft>
+                <a:spcPts val="500"/>
+              </a:spcAft>
+              <a:defRPr sz="1300" b="1">
+                <a:solidFill>
+                  <a:srgbClr val="21394D"/>
+                </a:solidFill>
+                <a:latin typeface="DejaVu Sans"/>
+              </a:defRPr>
+            </a:pPr>
+            <a:r>
+              <a:t>A compound query falls below the gate</a:t>
+            </a:r>
+          </a:p>
+        </p:txBody>
+      </p:sp>
+      <p:sp>
+        <p:nvSpPr>
+          <p:cNvPr id="13" name="TextBox 12"/>
+          <p:cNvSpPr txBox="1"/>
+          <p:nvPr/>
+        </p:nvSpPr>
+        <p:spPr>
+          <a:xfrm>
+            <a:off x="3858768" y="3273552"/>
+            <a:ext cx="3657600" cy="548640"/>
+          </a:xfrm>
+          <a:prstGeom prst="rect">
+            <a:avLst/>
+          </a:prstGeom>
+          <a:noFill/>
+        </p:spPr>
+        <p:txBody>
+          <a:bodyPr wrap="square" lIns="0" rIns="0" tIns="0" bIns="0">
+            <a:spAutoFit/>
+          </a:bodyPr>
+          <a:lstStyle/>
+          <a:p>
+            <a:pPr>
+              <a:spcAft>
+                <a:spcPts val="500"/>
+              </a:spcAft>
+              <a:defRPr sz="1300" b="0">
+                <a:solidFill>
+                  <a:srgbClr val="21394D"/>
+                </a:solidFill>
+                <a:latin typeface="DejaVu Sans"/>
+              </a:defRPr>
+            </a:pPr>
+            <a:r>
+              <a:t>Split explicit issues and search each part</a:t>
+            </a:r>
+          </a:p>
+        </p:txBody>
+      </p:sp>
+      <p:sp>
+        <p:nvSpPr>
+          <p:cNvPr id="14" name="TextBox 13"/>
+          <p:cNvSpPr txBox="1"/>
+          <p:nvPr/>
+        </p:nvSpPr>
+        <p:spPr>
+          <a:xfrm>
+            <a:off x="7854696" y="3273552"/>
+            <a:ext cx="3520440" cy="548640"/>
+          </a:xfrm>
+          <a:prstGeom prst="rect">
+            <a:avLst/>
+          </a:prstGeom>
+          <a:noFill/>
+        </p:spPr>
+        <p:txBody>
+          <a:bodyPr wrap="square" lIns="0" rIns="0" tIns="0" bIns="0">
+            <a:spAutoFit/>
+          </a:bodyPr>
+          <a:lstStyle/>
+          <a:p>
+            <a:pPr>
+              <a:spcAft>
+                <a:spcPts val="500"/>
+              </a:spcAft>
+              <a:defRPr sz="1200" b="0">
+                <a:solidFill>
+                  <a:srgbClr val="62798A"/>
+                </a:solidFill>
+                <a:latin typeface="DejaVu Sans"/>
+              </a:defRPr>
+            </a:pPr>
+            <a:r>
+              <a:t>Exact-text demo only; threshold not calibrated</a:t>
+            </a:r>
+          </a:p>
+        </p:txBody>
+      </p:sp>
+      <p:sp>
+        <p:nvSpPr>
+          <p:cNvPr id="15" name="Rectangle 14"/>
+          <p:cNvSpPr/>
+          <p:nvPr/>
+        </p:nvSpPr>
+        <p:spPr>
+          <a:xfrm>
+            <a:off x="594360" y="3895344"/>
+            <a:ext cx="11000232" cy="740664"/>
+          </a:xfrm>
+          <a:prstGeom prst="rect">
+            <a:avLst/>
+          </a:prstGeom>
+          <a:solidFill>
+            <a:srgbClr val="FFFFFF"/>
+          </a:solidFill>
+          <a:ln>
+            <a:noFill/>
+          </a:ln>
+        </p:spPr>
+        <p:style>
+          <a:lnRef idx="1">
+            <a:schemeClr val="accent1"/>
+          </a:lnRef>
+          <a:fillRef idx="3">
+            <a:schemeClr val="accent1"/>
+          </a:fillRef>
+          <a:effectRef idx="0">
+            <a:schemeClr val="accent1"/>
+          </a:effectRef>
+          <a:fontRef idx="minor">
+            <a:schemeClr val="lt1"/>
+          </a:fontRef>
+        </p:style>
+        <p:txBody>
+          <a:bodyPr rtlCol="0" anchor="ctr"/>
+          <a:lstStyle/>
+          <a:p>
+            <a:pPr algn="ctr"/>
+          </a:p>
+        </p:txBody>
+      </p:sp>
+      <p:sp>
+        <p:nvSpPr>
+          <p:cNvPr id="16" name="TextBox 15"/>
+          <p:cNvSpPr txBox="1"/>
+          <p:nvPr/>
+        </p:nvSpPr>
+        <p:spPr>
+          <a:xfrm>
+            <a:off x="795528" y="4041648"/>
+            <a:ext cx="2834640" cy="548640"/>
+          </a:xfrm>
+          <a:prstGeom prst="rect">
+            <a:avLst/>
+          </a:prstGeom>
+          <a:noFill/>
+        </p:spPr>
+        <p:txBody>
+          <a:bodyPr wrap="square" lIns="0" rIns="0" tIns="0" bIns="0">
+            <a:spAutoFit/>
+          </a:bodyPr>
+          <a:lstStyle/>
+          <a:p>
+            <a:pPr>
+              <a:spcAft>
+                <a:spcPts val="500"/>
+              </a:spcAft>
+              <a:defRPr sz="1300" b="1">
+                <a:solidFill>
+                  <a:srgbClr val="21394D"/>
+                </a:solidFill>
+                <a:latin typeface="DejaVu Sans"/>
+              </a:defRPr>
+            </a:pPr>
+            <a:r>
+              <a:t>Conflicting routes are selected</a:t>
+            </a:r>
+          </a:p>
+        </p:txBody>
+      </p:sp>
+      <p:sp>
+        <p:nvSpPr>
+          <p:cNvPr id="17" name="TextBox 16"/>
+          <p:cNvSpPr txBox="1"/>
+          <p:nvPr/>
+        </p:nvSpPr>
+        <p:spPr>
+          <a:xfrm>
+            <a:off x="3858768" y="4041648"/>
+            <a:ext cx="3657600" cy="548640"/>
+          </a:xfrm>
+          <a:prstGeom prst="rect">
+            <a:avLst/>
+          </a:prstGeom>
+          <a:noFill/>
+        </p:spPr>
+        <p:txBody>
+          <a:bodyPr wrap="square" lIns="0" rIns="0" tIns="0" bIns="0">
+            <a:spAutoFit/>
+          </a:bodyPr>
+          <a:lstStyle/>
+          <a:p>
+            <a:pPr>
+              <a:spcAft>
+                <a:spcPts val="500"/>
+              </a:spcAft>
+              <a:defRPr sz="1300" b="0">
+                <a:solidFill>
+                  <a:srgbClr val="21394D"/>
+                </a:solidFill>
+                <a:latin typeface="DejaVu Sans"/>
+              </a:defRPr>
+            </a:pPr>
+            <a:r>
+              <a:t>Stop before drafting; return a clear error</a:t>
+            </a:r>
+          </a:p>
+        </p:txBody>
+      </p:sp>
+      <p:sp>
+        <p:nvSpPr>
+          <p:cNvPr id="18" name="TextBox 17"/>
+          <p:cNvSpPr txBox="1"/>
+          <p:nvPr/>
+        </p:nvSpPr>
+        <p:spPr>
+          <a:xfrm>
+            <a:off x="7854696" y="4041648"/>
+            <a:ext cx="3520440" cy="548640"/>
+          </a:xfrm>
+          <a:prstGeom prst="rect">
+            <a:avLst/>
+          </a:prstGeom>
+          <a:noFill/>
+        </p:spPr>
+        <p:txBody>
+          <a:bodyPr wrap="square" lIns="0" rIns="0" tIns="0" bIns="0">
+            <a:spAutoFit/>
+          </a:bodyPr>
+          <a:lstStyle/>
+          <a:p>
+            <a:pPr>
+              <a:spcAft>
+                <a:spcPts val="500"/>
+              </a:spcAft>
+              <a:defRPr sz="1200" b="0">
+                <a:solidFill>
+                  <a:srgbClr val="62798A"/>
+                </a:solidFill>
+                <a:latin typeface="DejaVu Sans"/>
+              </a:defRPr>
+            </a:pPr>
+            <a:r>
+              <a:t>Real exclusions need lawyer approval</a:t>
+            </a:r>
+          </a:p>
+        </p:txBody>
+      </p:sp>
+      <p:sp>
+        <p:nvSpPr>
+          <p:cNvPr id="19" name="Rectangle 18"/>
+          <p:cNvSpPr/>
+          <p:nvPr/>
+        </p:nvSpPr>
+        <p:spPr>
+          <a:xfrm>
+            <a:off x="594360" y="4663440"/>
+            <a:ext cx="11000232" cy="740664"/>
+          </a:xfrm>
+          <a:prstGeom prst="rect">
+            <a:avLst/>
+          </a:prstGeom>
+          <a:solidFill>
+            <a:srgbClr val="F0F4F6"/>
+          </a:solidFill>
+          <a:ln>
+            <a:noFill/>
+          </a:ln>
+        </p:spPr>
+        <p:style>
+          <a:lnRef idx="1">
+            <a:schemeClr val="accent1"/>
+          </a:lnRef>
+          <a:fillRef idx="3">
+            <a:schemeClr val="accent1"/>
+          </a:fillRef>
+          <a:effectRef idx="0">
+            <a:schemeClr val="accent1"/>
+          </a:effectRef>
+          <a:fontRef idx="minor">
+            <a:schemeClr val="lt1"/>
+          </a:fontRef>
+        </p:style>
+        <p:txBody>
+          <a:bodyPr rtlCol="0" anchor="ctr"/>
+          <a:lstStyle/>
+          <a:p>
+            <a:pPr algn="ctr"/>
+          </a:p>
+        </p:txBody>
+      </p:sp>
+      <p:sp>
+        <p:nvSpPr>
+          <p:cNvPr id="20" name="TextBox 19"/>
+          <p:cNvSpPr txBox="1"/>
+          <p:nvPr/>
+        </p:nvSpPr>
+        <p:spPr>
+          <a:xfrm>
+            <a:off x="795528" y="4809744"/>
+            <a:ext cx="2834640" cy="548640"/>
+          </a:xfrm>
+          <a:prstGeom prst="rect">
+            <a:avLst/>
+          </a:prstGeom>
+          <a:noFill/>
+        </p:spPr>
+        <p:txBody>
+          <a:bodyPr wrap="square" lIns="0" rIns="0" tIns="0" bIns="0">
+            <a:spAutoFit/>
+          </a:bodyPr>
+          <a:lstStyle/>
+          <a:p>
+            <a:pPr>
+              <a:spcAft>
+                <a:spcPts val="500"/>
+              </a:spcAft>
+              <a:defRPr sz="1300" b="1">
+                <a:solidFill>
+                  <a:srgbClr val="21394D"/>
+                </a:solidFill>
+                <a:latin typeface="DejaVu Sans"/>
+              </a:defRPr>
+            </a:pPr>
+            <a:r>
+              <a:t>A citation is missing or unknown</a:t>
+            </a:r>
+          </a:p>
+        </p:txBody>
+      </p:sp>
+      <p:sp>
+        <p:nvSpPr>
+          <p:cNvPr id="21" name="TextBox 20"/>
+          <p:cNvSpPr txBox="1"/>
+          <p:nvPr/>
+        </p:nvSpPr>
+        <p:spPr>
+          <a:xfrm>
+            <a:off x="3858768" y="4809744"/>
+            <a:ext cx="3657600" cy="548640"/>
+          </a:xfrm>
+          <a:prstGeom prst="rect">
+            <a:avLst/>
+          </a:prstGeom>
+          <a:noFill/>
+        </p:spPr>
+        <p:txBody>
+          <a:bodyPr wrap="square" lIns="0" rIns="0" tIns="0" bIns="0">
+            <a:spAutoFit/>
+          </a:bodyPr>
+          <a:lstStyle/>
+          <a:p>
+            <a:pPr>
+              <a:spcAft>
+                <a:spcPts val="500"/>
+              </a:spcAft>
+              <a:defRPr sz="1300" b="0">
+                <a:solidFill>
+                  <a:srgbClr val="21394D"/>
+                </a:solidFill>
+                <a:latin typeface="DejaVu Sans"/>
+              </a:defRPr>
+            </a:pPr>
+            <a:r>
+              <a:t>Compare required IDs with actual text markers</a:t>
+            </a:r>
+          </a:p>
+        </p:txBody>
+      </p:sp>
+      <p:sp>
+        <p:nvSpPr>
+          <p:cNvPr id="22" name="TextBox 21"/>
+          <p:cNvSpPr txBox="1"/>
+          <p:nvPr/>
+        </p:nvSpPr>
+        <p:spPr>
+          <a:xfrm>
+            <a:off x="7854696" y="4809744"/>
+            <a:ext cx="3520440" cy="548640"/>
+          </a:xfrm>
+          <a:prstGeom prst="rect">
+            <a:avLst/>
+          </a:prstGeom>
+          <a:noFill/>
+        </p:spPr>
+        <p:txBody>
+          <a:bodyPr wrap="square" lIns="0" rIns="0" tIns="0" bIns="0">
+            <a:spAutoFit/>
+          </a:bodyPr>
+          <a:lstStyle/>
+          <a:p>
+            <a:pPr>
+              <a:spcAft>
+                <a:spcPts val="500"/>
+              </a:spcAft>
+              <a:defRPr sz="1200" b="0">
+                <a:solidFill>
+                  <a:srgbClr val="62798A"/>
+                </a:solidFill>
+                <a:latin typeface="DejaVu Sans"/>
+              </a:defRPr>
+            </a:pPr>
+            <a:r>
+              <a:t>Marker presence does not prove support</a:t>
+            </a:r>
+          </a:p>
+        </p:txBody>
+      </p:sp>
+      <p:sp>
+        <p:nvSpPr>
+          <p:cNvPr id="23" name="Rounded Rectangle 22"/>
+          <p:cNvSpPr/>
+          <p:nvPr/>
+        </p:nvSpPr>
+        <p:spPr>
+          <a:xfrm>
+            <a:off x="594360" y="5806440"/>
+            <a:ext cx="11000232" cy="438912"/>
+          </a:xfrm>
+          <a:prstGeom prst="roundRect">
+            <a:avLst>
+              <a:gd name="adj" fmla="val 6000"/>
+            </a:avLst>
+          </a:prstGeom>
+          <a:solidFill>
+            <a:srgbClr val="E9F4F0"/>
+          </a:solidFill>
+          <a:ln>
+            <a:noFill/>
+          </a:ln>
+        </p:spPr>
+        <p:style>
+          <a:lnRef idx="1">
+            <a:schemeClr val="accent1"/>
+          </a:lnRef>
+          <a:fillRef idx="3">
+            <a:schemeClr val="accent1"/>
+          </a:fillRef>
+          <a:effectRef idx="0">
+            <a:schemeClr val="accent1"/>
+          </a:effectRef>
+          <a:fontRef idx="minor">
+            <a:schemeClr val="lt1"/>
+          </a:fontRef>
+        </p:style>
+        <p:txBody>
+          <a:bodyPr rtlCol="0" anchor="ctr"/>
+          <a:lstStyle/>
+          <a:p>
+            <a:pPr algn="ctr"/>
+          </a:p>
+        </p:txBody>
+      </p:sp>
+      <p:sp>
+        <p:nvSpPr>
+          <p:cNvPr id="24" name="TextBox 23"/>
+          <p:cNvSpPr txBox="1"/>
+          <p:nvPr/>
+        </p:nvSpPr>
+        <p:spPr>
+          <a:xfrm>
+            <a:off x="813816" y="5925312"/>
+            <a:ext cx="10561320" cy="237744"/>
+          </a:xfrm>
+          <a:prstGeom prst="rect">
+            <a:avLst/>
+          </a:prstGeom>
+          <a:noFill/>
+        </p:spPr>
+        <p:txBody>
+          <a:bodyPr wrap="square" lIns="0" rIns="0" tIns="0" bIns="0">
+            <a:spAutoFit/>
+          </a:bodyPr>
+          <a:lstStyle/>
+          <a:p>
+            <a:pPr>
+              <a:spcAft>
+                <a:spcPts val="500"/>
+              </a:spcAft>
+              <a:defRPr sz="1400" b="1">
+                <a:solidFill>
+                  <a:srgbClr val="087F76"/>
+                </a:solidFill>
+                <a:latin typeface="DejaVu Sans"/>
+              </a:defRPr>
+            </a:pPr>
+            <a:r>
+              <a:t>Next step: validate these choices on reviewed cases and realistic legal questions.</a:t>
+            </a:r>
+          </a:p>
+        </p:txBody>
+      </p:sp>
+    </p:spTree>
+  </p:cSld>
+  <p:clrMapOvr>
+    <a:masterClrMapping/>
+  </p:clrMapOvr>
+</p:sld>
+</file>
+
+<file path=ppt/slides/slide8.xml><?xml version="1.0" encoding="utf-8"?>
+<p:sld xmlns:a="http://schemas.openxmlformats.org/drawingml/2006/main" xmlns:p="http://schemas.openxmlformats.org/presentationml/2006/main" xmlns:r="http://schemas.openxmlformats.org/officeDocument/2006/relationships">
+  <p:cSld>
+    <p:bg>
+      <p:bgPr>
+        <a:solidFill>
+          <a:srgbClr val="FFFFFF"/>
+        </a:solidFill>
+        <a:effectLst/>
+      </p:bgPr>
+    </p:bg>
+    <p:spTree>
+      <p:nvGrpSpPr>
+        <p:cNvPr id="1" name=""/>
+        <p:cNvGrpSpPr/>
+        <p:nvPr/>
+      </p:nvGrpSpPr>
+      <p:grpSpPr/>
+      <p:sp>
+        <p:nvSpPr>
+          <p:cNvPr id="2" name="TextBox 1"/>
+          <p:cNvSpPr txBox="1"/>
+          <p:nvPr/>
+        </p:nvSpPr>
+        <p:spPr>
+          <a:xfrm>
+            <a:off x="594360" y="365760"/>
+            <a:ext cx="10058400" cy="274320"/>
+          </a:xfrm>
+          <a:prstGeom prst="rect">
+            <a:avLst/>
+          </a:prstGeom>
+          <a:noFill/>
+        </p:spPr>
+        <p:txBody>
+          <a:bodyPr wrap="square" lIns="0" rIns="0" tIns="0" bIns="0">
+            <a:spAutoFit/>
+          </a:bodyPr>
+          <a:lstStyle/>
+          <a:p>
+            <a:pPr>
+              <a:spcAft>
+                <a:spcPts val="500"/>
+              </a:spcAft>
+              <a:defRPr sz="1100" b="1">
+                <a:solidFill>
+                  <a:srgbClr val="087F76"/>
+                </a:solidFill>
+                <a:latin typeface="DejaVu Sans"/>
+              </a:defRPr>
+            </a:pPr>
+            <a:r>
+              <a:t>PROPOSED NEXT STEPS</a:t>
+            </a:r>
+          </a:p>
+        </p:txBody>
+      </p:sp>
+      <p:sp>
+        <p:nvSpPr>
+          <p:cNvPr id="3" name="TextBox 2"/>
+          <p:cNvSpPr txBox="1"/>
+          <p:nvPr/>
+        </p:nvSpPr>
+        <p:spPr>
+          <a:xfrm>
+            <a:off x="594360" y="950976"/>
+            <a:ext cx="10972800" cy="960120"/>
+          </a:xfrm>
+          <a:prstGeom prst="rect">
+            <a:avLst/>
+          </a:prstGeom>
+          <a:noFill/>
+        </p:spPr>
+        <p:txBody>
+          <a:bodyPr wrap="square" lIns="0" rIns="0" tIns="0" bIns="0">
+            <a:spAutoFit/>
+          </a:bodyPr>
+          <a:lstStyle/>
+          <a:p>
+            <a:pPr>
+              <a:spcAft>
+                <a:spcPts val="500"/>
+              </a:spcAft>
+              <a:defRPr sz="3000" b="1">
+                <a:solidFill>
+                  <a:srgbClr val="142C43"/>
+                </a:solidFill>
+                <a:latin typeface="DejaVu Sans"/>
+              </a:defRPr>
+            </a:pPr>
+            <a:r>
+              <a:t>How I would keep it reliable in real use</a:t>
+            </a:r>
+          </a:p>
+        </p:txBody>
+      </p:sp>
+      <p:sp>
+        <p:nvSpPr>
+          <p:cNvPr id="4" name="TextBox 3"/>
+          <p:cNvSpPr txBox="1"/>
+          <p:nvPr/>
+        </p:nvSpPr>
+        <p:spPr>
+          <a:xfrm>
+            <a:off x="594360" y="1938528"/>
+            <a:ext cx="10972800" cy="548640"/>
+          </a:xfrm>
+          <a:prstGeom prst="rect">
+            <a:avLst/>
+          </a:prstGeom>
+          <a:noFill/>
+        </p:spPr>
+        <p:txBody>
+          <a:bodyPr wrap="square" lIns="0" rIns="0" tIns="0" bIns="0">
+            <a:spAutoFit/>
+          </a:bodyPr>
+          <a:lstStyle/>
+          <a:p>
+            <a:pPr>
+              <a:spcAft>
+                <a:spcPts val="500"/>
+              </a:spcAft>
+              <a:defRPr sz="1500" b="0">
+                <a:solidFill>
+                  <a:srgbClr val="62798A"/>
+                </a:solidFill>
+                <a:latin typeface="DejaVu Sans"/>
+              </a:defRPr>
+            </a:pPr>
+            <a:r>
+              <a:t>Start with one approved workflow, then expand only after review.</a:t>
+            </a:r>
+          </a:p>
+        </p:txBody>
+      </p:sp>
+      <p:sp>
+        <p:nvSpPr>
+          <p:cNvPr id="5" name="TextBox 4"/>
+          <p:cNvSpPr txBox="1"/>
+          <p:nvPr/>
+        </p:nvSpPr>
+        <p:spPr>
+          <a:xfrm>
+            <a:off x="594360" y="6519672"/>
+            <a:ext cx="9966960" cy="182880"/>
+          </a:xfrm>
+          <a:prstGeom prst="rect">
+            <a:avLst/>
+          </a:prstGeom>
+          <a:noFill/>
+        </p:spPr>
+        <p:txBody>
+          <a:bodyPr wrap="square" lIns="0" rIns="0" tIns="0" bIns="0">
+            <a:spAutoFit/>
+          </a:bodyPr>
+          <a:lstStyle/>
+          <a:p>
+            <a:pPr>
+              <a:spcAft>
+                <a:spcPts val="500"/>
+              </a:spcAft>
+              <a:defRPr sz="800" b="0">
+                <a:solidFill>
+                  <a:srgbClr val="62798A"/>
+                </a:solidFill>
+                <a:latin typeface="DejaVu Sans"/>
+              </a:defRPr>
+            </a:pPr>
+            <a:r>
+              <a:t>Proposed improvements based on the brief and demo limitations, not verified shortcomings in the existing company system.</a:t>
+            </a:r>
+          </a:p>
+        </p:txBody>
+      </p:sp>
+      <p:sp>
+        <p:nvSpPr>
+          <p:cNvPr id="6" name="TextBox 5"/>
+          <p:cNvSpPr txBox="1"/>
+          <p:nvPr/>
+        </p:nvSpPr>
+        <p:spPr>
+          <a:xfrm>
+            <a:off x="10835640" y="6446520"/>
+            <a:ext cx="731520" cy="274320"/>
+          </a:xfrm>
+          <a:prstGeom prst="rect">
+            <a:avLst/>
+          </a:prstGeom>
+          <a:noFill/>
+        </p:spPr>
+        <p:txBody>
+          <a:bodyPr wrap="square" lIns="0" rIns="0" tIns="0" bIns="0">
+            <a:spAutoFit/>
+          </a:bodyPr>
+          <a:lstStyle/>
+          <a:p>
+            <a:pPr>
+              <a:spcAft>
+                <a:spcPts val="500"/>
+              </a:spcAft>
+              <a:defRPr sz="1000" b="0">
+                <a:solidFill>
+                  <a:srgbClr val="62798A"/>
+                </a:solidFill>
+                <a:latin typeface="DejaVu Sans"/>
+              </a:defRPr>
+            </a:pPr>
+            <a:r>
+              <a:t>08 / 08</a:t>
             </a:r>
           </a:p>
         </p:txBody>

--- a/presentation/Nafis_Ismam_Docitalis_Final.pptx
+++ b/presentation/Nafis_Ismam_Docitalis_Final.pptx
@@ -929,7 +929,7 @@
           <a:lstStyle/>
           <a:p>
             <a:r>
-              <a:t>About 45 seconds. Present this as design reasoning rather than invented project history. “The demo makes three concerns visible. A compound query can fail the gate, so the controlled example tries explicit decomposition. Conflicting module choices must not silently coexist, so assembly raises an error. Citation metadata may claim a source is required even when the text omits it, so the review checks actual markers.” These are chosen failure modes and scripted checks, not evidence of a real customer incident or measured business improvement. The search is not validated on natural legal queries, legal exclusions require domain approval, and marker checks do not assess semantic support. Do not claim an optimal threshold or a fully solved legal retrieval problem.</a:t>
+              <a:t>About 60 seconds. This slide replaces a challenge story with the actual implementation choices. First, 0.80 was adopted from the reference approach to demonstrate gating, not derived from experiments on this TF-IDF index. It is not 80% confidence, correctness or coverage. Calibrate thresholds with reviewed legal questions and expected sources. Second, lists and dictionaries serve different roles: a list holds multiple records, while each dictionary names fields; source["act_name"] is clearer than remembering positional indexes. The by_id dictionary also supports lookup by source ID and rejects duplicates. Third, sorted JSON plus SHA-256 produces compact fingerprints for comparing knowledge-base content and outputs. Direct equality comparisons are another option. Hashes do not themselves create determinism, establish semantic correctness, or make this an approval/signature system. Fourth, scikit-learn supplies TF-IDF and cosine similarity for a small local retrieval baseline. It needs no embedding-model download or API key. It may miss paraphrases and its score is lexical similarity, not applicability. A dense embedding model or hybrid retrieval could be evaluated later. An LLM is a separate generator/reviewer, not a direct alternative to the TF-IDF retrieval component. The current notebook uses rule-based checks rather than an LLM review layer.</a:t>
             </a:r>
           </a:p>
         </p:txBody>
@@ -10270,7 +10270,7 @@
               </a:defRPr>
             </a:pPr>
             <a:r>
-              <a:t>DESIGN RATIONALE · CHALLENGES DEMONSTRATED</a:t>
+              <a:t>DESIGN CHOICES · REASONS AND LIMITS</a:t>
             </a:r>
           </a:p>
         </p:txBody>
@@ -10309,7 +10309,7 @@
               </a:defRPr>
             </a:pPr>
             <a:r>
-              <a:t>What could go wrong—and how the demo responds</a:t>
+              <a:t>Why these choices for a small prototype?</a:t>
             </a:r>
           </a:p>
         </p:txBody>
@@ -10348,105 +10348,29 @@
               </a:defRPr>
             </a:pPr>
             <a:r>
-              <a:t>These are design concerns and scripted observations, not a real-client incident.</a:t>
-            </a:r>
-          </a:p>
-        </p:txBody>
-      </p:sp>
-      <p:sp>
-        <p:nvSpPr>
-          <p:cNvPr id="5" name="TextBox 4"/>
-          <p:cNvSpPr txBox="1"/>
-          <p:nvPr/>
-        </p:nvSpPr>
-        <p:spPr>
-          <a:xfrm>
-            <a:off x="594360" y="6519672"/>
-            <a:ext cx="9966960" cy="182880"/>
-          </a:xfrm>
-          <a:prstGeom prst="rect">
-            <a:avLst/>
-          </a:prstGeom>
-          <a:noFill/>
-        </p:spPr>
-        <p:txBody>
-          <a:bodyPr wrap="square" lIns="0" rIns="0" tIns="0" bIns="0">
-            <a:spAutoFit/>
-          </a:bodyPr>
-          <a:lstStyle/>
-          <a:p>
-            <a:pPr>
-              <a:spcAft>
-                <a:spcPts val="500"/>
-              </a:spcAft>
-              <a:defRPr sz="800" b="0">
-                <a:solidFill>
-                  <a:srgbClr val="62798A"/>
-                </a:solidFill>
-                <a:latin typeface="DejaVu Sans"/>
-              </a:defRPr>
-            </a:pPr>
-            <a:r>
-              <a:t>Proposed improvements based on the brief and demo limitations, not verified shortcomings in the existing company system.</a:t>
-            </a:r>
-          </a:p>
-        </p:txBody>
-      </p:sp>
-      <p:sp>
-        <p:nvSpPr>
-          <p:cNvPr id="6" name="TextBox 5"/>
-          <p:cNvSpPr txBox="1"/>
-          <p:nvPr/>
-        </p:nvSpPr>
-        <p:spPr>
-          <a:xfrm>
-            <a:off x="10835640" y="6446520"/>
-            <a:ext cx="731520" cy="274320"/>
-          </a:xfrm>
-          <a:prstGeom prst="rect">
-            <a:avLst/>
-          </a:prstGeom>
-          <a:noFill/>
-        </p:spPr>
-        <p:txBody>
-          <a:bodyPr wrap="square" lIns="0" rIns="0" tIns="0" bIns="0">
-            <a:spAutoFit/>
-          </a:bodyPr>
-          <a:lstStyle/>
-          <a:p>
-            <a:pPr>
-              <a:spcAft>
-                <a:spcPts val="500"/>
-              </a:spcAft>
-              <a:defRPr sz="1000" b="0">
-                <a:solidFill>
-                  <a:srgbClr val="62798A"/>
-                </a:solidFill>
-                <a:latin typeface="DejaVu Sans"/>
-              </a:defRPr>
-            </a:pPr>
-            <a:r>
-              <a:t>07 / 08</a:t>
-            </a:r>
-          </a:p>
-        </p:txBody>
-      </p:sp>
-      <p:sp>
-        <p:nvSpPr>
-          <p:cNvPr id="7" name="Rectangle 6"/>
+              <a:t>Simple tools make the behaviour easier to inspect. Each choice has a limit.</a:t>
+            </a:r>
+          </a:p>
+        </p:txBody>
+      </p:sp>
+      <p:sp>
+        <p:nvSpPr>
+          <p:cNvPr id="5" name="Rounded Rectangle 4"/>
           <p:cNvSpPr/>
           <p:nvPr/>
         </p:nvSpPr>
         <p:spPr>
           <a:xfrm>
-            <a:off x="594360" y="2706624"/>
-            <a:ext cx="11000232" cy="393192"/>
-          </a:xfrm>
-          <a:prstGeom prst="rect">
-            <a:avLst/>
+            <a:off x="594360" y="2734056"/>
+            <a:ext cx="5202936" cy="1426464"/>
+          </a:xfrm>
+          <a:prstGeom prst="roundRect">
+            <a:avLst>
+              <a:gd name="adj" fmla="val 6000"/>
+            </a:avLst>
           </a:prstGeom>
           <a:solidFill>
-            <a:srgbClr val="142C43"/>
+            <a:srgbClr val="F0F4F6"/>
           </a:solidFill>
           <a:ln>
             <a:noFill/>
@@ -10476,137 +10400,116 @@
       </p:sp>
       <p:sp>
         <p:nvSpPr>
-          <p:cNvPr id="8" name="TextBox 7"/>
-          <p:cNvSpPr txBox="1"/>
-          <p:nvPr/>
-        </p:nvSpPr>
-        <p:spPr>
-          <a:xfrm>
-            <a:off x="795528" y="2807208"/>
-            <a:ext cx="2834640" cy="219456"/>
-          </a:xfrm>
-          <a:prstGeom prst="rect">
-            <a:avLst/>
-          </a:prstGeom>
-          <a:noFill/>
-        </p:spPr>
-        <p:txBody>
-          <a:bodyPr wrap="square" lIns="0" rIns="0" tIns="0" bIns="0">
-            <a:spAutoFit/>
-          </a:bodyPr>
-          <a:lstStyle/>
-          <a:p>
-            <a:pPr>
-              <a:spcAft>
-                <a:spcPts val="500"/>
-              </a:spcAft>
-              <a:defRPr sz="1000" b="1">
-                <a:solidFill>
-                  <a:srgbClr val="FFFFFF"/>
-                </a:solidFill>
-                <a:latin typeface="DejaVu Sans"/>
-              </a:defRPr>
-            </a:pPr>
-            <a:r>
-              <a:t>CHALLENGE</a:t>
-            </a:r>
-          </a:p>
-        </p:txBody>
-      </p:sp>
-      <p:sp>
-        <p:nvSpPr>
-          <p:cNvPr id="9" name="TextBox 8"/>
-          <p:cNvSpPr txBox="1"/>
-          <p:nvPr/>
-        </p:nvSpPr>
-        <p:spPr>
-          <a:xfrm>
-            <a:off x="3858768" y="2807208"/>
-            <a:ext cx="3657600" cy="219456"/>
-          </a:xfrm>
-          <a:prstGeom prst="rect">
-            <a:avLst/>
-          </a:prstGeom>
-          <a:noFill/>
-        </p:spPr>
-        <p:txBody>
-          <a:bodyPr wrap="square" lIns="0" rIns="0" tIns="0" bIns="0">
-            <a:spAutoFit/>
-          </a:bodyPr>
-          <a:lstStyle/>
-          <a:p>
-            <a:pPr>
-              <a:spcAft>
-                <a:spcPts val="500"/>
-              </a:spcAft>
-              <a:defRPr sz="1000" b="1">
-                <a:solidFill>
-                  <a:srgbClr val="FFFFFF"/>
-                </a:solidFill>
-                <a:latin typeface="DejaVu Sans"/>
-              </a:defRPr>
-            </a:pPr>
-            <a:r>
-              <a:t>APPROACH</a:t>
-            </a:r>
-          </a:p>
-        </p:txBody>
-      </p:sp>
-      <p:sp>
-        <p:nvSpPr>
-          <p:cNvPr id="10" name="TextBox 9"/>
-          <p:cNvSpPr txBox="1"/>
-          <p:nvPr/>
-        </p:nvSpPr>
-        <p:spPr>
-          <a:xfrm>
-            <a:off x="7854696" y="2807208"/>
-            <a:ext cx="3520440" cy="219456"/>
-          </a:xfrm>
-          <a:prstGeom prst="rect">
-            <a:avLst/>
-          </a:prstGeom>
-          <a:noFill/>
-        </p:spPr>
-        <p:txBody>
-          <a:bodyPr wrap="square" lIns="0" rIns="0" tIns="0" bIns="0">
-            <a:spAutoFit/>
-          </a:bodyPr>
-          <a:lstStyle/>
-          <a:p>
-            <a:pPr>
-              <a:spcAft>
-                <a:spcPts val="500"/>
-              </a:spcAft>
-              <a:defRPr sz="1000" b="1">
-                <a:solidFill>
-                  <a:srgbClr val="FFFFFF"/>
-                </a:solidFill>
-                <a:latin typeface="DejaVu Sans"/>
-              </a:defRPr>
-            </a:pPr>
-            <a:r>
-              <a:t>REMAINING LIMIT</a:t>
-            </a:r>
-          </a:p>
-        </p:txBody>
-      </p:sp>
-      <p:sp>
-        <p:nvSpPr>
-          <p:cNvPr id="11" name="Rectangle 10"/>
+          <p:cNvPr id="6" name="TextBox 5"/>
+          <p:cNvSpPr txBox="1"/>
+          <p:nvPr/>
+        </p:nvSpPr>
+        <p:spPr>
+          <a:xfrm>
+            <a:off x="832104" y="2944368"/>
+            <a:ext cx="4727448" cy="320040"/>
+          </a:xfrm>
+          <a:prstGeom prst="rect">
+            <a:avLst/>
+          </a:prstGeom>
+          <a:noFill/>
+        </p:spPr>
+        <p:txBody>
+          <a:bodyPr wrap="square" lIns="0" rIns="0" tIns="0" bIns="0">
+            <a:spAutoFit/>
+          </a:bodyPr>
+          <a:lstStyle/>
+          <a:p>
+            <a:pPr>
+              <a:spcAft>
+                <a:spcPts val="500"/>
+              </a:spcAft>
+              <a:defRPr sz="1300" b="1">
+                <a:solidFill>
+                  <a:srgbClr val="087F76"/>
+                </a:solidFill>
+                <a:latin typeface="DejaVu Sans"/>
+              </a:defRPr>
+            </a:pPr>
+            <a:r>
+              <a:t>0.80 THRESHOLD</a:t>
+            </a:r>
+          </a:p>
+        </p:txBody>
+      </p:sp>
+      <p:sp>
+        <p:nvSpPr>
+          <p:cNvPr id="7" name="TextBox 6"/>
+          <p:cNvSpPr txBox="1"/>
+          <p:nvPr/>
+        </p:nvSpPr>
+        <p:spPr>
+          <a:xfrm>
+            <a:off x="832104" y="3456432"/>
+            <a:ext cx="4727448" cy="594360"/>
+          </a:xfrm>
+          <a:prstGeom prst="rect">
+            <a:avLst/>
+          </a:prstGeom>
+          <a:noFill/>
+        </p:spPr>
+        <p:txBody>
+          <a:bodyPr wrap="square" lIns="0" rIns="0" tIns="0" bIns="0">
+            <a:spAutoFit/>
+          </a:bodyPr>
+          <a:lstStyle/>
+          <a:p>
+            <a:pPr>
+              <a:spcAft>
+                <a:spcPts val="500"/>
+              </a:spcAft>
+              <a:defRPr sz="1400" b="0">
+                <a:solidFill>
+                  <a:srgbClr val="21394D"/>
+                </a:solidFill>
+                <a:latin typeface="DejaVu Sans"/>
+              </a:defRPr>
+            </a:pPr>
+            <a:r>
+              <a:t>A starting value from the reference approach.</a:t>
+            </a:r>
+          </a:p>
+          <a:p>
+            <a:pPr>
+              <a:spcAft>
+                <a:spcPts val="500"/>
+              </a:spcAft>
+              <a:defRPr sz="1400" b="0">
+                <a:solidFill>
+                  <a:srgbClr val="21394D"/>
+                </a:solidFill>
+                <a:latin typeface="DejaVu Sans"/>
+              </a:defRPr>
+            </a:pPr>
+            <a:r>
+              <a:t>Not calibrated here; not 80% accuracy.</a:t>
+            </a:r>
+          </a:p>
+        </p:txBody>
+      </p:sp>
+      <p:sp>
+        <p:nvSpPr>
+          <p:cNvPr id="8" name="Rounded Rectangle 7"/>
           <p:cNvSpPr/>
           <p:nvPr/>
         </p:nvSpPr>
         <p:spPr>
           <a:xfrm>
-            <a:off x="594360" y="3127248"/>
-            <a:ext cx="11000232" cy="740664"/>
-          </a:xfrm>
-          <a:prstGeom prst="rect">
-            <a:avLst/>
+            <a:off x="6391656" y="2734056"/>
+            <a:ext cx="5202936" cy="1426464"/>
+          </a:xfrm>
+          <a:prstGeom prst="roundRect">
+            <a:avLst>
+              <a:gd name="adj" fmla="val 6000"/>
+            </a:avLst>
           </a:prstGeom>
           <a:solidFill>
-            <a:srgbClr val="F0F4F6"/>
+            <a:srgbClr val="E9F4F0"/>
           </a:solidFill>
           <a:ln>
             <a:noFill/>
@@ -10636,14 +10539,14 @@
       </p:sp>
       <p:sp>
         <p:nvSpPr>
-          <p:cNvPr id="12" name="TextBox 11"/>
-          <p:cNvSpPr txBox="1"/>
-          <p:nvPr/>
-        </p:nvSpPr>
-        <p:spPr>
-          <a:xfrm>
-            <a:off x="795528" y="3273552"/>
-            <a:ext cx="2834640" cy="548640"/>
+          <p:cNvPr id="9" name="TextBox 8"/>
+          <p:cNvSpPr txBox="1"/>
+          <p:nvPr/>
+        </p:nvSpPr>
+        <p:spPr>
+          <a:xfrm>
+            <a:off x="6629400" y="2944368"/>
+            <a:ext cx="4727448" cy="320040"/>
           </a:xfrm>
           <a:prstGeom prst="rect">
             <a:avLst/>
@@ -10662,44 +10565,60 @@
               </a:spcAft>
               <a:defRPr sz="1300" b="1">
                 <a:solidFill>
+                  <a:srgbClr val="087F76"/>
+                </a:solidFill>
+                <a:latin typeface="DejaVu Sans"/>
+              </a:defRPr>
+            </a:pPr>
+            <a:r>
+              <a:t>DICTIONARIES + LISTS</a:t>
+            </a:r>
+          </a:p>
+        </p:txBody>
+      </p:sp>
+      <p:sp>
+        <p:nvSpPr>
+          <p:cNvPr id="10" name="TextBox 9"/>
+          <p:cNvSpPr txBox="1"/>
+          <p:nvPr/>
+        </p:nvSpPr>
+        <p:spPr>
+          <a:xfrm>
+            <a:off x="6629400" y="3456432"/>
+            <a:ext cx="4727448" cy="594360"/>
+          </a:xfrm>
+          <a:prstGeom prst="rect">
+            <a:avLst/>
+          </a:prstGeom>
+          <a:noFill/>
+        </p:spPr>
+        <p:txBody>
+          <a:bodyPr wrap="square" lIns="0" rIns="0" tIns="0" bIns="0">
+            <a:spAutoFit/>
+          </a:bodyPr>
+          <a:lstStyle/>
+          <a:p>
+            <a:pPr>
+              <a:spcAft>
+                <a:spcPts val="500"/>
+              </a:spcAft>
+              <a:defRPr sz="1400" b="0">
+                <a:solidFill>
                   <a:srgbClr val="21394D"/>
                 </a:solidFill>
                 <a:latin typeface="DejaVu Sans"/>
               </a:defRPr>
             </a:pPr>
             <a:r>
-              <a:t>A compound query falls below the gate</a:t>
-            </a:r>
-          </a:p>
-        </p:txBody>
-      </p:sp>
-      <p:sp>
-        <p:nvSpPr>
-          <p:cNvPr id="13" name="TextBox 12"/>
-          <p:cNvSpPr txBox="1"/>
-          <p:nvPr/>
-        </p:nvSpPr>
-        <p:spPr>
-          <a:xfrm>
-            <a:off x="3858768" y="3273552"/>
-            <a:ext cx="3657600" cy="548640"/>
-          </a:xfrm>
-          <a:prstGeom prst="rect">
-            <a:avLst/>
-          </a:prstGeom>
-          <a:noFill/>
-        </p:spPr>
-        <p:txBody>
-          <a:bodyPr wrap="square" lIns="0" rIns="0" tIns="0" bIns="0">
-            <a:spAutoFit/>
-          </a:bodyPr>
-          <a:lstStyle/>
-          <a:p>
-            <a:pPr>
-              <a:spcAft>
-                <a:spcPts val="500"/>
-              </a:spcAft>
-              <a:defRPr sz="1300" b="0">
+              <a:t>Lists hold the records; dictionaries name fields.</a:t>
+            </a:r>
+          </a:p>
+          <a:p>
+            <a:pPr>
+              <a:spcAft>
+                <a:spcPts val="500"/>
+              </a:spcAft>
+              <a:defRPr sz="1400" b="0">
                 <a:solidFill>
                   <a:srgbClr val="21394D"/>
                 </a:solidFill>
@@ -10707,66 +10626,29 @@
               </a:defRPr>
             </a:pPr>
             <a:r>
-              <a:t>Split explicit issues and search each part</a:t>
-            </a:r>
-          </a:p>
-        </p:txBody>
-      </p:sp>
-      <p:sp>
-        <p:nvSpPr>
-          <p:cNvPr id="14" name="TextBox 13"/>
-          <p:cNvSpPr txBox="1"/>
-          <p:nvPr/>
-        </p:nvSpPr>
-        <p:spPr>
-          <a:xfrm>
-            <a:off x="7854696" y="3273552"/>
-            <a:ext cx="3520440" cy="548640"/>
-          </a:xfrm>
-          <a:prstGeom prst="rect">
-            <a:avLst/>
-          </a:prstGeom>
-          <a:noFill/>
-        </p:spPr>
-        <p:txBody>
-          <a:bodyPr wrap="square" lIns="0" rIns="0" tIns="0" bIns="0">
-            <a:spAutoFit/>
-          </a:bodyPr>
-          <a:lstStyle/>
-          <a:p>
-            <a:pPr>
-              <a:spcAft>
-                <a:spcPts val="500"/>
-              </a:spcAft>
-              <a:defRPr sz="1200" b="0">
-                <a:solidFill>
-                  <a:srgbClr val="62798A"/>
-                </a:solidFill>
-                <a:latin typeface="DejaVu Sans"/>
-              </a:defRPr>
-            </a:pPr>
-            <a:r>
-              <a:t>Exact-text demo only; threshold not calibrated</a:t>
-            </a:r>
-          </a:p>
-        </p:txBody>
-      </p:sp>
-      <p:sp>
-        <p:nvSpPr>
-          <p:cNvPr id="15" name="Rectangle 14"/>
+              <a:t>Read source["act_name"], not source[1].</a:t>
+            </a:r>
+          </a:p>
+        </p:txBody>
+      </p:sp>
+      <p:sp>
+        <p:nvSpPr>
+          <p:cNvPr id="11" name="Rounded Rectangle 10"/>
           <p:cNvSpPr/>
           <p:nvPr/>
         </p:nvSpPr>
         <p:spPr>
           <a:xfrm>
-            <a:off x="594360" y="3895344"/>
-            <a:ext cx="11000232" cy="740664"/>
-          </a:xfrm>
-          <a:prstGeom prst="rect">
-            <a:avLst/>
+            <a:off x="594360" y="4398264"/>
+            <a:ext cx="5202936" cy="1426464"/>
+          </a:xfrm>
+          <a:prstGeom prst="roundRect">
+            <a:avLst>
+              <a:gd name="adj" fmla="val 6000"/>
+            </a:avLst>
           </a:prstGeom>
           <a:solidFill>
-            <a:srgbClr val="FFFFFF"/>
+            <a:srgbClr val="F0F4F6"/>
           </a:solidFill>
           <a:ln>
             <a:noFill/>
@@ -10796,14 +10678,14 @@
       </p:sp>
       <p:sp>
         <p:nvSpPr>
-          <p:cNvPr id="16" name="TextBox 15"/>
-          <p:cNvSpPr txBox="1"/>
-          <p:nvPr/>
-        </p:nvSpPr>
-        <p:spPr>
-          <a:xfrm>
-            <a:off x="795528" y="4041648"/>
-            <a:ext cx="2834640" cy="548640"/>
+          <p:cNvPr id="12" name="TextBox 11"/>
+          <p:cNvSpPr txBox="1"/>
+          <p:nvPr/>
+        </p:nvSpPr>
+        <p:spPr>
+          <a:xfrm>
+            <a:off x="832104" y="4608576"/>
+            <a:ext cx="4727448" cy="320040"/>
           </a:xfrm>
           <a:prstGeom prst="rect">
             <a:avLst/>
@@ -10822,44 +10704,60 @@
               </a:spcAft>
               <a:defRPr sz="1300" b="1">
                 <a:solidFill>
+                  <a:srgbClr val="087F76"/>
+                </a:solidFill>
+                <a:latin typeface="DejaVu Sans"/>
+              </a:defRPr>
+            </a:pPr>
+            <a:r>
+              <a:t>SHA-256 FINGERPRINTS</a:t>
+            </a:r>
+          </a:p>
+        </p:txBody>
+      </p:sp>
+      <p:sp>
+        <p:nvSpPr>
+          <p:cNvPr id="13" name="TextBox 12"/>
+          <p:cNvSpPr txBox="1"/>
+          <p:nvPr/>
+        </p:nvSpPr>
+        <p:spPr>
+          <a:xfrm>
+            <a:off x="832104" y="5120640"/>
+            <a:ext cx="4727448" cy="594360"/>
+          </a:xfrm>
+          <a:prstGeom prst="rect">
+            <a:avLst/>
+          </a:prstGeom>
+          <a:noFill/>
+        </p:spPr>
+        <p:txBody>
+          <a:bodyPr wrap="square" lIns="0" rIns="0" tIns="0" bIns="0">
+            <a:spAutoFit/>
+          </a:bodyPr>
+          <a:lstStyle/>
+          <a:p>
+            <a:pPr>
+              <a:spcAft>
+                <a:spcPts val="500"/>
+              </a:spcAft>
+              <a:defRPr sz="1400" b="0">
+                <a:solidFill>
                   <a:srgbClr val="21394D"/>
                 </a:solidFill>
                 <a:latin typeface="DejaVu Sans"/>
               </a:defRPr>
             </a:pPr>
             <a:r>
-              <a:t>Conflicting routes are selected</a:t>
-            </a:r>
-          </a:p>
-        </p:txBody>
-      </p:sp>
-      <p:sp>
-        <p:nvSpPr>
-          <p:cNvPr id="17" name="TextBox 16"/>
-          <p:cNvSpPr txBox="1"/>
-          <p:nvPr/>
-        </p:nvSpPr>
-        <p:spPr>
-          <a:xfrm>
-            <a:off x="3858768" y="4041648"/>
-            <a:ext cx="3657600" cy="548640"/>
-          </a:xfrm>
-          <a:prstGeom prst="rect">
-            <a:avLst/>
-          </a:prstGeom>
-          <a:noFill/>
-        </p:spPr>
-        <p:txBody>
-          <a:bodyPr wrap="square" lIns="0" rIns="0" tIns="0" bIns="0">
-            <a:spAutoFit/>
-          </a:bodyPr>
-          <a:lstStyle/>
-          <a:p>
-            <a:pPr>
-              <a:spcAft>
-                <a:spcPts val="500"/>
-              </a:spcAft>
-              <a:defRPr sz="1300" b="0">
+              <a:t>Compare rule and output content compactly.</a:t>
+            </a:r>
+          </a:p>
+          <a:p>
+            <a:pPr>
+              <a:spcAft>
+                <a:spcPts val="500"/>
+              </a:spcAft>
+              <a:defRPr sz="1400" b="0">
                 <a:solidFill>
                   <a:srgbClr val="21394D"/>
                 </a:solidFill>
@@ -10867,66 +10765,29 @@
               </a:defRPr>
             </a:pPr>
             <a:r>
-              <a:t>Stop before drafting; return a clear error</a:t>
-            </a:r>
-          </a:p>
-        </p:txBody>
-      </p:sp>
-      <p:sp>
-        <p:nvSpPr>
-          <p:cNvPr id="18" name="TextBox 17"/>
-          <p:cNvSpPr txBox="1"/>
-          <p:nvPr/>
-        </p:nvSpPr>
-        <p:spPr>
-          <a:xfrm>
-            <a:off x="7854696" y="4041648"/>
-            <a:ext cx="3520440" cy="548640"/>
-          </a:xfrm>
-          <a:prstGeom prst="rect">
-            <a:avLst/>
-          </a:prstGeom>
-          <a:noFill/>
-        </p:spPr>
-        <p:txBody>
-          <a:bodyPr wrap="square" lIns="0" rIns="0" tIns="0" bIns="0">
-            <a:spAutoFit/>
-          </a:bodyPr>
-          <a:lstStyle/>
-          <a:p>
-            <a:pPr>
-              <a:spcAft>
-                <a:spcPts val="500"/>
-              </a:spcAft>
-              <a:defRPr sz="1200" b="0">
-                <a:solidFill>
-                  <a:srgbClr val="62798A"/>
-                </a:solidFill>
-                <a:latin typeface="DejaVu Sans"/>
-              </a:defRPr>
-            </a:pPr>
-            <a:r>
-              <a:t>Real exclusions need lawyer approval</a:t>
-            </a:r>
-          </a:p>
-        </p:txBody>
-      </p:sp>
-      <p:sp>
-        <p:nvSpPr>
-          <p:cNvPr id="19" name="Rectangle 18"/>
+              <a:t>They do not prove legal correctness.</a:t>
+            </a:r>
+          </a:p>
+        </p:txBody>
+      </p:sp>
+      <p:sp>
+        <p:nvSpPr>
+          <p:cNvPr id="14" name="Rounded Rectangle 13"/>
           <p:cNvSpPr/>
           <p:nvPr/>
         </p:nvSpPr>
         <p:spPr>
           <a:xfrm>
-            <a:off x="594360" y="4663440"/>
-            <a:ext cx="11000232" cy="740664"/>
-          </a:xfrm>
-          <a:prstGeom prst="rect">
-            <a:avLst/>
+            <a:off x="6391656" y="4398264"/>
+            <a:ext cx="5202936" cy="1426464"/>
+          </a:xfrm>
+          <a:prstGeom prst="roundRect">
+            <a:avLst>
+              <a:gd name="adj" fmla="val 6000"/>
+            </a:avLst>
           </a:prstGeom>
           <a:solidFill>
-            <a:srgbClr val="F0F4F6"/>
+            <a:srgbClr val="E9F4F0"/>
           </a:solidFill>
           <a:ln>
             <a:noFill/>
@@ -10956,14 +10817,14 @@
       </p:sp>
       <p:sp>
         <p:nvSpPr>
-          <p:cNvPr id="20" name="TextBox 19"/>
-          <p:cNvSpPr txBox="1"/>
-          <p:nvPr/>
-        </p:nvSpPr>
-        <p:spPr>
-          <a:xfrm>
-            <a:off x="795528" y="4809744"/>
-            <a:ext cx="2834640" cy="548640"/>
+          <p:cNvPr id="15" name="TextBox 14"/>
+          <p:cNvSpPr txBox="1"/>
+          <p:nvPr/>
+        </p:nvSpPr>
+        <p:spPr>
+          <a:xfrm>
+            <a:off x="6629400" y="4608576"/>
+            <a:ext cx="4727448" cy="320040"/>
           </a:xfrm>
           <a:prstGeom prst="rect">
             <a:avLst/>
@@ -10982,44 +10843,60 @@
               </a:spcAft>
               <a:defRPr sz="1300" b="1">
                 <a:solidFill>
+                  <a:srgbClr val="087F76"/>
+                </a:solidFill>
+                <a:latin typeface="DejaVu Sans"/>
+              </a:defRPr>
+            </a:pPr>
+            <a:r>
+              <a:t>TF-IDF WITH SCIKIT-LEARN</a:t>
+            </a:r>
+          </a:p>
+        </p:txBody>
+      </p:sp>
+      <p:sp>
+        <p:nvSpPr>
+          <p:cNvPr id="16" name="TextBox 15"/>
+          <p:cNvSpPr txBox="1"/>
+          <p:nvPr/>
+        </p:nvSpPr>
+        <p:spPr>
+          <a:xfrm>
+            <a:off x="6629400" y="5120640"/>
+            <a:ext cx="4727448" cy="594360"/>
+          </a:xfrm>
+          <a:prstGeom prst="rect">
+            <a:avLst/>
+          </a:prstGeom>
+          <a:noFill/>
+        </p:spPr>
+        <p:txBody>
+          <a:bodyPr wrap="square" lIns="0" rIns="0" tIns="0" bIns="0">
+            <a:spAutoFit/>
+          </a:bodyPr>
+          <a:lstStyle/>
+          <a:p>
+            <a:pPr>
+              <a:spcAft>
+                <a:spcPts val="500"/>
+              </a:spcAft>
+              <a:defRPr sz="1400" b="0">
+                <a:solidFill>
                   <a:srgbClr val="21394D"/>
                 </a:solidFill>
                 <a:latin typeface="DejaVu Sans"/>
               </a:defRPr>
             </a:pPr>
             <a:r>
-              <a:t>A citation is missing or unknown</a:t>
-            </a:r>
-          </a:p>
-        </p:txBody>
-      </p:sp>
-      <p:sp>
-        <p:nvSpPr>
-          <p:cNvPr id="21" name="TextBox 20"/>
-          <p:cNvSpPr txBox="1"/>
-          <p:nvPr/>
-        </p:nvSpPr>
-        <p:spPr>
-          <a:xfrm>
-            <a:off x="3858768" y="4809744"/>
-            <a:ext cx="3657600" cy="548640"/>
-          </a:xfrm>
-          <a:prstGeom prst="rect">
-            <a:avLst/>
-          </a:prstGeom>
-          <a:noFill/>
-        </p:spPr>
-        <p:txBody>
-          <a:bodyPr wrap="square" lIns="0" rIns="0" tIns="0" bIns="0">
-            <a:spAutoFit/>
-          </a:bodyPr>
-          <a:lstStyle/>
-          <a:p>
-            <a:pPr>
-              <a:spcAft>
-                <a:spcPts val="500"/>
-              </a:spcAft>
-              <a:defRPr sz="1300" b="0">
+              <a:t>Lightweight word-based search; no model download.</a:t>
+            </a:r>
+          </a:p>
+          <a:p>
+            <a:pPr>
+              <a:spcAft>
+                <a:spcPts val="500"/>
+              </a:spcAft>
+              <a:defRPr sz="1400" b="0">
                 <a:solidFill>
                   <a:srgbClr val="21394D"/>
                 </a:solidFill>
@@ -11027,21 +10904,21 @@
               </a:defRPr>
             </a:pPr>
             <a:r>
-              <a:t>Compare required IDs with actual text markers</a:t>
-            </a:r>
-          </a:p>
-        </p:txBody>
-      </p:sp>
-      <p:sp>
-        <p:nvSpPr>
-          <p:cNvPr id="22" name="TextBox 21"/>
-          <p:cNvSpPr txBox="1"/>
-          <p:nvPr/>
-        </p:nvSpPr>
-        <p:spPr>
-          <a:xfrm>
-            <a:off x="7854696" y="4809744"/>
-            <a:ext cx="3520440" cy="548640"/>
+              <a:t>Simple to inspect, but weak on some paraphrases.</a:t>
+            </a:r>
+          </a:p>
+        </p:txBody>
+      </p:sp>
+      <p:sp>
+        <p:nvSpPr>
+          <p:cNvPr id="17" name="TextBox 16"/>
+          <p:cNvSpPr txBox="1"/>
+          <p:nvPr/>
+        </p:nvSpPr>
+        <p:spPr>
+          <a:xfrm>
+            <a:off x="594360" y="6099048"/>
+            <a:ext cx="10972800" cy="274320"/>
           </a:xfrm>
           <a:prstGeom prst="rect">
             <a:avLst/>
@@ -11066,91 +10943,85 @@
               </a:defRPr>
             </a:pPr>
             <a:r>
-              <a:t>Marker presence does not prove support</a:t>
-            </a:r>
-          </a:p>
-        </p:txBody>
-      </p:sp>
-      <p:sp>
-        <p:nvSpPr>
-          <p:cNvPr id="23" name="Rounded Rectangle 22"/>
-          <p:cNvSpPr/>
-          <p:nvPr/>
-        </p:nvSpPr>
-        <p:spPr>
-          <a:xfrm>
-            <a:off x="594360" y="5806440"/>
-            <a:ext cx="11000232" cy="438912"/>
-          </a:xfrm>
-          <a:prstGeom prst="roundRect">
-            <a:avLst>
-              <a:gd name="adj" fmla="val 6000"/>
-            </a:avLst>
-          </a:prstGeom>
-          <a:solidFill>
-            <a:srgbClr val="E9F4F0"/>
-          </a:solidFill>
-          <a:ln>
-            <a:noFill/>
-          </a:ln>
-        </p:spPr>
-        <p:style>
-          <a:lnRef idx="1">
-            <a:schemeClr val="accent1"/>
-          </a:lnRef>
-          <a:fillRef idx="3">
-            <a:schemeClr val="accent1"/>
-          </a:fillRef>
-          <a:effectRef idx="0">
-            <a:schemeClr val="accent1"/>
-          </a:effectRef>
-          <a:fontRef idx="minor">
-            <a:schemeClr val="lt1"/>
-          </a:fontRef>
-        </p:style>
-        <p:txBody>
-          <a:bodyPr rtlCol="0" anchor="ctr"/>
-          <a:lstStyle/>
-          <a:p>
-            <a:pPr algn="ctr"/>
-          </a:p>
-        </p:txBody>
-      </p:sp>
-      <p:sp>
-        <p:nvSpPr>
-          <p:cNvPr id="24" name="TextBox 23"/>
-          <p:cNvSpPr txBox="1"/>
-          <p:nvPr/>
-        </p:nvSpPr>
-        <p:spPr>
-          <a:xfrm>
-            <a:off x="813816" y="5925312"/>
-            <a:ext cx="10561320" cy="237744"/>
-          </a:xfrm>
-          <a:prstGeom prst="rect">
-            <a:avLst/>
-          </a:prstGeom>
-          <a:noFill/>
-        </p:spPr>
-        <p:txBody>
-          <a:bodyPr wrap="square" lIns="0" rIns="0" tIns="0" bIns="0">
-            <a:spAutoFit/>
-          </a:bodyPr>
-          <a:lstStyle/>
-          <a:p>
-            <a:pPr>
-              <a:spcAft>
-                <a:spcPts val="500"/>
-              </a:spcAft>
-              <a:defRPr sz="1400" b="1">
-                <a:solidFill>
-                  <a:srgbClr val="087F76"/>
-                </a:solidFill>
-                <a:latin typeface="DejaVu Sans"/>
-              </a:defRPr>
-            </a:pPr>
-            <a:r>
-              <a:t>Next step: validate these choices on reviewed cases and realistic legal questions.</a:t>
+              <a:t>TF-IDF retrieves text. An LLM generates or reviews text. These are different jobs.</a:t>
+            </a:r>
+          </a:p>
+        </p:txBody>
+      </p:sp>
+      <p:sp>
+        <p:nvSpPr>
+          <p:cNvPr id="18" name="TextBox 17"/>
+          <p:cNvSpPr txBox="1"/>
+          <p:nvPr/>
+        </p:nvSpPr>
+        <p:spPr>
+          <a:xfrm>
+            <a:off x="594360" y="6519672"/>
+            <a:ext cx="9966960" cy="182880"/>
+          </a:xfrm>
+          <a:prstGeom prst="rect">
+            <a:avLst/>
+          </a:prstGeom>
+          <a:noFill/>
+        </p:spPr>
+        <p:txBody>
+          <a:bodyPr wrap="square" lIns="0" rIns="0" tIns="0" bIns="0">
+            <a:spAutoFit/>
+          </a:bodyPr>
+          <a:lstStyle/>
+          <a:p>
+            <a:pPr>
+              <a:spcAft>
+                <a:spcPts val="500"/>
+              </a:spcAft>
+              <a:defRPr sz="800" b="0">
+                <a:solidFill>
+                  <a:srgbClr val="62798A"/>
+                </a:solidFill>
+                <a:latin typeface="DejaVu Sans"/>
+              </a:defRPr>
+            </a:pPr>
+            <a:r>
+              <a:t>Design choices in the current demonstration. Threshold selection still requires evaluation on representative queries.</a:t>
+            </a:r>
+          </a:p>
+        </p:txBody>
+      </p:sp>
+      <p:sp>
+        <p:nvSpPr>
+          <p:cNvPr id="19" name="TextBox 18"/>
+          <p:cNvSpPr txBox="1"/>
+          <p:nvPr/>
+        </p:nvSpPr>
+        <p:spPr>
+          <a:xfrm>
+            <a:off x="10835640" y="6446520"/>
+            <a:ext cx="731520" cy="274320"/>
+          </a:xfrm>
+          <a:prstGeom prst="rect">
+            <a:avLst/>
+          </a:prstGeom>
+          <a:noFill/>
+        </p:spPr>
+        <p:txBody>
+          <a:bodyPr wrap="square" lIns="0" rIns="0" tIns="0" bIns="0">
+            <a:spAutoFit/>
+          </a:bodyPr>
+          <a:lstStyle/>
+          <a:p>
+            <a:pPr>
+              <a:spcAft>
+                <a:spcPts val="500"/>
+              </a:spcAft>
+              <a:defRPr sz="1000" b="0">
+                <a:solidFill>
+                  <a:srgbClr val="62798A"/>
+                </a:solidFill>
+                <a:latin typeface="DejaVu Sans"/>
+              </a:defRPr>
+            </a:pPr>
+            <a:r>
+              <a:t>07 / 08</a:t>
             </a:r>
           </a:p>
         </p:txBody>

--- a/presentation/Nafis_Ismam_Docitalis_Final.pptx
+++ b/presentation/Nafis_Ismam_Docitalis_Final.pptx
@@ -929,7 +929,7 @@
           <a:lstStyle/>
           <a:p>
             <a:r>
-              <a:t>About 60 seconds. This slide replaces a challenge story with the actual implementation choices. First, 0.80 was adopted from the reference approach to demonstrate gating, not derived from experiments on this TF-IDF index. It is not 80% confidence, correctness or coverage. Calibrate thresholds with reviewed legal questions and expected sources. Second, lists and dictionaries serve different roles: a list holds multiple records, while each dictionary names fields; source["act_name"] is clearer than remembering positional indexes. The by_id dictionary also supports lookup by source ID and rejects duplicates. Third, sorted JSON plus SHA-256 produces compact fingerprints for comparing knowledge-base content and outputs. Direct equality comparisons are another option. Hashes do not themselves create determinism, establish semantic correctness, or make this an approval/signature system. Fourth, scikit-learn supplies TF-IDF and cosine similarity for a small local retrieval baseline. It needs no embedding-model download or API key. It may miss paraphrases and its score is lexical similarity, not applicability. A dense embedding model or hybrid retrieval could be evaluated later. An LLM is a separate generator/reviewer, not a direct alternative to the TF-IDF retrieval component. The current notebook uses rule-based checks rather than an LLM review layer.</a:t>
+              <a:t>About 60 seconds. Explain these as design decisions in this demonstration, not a fabricated development incident. First: distinguish a metric from its cutoff. Cosine similarity compares TF-IDF vector directions; tau=0.80 decides which scores are accepted. The threshold came from the reference approach as an illustrative starting point, not an experimental optimum for this corpus. It does not mean 80% accuracy, confidence or question coverage. Scores below the gate lead to decomposition when possible, then unresolved queries if parts still fail. Calibrate with reviewed legal questions and expected sources. Second: a consistent-looking draft can still change unexpectedly after rules are edited. The demo compares explicit expected module/citation lists on four synthetic fixtures and uses SHA-256 fingerprints to check 25 repeated full outputs. Dictionaries are converted to sorted-key JSON so key order does not alter fingerprints. Direct equality is also possible; hashes are compact content identifiers, not legal correctness checks. Tests must distinguish an intentional approved update from a regression. Real deployment would require genuinely approved examples, source verification and review. These decisions follow the requested prototype requirements; do not claim an invented production incident or independent empirical threshold selection.</a:t>
             </a:r>
           </a:p>
         </p:txBody>
@@ -10270,7 +10270,7 @@
               </a:defRPr>
             </a:pPr>
             <a:r>
-              <a:t>DESIGN CHOICES · REASONS AND LIMITS</a:t>
+              <a:t>IMPLEMENTATION DECISIONS · CHOICES AND LIMITS</a:t>
             </a:r>
           </a:p>
         </p:txBody>
@@ -10309,7 +10309,7 @@
               </a:defRPr>
             </a:pPr>
             <a:r>
-              <a:t>Why these choices for a small prototype?</a:t>
+              <a:t>Two practical questions behind the implementation</a:t>
             </a:r>
           </a:p>
         </p:txBody>
@@ -10348,7 +10348,7 @@
               </a:defRPr>
             </a:pPr>
             <a:r>
-              <a:t>Simple tools make the behaviour easier to inspect. Each choice has a limit.</a:t>
+              <a:t>What should count as a match—and how can a change be checked?</a:t>
             </a:r>
           </a:p>
         </p:txBody>
@@ -10361,8 +10361,8 @@
         </p:nvSpPr>
         <p:spPr>
           <a:xfrm>
-            <a:off x="594360" y="2734056"/>
-            <a:ext cx="5202936" cy="1426464"/>
+            <a:off x="594360" y="2706624"/>
+            <a:ext cx="11000232" cy="1426464"/>
           </a:xfrm>
           <a:prstGeom prst="roundRect">
             <a:avLst>
@@ -10406,25 +10406,25 @@
         </p:nvSpPr>
         <p:spPr>
           <a:xfrm>
-            <a:off x="832104" y="2944368"/>
-            <a:ext cx="4727448" cy="320040"/>
-          </a:xfrm>
-          <a:prstGeom prst="rect">
-            <a:avLst/>
-          </a:prstGeom>
-          <a:noFill/>
-        </p:spPr>
-        <p:txBody>
-          <a:bodyPr wrap="square" lIns="0" rIns="0" tIns="0" bIns="0">
-            <a:spAutoFit/>
-          </a:bodyPr>
-          <a:lstStyle/>
-          <a:p>
-            <a:pPr>
-              <a:spcAft>
-                <a:spcPts val="500"/>
-              </a:spcAft>
-              <a:defRPr sz="1300" b="1">
+            <a:off x="850392" y="2907792"/>
+            <a:ext cx="10488168" cy="320040"/>
+          </a:xfrm>
+          <a:prstGeom prst="rect">
+            <a:avLst/>
+          </a:prstGeom>
+          <a:noFill/>
+        </p:spPr>
+        <p:txBody>
+          <a:bodyPr wrap="square" lIns="0" rIns="0" tIns="0" bIns="0">
+            <a:spAutoFit/>
+          </a:bodyPr>
+          <a:lstStyle/>
+          <a:p>
+            <a:pPr>
+              <a:spcAft>
+                <a:spcPts val="500"/>
+              </a:spcAft>
+              <a:defRPr sz="1700" b="1">
                 <a:solidFill>
                   <a:srgbClr val="087F76"/>
                 </a:solidFill>
@@ -10432,7 +10432,7 @@
               </a:defRPr>
             </a:pPr>
             <a:r>
-              <a:t>0.80 THRESHOLD</a:t>
+              <a:t>1 · Which search results should be accepted?</a:t>
             </a:r>
           </a:p>
         </p:txBody>
@@ -10445,25 +10445,25 @@
         </p:nvSpPr>
         <p:spPr>
           <a:xfrm>
-            <a:off x="832104" y="3456432"/>
-            <a:ext cx="4727448" cy="594360"/>
-          </a:xfrm>
-          <a:prstGeom prst="rect">
-            <a:avLst/>
-          </a:prstGeom>
-          <a:noFill/>
-        </p:spPr>
-        <p:txBody>
-          <a:bodyPr wrap="square" lIns="0" rIns="0" tIns="0" bIns="0">
-            <a:spAutoFit/>
-          </a:bodyPr>
-          <a:lstStyle/>
-          <a:p>
-            <a:pPr>
-              <a:spcAft>
-                <a:spcPts val="500"/>
-              </a:spcAft>
-              <a:defRPr sz="1400" b="0">
+            <a:off x="850392" y="3502152"/>
+            <a:ext cx="5001768" cy="521207"/>
+          </a:xfrm>
+          <a:prstGeom prst="rect">
+            <a:avLst/>
+          </a:prstGeom>
+          <a:noFill/>
+        </p:spPr>
+        <p:txBody>
+          <a:bodyPr wrap="square" lIns="0" rIns="0" tIns="0" bIns="0">
+            <a:spAutoFit/>
+          </a:bodyPr>
+          <a:lstStyle/>
+          <a:p>
+            <a:pPr>
+              <a:spcAft>
+                <a:spcPts val="500"/>
+              </a:spcAft>
+              <a:defRPr sz="1300" b="0">
                 <a:solidFill>
                   <a:srgbClr val="21394D"/>
                 </a:solidFill>
@@ -10471,15 +10471,15 @@
               </a:defRPr>
             </a:pPr>
             <a:r>
-              <a:t>A starting value from the reference approach.</a:t>
-            </a:r>
-          </a:p>
-          <a:p>
-            <a:pPr>
-              <a:spcAft>
-                <a:spcPts val="500"/>
-              </a:spcAft>
-              <a:defRPr sz="1400" b="0">
+              <a:t>Metric: cosine similarity on TF-IDF vectors.</a:t>
+            </a:r>
+          </a:p>
+          <a:p>
+            <a:pPr>
+              <a:spcAft>
+                <a:spcPts val="500"/>
+              </a:spcAft>
+              <a:defRPr sz="1300" b="0">
                 <a:solidFill>
                   <a:srgbClr val="21394D"/>
                 </a:solidFill>
@@ -10487,21 +10487,76 @@
               </a:defRPr>
             </a:pPr>
             <a:r>
-              <a:t>Not calibrated here; not 80% accuracy.</a:t>
-            </a:r>
-          </a:p>
-        </p:txBody>
-      </p:sp>
-      <p:sp>
-        <p:nvSpPr>
-          <p:cNvPr id="8" name="Rounded Rectangle 7"/>
+              <a:t>Threshold: accept a score of 0.80 or higher.</a:t>
+            </a:r>
+          </a:p>
+        </p:txBody>
+      </p:sp>
+      <p:sp>
+        <p:nvSpPr>
+          <p:cNvPr id="8" name="TextBox 7"/>
+          <p:cNvSpPr txBox="1"/>
+          <p:nvPr/>
+        </p:nvSpPr>
+        <p:spPr>
+          <a:xfrm>
+            <a:off x="6400800" y="3502152"/>
+            <a:ext cx="4937760" cy="521207"/>
+          </a:xfrm>
+          <a:prstGeom prst="rect">
+            <a:avLst/>
+          </a:prstGeom>
+          <a:noFill/>
+        </p:spPr>
+        <p:txBody>
+          <a:bodyPr wrap="square" lIns="0" rIns="0" tIns="0" bIns="0">
+            <a:spAutoFit/>
+          </a:bodyPr>
+          <a:lstStyle/>
+          <a:p>
+            <a:pPr>
+              <a:spcAft>
+                <a:spcPts val="500"/>
+              </a:spcAft>
+              <a:defRPr sz="1300" b="0">
+                <a:solidFill>
+                  <a:srgbClr val="21394D"/>
+                </a:solidFill>
+                <a:latin typeface="DejaVu Sans"/>
+              </a:defRPr>
+            </a:pPr>
+            <a:r>
+              <a:t>Why: a starting value from the reference approach.</a:t>
+            </a:r>
+          </a:p>
+          <a:p>
+            <a:pPr>
+              <a:spcAft>
+                <a:spcPts val="500"/>
+              </a:spcAft>
+              <a:defRPr sz="1300" b="0">
+                <a:solidFill>
+                  <a:srgbClr val="21394D"/>
+                </a:solidFill>
+                <a:latin typeface="DejaVu Sans"/>
+              </a:defRPr>
+            </a:pPr>
+            <a:r>
+              <a:t>Meaning: a similarity gate, not 80% accuracy.</a:t>
+            </a:r>
+          </a:p>
+        </p:txBody>
+      </p:sp>
+      <p:sp>
+        <p:nvSpPr>
+          <p:cNvPr id="9" name="Rounded Rectangle 8"/>
           <p:cNvSpPr/>
           <p:nvPr/>
         </p:nvSpPr>
         <p:spPr>
           <a:xfrm>
-            <a:off x="6391656" y="2734056"/>
-            <a:ext cx="5202936" cy="1426464"/>
+            <a:off x="594360" y="4389120"/>
+            <a:ext cx="11000232" cy="1426464"/>
           </a:xfrm>
           <a:prstGeom prst="roundRect">
             <a:avLst>
@@ -10539,31 +10594,31 @@
       </p:sp>
       <p:sp>
         <p:nvSpPr>
-          <p:cNvPr id="9" name="TextBox 8"/>
-          <p:cNvSpPr txBox="1"/>
-          <p:nvPr/>
-        </p:nvSpPr>
-        <p:spPr>
-          <a:xfrm>
-            <a:off x="6629400" y="2944368"/>
-            <a:ext cx="4727448" cy="320040"/>
-          </a:xfrm>
-          <a:prstGeom prst="rect">
-            <a:avLst/>
-          </a:prstGeom>
-          <a:noFill/>
-        </p:spPr>
-        <p:txBody>
-          <a:bodyPr wrap="square" lIns="0" rIns="0" tIns="0" bIns="0">
-            <a:spAutoFit/>
-          </a:bodyPr>
-          <a:lstStyle/>
-          <a:p>
-            <a:pPr>
-              <a:spcAft>
-                <a:spcPts val="500"/>
-              </a:spcAft>
-              <a:defRPr sz="1300" b="1">
+          <p:cNvPr id="10" name="TextBox 9"/>
+          <p:cNvSpPr txBox="1"/>
+          <p:nvPr/>
+        </p:nvSpPr>
+        <p:spPr>
+          <a:xfrm>
+            <a:off x="850392" y="4590288"/>
+            <a:ext cx="10488168" cy="320040"/>
+          </a:xfrm>
+          <a:prstGeom prst="rect">
+            <a:avLst/>
+          </a:prstGeom>
+          <a:noFill/>
+        </p:spPr>
+        <p:txBody>
+          <a:bodyPr wrap="square" lIns="0" rIns="0" tIns="0" bIns="0">
+            <a:spAutoFit/>
+          </a:bodyPr>
+          <a:lstStyle/>
+          <a:p>
+            <a:pPr>
+              <a:spcAft>
+                <a:spcPts val="500"/>
+              </a:spcAft>
+              <a:defRPr sz="1700" b="1">
                 <a:solidFill>
                   <a:srgbClr val="087F76"/>
                 </a:solidFill>
@@ -10571,38 +10626,38 @@
               </a:defRPr>
             </a:pPr>
             <a:r>
-              <a:t>DICTIONARIES + LISTS</a:t>
-            </a:r>
-          </a:p>
-        </p:txBody>
-      </p:sp>
-      <p:sp>
-        <p:nvSpPr>
-          <p:cNvPr id="10" name="TextBox 9"/>
-          <p:cNvSpPr txBox="1"/>
-          <p:nvPr/>
-        </p:nvSpPr>
-        <p:spPr>
-          <a:xfrm>
-            <a:off x="6629400" y="3456432"/>
-            <a:ext cx="4727448" cy="594360"/>
-          </a:xfrm>
-          <a:prstGeom prst="rect">
-            <a:avLst/>
-          </a:prstGeom>
-          <a:noFill/>
-        </p:spPr>
-        <p:txBody>
-          <a:bodyPr wrap="square" lIns="0" rIns="0" tIns="0" bIns="0">
-            <a:spAutoFit/>
-          </a:bodyPr>
-          <a:lstStyle/>
-          <a:p>
-            <a:pPr>
-              <a:spcAft>
-                <a:spcPts val="500"/>
-              </a:spcAft>
-              <a:defRPr sz="1400" b="0">
+              <a:t>2 · How can an unintended output change be detected?</a:t>
+            </a:r>
+          </a:p>
+        </p:txBody>
+      </p:sp>
+      <p:sp>
+        <p:nvSpPr>
+          <p:cNvPr id="11" name="TextBox 10"/>
+          <p:cNvSpPr txBox="1"/>
+          <p:nvPr/>
+        </p:nvSpPr>
+        <p:spPr>
+          <a:xfrm>
+            <a:off x="850392" y="5184648"/>
+            <a:ext cx="5001768" cy="521207"/>
+          </a:xfrm>
+          <a:prstGeom prst="rect">
+            <a:avLst/>
+          </a:prstGeom>
+          <a:noFill/>
+        </p:spPr>
+        <p:txBody>
+          <a:bodyPr wrap="square" lIns="0" rIns="0" tIns="0" bIns="0">
+            <a:spAutoFit/>
+          </a:bodyPr>
+          <a:lstStyle/>
+          <a:p>
+            <a:pPr>
+              <a:spcAft>
+                <a:spcPts val="500"/>
+              </a:spcAft>
+              <a:defRPr sz="1300" b="0">
                 <a:solidFill>
                   <a:srgbClr val="21394D"/>
                 </a:solidFill>
@@ -10610,15 +10665,15 @@
               </a:defRPr>
             </a:pPr>
             <a:r>
-              <a:t>Lists hold the records; dictionaries name fields.</a:t>
-            </a:r>
-          </a:p>
-          <a:p>
-            <a:pPr>
-              <a:spcAft>
-                <a:spcPts val="500"/>
-              </a:spcAft>
-              <a:defRPr sz="1400" b="0">
+              <a:t>Choice: fixed expected modules and citations;</a:t>
+            </a:r>
+          </a:p>
+          <a:p>
+            <a:pPr>
+              <a:spcAft>
+                <a:spcPts val="500"/>
+              </a:spcAft>
+              <a:defRPr sz="1300" b="0">
                 <a:solidFill>
                   <a:srgbClr val="21394D"/>
                 </a:solidFill>
@@ -10626,53 +10681,8 @@
               </a:defRPr>
             </a:pPr>
             <a:r>
-              <a:t>Read source["act_name"], not source[1].</a:t>
-            </a:r>
-          </a:p>
-        </p:txBody>
-      </p:sp>
-      <p:sp>
-        <p:nvSpPr>
-          <p:cNvPr id="11" name="Rounded Rectangle 10"/>
-          <p:cNvSpPr/>
-          <p:nvPr/>
-        </p:nvSpPr>
-        <p:spPr>
-          <a:xfrm>
-            <a:off x="594360" y="4398264"/>
-            <a:ext cx="5202936" cy="1426464"/>
-          </a:xfrm>
-          <a:prstGeom prst="roundRect">
-            <a:avLst>
-              <a:gd name="adj" fmla="val 6000"/>
-            </a:avLst>
-          </a:prstGeom>
-          <a:solidFill>
-            <a:srgbClr val="F0F4F6"/>
-          </a:solidFill>
-          <a:ln>
-            <a:noFill/>
-          </a:ln>
-        </p:spPr>
-        <p:style>
-          <a:lnRef idx="1">
-            <a:schemeClr val="accent1"/>
-          </a:lnRef>
-          <a:fillRef idx="3">
-            <a:schemeClr val="accent1"/>
-          </a:fillRef>
-          <a:effectRef idx="0">
-            <a:schemeClr val="accent1"/>
-          </a:effectRef>
-          <a:fontRef idx="minor">
-            <a:schemeClr val="lt1"/>
-          </a:fontRef>
-        </p:style>
-        <p:txBody>
-          <a:bodyPr rtlCol="0" anchor="ctr"/>
-          <a:lstStyle/>
-          <a:p>
-            <a:pPr algn="ctr"/>
+              <a:t>SHA-256 fingerprints for repeated outputs.</a:t>
+            </a:r>
           </a:p>
         </p:txBody>
       </p:sp>
@@ -10684,33 +10694,49 @@
         </p:nvSpPr>
         <p:spPr>
           <a:xfrm>
-            <a:off x="832104" y="4608576"/>
-            <a:ext cx="4727448" cy="320040"/>
-          </a:xfrm>
-          <a:prstGeom prst="rect">
-            <a:avLst/>
-          </a:prstGeom>
-          <a:noFill/>
-        </p:spPr>
-        <p:txBody>
-          <a:bodyPr wrap="square" lIns="0" rIns="0" tIns="0" bIns="0">
-            <a:spAutoFit/>
-          </a:bodyPr>
-          <a:lstStyle/>
-          <a:p>
-            <a:pPr>
-              <a:spcAft>
-                <a:spcPts val="500"/>
-              </a:spcAft>
-              <a:defRPr sz="1300" b="1">
-                <a:solidFill>
-                  <a:srgbClr val="087F76"/>
-                </a:solidFill>
-                <a:latin typeface="DejaVu Sans"/>
-              </a:defRPr>
-            </a:pPr>
-            <a:r>
-              <a:t>SHA-256 FINGERPRINTS</a:t>
+            <a:off x="6400800" y="5184648"/>
+            <a:ext cx="4937760" cy="521207"/>
+          </a:xfrm>
+          <a:prstGeom prst="rect">
+            <a:avLst/>
+          </a:prstGeom>
+          <a:noFill/>
+        </p:spPr>
+        <p:txBody>
+          <a:bodyPr wrap="square" lIns="0" rIns="0" tIns="0" bIns="0">
+            <a:spAutoFit/>
+          </a:bodyPr>
+          <a:lstStyle/>
+          <a:p>
+            <a:pPr>
+              <a:spcAft>
+                <a:spcPts val="500"/>
+              </a:spcAft>
+              <a:defRPr sz="1300" b="0">
+                <a:solidFill>
+                  <a:srgbClr val="21394D"/>
+                </a:solidFill>
+                <a:latin typeface="DejaVu Sans"/>
+              </a:defRPr>
+            </a:pPr>
+            <a:r>
+              <a:t>Why: do not rely on rereading each draft alone.</a:t>
+            </a:r>
+          </a:p>
+          <a:p>
+            <a:pPr>
+              <a:spcAft>
+                <a:spcPts val="500"/>
+              </a:spcAft>
+              <a:defRPr sz="1300" b="0">
+                <a:solidFill>
+                  <a:srgbClr val="21394D"/>
+                </a:solidFill>
+                <a:latin typeface="DejaVu Sans"/>
+              </a:defRPr>
+            </a:pPr>
+            <a:r>
+              <a:t>Meaning: detect differences, not prove legal correctness.</a:t>
             </a:r>
           </a:p>
         </p:txBody>
@@ -10723,201 +10749,7 @@
         </p:nvSpPr>
         <p:spPr>
           <a:xfrm>
-            <a:off x="832104" y="5120640"/>
-            <a:ext cx="4727448" cy="594360"/>
-          </a:xfrm>
-          <a:prstGeom prst="rect">
-            <a:avLst/>
-          </a:prstGeom>
-          <a:noFill/>
-        </p:spPr>
-        <p:txBody>
-          <a:bodyPr wrap="square" lIns="0" rIns="0" tIns="0" bIns="0">
-            <a:spAutoFit/>
-          </a:bodyPr>
-          <a:lstStyle/>
-          <a:p>
-            <a:pPr>
-              <a:spcAft>
-                <a:spcPts val="500"/>
-              </a:spcAft>
-              <a:defRPr sz="1400" b="0">
-                <a:solidFill>
-                  <a:srgbClr val="21394D"/>
-                </a:solidFill>
-                <a:latin typeface="DejaVu Sans"/>
-              </a:defRPr>
-            </a:pPr>
-            <a:r>
-              <a:t>Compare rule and output content compactly.</a:t>
-            </a:r>
-          </a:p>
-          <a:p>
-            <a:pPr>
-              <a:spcAft>
-                <a:spcPts val="500"/>
-              </a:spcAft>
-              <a:defRPr sz="1400" b="0">
-                <a:solidFill>
-                  <a:srgbClr val="21394D"/>
-                </a:solidFill>
-                <a:latin typeface="DejaVu Sans"/>
-              </a:defRPr>
-            </a:pPr>
-            <a:r>
-              <a:t>They do not prove legal correctness.</a:t>
-            </a:r>
-          </a:p>
-        </p:txBody>
-      </p:sp>
-      <p:sp>
-        <p:nvSpPr>
-          <p:cNvPr id="14" name="Rounded Rectangle 13"/>
-          <p:cNvSpPr/>
-          <p:nvPr/>
-        </p:nvSpPr>
-        <p:spPr>
-          <a:xfrm>
-            <a:off x="6391656" y="4398264"/>
-            <a:ext cx="5202936" cy="1426464"/>
-          </a:xfrm>
-          <a:prstGeom prst="roundRect">
-            <a:avLst>
-              <a:gd name="adj" fmla="val 6000"/>
-            </a:avLst>
-          </a:prstGeom>
-          <a:solidFill>
-            <a:srgbClr val="E9F4F0"/>
-          </a:solidFill>
-          <a:ln>
-            <a:noFill/>
-          </a:ln>
-        </p:spPr>
-        <p:style>
-          <a:lnRef idx="1">
-            <a:schemeClr val="accent1"/>
-          </a:lnRef>
-          <a:fillRef idx="3">
-            <a:schemeClr val="accent1"/>
-          </a:fillRef>
-          <a:effectRef idx="0">
-            <a:schemeClr val="accent1"/>
-          </a:effectRef>
-          <a:fontRef idx="minor">
-            <a:schemeClr val="lt1"/>
-          </a:fontRef>
-        </p:style>
-        <p:txBody>
-          <a:bodyPr rtlCol="0" anchor="ctr"/>
-          <a:lstStyle/>
-          <a:p>
-            <a:pPr algn="ctr"/>
-          </a:p>
-        </p:txBody>
-      </p:sp>
-      <p:sp>
-        <p:nvSpPr>
-          <p:cNvPr id="15" name="TextBox 14"/>
-          <p:cNvSpPr txBox="1"/>
-          <p:nvPr/>
-        </p:nvSpPr>
-        <p:spPr>
-          <a:xfrm>
-            <a:off x="6629400" y="4608576"/>
-            <a:ext cx="4727448" cy="320040"/>
-          </a:xfrm>
-          <a:prstGeom prst="rect">
-            <a:avLst/>
-          </a:prstGeom>
-          <a:noFill/>
-        </p:spPr>
-        <p:txBody>
-          <a:bodyPr wrap="square" lIns="0" rIns="0" tIns="0" bIns="0">
-            <a:spAutoFit/>
-          </a:bodyPr>
-          <a:lstStyle/>
-          <a:p>
-            <a:pPr>
-              <a:spcAft>
-                <a:spcPts val="500"/>
-              </a:spcAft>
-              <a:defRPr sz="1300" b="1">
-                <a:solidFill>
-                  <a:srgbClr val="087F76"/>
-                </a:solidFill>
-                <a:latin typeface="DejaVu Sans"/>
-              </a:defRPr>
-            </a:pPr>
-            <a:r>
-              <a:t>TF-IDF WITH SCIKIT-LEARN</a:t>
-            </a:r>
-          </a:p>
-        </p:txBody>
-      </p:sp>
-      <p:sp>
-        <p:nvSpPr>
-          <p:cNvPr id="16" name="TextBox 15"/>
-          <p:cNvSpPr txBox="1"/>
-          <p:nvPr/>
-        </p:nvSpPr>
-        <p:spPr>
-          <a:xfrm>
-            <a:off x="6629400" y="5120640"/>
-            <a:ext cx="4727448" cy="594360"/>
-          </a:xfrm>
-          <a:prstGeom prst="rect">
-            <a:avLst/>
-          </a:prstGeom>
-          <a:noFill/>
-        </p:spPr>
-        <p:txBody>
-          <a:bodyPr wrap="square" lIns="0" rIns="0" tIns="0" bIns="0">
-            <a:spAutoFit/>
-          </a:bodyPr>
-          <a:lstStyle/>
-          <a:p>
-            <a:pPr>
-              <a:spcAft>
-                <a:spcPts val="500"/>
-              </a:spcAft>
-              <a:defRPr sz="1400" b="0">
-                <a:solidFill>
-                  <a:srgbClr val="21394D"/>
-                </a:solidFill>
-                <a:latin typeface="DejaVu Sans"/>
-              </a:defRPr>
-            </a:pPr>
-            <a:r>
-              <a:t>Lightweight word-based search; no model download.</a:t>
-            </a:r>
-          </a:p>
-          <a:p>
-            <a:pPr>
-              <a:spcAft>
-                <a:spcPts val="500"/>
-              </a:spcAft>
-              <a:defRPr sz="1400" b="0">
-                <a:solidFill>
-                  <a:srgbClr val="21394D"/>
-                </a:solidFill>
-                <a:latin typeface="DejaVu Sans"/>
-              </a:defRPr>
-            </a:pPr>
-            <a:r>
-              <a:t>Simple to inspect, but weak on some paraphrases.</a:t>
-            </a:r>
-          </a:p>
-        </p:txBody>
-      </p:sp>
-      <p:sp>
-        <p:nvSpPr>
-          <p:cNvPr id="17" name="TextBox 16"/>
-          <p:cNvSpPr txBox="1"/>
-          <p:nvPr/>
-        </p:nvSpPr>
-        <p:spPr>
-          <a:xfrm>
-            <a:off x="594360" y="6099048"/>
+            <a:off x="594360" y="6089904"/>
             <a:ext cx="10972800" cy="274320"/>
           </a:xfrm>
           <a:prstGeom prst="rect">
@@ -10943,14 +10775,14 @@
               </a:defRPr>
             </a:pPr>
             <a:r>
-              <a:t>TF-IDF retrieves text. An LLM generates or reviews text. These are different jobs.</a:t>
-            </a:r>
-          </a:p>
-        </p:txBody>
-      </p:sp>
-      <p:sp>
-        <p:nvSpPr>
-          <p:cNvPr id="18" name="TextBox 17"/>
+              <a:t>Next: calibrate retrieval on realistic questions and validate expectations with lawyers.</a:t>
+            </a:r>
+          </a:p>
+        </p:txBody>
+      </p:sp>
+      <p:sp>
+        <p:nvSpPr>
+          <p:cNvPr id="14" name="TextBox 13"/>
           <p:cNvSpPr txBox="1"/>
           <p:nvPr/>
         </p:nvSpPr>
@@ -10982,14 +10814,14 @@
               </a:defRPr>
             </a:pPr>
             <a:r>
-              <a:t>Design choices in the current demonstration. Threshold selection still requires evaluation on representative queries.</a:t>
-            </a:r>
-          </a:p>
-        </p:txBody>
-      </p:sp>
-      <p:sp>
-        <p:nvSpPr>
-          <p:cNvPr id="19" name="TextBox 18"/>
+              <a:t>Design rationale for this demonstration. 0.80 is uncalibrated; reference cases and updates are synthetic.</a:t>
+            </a:r>
+          </a:p>
+        </p:txBody>
+      </p:sp>
+      <p:sp>
+        <p:nvSpPr>
+          <p:cNvPr id="15" name="TextBox 14"/>
           <p:cNvSpPr txBox="1"/>
           <p:nvPr/>
         </p:nvSpPr>

--- a/presentation/Nafis_Ismam_Docitalis_Final.pptx
+++ b/presentation/Nafis_Ismam_Docitalis_Final.pptx
@@ -11,7 +11,6 @@
     <p:sldId id="259" r:id="rId11"/>
     <p:sldId id="260" r:id="rId12"/>
     <p:sldId id="261" r:id="rId13"/>
-    <p:sldId id="262" r:id="rId14"/>
     <p:sldId id="263" r:id="rId15"/>
   </p:sldIdLst>
   <p:sldSz cx="12191695" cy="6858000" type="screen4x3"/>
@@ -860,76 +859,6 @@
           <a:p>
             <a:r>
               <a:t>About 50 seconds. Reproducibility compares document and full-output fingerprints across 25 runs. Reference parity compares four synthetic cases against independently written module sequences, citation lists and actual text markers. The conflict test expects an exception when both teaching routes are requested, and checks consistent messages. The update test begins with no notes, adds a simulated C167 note and expects M3 and M5 warnings. Additional checks remove C54, add unknown C999 and exercise retrieval paths. All four groups pass. These checks were specified for this role-focused demonstration, not taken as an evaluation suite from the research paper. Twenty-five is a demonstration count, not a statistical guarantee. Synthetic fixtures are not genuinely lawyer-approved historical cases. Passing checks software expectations, not legal correctness.</a:t>
-            </a:r>
-          </a:p>
-        </p:txBody>
-      </p:sp>
-      <p:sp>
-        <p:nvSpPr>
-          <p:cNvPr id="4" name="Slide Number Placeholder 3"/>
-          <p:cNvSpPr>
-            <a:spLocks noGrp="1"/>
-          </p:cNvSpPr>
-          <p:nvPr>
-            <p:ph type="sldNum" idx="5" sz="quarter"/>
-          </p:nvPr>
-        </p:nvSpPr>
-        <p:spPr/>
-      </p:sp>
-    </p:spTree>
-  </p:cSld>
-  <p:clrMapOvr>
-    <a:masterClrMapping/>
-  </p:clrMapOvr>
-</p:notes>
-</file>
-
-<file path=ppt/notesSlides/notesSlide7.xml><?xml version="1.0" encoding="utf-8"?>
-<p:notes xmlns:a="http://schemas.openxmlformats.org/drawingml/2006/main" xmlns:p="http://schemas.openxmlformats.org/presentationml/2006/main" xmlns:r="http://schemas.openxmlformats.org/officeDocument/2006/relationships">
-  <p:cSld>
-    <p:spTree>
-      <p:nvGrpSpPr>
-        <p:cNvPr id="1" name=""/>
-        <p:cNvGrpSpPr/>
-        <p:nvPr/>
-      </p:nvGrpSpPr>
-      <p:grpSpPr>
-        <a:xfrm>
-          <a:off x="0" y="0"/>
-          <a:ext cx="0" cy="0"/>
-          <a:chOff x="0" y="0"/>
-          <a:chExt cx="0" cy="0"/>
-        </a:xfrm>
-      </p:grpSpPr>
-      <p:sp>
-        <p:nvSpPr>
-          <p:cNvPr id="2" name="Slide Image Placeholder 1"/>
-          <p:cNvSpPr>
-            <a:spLocks noGrp="1"/>
-          </p:cNvSpPr>
-          <p:nvPr>
-            <p:ph type="sldImg" idx="2"/>
-          </p:nvPr>
-        </p:nvSpPr>
-        <p:spPr/>
-      </p:sp>
-      <p:sp>
-        <p:nvSpPr>
-          <p:cNvPr id="3" name="Notes Placeholder 2"/>
-          <p:cNvSpPr>
-            <a:spLocks noGrp="1"/>
-          </p:cNvSpPr>
-          <p:nvPr>
-            <p:ph type="body" idx="3" sz="quarter"/>
-          </p:nvPr>
-        </p:nvSpPr>
-        <p:spPr/>
-        <p:txBody>
-          <a:bodyPr/>
-          <a:lstStyle/>
-          <a:p>
-            <a:r>
-              <a:t>About 60 seconds. Explain these as design decisions in this demonstration, not a fabricated development incident. First: distinguish a metric from its cutoff. Cosine similarity compares TF-IDF vector directions; tau=0.80 decides which scores are accepted. The threshold came from the reference approach as an illustrative starting point, not an experimental optimum for this corpus. It does not mean 80% accuracy, confidence or question coverage. Scores below the gate lead to decomposition when possible, then unresolved queries if parts still fail. Calibrate with reviewed legal questions and expected sources. Second: a consistent-looking draft can still change unexpectedly after rules are edited. The demo compares explicit expected module/citation lists on four synthetic fixtures and uses SHA-256 fingerprints to check 25 repeated full outputs. Dictionaries are converted to sorted-key JSON so key order does not alter fingerprints. Direct equality is also possible; hashes are compact content identifiers, not legal correctness checks. Tests must distinguish an intentional approved update from a regression. Real deployment would require genuinely approved examples, source verification and review. These decisions follow the requested prototype requirements; do not claim an invented production incident or independent empirical threshold selection.</a:t>
             </a:r>
           </a:p>
         </p:txBody>
@@ -4125,7 +4054,7 @@
               </a:defRPr>
             </a:pPr>
             <a:r>
-              <a:t>01 / 08</a:t>
+              <a:t>01 / 07</a:t>
             </a:r>
           </a:p>
         </p:txBody>
@@ -4880,7 +4809,7 @@
               </a:defRPr>
             </a:pPr>
             <a:r>
-              <a:t>02 / 08</a:t>
+              <a:t>02 / 07</a:t>
             </a:r>
           </a:p>
         </p:txBody>
@@ -5772,7 +5701,7 @@
               </a:defRPr>
             </a:pPr>
             <a:r>
-              <a:t>03 / 08</a:t>
+              <a:t>03 / 07</a:t>
             </a:r>
           </a:p>
         </p:txBody>
@@ -6651,7 +6580,7 @@
               </a:defRPr>
             </a:pPr>
             <a:r>
-              <a:t>04 / 08</a:t>
+              <a:t>04 / 07</a:t>
             </a:r>
           </a:p>
         </p:txBody>
@@ -8310,7 +8239,7 @@
               </a:defRPr>
             </a:pPr>
             <a:r>
-              <a:t>05 / 08</a:t>
+              <a:t>05 / 07</a:t>
             </a:r>
           </a:p>
         </p:txBody>
@@ -9366,7 +9295,7 @@
               </a:defRPr>
             </a:pPr>
             <a:r>
-              <a:t>06 / 08</a:t>
+              <a:t>06 / 07</a:t>
             </a:r>
           </a:p>
         </p:txBody>
@@ -10206,654 +10135,6 @@
             </a:pPr>
             <a:r>
               <a:t>All four groups PASS. Extra assertions check missing/unknown citations and retrieval paths.</a:t>
-            </a:r>
-          </a:p>
-        </p:txBody>
-      </p:sp>
-    </p:spTree>
-  </p:cSld>
-  <p:clrMapOvr>
-    <a:masterClrMapping/>
-  </p:clrMapOvr>
-</p:sld>
-</file>
-
-<file path=ppt/slides/slide7.xml><?xml version="1.0" encoding="utf-8"?>
-<p:sld xmlns:a="http://schemas.openxmlformats.org/drawingml/2006/main" xmlns:p="http://schemas.openxmlformats.org/presentationml/2006/main" xmlns:r="http://schemas.openxmlformats.org/officeDocument/2006/relationships">
-  <p:cSld>
-    <p:bg>
-      <p:bgPr>
-        <a:solidFill>
-          <a:srgbClr val="FFFFFF"/>
-        </a:solidFill>
-        <a:effectLst/>
-      </p:bgPr>
-    </p:bg>
-    <p:spTree>
-      <p:nvGrpSpPr>
-        <p:cNvPr id="1" name=""/>
-        <p:cNvGrpSpPr/>
-        <p:nvPr/>
-      </p:nvGrpSpPr>
-      <p:grpSpPr/>
-      <p:sp>
-        <p:nvSpPr>
-          <p:cNvPr id="2" name="TextBox 1"/>
-          <p:cNvSpPr txBox="1"/>
-          <p:nvPr/>
-        </p:nvSpPr>
-        <p:spPr>
-          <a:xfrm>
-            <a:off x="594360" y="365760"/>
-            <a:ext cx="10058400" cy="274320"/>
-          </a:xfrm>
-          <a:prstGeom prst="rect">
-            <a:avLst/>
-          </a:prstGeom>
-          <a:noFill/>
-        </p:spPr>
-        <p:txBody>
-          <a:bodyPr wrap="square" lIns="0" rIns="0" tIns="0" bIns="0">
-            <a:spAutoFit/>
-          </a:bodyPr>
-          <a:lstStyle/>
-          <a:p>
-            <a:pPr>
-              <a:spcAft>
-                <a:spcPts val="500"/>
-              </a:spcAft>
-              <a:defRPr sz="1100" b="1">
-                <a:solidFill>
-                  <a:srgbClr val="087F76"/>
-                </a:solidFill>
-                <a:latin typeface="DejaVu Sans"/>
-              </a:defRPr>
-            </a:pPr>
-            <a:r>
-              <a:t>IMPLEMENTATION DECISIONS · CHOICES AND LIMITS</a:t>
-            </a:r>
-          </a:p>
-        </p:txBody>
-      </p:sp>
-      <p:sp>
-        <p:nvSpPr>
-          <p:cNvPr id="3" name="TextBox 2"/>
-          <p:cNvSpPr txBox="1"/>
-          <p:nvPr/>
-        </p:nvSpPr>
-        <p:spPr>
-          <a:xfrm>
-            <a:off x="594360" y="950976"/>
-            <a:ext cx="10972800" cy="960120"/>
-          </a:xfrm>
-          <a:prstGeom prst="rect">
-            <a:avLst/>
-          </a:prstGeom>
-          <a:noFill/>
-        </p:spPr>
-        <p:txBody>
-          <a:bodyPr wrap="square" lIns="0" rIns="0" tIns="0" bIns="0">
-            <a:spAutoFit/>
-          </a:bodyPr>
-          <a:lstStyle/>
-          <a:p>
-            <a:pPr>
-              <a:spcAft>
-                <a:spcPts val="500"/>
-              </a:spcAft>
-              <a:defRPr sz="3000" b="1">
-                <a:solidFill>
-                  <a:srgbClr val="142C43"/>
-                </a:solidFill>
-                <a:latin typeface="DejaVu Sans"/>
-              </a:defRPr>
-            </a:pPr>
-            <a:r>
-              <a:t>Two practical questions behind the implementation</a:t>
-            </a:r>
-          </a:p>
-        </p:txBody>
-      </p:sp>
-      <p:sp>
-        <p:nvSpPr>
-          <p:cNvPr id="4" name="TextBox 3"/>
-          <p:cNvSpPr txBox="1"/>
-          <p:nvPr/>
-        </p:nvSpPr>
-        <p:spPr>
-          <a:xfrm>
-            <a:off x="594360" y="1938528"/>
-            <a:ext cx="10972800" cy="548640"/>
-          </a:xfrm>
-          <a:prstGeom prst="rect">
-            <a:avLst/>
-          </a:prstGeom>
-          <a:noFill/>
-        </p:spPr>
-        <p:txBody>
-          <a:bodyPr wrap="square" lIns="0" rIns="0" tIns="0" bIns="0">
-            <a:spAutoFit/>
-          </a:bodyPr>
-          <a:lstStyle/>
-          <a:p>
-            <a:pPr>
-              <a:spcAft>
-                <a:spcPts val="500"/>
-              </a:spcAft>
-              <a:defRPr sz="1500" b="0">
-                <a:solidFill>
-                  <a:srgbClr val="62798A"/>
-                </a:solidFill>
-                <a:latin typeface="DejaVu Sans"/>
-              </a:defRPr>
-            </a:pPr>
-            <a:r>
-              <a:t>What should count as a match—and how can a change be checked?</a:t>
-            </a:r>
-          </a:p>
-        </p:txBody>
-      </p:sp>
-      <p:sp>
-        <p:nvSpPr>
-          <p:cNvPr id="5" name="Rounded Rectangle 4"/>
-          <p:cNvSpPr/>
-          <p:nvPr/>
-        </p:nvSpPr>
-        <p:spPr>
-          <a:xfrm>
-            <a:off x="594360" y="2706624"/>
-            <a:ext cx="11000232" cy="1426464"/>
-          </a:xfrm>
-          <a:prstGeom prst="roundRect">
-            <a:avLst>
-              <a:gd name="adj" fmla="val 6000"/>
-            </a:avLst>
-          </a:prstGeom>
-          <a:solidFill>
-            <a:srgbClr val="F0F4F6"/>
-          </a:solidFill>
-          <a:ln>
-            <a:noFill/>
-          </a:ln>
-        </p:spPr>
-        <p:style>
-          <a:lnRef idx="1">
-            <a:schemeClr val="accent1"/>
-          </a:lnRef>
-          <a:fillRef idx="3">
-            <a:schemeClr val="accent1"/>
-          </a:fillRef>
-          <a:effectRef idx="0">
-            <a:schemeClr val="accent1"/>
-          </a:effectRef>
-          <a:fontRef idx="minor">
-            <a:schemeClr val="lt1"/>
-          </a:fontRef>
-        </p:style>
-        <p:txBody>
-          <a:bodyPr rtlCol="0" anchor="ctr"/>
-          <a:lstStyle/>
-          <a:p>
-            <a:pPr algn="ctr"/>
-          </a:p>
-        </p:txBody>
-      </p:sp>
-      <p:sp>
-        <p:nvSpPr>
-          <p:cNvPr id="6" name="TextBox 5"/>
-          <p:cNvSpPr txBox="1"/>
-          <p:nvPr/>
-        </p:nvSpPr>
-        <p:spPr>
-          <a:xfrm>
-            <a:off x="850392" y="2907792"/>
-            <a:ext cx="10488168" cy="320040"/>
-          </a:xfrm>
-          <a:prstGeom prst="rect">
-            <a:avLst/>
-          </a:prstGeom>
-          <a:noFill/>
-        </p:spPr>
-        <p:txBody>
-          <a:bodyPr wrap="square" lIns="0" rIns="0" tIns="0" bIns="0">
-            <a:spAutoFit/>
-          </a:bodyPr>
-          <a:lstStyle/>
-          <a:p>
-            <a:pPr>
-              <a:spcAft>
-                <a:spcPts val="500"/>
-              </a:spcAft>
-              <a:defRPr sz="1700" b="1">
-                <a:solidFill>
-                  <a:srgbClr val="087F76"/>
-                </a:solidFill>
-                <a:latin typeface="DejaVu Sans"/>
-              </a:defRPr>
-            </a:pPr>
-            <a:r>
-              <a:t>1 · Which search results should be accepted?</a:t>
-            </a:r>
-          </a:p>
-        </p:txBody>
-      </p:sp>
-      <p:sp>
-        <p:nvSpPr>
-          <p:cNvPr id="7" name="TextBox 6"/>
-          <p:cNvSpPr txBox="1"/>
-          <p:nvPr/>
-        </p:nvSpPr>
-        <p:spPr>
-          <a:xfrm>
-            <a:off x="850392" y="3502152"/>
-            <a:ext cx="5001768" cy="521207"/>
-          </a:xfrm>
-          <a:prstGeom prst="rect">
-            <a:avLst/>
-          </a:prstGeom>
-          <a:noFill/>
-        </p:spPr>
-        <p:txBody>
-          <a:bodyPr wrap="square" lIns="0" rIns="0" tIns="0" bIns="0">
-            <a:spAutoFit/>
-          </a:bodyPr>
-          <a:lstStyle/>
-          <a:p>
-            <a:pPr>
-              <a:spcAft>
-                <a:spcPts val="500"/>
-              </a:spcAft>
-              <a:defRPr sz="1300" b="0">
-                <a:solidFill>
-                  <a:srgbClr val="21394D"/>
-                </a:solidFill>
-                <a:latin typeface="DejaVu Sans"/>
-              </a:defRPr>
-            </a:pPr>
-            <a:r>
-              <a:t>Metric: cosine similarity on TF-IDF vectors.</a:t>
-            </a:r>
-          </a:p>
-          <a:p>
-            <a:pPr>
-              <a:spcAft>
-                <a:spcPts val="500"/>
-              </a:spcAft>
-              <a:defRPr sz="1300" b="0">
-                <a:solidFill>
-                  <a:srgbClr val="21394D"/>
-                </a:solidFill>
-                <a:latin typeface="DejaVu Sans"/>
-              </a:defRPr>
-            </a:pPr>
-            <a:r>
-              <a:t>Threshold: accept a score of 0.80 or higher.</a:t>
-            </a:r>
-          </a:p>
-        </p:txBody>
-      </p:sp>
-      <p:sp>
-        <p:nvSpPr>
-          <p:cNvPr id="8" name="TextBox 7"/>
-          <p:cNvSpPr txBox="1"/>
-          <p:nvPr/>
-        </p:nvSpPr>
-        <p:spPr>
-          <a:xfrm>
-            <a:off x="6400800" y="3502152"/>
-            <a:ext cx="4937760" cy="521207"/>
-          </a:xfrm>
-          <a:prstGeom prst="rect">
-            <a:avLst/>
-          </a:prstGeom>
-          <a:noFill/>
-        </p:spPr>
-        <p:txBody>
-          <a:bodyPr wrap="square" lIns="0" rIns="0" tIns="0" bIns="0">
-            <a:spAutoFit/>
-          </a:bodyPr>
-          <a:lstStyle/>
-          <a:p>
-            <a:pPr>
-              <a:spcAft>
-                <a:spcPts val="500"/>
-              </a:spcAft>
-              <a:defRPr sz="1300" b="0">
-                <a:solidFill>
-                  <a:srgbClr val="21394D"/>
-                </a:solidFill>
-                <a:latin typeface="DejaVu Sans"/>
-              </a:defRPr>
-            </a:pPr>
-            <a:r>
-              <a:t>Why: a starting value from the reference approach.</a:t>
-            </a:r>
-          </a:p>
-          <a:p>
-            <a:pPr>
-              <a:spcAft>
-                <a:spcPts val="500"/>
-              </a:spcAft>
-              <a:defRPr sz="1300" b="0">
-                <a:solidFill>
-                  <a:srgbClr val="21394D"/>
-                </a:solidFill>
-                <a:latin typeface="DejaVu Sans"/>
-              </a:defRPr>
-            </a:pPr>
-            <a:r>
-              <a:t>Meaning: a similarity gate, not 80% accuracy.</a:t>
-            </a:r>
-          </a:p>
-        </p:txBody>
-      </p:sp>
-      <p:sp>
-        <p:nvSpPr>
-          <p:cNvPr id="9" name="Rounded Rectangle 8"/>
-          <p:cNvSpPr/>
-          <p:nvPr/>
-        </p:nvSpPr>
-        <p:spPr>
-          <a:xfrm>
-            <a:off x="594360" y="4389120"/>
-            <a:ext cx="11000232" cy="1426464"/>
-          </a:xfrm>
-          <a:prstGeom prst="roundRect">
-            <a:avLst>
-              <a:gd name="adj" fmla="val 6000"/>
-            </a:avLst>
-          </a:prstGeom>
-          <a:solidFill>
-            <a:srgbClr val="E9F4F0"/>
-          </a:solidFill>
-          <a:ln>
-            <a:noFill/>
-          </a:ln>
-        </p:spPr>
-        <p:style>
-          <a:lnRef idx="1">
-            <a:schemeClr val="accent1"/>
-          </a:lnRef>
-          <a:fillRef idx="3">
-            <a:schemeClr val="accent1"/>
-          </a:fillRef>
-          <a:effectRef idx="0">
-            <a:schemeClr val="accent1"/>
-          </a:effectRef>
-          <a:fontRef idx="minor">
-            <a:schemeClr val="lt1"/>
-          </a:fontRef>
-        </p:style>
-        <p:txBody>
-          <a:bodyPr rtlCol="0" anchor="ctr"/>
-          <a:lstStyle/>
-          <a:p>
-            <a:pPr algn="ctr"/>
-          </a:p>
-        </p:txBody>
-      </p:sp>
-      <p:sp>
-        <p:nvSpPr>
-          <p:cNvPr id="10" name="TextBox 9"/>
-          <p:cNvSpPr txBox="1"/>
-          <p:nvPr/>
-        </p:nvSpPr>
-        <p:spPr>
-          <a:xfrm>
-            <a:off x="850392" y="4590288"/>
-            <a:ext cx="10488168" cy="320040"/>
-          </a:xfrm>
-          <a:prstGeom prst="rect">
-            <a:avLst/>
-          </a:prstGeom>
-          <a:noFill/>
-        </p:spPr>
-        <p:txBody>
-          <a:bodyPr wrap="square" lIns="0" rIns="0" tIns="0" bIns="0">
-            <a:spAutoFit/>
-          </a:bodyPr>
-          <a:lstStyle/>
-          <a:p>
-            <a:pPr>
-              <a:spcAft>
-                <a:spcPts val="500"/>
-              </a:spcAft>
-              <a:defRPr sz="1700" b="1">
-                <a:solidFill>
-                  <a:srgbClr val="087F76"/>
-                </a:solidFill>
-                <a:latin typeface="DejaVu Sans"/>
-              </a:defRPr>
-            </a:pPr>
-            <a:r>
-              <a:t>2 · How can an unintended output change be detected?</a:t>
-            </a:r>
-          </a:p>
-        </p:txBody>
-      </p:sp>
-      <p:sp>
-        <p:nvSpPr>
-          <p:cNvPr id="11" name="TextBox 10"/>
-          <p:cNvSpPr txBox="1"/>
-          <p:nvPr/>
-        </p:nvSpPr>
-        <p:spPr>
-          <a:xfrm>
-            <a:off x="850392" y="5184648"/>
-            <a:ext cx="5001768" cy="521207"/>
-          </a:xfrm>
-          <a:prstGeom prst="rect">
-            <a:avLst/>
-          </a:prstGeom>
-          <a:noFill/>
-        </p:spPr>
-        <p:txBody>
-          <a:bodyPr wrap="square" lIns="0" rIns="0" tIns="0" bIns="0">
-            <a:spAutoFit/>
-          </a:bodyPr>
-          <a:lstStyle/>
-          <a:p>
-            <a:pPr>
-              <a:spcAft>
-                <a:spcPts val="500"/>
-              </a:spcAft>
-              <a:defRPr sz="1300" b="0">
-                <a:solidFill>
-                  <a:srgbClr val="21394D"/>
-                </a:solidFill>
-                <a:latin typeface="DejaVu Sans"/>
-              </a:defRPr>
-            </a:pPr>
-            <a:r>
-              <a:t>Choice: fixed expected modules and citations;</a:t>
-            </a:r>
-          </a:p>
-          <a:p>
-            <a:pPr>
-              <a:spcAft>
-                <a:spcPts val="500"/>
-              </a:spcAft>
-              <a:defRPr sz="1300" b="0">
-                <a:solidFill>
-                  <a:srgbClr val="21394D"/>
-                </a:solidFill>
-                <a:latin typeface="DejaVu Sans"/>
-              </a:defRPr>
-            </a:pPr>
-            <a:r>
-              <a:t>SHA-256 fingerprints for repeated outputs.</a:t>
-            </a:r>
-          </a:p>
-        </p:txBody>
-      </p:sp>
-      <p:sp>
-        <p:nvSpPr>
-          <p:cNvPr id="12" name="TextBox 11"/>
-          <p:cNvSpPr txBox="1"/>
-          <p:nvPr/>
-        </p:nvSpPr>
-        <p:spPr>
-          <a:xfrm>
-            <a:off x="6400800" y="5184648"/>
-            <a:ext cx="4937760" cy="521207"/>
-          </a:xfrm>
-          <a:prstGeom prst="rect">
-            <a:avLst/>
-          </a:prstGeom>
-          <a:noFill/>
-        </p:spPr>
-        <p:txBody>
-          <a:bodyPr wrap="square" lIns="0" rIns="0" tIns="0" bIns="0">
-            <a:spAutoFit/>
-          </a:bodyPr>
-          <a:lstStyle/>
-          <a:p>
-            <a:pPr>
-              <a:spcAft>
-                <a:spcPts val="500"/>
-              </a:spcAft>
-              <a:defRPr sz="1300" b="0">
-                <a:solidFill>
-                  <a:srgbClr val="21394D"/>
-                </a:solidFill>
-                <a:latin typeface="DejaVu Sans"/>
-              </a:defRPr>
-            </a:pPr>
-            <a:r>
-              <a:t>Why: do not rely on rereading each draft alone.</a:t>
-            </a:r>
-          </a:p>
-          <a:p>
-            <a:pPr>
-              <a:spcAft>
-                <a:spcPts val="500"/>
-              </a:spcAft>
-              <a:defRPr sz="1300" b="0">
-                <a:solidFill>
-                  <a:srgbClr val="21394D"/>
-                </a:solidFill>
-                <a:latin typeface="DejaVu Sans"/>
-              </a:defRPr>
-            </a:pPr>
-            <a:r>
-              <a:t>Meaning: detect differences, not prove legal correctness.</a:t>
-            </a:r>
-          </a:p>
-        </p:txBody>
-      </p:sp>
-      <p:sp>
-        <p:nvSpPr>
-          <p:cNvPr id="13" name="TextBox 12"/>
-          <p:cNvSpPr txBox="1"/>
-          <p:nvPr/>
-        </p:nvSpPr>
-        <p:spPr>
-          <a:xfrm>
-            <a:off x="594360" y="6089904"/>
-            <a:ext cx="10972800" cy="274320"/>
-          </a:xfrm>
-          <a:prstGeom prst="rect">
-            <a:avLst/>
-          </a:prstGeom>
-          <a:noFill/>
-        </p:spPr>
-        <p:txBody>
-          <a:bodyPr wrap="square" lIns="0" rIns="0" tIns="0" bIns="0">
-            <a:spAutoFit/>
-          </a:bodyPr>
-          <a:lstStyle/>
-          <a:p>
-            <a:pPr>
-              <a:spcAft>
-                <a:spcPts val="500"/>
-              </a:spcAft>
-              <a:defRPr sz="1200" b="0">
-                <a:solidFill>
-                  <a:srgbClr val="62798A"/>
-                </a:solidFill>
-                <a:latin typeface="DejaVu Sans"/>
-              </a:defRPr>
-            </a:pPr>
-            <a:r>
-              <a:t>Next: calibrate retrieval on realistic questions and validate expectations with lawyers.</a:t>
-            </a:r>
-          </a:p>
-        </p:txBody>
-      </p:sp>
-      <p:sp>
-        <p:nvSpPr>
-          <p:cNvPr id="14" name="TextBox 13"/>
-          <p:cNvSpPr txBox="1"/>
-          <p:nvPr/>
-        </p:nvSpPr>
-        <p:spPr>
-          <a:xfrm>
-            <a:off x="594360" y="6519672"/>
-            <a:ext cx="9966960" cy="182880"/>
-          </a:xfrm>
-          <a:prstGeom prst="rect">
-            <a:avLst/>
-          </a:prstGeom>
-          <a:noFill/>
-        </p:spPr>
-        <p:txBody>
-          <a:bodyPr wrap="square" lIns="0" rIns="0" tIns="0" bIns="0">
-            <a:spAutoFit/>
-          </a:bodyPr>
-          <a:lstStyle/>
-          <a:p>
-            <a:pPr>
-              <a:spcAft>
-                <a:spcPts val="500"/>
-              </a:spcAft>
-              <a:defRPr sz="800" b="0">
-                <a:solidFill>
-                  <a:srgbClr val="62798A"/>
-                </a:solidFill>
-                <a:latin typeface="DejaVu Sans"/>
-              </a:defRPr>
-            </a:pPr>
-            <a:r>
-              <a:t>Design rationale for this demonstration. 0.80 is uncalibrated; reference cases and updates are synthetic.</a:t>
-            </a:r>
-          </a:p>
-        </p:txBody>
-      </p:sp>
-      <p:sp>
-        <p:nvSpPr>
-          <p:cNvPr id="15" name="TextBox 14"/>
-          <p:cNvSpPr txBox="1"/>
-          <p:nvPr/>
-        </p:nvSpPr>
-        <p:spPr>
-          <a:xfrm>
-            <a:off x="10835640" y="6446520"/>
-            <a:ext cx="731520" cy="274320"/>
-          </a:xfrm>
-          <a:prstGeom prst="rect">
-            <a:avLst/>
-          </a:prstGeom>
-          <a:noFill/>
-        </p:spPr>
-        <p:txBody>
-          <a:bodyPr wrap="square" lIns="0" rIns="0" tIns="0" bIns="0">
-            <a:spAutoFit/>
-          </a:bodyPr>
-          <a:lstStyle/>
-          <a:p>
-            <a:pPr>
-              <a:spcAft>
-                <a:spcPts val="500"/>
-              </a:spcAft>
-              <a:defRPr sz="1000" b="0">
-                <a:solidFill>
-                  <a:srgbClr val="62798A"/>
-                </a:solidFill>
-                <a:latin typeface="DejaVu Sans"/>
-              </a:defRPr>
-            </a:pPr>
-            <a:r>
-              <a:t>07 / 08</a:t>
             </a:r>
           </a:p>
         </p:txBody>
@@ -11074,7 +10355,7 @@
               </a:defRPr>
             </a:pPr>
             <a:r>
-              <a:t>08 / 08</a:t>
+              <a:t>07 / 07</a:t>
             </a:r>
           </a:p>
         </p:txBody>
